--- a/src/pallotti_slides/resources/template/mass_template.pptx
+++ b/src/pallotti_slides/resources/template/mass_template.pptx
@@ -13299,7 +13299,7 @@
         <p:spPr>
           <a:xfrm>
             <a:off x="114480" y="1130760"/>
-            <a:ext cx="11944080" cy="5182920"/>
+            <a:ext cx="11944080" cy="5544360"/>
           </a:xfrm>
           <a:prstGeom prst="rect">
             <a:avLst/>
@@ -14998,8 +14998,8 @@
         </p:nvSpPr>
         <p:spPr>
           <a:xfrm>
-            <a:off x="992160" y="1047600"/>
-            <a:ext cx="10173240" cy="4944240"/>
+            <a:off x="114480" y="1047600"/>
+            <a:ext cx="11944080" cy="5627520"/>
           </a:xfrm>
           <a:prstGeom prst="rect">
             <a:avLst/>
@@ -15498,7 +15498,7 @@
         <p:spPr>
           <a:xfrm>
             <a:off x="114480" y="1248480"/>
-            <a:ext cx="11944080" cy="4944240"/>
+            <a:ext cx="11944080" cy="5426640"/>
           </a:xfrm>
           <a:prstGeom prst="rect">
             <a:avLst/>
@@ -18116,7 +18116,7 @@
         <p:spPr>
           <a:xfrm>
             <a:off x="383760" y="1396080"/>
-            <a:ext cx="11423520" cy="4777920"/>
+            <a:ext cx="11423520" cy="5279040"/>
           </a:xfrm>
           <a:prstGeom prst="rect">
             <a:avLst/>
@@ -19067,8 +19067,8 @@
         </p:nvSpPr>
         <p:spPr>
           <a:xfrm>
-            <a:off x="992160" y="1047600"/>
-            <a:ext cx="10173240" cy="4944240"/>
+            <a:off x="114480" y="1047600"/>
+            <a:ext cx="11944080" cy="5627520"/>
           </a:xfrm>
           <a:prstGeom prst="rect">
             <a:avLst/>
@@ -19337,8 +19337,8 @@
         </p:nvSpPr>
         <p:spPr>
           <a:xfrm>
-            <a:off x="992160" y="1047600"/>
-            <a:ext cx="10173240" cy="4944240"/>
+            <a:off x="114480" y="1047600"/>
+            <a:ext cx="11944080" cy="5627520"/>
           </a:xfrm>
           <a:prstGeom prst="rect">
             <a:avLst/>
@@ -19724,8 +19724,8 @@
         </p:nvSpPr>
         <p:spPr>
           <a:xfrm>
-            <a:off x="992160" y="1047600"/>
-            <a:ext cx="10173240" cy="4944240"/>
+            <a:off x="114480" y="1047600"/>
+            <a:ext cx="11944080" cy="5627520"/>
           </a:xfrm>
           <a:prstGeom prst="rect">
             <a:avLst/>
@@ -19995,7 +19995,7 @@
         <p:spPr>
           <a:xfrm>
             <a:off x="114480" y="1248480"/>
-            <a:ext cx="11944080" cy="4944240"/>
+            <a:ext cx="11944080" cy="5426640"/>
           </a:xfrm>
           <a:prstGeom prst="rect">
             <a:avLst/>
@@ -20265,7 +20265,7 @@
         <p:spPr>
           <a:xfrm>
             <a:off x="180000" y="815760"/>
-            <a:ext cx="11944080" cy="4944240"/>
+            <a:ext cx="11944080" cy="5859360"/>
           </a:xfrm>
           <a:prstGeom prst="rect">
             <a:avLst/>

--- a/src/pallotti_slides/resources/template/mass_template.pptx
+++ b/src/pallotti_slides/resources/template/mass_template.pptx
@@ -52,6 +52,24 @@
     <p:sldId id="313" r:id="rId60"/>
     <p:sldId id="314" r:id="rId61"/>
     <p:sldId id="315" r:id="rId62"/>
+    <p:sldId id="325" r:id="rId73"/>
+    <p:sldId id="326" r:id="rId74"/>
+    <p:sldId id="327" r:id="rId75"/>
+    <p:sldId id="328" r:id="rId76"/>
+    <p:sldId id="329" r:id="rId77"/>
+    <p:sldId id="330" r:id="rId78"/>
+    <p:sldId id="331" r:id="rId79"/>
+    <p:sldId id="332" r:id="rId80"/>
+    <p:sldId id="333" r:id="rId81"/>
+    <p:sldId id="334" r:id="rId82"/>
+    <p:sldId id="335" r:id="rId83"/>
+    <p:sldId id="336" r:id="rId84"/>
+    <p:sldId id="337" r:id="rId85"/>
+    <p:sldId id="338" r:id="rId86"/>
+    <p:sldId id="339" r:id="rId87"/>
+    <p:sldId id="340" r:id="rId88"/>
+    <p:sldId id="341" r:id="rId89"/>
+    <p:sldId id="342" r:id="rId90"/>
     <p:sldId id="316" r:id="rId63"/>
     <p:sldId id="317" r:id="rId64"/>
     <p:sldId id="318" r:id="rId65"/>
@@ -60,12 +78,12 @@
     <p:sldId id="321" r:id="rId68"/>
     <p:sldId id="322" r:id="rId69"/>
     <p:sldId id="323" r:id="rId70"/>
-    <p:sldId id="325" r:id="rId73"/>
-    <p:sldId id="326" r:id="rId74"/>
-    <p:sldId id="327" r:id="rId75"/>
-    <p:sldId id="328" r:id="rId76"/>
-    <p:sldId id="329" r:id="rId77"/>
-    <p:sldId id="330" r:id="rId78"/>
+    <p:sldId id="343" r:id="rId91"/>
+    <p:sldId id="344" r:id="rId92"/>
+    <p:sldId id="345" r:id="rId93"/>
+    <p:sldId id="346" r:id="rId94"/>
+    <p:sldId id="347" r:id="rId95"/>
+    <p:sldId id="348" r:id="rId96"/>
     <p:sldId id="324" r:id="rId71"/>
   </p:sldIdLst>
   <p:sldSz cx="12192000" cy="6858000"/>
@@ -3408,7 +3426,7 @@
           <a:lstStyle/>
           <a:p>
             <a:r>
-              <a:t>@pallotti fixo</a:t>
+              <a:t>@pallotti oe=DC_IV</a:t>
             </a:r>
           </a:p>
         </p:txBody>
@@ -3478,7 +3496,7 @@
           <a:lstStyle/>
           <a:p>
             <a:r>
-              <a:t>@pallotti fixo</a:t>
+              <a:t>@pallotti oe=DC_IV</a:t>
             </a:r>
           </a:p>
         </p:txBody>
@@ -3618,7 +3636,7 @@
           <a:lstStyle/>
           <a:p>
             <a:r>
-              <a:t>@pallotti fixo</a:t>
+              <a:t>@pallotti oe=DC_IV</a:t>
             </a:r>
           </a:p>
         </p:txBody>
@@ -3688,7 +3706,7 @@
           <a:lstStyle/>
           <a:p>
             <a:r>
-              <a:t>@pallotti fixo</a:t>
+              <a:t>@pallotti oe=DC_IV</a:t>
             </a:r>
           </a:p>
         </p:txBody>
@@ -3758,7 +3776,7 @@
           <a:lstStyle/>
           <a:p>
             <a:r>
-              <a:t>@pallotti fixo</a:t>
+              <a:t>@pallotti oe=DC_IV</a:t>
             </a:r>
           </a:p>
         </p:txBody>
@@ -3828,7 +3846,7 @@
           <a:lstStyle/>
           <a:p>
             <a:r>
-              <a:t>@pallotti fixo</a:t>
+              <a:t>@pallotti oe=DC_IV</a:t>
             </a:r>
           </a:p>
         </p:txBody>
@@ -3898,7 +3916,7 @@
           <a:lstStyle/>
           <a:p>
             <a:r>
-              <a:t>@pallotti fixo</a:t>
+              <a:t>@pallotti oe=DC_IV</a:t>
             </a:r>
           </a:p>
         </p:txBody>
@@ -3968,7 +3986,7 @@
           <a:lstStyle/>
           <a:p>
             <a:r>
-              <a:t>@pallotti fixo</a:t>
+              <a:t>@pallotti oe=DC_IV</a:t>
             </a:r>
           </a:p>
         </p:txBody>
@@ -4038,7 +4056,7 @@
           <a:lstStyle/>
           <a:p>
             <a:r>
-              <a:t>@pallotti grupo=canto:comunhao</a:t>
+              <a:t>@pallotti oe=DC_IV</a:t>
             </a:r>
           </a:p>
         </p:txBody>
@@ -4108,7 +4126,7 @@
           <a:lstStyle/>
           <a:p>
             <a:r>
-              <a:t>@pallotti canto=comunhao</a:t>
+              <a:t>@pallotti oe=DC_IV</a:t>
             </a:r>
           </a:p>
         </p:txBody>
@@ -4178,7 +4196,7 @@
           <a:lstStyle/>
           <a:p>
             <a:r>
-              <a:t>@pallotti grupo=canto:pos_comunhao</a:t>
+              <a:t>@pallotti oe=DC_IV</a:t>
             </a:r>
           </a:p>
         </p:txBody>
@@ -4248,7 +4266,7 @@
           <a:lstStyle/>
           <a:p>
             <a:r>
-              <a:t>@pallotti canto=pos_comunhao</a:t>
+              <a:t>@pallotti oe=DC_IV</a:t>
             </a:r>
           </a:p>
         </p:txBody>
@@ -4388,7 +4406,7 @@
           <a:lstStyle/>
           <a:p>
             <a:r>
-              <a:t>@pallotti grupo=canto:saida</a:t>
+              <a:t>@pallotti oe=DC_IV</a:t>
             </a:r>
           </a:p>
         </p:txBody>
@@ -4458,7 +4476,7 @@
           <a:lstStyle/>
           <a:p>
             <a:r>
-              <a:t>@pallotti canto=saida</a:t>
+              <a:t>@pallotti oe=DC_IV</a:t>
             </a:r>
           </a:p>
         </p:txBody>
@@ -4528,6 +4546,496 @@
           <a:lstStyle/>
           <a:p>
             <a:r>
+              <a:t>@pallotti oe=DC_IV</a:t>
+            </a:r>
+          </a:p>
+        </p:txBody>
+      </p:sp>
+      <p:sp>
+        <p:nvSpPr>
+          <p:cNvPr id="4" name="Slide Number Placeholder 3"/>
+          <p:cNvSpPr>
+            <a:spLocks noGrp="1"/>
+          </p:cNvSpPr>
+          <p:nvPr>
+            <p:ph type="sldNum" idx="5" sz="quarter"/>
+          </p:nvPr>
+        </p:nvSpPr>
+        <p:spPr/>
+      </p:sp>
+    </p:spTree>
+  </p:cSld>
+  <p:clrMapOvr>
+    <a:masterClrMapping/>
+  </p:clrMapOvr>
+</p:notes>
+</file>
+
+<file path=ppt/notesSlides/notesSlide63.xml><?xml version="1.0" encoding="utf-8"?>
+<p:notes xmlns:a="http://schemas.openxmlformats.org/drawingml/2006/main" xmlns:p="http://schemas.openxmlformats.org/presentationml/2006/main" xmlns:r="http://schemas.openxmlformats.org/officeDocument/2006/relationships">
+  <p:cSld>
+    <p:spTree>
+      <p:nvGrpSpPr>
+        <p:cNvPr id="1" name=""/>
+        <p:cNvGrpSpPr/>
+        <p:nvPr/>
+      </p:nvGrpSpPr>
+      <p:grpSpPr>
+        <a:xfrm>
+          <a:off x="0" y="0"/>
+          <a:ext cx="0" cy="0"/>
+          <a:chOff x="0" y="0"/>
+          <a:chExt cx="0" cy="0"/>
+        </a:xfrm>
+      </p:grpSpPr>
+      <p:sp>
+        <p:nvSpPr>
+          <p:cNvPr id="2" name="Slide Image Placeholder 1"/>
+          <p:cNvSpPr>
+            <a:spLocks noGrp="1"/>
+          </p:cNvSpPr>
+          <p:nvPr>
+            <p:ph type="sldImg" idx="2"/>
+          </p:nvPr>
+        </p:nvSpPr>
+        <p:spPr/>
+      </p:sp>
+      <p:sp>
+        <p:nvSpPr>
+          <p:cNvPr id="3" name="Notes Placeholder 2"/>
+          <p:cNvSpPr>
+            <a:spLocks noGrp="1"/>
+          </p:cNvSpPr>
+          <p:nvPr>
+            <p:ph type="body" idx="3" sz="quarter"/>
+          </p:nvPr>
+        </p:nvSpPr>
+        <p:spPr/>
+        <p:txBody>
+          <a:bodyPr/>
+          <a:lstStyle/>
+          <a:p>
+            <a:r>
+              <a:t>@pallotti oe=DC_IV</a:t>
+            </a:r>
+          </a:p>
+        </p:txBody>
+      </p:sp>
+      <p:sp>
+        <p:nvSpPr>
+          <p:cNvPr id="4" name="Slide Number Placeholder 3"/>
+          <p:cNvSpPr>
+            <a:spLocks noGrp="1"/>
+          </p:cNvSpPr>
+          <p:nvPr>
+            <p:ph type="sldNum" idx="5" sz="quarter"/>
+          </p:nvPr>
+        </p:nvSpPr>
+        <p:spPr/>
+      </p:sp>
+    </p:spTree>
+  </p:cSld>
+  <p:clrMapOvr>
+    <a:masterClrMapping/>
+  </p:clrMapOvr>
+</p:notes>
+</file>
+
+<file path=ppt/notesSlides/notesSlide64.xml><?xml version="1.0" encoding="utf-8"?>
+<p:notes xmlns:a="http://schemas.openxmlformats.org/drawingml/2006/main" xmlns:p="http://schemas.openxmlformats.org/presentationml/2006/main" xmlns:r="http://schemas.openxmlformats.org/officeDocument/2006/relationships">
+  <p:cSld>
+    <p:spTree>
+      <p:nvGrpSpPr>
+        <p:cNvPr id="1" name=""/>
+        <p:cNvGrpSpPr/>
+        <p:nvPr/>
+      </p:nvGrpSpPr>
+      <p:grpSpPr>
+        <a:xfrm>
+          <a:off x="0" y="0"/>
+          <a:ext cx="0" cy="0"/>
+          <a:chOff x="0" y="0"/>
+          <a:chExt cx="0" cy="0"/>
+        </a:xfrm>
+      </p:grpSpPr>
+      <p:sp>
+        <p:nvSpPr>
+          <p:cNvPr id="2" name="Slide Image Placeholder 1"/>
+          <p:cNvSpPr>
+            <a:spLocks noGrp="1"/>
+          </p:cNvSpPr>
+          <p:nvPr>
+            <p:ph type="sldImg" idx="2"/>
+          </p:nvPr>
+        </p:nvSpPr>
+        <p:spPr/>
+      </p:sp>
+      <p:sp>
+        <p:nvSpPr>
+          <p:cNvPr id="3" name="Notes Placeholder 2"/>
+          <p:cNvSpPr>
+            <a:spLocks noGrp="1"/>
+          </p:cNvSpPr>
+          <p:nvPr>
+            <p:ph type="body" idx="3" sz="quarter"/>
+          </p:nvPr>
+        </p:nvSpPr>
+        <p:spPr/>
+        <p:txBody>
+          <a:bodyPr/>
+          <a:lstStyle/>
+          <a:p>
+            <a:r>
+              <a:t>@pallotti oe=DC_IV</a:t>
+            </a:r>
+          </a:p>
+        </p:txBody>
+      </p:sp>
+      <p:sp>
+        <p:nvSpPr>
+          <p:cNvPr id="4" name="Slide Number Placeholder 3"/>
+          <p:cNvSpPr>
+            <a:spLocks noGrp="1"/>
+          </p:cNvSpPr>
+          <p:nvPr>
+            <p:ph type="sldNum" idx="5" sz="quarter"/>
+          </p:nvPr>
+        </p:nvSpPr>
+        <p:spPr/>
+      </p:sp>
+    </p:spTree>
+  </p:cSld>
+  <p:clrMapOvr>
+    <a:masterClrMapping/>
+  </p:clrMapOvr>
+</p:notes>
+</file>
+
+<file path=ppt/notesSlides/notesSlide65.xml><?xml version="1.0" encoding="utf-8"?>
+<p:notes xmlns:a="http://schemas.openxmlformats.org/drawingml/2006/main" xmlns:p="http://schemas.openxmlformats.org/presentationml/2006/main" xmlns:r="http://schemas.openxmlformats.org/officeDocument/2006/relationships">
+  <p:cSld>
+    <p:spTree>
+      <p:nvGrpSpPr>
+        <p:cNvPr id="1" name=""/>
+        <p:cNvGrpSpPr/>
+        <p:nvPr/>
+      </p:nvGrpSpPr>
+      <p:grpSpPr>
+        <a:xfrm>
+          <a:off x="0" y="0"/>
+          <a:ext cx="0" cy="0"/>
+          <a:chOff x="0" y="0"/>
+          <a:chExt cx="0" cy="0"/>
+        </a:xfrm>
+      </p:grpSpPr>
+      <p:sp>
+        <p:nvSpPr>
+          <p:cNvPr id="2" name="Slide Image Placeholder 1"/>
+          <p:cNvSpPr>
+            <a:spLocks noGrp="1"/>
+          </p:cNvSpPr>
+          <p:nvPr>
+            <p:ph type="sldImg" idx="2"/>
+          </p:nvPr>
+        </p:nvSpPr>
+        <p:spPr/>
+      </p:sp>
+      <p:sp>
+        <p:nvSpPr>
+          <p:cNvPr id="3" name="Notes Placeholder 2"/>
+          <p:cNvSpPr>
+            <a:spLocks noGrp="1"/>
+          </p:cNvSpPr>
+          <p:nvPr>
+            <p:ph type="body" idx="3" sz="quarter"/>
+          </p:nvPr>
+        </p:nvSpPr>
+        <p:spPr/>
+        <p:txBody>
+          <a:bodyPr/>
+          <a:lstStyle/>
+          <a:p>
+            <a:r>
+              <a:t>@pallotti oe=DC_IV</a:t>
+            </a:r>
+          </a:p>
+        </p:txBody>
+      </p:sp>
+      <p:sp>
+        <p:nvSpPr>
+          <p:cNvPr id="4" name="Slide Number Placeholder 3"/>
+          <p:cNvSpPr>
+            <a:spLocks noGrp="1"/>
+          </p:cNvSpPr>
+          <p:nvPr>
+            <p:ph type="sldNum" idx="5" sz="quarter"/>
+          </p:nvPr>
+        </p:nvSpPr>
+        <p:spPr/>
+      </p:sp>
+    </p:spTree>
+  </p:cSld>
+  <p:clrMapOvr>
+    <a:masterClrMapping/>
+  </p:clrMapOvr>
+</p:notes>
+</file>
+
+<file path=ppt/notesSlides/notesSlide66.xml><?xml version="1.0" encoding="utf-8"?>
+<p:notes xmlns:a="http://schemas.openxmlformats.org/drawingml/2006/main" xmlns:p="http://schemas.openxmlformats.org/presentationml/2006/main" xmlns:r="http://schemas.openxmlformats.org/officeDocument/2006/relationships">
+  <p:cSld>
+    <p:spTree>
+      <p:nvGrpSpPr>
+        <p:cNvPr id="1" name=""/>
+        <p:cNvGrpSpPr/>
+        <p:nvPr/>
+      </p:nvGrpSpPr>
+      <p:grpSpPr>
+        <a:xfrm>
+          <a:off x="0" y="0"/>
+          <a:ext cx="0" cy="0"/>
+          <a:chOff x="0" y="0"/>
+          <a:chExt cx="0" cy="0"/>
+        </a:xfrm>
+      </p:grpSpPr>
+      <p:sp>
+        <p:nvSpPr>
+          <p:cNvPr id="2" name="Slide Image Placeholder 1"/>
+          <p:cNvSpPr>
+            <a:spLocks noGrp="1"/>
+          </p:cNvSpPr>
+          <p:nvPr>
+            <p:ph type="sldImg" idx="2"/>
+          </p:nvPr>
+        </p:nvSpPr>
+        <p:spPr/>
+      </p:sp>
+      <p:sp>
+        <p:nvSpPr>
+          <p:cNvPr id="3" name="Notes Placeholder 2"/>
+          <p:cNvSpPr>
+            <a:spLocks noGrp="1"/>
+          </p:cNvSpPr>
+          <p:nvPr>
+            <p:ph type="body" idx="3" sz="quarter"/>
+          </p:nvPr>
+        </p:nvSpPr>
+        <p:spPr/>
+        <p:txBody>
+          <a:bodyPr/>
+          <a:lstStyle/>
+          <a:p>
+            <a:r>
+              <a:t>@pallotti fixo</a:t>
+            </a:r>
+          </a:p>
+        </p:txBody>
+      </p:sp>
+      <p:sp>
+        <p:nvSpPr>
+          <p:cNvPr id="4" name="Slide Number Placeholder 3"/>
+          <p:cNvSpPr>
+            <a:spLocks noGrp="1"/>
+          </p:cNvSpPr>
+          <p:nvPr>
+            <p:ph type="sldNum" idx="5" sz="quarter"/>
+          </p:nvPr>
+        </p:nvSpPr>
+        <p:spPr/>
+      </p:sp>
+    </p:spTree>
+  </p:cSld>
+  <p:clrMapOvr>
+    <a:masterClrMapping/>
+  </p:clrMapOvr>
+</p:notes>
+</file>
+
+<file path=ppt/notesSlides/notesSlide67.xml><?xml version="1.0" encoding="utf-8"?>
+<p:notes xmlns:a="http://schemas.openxmlformats.org/drawingml/2006/main" xmlns:p="http://schemas.openxmlformats.org/presentationml/2006/main" xmlns:r="http://schemas.openxmlformats.org/officeDocument/2006/relationships">
+  <p:cSld>
+    <p:spTree>
+      <p:nvGrpSpPr>
+        <p:cNvPr id="1" name=""/>
+        <p:cNvGrpSpPr/>
+        <p:nvPr/>
+      </p:nvGrpSpPr>
+      <p:grpSpPr>
+        <a:xfrm>
+          <a:off x="0" y="0"/>
+          <a:ext cx="0" cy="0"/>
+          <a:chOff x="0" y="0"/>
+          <a:chExt cx="0" cy="0"/>
+        </a:xfrm>
+      </p:grpSpPr>
+      <p:sp>
+        <p:nvSpPr>
+          <p:cNvPr id="2" name="Slide Image Placeholder 1"/>
+          <p:cNvSpPr>
+            <a:spLocks noGrp="1"/>
+          </p:cNvSpPr>
+          <p:nvPr>
+            <p:ph type="sldImg" idx="2"/>
+          </p:nvPr>
+        </p:nvSpPr>
+        <p:spPr/>
+      </p:sp>
+      <p:sp>
+        <p:nvSpPr>
+          <p:cNvPr id="3" name="Notes Placeholder 2"/>
+          <p:cNvSpPr>
+            <a:spLocks noGrp="1"/>
+          </p:cNvSpPr>
+          <p:nvPr>
+            <p:ph type="body" idx="3" sz="quarter"/>
+          </p:nvPr>
+        </p:nvSpPr>
+        <p:spPr/>
+        <p:txBody>
+          <a:bodyPr/>
+          <a:lstStyle/>
+          <a:p>
+            <a:r>
+              <a:t>@pallotti fixo</a:t>
+            </a:r>
+          </a:p>
+        </p:txBody>
+      </p:sp>
+      <p:sp>
+        <p:nvSpPr>
+          <p:cNvPr id="4" name="Slide Number Placeholder 3"/>
+          <p:cNvSpPr>
+            <a:spLocks noGrp="1"/>
+          </p:cNvSpPr>
+          <p:nvPr>
+            <p:ph type="sldNum" idx="5" sz="quarter"/>
+          </p:nvPr>
+        </p:nvSpPr>
+        <p:spPr/>
+      </p:sp>
+    </p:spTree>
+  </p:cSld>
+  <p:clrMapOvr>
+    <a:masterClrMapping/>
+  </p:clrMapOvr>
+</p:notes>
+</file>
+
+<file path=ppt/notesSlides/notesSlide68.xml><?xml version="1.0" encoding="utf-8"?>
+<p:notes xmlns:a="http://schemas.openxmlformats.org/drawingml/2006/main" xmlns:p="http://schemas.openxmlformats.org/presentationml/2006/main" xmlns:r="http://schemas.openxmlformats.org/officeDocument/2006/relationships">
+  <p:cSld>
+    <p:spTree>
+      <p:nvGrpSpPr>
+        <p:cNvPr id="1" name=""/>
+        <p:cNvGrpSpPr/>
+        <p:nvPr/>
+      </p:nvGrpSpPr>
+      <p:grpSpPr>
+        <a:xfrm>
+          <a:off x="0" y="0"/>
+          <a:ext cx="0" cy="0"/>
+          <a:chOff x="0" y="0"/>
+          <a:chExt cx="0" cy="0"/>
+        </a:xfrm>
+      </p:grpSpPr>
+      <p:sp>
+        <p:nvSpPr>
+          <p:cNvPr id="2" name="Slide Image Placeholder 1"/>
+          <p:cNvSpPr>
+            <a:spLocks noGrp="1"/>
+          </p:cNvSpPr>
+          <p:nvPr>
+            <p:ph type="sldImg" idx="2"/>
+          </p:nvPr>
+        </p:nvSpPr>
+        <p:spPr/>
+      </p:sp>
+      <p:sp>
+        <p:nvSpPr>
+          <p:cNvPr id="3" name="Notes Placeholder 2"/>
+          <p:cNvSpPr>
+            <a:spLocks noGrp="1"/>
+          </p:cNvSpPr>
+          <p:nvPr>
+            <p:ph type="body" idx="3" sz="quarter"/>
+          </p:nvPr>
+        </p:nvSpPr>
+        <p:spPr/>
+        <p:txBody>
+          <a:bodyPr/>
+          <a:lstStyle/>
+          <a:p>
+            <a:r>
+              <a:t>@pallotti fixo</a:t>
+            </a:r>
+          </a:p>
+        </p:txBody>
+      </p:sp>
+      <p:sp>
+        <p:nvSpPr>
+          <p:cNvPr id="4" name="Slide Number Placeholder 3"/>
+          <p:cNvSpPr>
+            <a:spLocks noGrp="1"/>
+          </p:cNvSpPr>
+          <p:nvPr>
+            <p:ph type="sldNum" idx="5" sz="quarter"/>
+          </p:nvPr>
+        </p:nvSpPr>
+        <p:spPr/>
+      </p:sp>
+    </p:spTree>
+  </p:cSld>
+  <p:clrMapOvr>
+    <a:masterClrMapping/>
+  </p:clrMapOvr>
+</p:notes>
+</file>
+
+<file path=ppt/notesSlides/notesSlide69.xml><?xml version="1.0" encoding="utf-8"?>
+<p:notes xmlns:a="http://schemas.openxmlformats.org/drawingml/2006/main" xmlns:p="http://schemas.openxmlformats.org/presentationml/2006/main" xmlns:r="http://schemas.openxmlformats.org/officeDocument/2006/relationships">
+  <p:cSld>
+    <p:spTree>
+      <p:nvGrpSpPr>
+        <p:cNvPr id="1" name=""/>
+        <p:cNvGrpSpPr/>
+        <p:nvPr/>
+      </p:nvGrpSpPr>
+      <p:grpSpPr>
+        <a:xfrm>
+          <a:off x="0" y="0"/>
+          <a:ext cx="0" cy="0"/>
+          <a:chOff x="0" y="0"/>
+          <a:chExt cx="0" cy="0"/>
+        </a:xfrm>
+      </p:grpSpPr>
+      <p:sp>
+        <p:nvSpPr>
+          <p:cNvPr id="2" name="Slide Image Placeholder 1"/>
+          <p:cNvSpPr>
+            <a:spLocks noGrp="1"/>
+          </p:cNvSpPr>
+          <p:nvPr>
+            <p:ph type="sldImg" idx="2"/>
+          </p:nvPr>
+        </p:nvSpPr>
+        <p:spPr/>
+      </p:sp>
+      <p:sp>
+        <p:nvSpPr>
+          <p:cNvPr id="3" name="Notes Placeholder 2"/>
+          <p:cNvSpPr>
+            <a:spLocks noGrp="1"/>
+          </p:cNvSpPr>
+          <p:nvPr>
+            <p:ph type="body" idx="3" sz="quarter"/>
+          </p:nvPr>
+        </p:nvSpPr>
+        <p:spPr/>
+        <p:txBody>
+          <a:bodyPr/>
+          <a:lstStyle/>
+          <a:p>
+            <a:r>
               <a:t>@pallotti fixo</a:t>
             </a:r>
           </a:p>
@@ -4623,6 +5131,706 @@
 </p:notes>
 </file>
 
+<file path=ppt/notesSlides/notesSlide70.xml><?xml version="1.0" encoding="utf-8"?>
+<p:notes xmlns:a="http://schemas.openxmlformats.org/drawingml/2006/main" xmlns:p="http://schemas.openxmlformats.org/presentationml/2006/main" xmlns:r="http://schemas.openxmlformats.org/officeDocument/2006/relationships">
+  <p:cSld>
+    <p:spTree>
+      <p:nvGrpSpPr>
+        <p:cNvPr id="1" name=""/>
+        <p:cNvGrpSpPr/>
+        <p:nvPr/>
+      </p:nvGrpSpPr>
+      <p:grpSpPr>
+        <a:xfrm>
+          <a:off x="0" y="0"/>
+          <a:ext cx="0" cy="0"/>
+          <a:chOff x="0" y="0"/>
+          <a:chExt cx="0" cy="0"/>
+        </a:xfrm>
+      </p:grpSpPr>
+      <p:sp>
+        <p:nvSpPr>
+          <p:cNvPr id="2" name="Slide Image Placeholder 1"/>
+          <p:cNvSpPr>
+            <a:spLocks noGrp="1"/>
+          </p:cNvSpPr>
+          <p:nvPr>
+            <p:ph type="sldImg" idx="2"/>
+          </p:nvPr>
+        </p:nvSpPr>
+        <p:spPr/>
+      </p:sp>
+      <p:sp>
+        <p:nvSpPr>
+          <p:cNvPr id="3" name="Notes Placeholder 2"/>
+          <p:cNvSpPr>
+            <a:spLocks noGrp="1"/>
+          </p:cNvSpPr>
+          <p:nvPr>
+            <p:ph type="body" idx="3" sz="quarter"/>
+          </p:nvPr>
+        </p:nvSpPr>
+        <p:spPr/>
+        <p:txBody>
+          <a:bodyPr/>
+          <a:lstStyle/>
+          <a:p>
+            <a:r>
+              <a:t>@pallotti fixo</a:t>
+            </a:r>
+          </a:p>
+        </p:txBody>
+      </p:sp>
+      <p:sp>
+        <p:nvSpPr>
+          <p:cNvPr id="4" name="Slide Number Placeholder 3"/>
+          <p:cNvSpPr>
+            <a:spLocks noGrp="1"/>
+          </p:cNvSpPr>
+          <p:nvPr>
+            <p:ph type="sldNum" idx="5" sz="quarter"/>
+          </p:nvPr>
+        </p:nvSpPr>
+        <p:spPr/>
+      </p:sp>
+    </p:spTree>
+  </p:cSld>
+  <p:clrMapOvr>
+    <a:masterClrMapping/>
+  </p:clrMapOvr>
+</p:notes>
+</file>
+
+<file path=ppt/notesSlides/notesSlide71.xml><?xml version="1.0" encoding="utf-8"?>
+<p:notes xmlns:a="http://schemas.openxmlformats.org/drawingml/2006/main" xmlns:p="http://schemas.openxmlformats.org/presentationml/2006/main" xmlns:r="http://schemas.openxmlformats.org/officeDocument/2006/relationships">
+  <p:cSld>
+    <p:spTree>
+      <p:nvGrpSpPr>
+        <p:cNvPr id="1" name=""/>
+        <p:cNvGrpSpPr/>
+        <p:nvPr/>
+      </p:nvGrpSpPr>
+      <p:grpSpPr>
+        <a:xfrm>
+          <a:off x="0" y="0"/>
+          <a:ext cx="0" cy="0"/>
+          <a:chOff x="0" y="0"/>
+          <a:chExt cx="0" cy="0"/>
+        </a:xfrm>
+      </p:grpSpPr>
+      <p:sp>
+        <p:nvSpPr>
+          <p:cNvPr id="2" name="Slide Image Placeholder 1"/>
+          <p:cNvSpPr>
+            <a:spLocks noGrp="1"/>
+          </p:cNvSpPr>
+          <p:nvPr>
+            <p:ph type="sldImg" idx="2"/>
+          </p:nvPr>
+        </p:nvSpPr>
+        <p:spPr/>
+      </p:sp>
+      <p:sp>
+        <p:nvSpPr>
+          <p:cNvPr id="3" name="Notes Placeholder 2"/>
+          <p:cNvSpPr>
+            <a:spLocks noGrp="1"/>
+          </p:cNvSpPr>
+          <p:nvPr>
+            <p:ph type="body" idx="3" sz="quarter"/>
+          </p:nvPr>
+        </p:nvSpPr>
+        <p:spPr/>
+        <p:txBody>
+          <a:bodyPr/>
+          <a:lstStyle/>
+          <a:p>
+            <a:r>
+              <a:t>@pallotti fixo</a:t>
+            </a:r>
+          </a:p>
+        </p:txBody>
+      </p:sp>
+      <p:sp>
+        <p:nvSpPr>
+          <p:cNvPr id="4" name="Slide Number Placeholder 3"/>
+          <p:cNvSpPr>
+            <a:spLocks noGrp="1"/>
+          </p:cNvSpPr>
+          <p:nvPr>
+            <p:ph type="sldNum" idx="5" sz="quarter"/>
+          </p:nvPr>
+        </p:nvSpPr>
+        <p:spPr/>
+      </p:sp>
+    </p:spTree>
+  </p:cSld>
+  <p:clrMapOvr>
+    <a:masterClrMapping/>
+  </p:clrMapOvr>
+</p:notes>
+</file>
+
+<file path=ppt/notesSlides/notesSlide72.xml><?xml version="1.0" encoding="utf-8"?>
+<p:notes xmlns:a="http://schemas.openxmlformats.org/drawingml/2006/main" xmlns:p="http://schemas.openxmlformats.org/presentationml/2006/main" xmlns:r="http://schemas.openxmlformats.org/officeDocument/2006/relationships">
+  <p:cSld>
+    <p:spTree>
+      <p:nvGrpSpPr>
+        <p:cNvPr id="1" name=""/>
+        <p:cNvGrpSpPr/>
+        <p:nvPr/>
+      </p:nvGrpSpPr>
+      <p:grpSpPr>
+        <a:xfrm>
+          <a:off x="0" y="0"/>
+          <a:ext cx="0" cy="0"/>
+          <a:chOff x="0" y="0"/>
+          <a:chExt cx="0" cy="0"/>
+        </a:xfrm>
+      </p:grpSpPr>
+      <p:sp>
+        <p:nvSpPr>
+          <p:cNvPr id="2" name="Slide Image Placeholder 1"/>
+          <p:cNvSpPr>
+            <a:spLocks noGrp="1"/>
+          </p:cNvSpPr>
+          <p:nvPr>
+            <p:ph type="sldImg" idx="2"/>
+          </p:nvPr>
+        </p:nvSpPr>
+        <p:spPr/>
+      </p:sp>
+      <p:sp>
+        <p:nvSpPr>
+          <p:cNvPr id="3" name="Notes Placeholder 2"/>
+          <p:cNvSpPr>
+            <a:spLocks noGrp="1"/>
+          </p:cNvSpPr>
+          <p:nvPr>
+            <p:ph type="body" idx="3" sz="quarter"/>
+          </p:nvPr>
+        </p:nvSpPr>
+        <p:spPr/>
+        <p:txBody>
+          <a:bodyPr/>
+          <a:lstStyle/>
+          <a:p>
+            <a:r>
+              <a:t>@pallotti fixo</a:t>
+            </a:r>
+          </a:p>
+        </p:txBody>
+      </p:sp>
+      <p:sp>
+        <p:nvSpPr>
+          <p:cNvPr id="4" name="Slide Number Placeholder 3"/>
+          <p:cNvSpPr>
+            <a:spLocks noGrp="1"/>
+          </p:cNvSpPr>
+          <p:nvPr>
+            <p:ph type="sldNum" idx="5" sz="quarter"/>
+          </p:nvPr>
+        </p:nvSpPr>
+        <p:spPr/>
+      </p:sp>
+    </p:spTree>
+  </p:cSld>
+  <p:clrMapOvr>
+    <a:masterClrMapping/>
+  </p:clrMapOvr>
+</p:notes>
+</file>
+
+<file path=ppt/notesSlides/notesSlide73.xml><?xml version="1.0" encoding="utf-8"?>
+<p:notes xmlns:a="http://schemas.openxmlformats.org/drawingml/2006/main" xmlns:p="http://schemas.openxmlformats.org/presentationml/2006/main" xmlns:r="http://schemas.openxmlformats.org/officeDocument/2006/relationships">
+  <p:cSld>
+    <p:spTree>
+      <p:nvGrpSpPr>
+        <p:cNvPr id="1" name=""/>
+        <p:cNvGrpSpPr/>
+        <p:nvPr/>
+      </p:nvGrpSpPr>
+      <p:grpSpPr>
+        <a:xfrm>
+          <a:off x="0" y="0"/>
+          <a:ext cx="0" cy="0"/>
+          <a:chOff x="0" y="0"/>
+          <a:chExt cx="0" cy="0"/>
+        </a:xfrm>
+      </p:grpSpPr>
+      <p:sp>
+        <p:nvSpPr>
+          <p:cNvPr id="2" name="Slide Image Placeholder 1"/>
+          <p:cNvSpPr>
+            <a:spLocks noGrp="1"/>
+          </p:cNvSpPr>
+          <p:nvPr>
+            <p:ph type="sldImg" idx="2"/>
+          </p:nvPr>
+        </p:nvSpPr>
+        <p:spPr/>
+      </p:sp>
+      <p:sp>
+        <p:nvSpPr>
+          <p:cNvPr id="3" name="Notes Placeholder 2"/>
+          <p:cNvSpPr>
+            <a:spLocks noGrp="1"/>
+          </p:cNvSpPr>
+          <p:nvPr>
+            <p:ph type="body" idx="3" sz="quarter"/>
+          </p:nvPr>
+        </p:nvSpPr>
+        <p:spPr/>
+        <p:txBody>
+          <a:bodyPr/>
+          <a:lstStyle/>
+          <a:p>
+            <a:r>
+              <a:t>@pallotti fixo</a:t>
+            </a:r>
+          </a:p>
+        </p:txBody>
+      </p:sp>
+      <p:sp>
+        <p:nvSpPr>
+          <p:cNvPr id="4" name="Slide Number Placeholder 3"/>
+          <p:cNvSpPr>
+            <a:spLocks noGrp="1"/>
+          </p:cNvSpPr>
+          <p:nvPr>
+            <p:ph type="sldNum" idx="5" sz="quarter"/>
+          </p:nvPr>
+        </p:nvSpPr>
+        <p:spPr/>
+      </p:sp>
+    </p:spTree>
+  </p:cSld>
+  <p:clrMapOvr>
+    <a:masterClrMapping/>
+  </p:clrMapOvr>
+</p:notes>
+</file>
+
+<file path=ppt/notesSlides/notesSlide74.xml><?xml version="1.0" encoding="utf-8"?>
+<p:notes xmlns:a="http://schemas.openxmlformats.org/drawingml/2006/main" xmlns:p="http://schemas.openxmlformats.org/presentationml/2006/main" xmlns:r="http://schemas.openxmlformats.org/officeDocument/2006/relationships">
+  <p:cSld>
+    <p:spTree>
+      <p:nvGrpSpPr>
+        <p:cNvPr id="1" name=""/>
+        <p:cNvGrpSpPr/>
+        <p:nvPr/>
+      </p:nvGrpSpPr>
+      <p:grpSpPr>
+        <a:xfrm>
+          <a:off x="0" y="0"/>
+          <a:ext cx="0" cy="0"/>
+          <a:chOff x="0" y="0"/>
+          <a:chExt cx="0" cy="0"/>
+        </a:xfrm>
+      </p:grpSpPr>
+      <p:sp>
+        <p:nvSpPr>
+          <p:cNvPr id="2" name="Slide Image Placeholder 1"/>
+          <p:cNvSpPr>
+            <a:spLocks noGrp="1"/>
+          </p:cNvSpPr>
+          <p:nvPr>
+            <p:ph type="sldImg" idx="2"/>
+          </p:nvPr>
+        </p:nvSpPr>
+        <p:spPr/>
+      </p:sp>
+      <p:sp>
+        <p:nvSpPr>
+          <p:cNvPr id="3" name="Notes Placeholder 2"/>
+          <p:cNvSpPr>
+            <a:spLocks noGrp="1"/>
+          </p:cNvSpPr>
+          <p:nvPr>
+            <p:ph type="body" idx="3" sz="quarter"/>
+          </p:nvPr>
+        </p:nvSpPr>
+        <p:spPr/>
+        <p:txBody>
+          <a:bodyPr/>
+          <a:lstStyle/>
+          <a:p>
+            <a:r>
+              <a:t>@pallotti grupo=canto:comunhao</a:t>
+            </a:r>
+          </a:p>
+        </p:txBody>
+      </p:sp>
+      <p:sp>
+        <p:nvSpPr>
+          <p:cNvPr id="4" name="Slide Number Placeholder 3"/>
+          <p:cNvSpPr>
+            <a:spLocks noGrp="1"/>
+          </p:cNvSpPr>
+          <p:nvPr>
+            <p:ph type="sldNum" idx="5" sz="quarter"/>
+          </p:nvPr>
+        </p:nvSpPr>
+        <p:spPr/>
+      </p:sp>
+    </p:spTree>
+  </p:cSld>
+  <p:clrMapOvr>
+    <a:masterClrMapping/>
+  </p:clrMapOvr>
+</p:notes>
+</file>
+
+<file path=ppt/notesSlides/notesSlide75.xml><?xml version="1.0" encoding="utf-8"?>
+<p:notes xmlns:a="http://schemas.openxmlformats.org/drawingml/2006/main" xmlns:p="http://schemas.openxmlformats.org/presentationml/2006/main" xmlns:r="http://schemas.openxmlformats.org/officeDocument/2006/relationships">
+  <p:cSld>
+    <p:spTree>
+      <p:nvGrpSpPr>
+        <p:cNvPr id="1" name=""/>
+        <p:cNvGrpSpPr/>
+        <p:nvPr/>
+      </p:nvGrpSpPr>
+      <p:grpSpPr>
+        <a:xfrm>
+          <a:off x="0" y="0"/>
+          <a:ext cx="0" cy="0"/>
+          <a:chOff x="0" y="0"/>
+          <a:chExt cx="0" cy="0"/>
+        </a:xfrm>
+      </p:grpSpPr>
+      <p:sp>
+        <p:nvSpPr>
+          <p:cNvPr id="2" name="Slide Image Placeholder 1"/>
+          <p:cNvSpPr>
+            <a:spLocks noGrp="1"/>
+          </p:cNvSpPr>
+          <p:nvPr>
+            <p:ph type="sldImg" idx="2"/>
+          </p:nvPr>
+        </p:nvSpPr>
+        <p:spPr/>
+      </p:sp>
+      <p:sp>
+        <p:nvSpPr>
+          <p:cNvPr id="3" name="Notes Placeholder 2"/>
+          <p:cNvSpPr>
+            <a:spLocks noGrp="1"/>
+          </p:cNvSpPr>
+          <p:nvPr>
+            <p:ph type="body" idx="3" sz="quarter"/>
+          </p:nvPr>
+        </p:nvSpPr>
+        <p:spPr/>
+        <p:txBody>
+          <a:bodyPr/>
+          <a:lstStyle/>
+          <a:p>
+            <a:r>
+              <a:t>@pallotti canto=comunhao</a:t>
+            </a:r>
+          </a:p>
+        </p:txBody>
+      </p:sp>
+      <p:sp>
+        <p:nvSpPr>
+          <p:cNvPr id="4" name="Slide Number Placeholder 3"/>
+          <p:cNvSpPr>
+            <a:spLocks noGrp="1"/>
+          </p:cNvSpPr>
+          <p:nvPr>
+            <p:ph type="sldNum" idx="5" sz="quarter"/>
+          </p:nvPr>
+        </p:nvSpPr>
+        <p:spPr/>
+      </p:sp>
+    </p:spTree>
+  </p:cSld>
+  <p:clrMapOvr>
+    <a:masterClrMapping/>
+  </p:clrMapOvr>
+</p:notes>
+</file>
+
+<file path=ppt/notesSlides/notesSlide76.xml><?xml version="1.0" encoding="utf-8"?>
+<p:notes xmlns:a="http://schemas.openxmlformats.org/drawingml/2006/main" xmlns:p="http://schemas.openxmlformats.org/presentationml/2006/main" xmlns:r="http://schemas.openxmlformats.org/officeDocument/2006/relationships">
+  <p:cSld>
+    <p:spTree>
+      <p:nvGrpSpPr>
+        <p:cNvPr id="1" name=""/>
+        <p:cNvGrpSpPr/>
+        <p:nvPr/>
+      </p:nvGrpSpPr>
+      <p:grpSpPr>
+        <a:xfrm>
+          <a:off x="0" y="0"/>
+          <a:ext cx="0" cy="0"/>
+          <a:chOff x="0" y="0"/>
+          <a:chExt cx="0" cy="0"/>
+        </a:xfrm>
+      </p:grpSpPr>
+      <p:sp>
+        <p:nvSpPr>
+          <p:cNvPr id="2" name="Slide Image Placeholder 1"/>
+          <p:cNvSpPr>
+            <a:spLocks noGrp="1"/>
+          </p:cNvSpPr>
+          <p:nvPr>
+            <p:ph type="sldImg" idx="2"/>
+          </p:nvPr>
+        </p:nvSpPr>
+        <p:spPr/>
+      </p:sp>
+      <p:sp>
+        <p:nvSpPr>
+          <p:cNvPr id="3" name="Notes Placeholder 2"/>
+          <p:cNvSpPr>
+            <a:spLocks noGrp="1"/>
+          </p:cNvSpPr>
+          <p:nvPr>
+            <p:ph type="body" idx="3" sz="quarter"/>
+          </p:nvPr>
+        </p:nvSpPr>
+        <p:spPr/>
+        <p:txBody>
+          <a:bodyPr/>
+          <a:lstStyle/>
+          <a:p>
+            <a:r>
+              <a:t>@pallotti grupo=canto:pos_comunhao</a:t>
+            </a:r>
+          </a:p>
+        </p:txBody>
+      </p:sp>
+      <p:sp>
+        <p:nvSpPr>
+          <p:cNvPr id="4" name="Slide Number Placeholder 3"/>
+          <p:cNvSpPr>
+            <a:spLocks noGrp="1"/>
+          </p:cNvSpPr>
+          <p:nvPr>
+            <p:ph type="sldNum" idx="5" sz="quarter"/>
+          </p:nvPr>
+        </p:nvSpPr>
+        <p:spPr/>
+      </p:sp>
+    </p:spTree>
+  </p:cSld>
+  <p:clrMapOvr>
+    <a:masterClrMapping/>
+  </p:clrMapOvr>
+</p:notes>
+</file>
+
+<file path=ppt/notesSlides/notesSlide77.xml><?xml version="1.0" encoding="utf-8"?>
+<p:notes xmlns:a="http://schemas.openxmlformats.org/drawingml/2006/main" xmlns:p="http://schemas.openxmlformats.org/presentationml/2006/main" xmlns:r="http://schemas.openxmlformats.org/officeDocument/2006/relationships">
+  <p:cSld>
+    <p:spTree>
+      <p:nvGrpSpPr>
+        <p:cNvPr id="1" name=""/>
+        <p:cNvGrpSpPr/>
+        <p:nvPr/>
+      </p:nvGrpSpPr>
+      <p:grpSpPr>
+        <a:xfrm>
+          <a:off x="0" y="0"/>
+          <a:ext cx="0" cy="0"/>
+          <a:chOff x="0" y="0"/>
+          <a:chExt cx="0" cy="0"/>
+        </a:xfrm>
+      </p:grpSpPr>
+      <p:sp>
+        <p:nvSpPr>
+          <p:cNvPr id="2" name="Slide Image Placeholder 1"/>
+          <p:cNvSpPr>
+            <a:spLocks noGrp="1"/>
+          </p:cNvSpPr>
+          <p:nvPr>
+            <p:ph type="sldImg" idx="2"/>
+          </p:nvPr>
+        </p:nvSpPr>
+        <p:spPr/>
+      </p:sp>
+      <p:sp>
+        <p:nvSpPr>
+          <p:cNvPr id="3" name="Notes Placeholder 2"/>
+          <p:cNvSpPr>
+            <a:spLocks noGrp="1"/>
+          </p:cNvSpPr>
+          <p:nvPr>
+            <p:ph type="body" idx="3" sz="quarter"/>
+          </p:nvPr>
+        </p:nvSpPr>
+        <p:spPr/>
+        <p:txBody>
+          <a:bodyPr/>
+          <a:lstStyle/>
+          <a:p>
+            <a:r>
+              <a:t>@pallotti canto=pos_comunhao</a:t>
+            </a:r>
+          </a:p>
+        </p:txBody>
+      </p:sp>
+      <p:sp>
+        <p:nvSpPr>
+          <p:cNvPr id="4" name="Slide Number Placeholder 3"/>
+          <p:cNvSpPr>
+            <a:spLocks noGrp="1"/>
+          </p:cNvSpPr>
+          <p:nvPr>
+            <p:ph type="sldNum" idx="5" sz="quarter"/>
+          </p:nvPr>
+        </p:nvSpPr>
+        <p:spPr/>
+      </p:sp>
+    </p:spTree>
+  </p:cSld>
+  <p:clrMapOvr>
+    <a:masterClrMapping/>
+  </p:clrMapOvr>
+</p:notes>
+</file>
+
+<file path=ppt/notesSlides/notesSlide78.xml><?xml version="1.0" encoding="utf-8"?>
+<p:notes xmlns:a="http://schemas.openxmlformats.org/drawingml/2006/main" xmlns:p="http://schemas.openxmlformats.org/presentationml/2006/main" xmlns:r="http://schemas.openxmlformats.org/officeDocument/2006/relationships">
+  <p:cSld>
+    <p:spTree>
+      <p:nvGrpSpPr>
+        <p:cNvPr id="1" name=""/>
+        <p:cNvGrpSpPr/>
+        <p:nvPr/>
+      </p:nvGrpSpPr>
+      <p:grpSpPr>
+        <a:xfrm>
+          <a:off x="0" y="0"/>
+          <a:ext cx="0" cy="0"/>
+          <a:chOff x="0" y="0"/>
+          <a:chExt cx="0" cy="0"/>
+        </a:xfrm>
+      </p:grpSpPr>
+      <p:sp>
+        <p:nvSpPr>
+          <p:cNvPr id="2" name="Slide Image Placeholder 1"/>
+          <p:cNvSpPr>
+            <a:spLocks noGrp="1"/>
+          </p:cNvSpPr>
+          <p:nvPr>
+            <p:ph type="sldImg" idx="2"/>
+          </p:nvPr>
+        </p:nvSpPr>
+        <p:spPr/>
+      </p:sp>
+      <p:sp>
+        <p:nvSpPr>
+          <p:cNvPr id="3" name="Notes Placeholder 2"/>
+          <p:cNvSpPr>
+            <a:spLocks noGrp="1"/>
+          </p:cNvSpPr>
+          <p:nvPr>
+            <p:ph type="body" idx="3" sz="quarter"/>
+          </p:nvPr>
+        </p:nvSpPr>
+        <p:spPr/>
+        <p:txBody>
+          <a:bodyPr/>
+          <a:lstStyle/>
+          <a:p>
+            <a:r>
+              <a:t>@pallotti grupo=canto:saida</a:t>
+            </a:r>
+          </a:p>
+        </p:txBody>
+      </p:sp>
+      <p:sp>
+        <p:nvSpPr>
+          <p:cNvPr id="4" name="Slide Number Placeholder 3"/>
+          <p:cNvSpPr>
+            <a:spLocks noGrp="1"/>
+          </p:cNvSpPr>
+          <p:nvPr>
+            <p:ph type="sldNum" idx="5" sz="quarter"/>
+          </p:nvPr>
+        </p:nvSpPr>
+        <p:spPr/>
+      </p:sp>
+    </p:spTree>
+  </p:cSld>
+  <p:clrMapOvr>
+    <a:masterClrMapping/>
+  </p:clrMapOvr>
+</p:notes>
+</file>
+
+<file path=ppt/notesSlides/notesSlide79.xml><?xml version="1.0" encoding="utf-8"?>
+<p:notes xmlns:a="http://schemas.openxmlformats.org/drawingml/2006/main" xmlns:p="http://schemas.openxmlformats.org/presentationml/2006/main" xmlns:r="http://schemas.openxmlformats.org/officeDocument/2006/relationships">
+  <p:cSld>
+    <p:spTree>
+      <p:nvGrpSpPr>
+        <p:cNvPr id="1" name=""/>
+        <p:cNvGrpSpPr/>
+        <p:nvPr/>
+      </p:nvGrpSpPr>
+      <p:grpSpPr>
+        <a:xfrm>
+          <a:off x="0" y="0"/>
+          <a:ext cx="0" cy="0"/>
+          <a:chOff x="0" y="0"/>
+          <a:chExt cx="0" cy="0"/>
+        </a:xfrm>
+      </p:grpSpPr>
+      <p:sp>
+        <p:nvSpPr>
+          <p:cNvPr id="2" name="Slide Image Placeholder 1"/>
+          <p:cNvSpPr>
+            <a:spLocks noGrp="1"/>
+          </p:cNvSpPr>
+          <p:nvPr>
+            <p:ph type="sldImg" idx="2"/>
+          </p:nvPr>
+        </p:nvSpPr>
+        <p:spPr/>
+      </p:sp>
+      <p:sp>
+        <p:nvSpPr>
+          <p:cNvPr id="3" name="Notes Placeholder 2"/>
+          <p:cNvSpPr>
+            <a:spLocks noGrp="1"/>
+          </p:cNvSpPr>
+          <p:nvPr>
+            <p:ph type="body" idx="3" sz="quarter"/>
+          </p:nvPr>
+        </p:nvSpPr>
+        <p:spPr/>
+        <p:txBody>
+          <a:bodyPr/>
+          <a:lstStyle/>
+          <a:p>
+            <a:r>
+              <a:t>@pallotti canto=saida</a:t>
+            </a:r>
+          </a:p>
+        </p:txBody>
+      </p:sp>
+      <p:sp>
+        <p:nvSpPr>
+          <p:cNvPr id="4" name="Slide Number Placeholder 3"/>
+          <p:cNvSpPr>
+            <a:spLocks noGrp="1"/>
+          </p:cNvSpPr>
+          <p:nvPr>
+            <p:ph type="sldNum" idx="5" sz="quarter"/>
+          </p:nvPr>
+        </p:nvSpPr>
+        <p:spPr/>
+      </p:sp>
+    </p:spTree>
+  </p:cSld>
+  <p:clrMapOvr>
+    <a:masterClrMapping/>
+  </p:clrMapOvr>
+</p:notes>
+</file>
+
 <file path=ppt/notesSlides/notesSlide8.xml><?xml version="1.0" encoding="utf-8"?>
 <p:notes xmlns:a="http://schemas.openxmlformats.org/drawingml/2006/main" xmlns:p="http://schemas.openxmlformats.org/presentationml/2006/main" xmlns:r="http://schemas.openxmlformats.org/officeDocument/2006/relationships">
   <p:cSld>
@@ -4669,6 +5877,76 @@
           <a:p>
             <a:r>
               <a:t>@pallotti grupo=canto:gloria</a:t>
+            </a:r>
+          </a:p>
+        </p:txBody>
+      </p:sp>
+      <p:sp>
+        <p:nvSpPr>
+          <p:cNvPr id="4" name="Slide Number Placeholder 3"/>
+          <p:cNvSpPr>
+            <a:spLocks noGrp="1"/>
+          </p:cNvSpPr>
+          <p:nvPr>
+            <p:ph type="sldNum" idx="5" sz="quarter"/>
+          </p:nvPr>
+        </p:nvSpPr>
+        <p:spPr/>
+      </p:sp>
+    </p:spTree>
+  </p:cSld>
+  <p:clrMapOvr>
+    <a:masterClrMapping/>
+  </p:clrMapOvr>
+</p:notes>
+</file>
+
+<file path=ppt/notesSlides/notesSlide80.xml><?xml version="1.0" encoding="utf-8"?>
+<p:notes xmlns:a="http://schemas.openxmlformats.org/drawingml/2006/main" xmlns:p="http://schemas.openxmlformats.org/presentationml/2006/main" xmlns:r="http://schemas.openxmlformats.org/officeDocument/2006/relationships">
+  <p:cSld>
+    <p:spTree>
+      <p:nvGrpSpPr>
+        <p:cNvPr id="1" name=""/>
+        <p:cNvGrpSpPr/>
+        <p:nvPr/>
+      </p:nvGrpSpPr>
+      <p:grpSpPr>
+        <a:xfrm>
+          <a:off x="0" y="0"/>
+          <a:ext cx="0" cy="0"/>
+          <a:chOff x="0" y="0"/>
+          <a:chExt cx="0" cy="0"/>
+        </a:xfrm>
+      </p:grpSpPr>
+      <p:sp>
+        <p:nvSpPr>
+          <p:cNvPr id="2" name="Slide Image Placeholder 1"/>
+          <p:cNvSpPr>
+            <a:spLocks noGrp="1"/>
+          </p:cNvSpPr>
+          <p:nvPr>
+            <p:ph type="sldImg" idx="2"/>
+          </p:nvPr>
+        </p:nvSpPr>
+        <p:spPr/>
+      </p:sp>
+      <p:sp>
+        <p:nvSpPr>
+          <p:cNvPr id="3" name="Notes Placeholder 2"/>
+          <p:cNvSpPr>
+            <a:spLocks noGrp="1"/>
+          </p:cNvSpPr>
+          <p:nvPr>
+            <p:ph type="body" idx="3" sz="quarter"/>
+          </p:nvPr>
+        </p:nvSpPr>
+        <p:spPr/>
+        <p:txBody>
+          <a:bodyPr/>
+          <a:lstStyle/>
+          <a:p>
+            <a:r>
+              <a:t>@pallotti fixo</a:t>
             </a:r>
           </a:p>
         </p:txBody>
@@ -17920,892 +19198,7 @@
 </file>
 
 <file path=ppt/slides/slide48.xml><?xml version="1.0" encoding="utf-8"?>
-<p:sld xmlns:a="http://schemas.openxmlformats.org/drawingml/2006/main" xmlns:p="http://schemas.openxmlformats.org/presentationml/2006/main" xmlns:r="http://schemas.openxmlformats.org/officeDocument/2006/relationships" xmlns:p14="http://schemas.microsoft.com/office/powerpoint/2010/main" xmlns:p15="http://schemas.microsoft.com/office/powerpoint/2012/main" xmlns:mc="http://schemas.openxmlformats.org/markup-compatibility/2006">
-  <p:cSld>
-    <p:spTree>
-      <p:nvGrpSpPr>
-        <p:cNvPr id="1" name=""/>
-        <p:cNvGrpSpPr/>
-        <p:nvPr/>
-      </p:nvGrpSpPr>
-      <p:grpSpPr>
-        <a:xfrm>
-          <a:off x="0" y="0"/>
-          <a:ext cx="0" cy="0"/>
-          <a:chOff x="0" y="0"/>
-          <a:chExt cx="0" cy="0"/>
-        </a:xfrm>
-      </p:grpSpPr>
-      <p:pic>
-        <p:nvPicPr>
-          <p:cNvPr id="170" name="Espaço Reservado para Conteúdo 4"/>
-          <p:cNvPicPr/>
-          <p:nvPr/>
-        </p:nvPicPr>
-        <p:blipFill>
-          <a:blip r:embed="rId1"/>
-          <a:srcRect l="0" t="7" r="0" b="7"/>
-          <a:stretch/>
-        </p:blipFill>
-        <p:spPr>
-          <a:xfrm>
-            <a:off x="0" y="1440"/>
-            <a:ext cx="12202200" cy="6860160"/>
-          </a:xfrm>
-          <a:prstGeom prst="rect">
-            <a:avLst/>
-          </a:prstGeom>
-          <a:noFill/>
-          <a:ln w="0">
-            <a:noFill/>
-          </a:ln>
-        </p:spPr>
-      </p:pic>
-    </p:spTree>
-  </p:cSld>
-  <mc:AlternateContent>
-    <mc:Choice Requires="p14">
-      <p:transition spd="slow" p14:dur="2000"/>
-    </mc:Choice>
-    <mc:Fallback>
-      <p:transition spd="slow"/>
-    </mc:Fallback>
-  </mc:AlternateContent>
-</p:sld>
-</file>
-
-<file path=ppt/slides/slide49.xml><?xml version="1.0" encoding="utf-8"?>
-<p:sld xmlns:a="http://schemas.openxmlformats.org/drawingml/2006/main" xmlns:p="http://schemas.openxmlformats.org/presentationml/2006/main" xmlns:r="http://schemas.openxmlformats.org/officeDocument/2006/relationships" xmlns:p14="http://schemas.microsoft.com/office/powerpoint/2010/main" xmlns:p15="http://schemas.microsoft.com/office/powerpoint/2012/main" xmlns:mc="http://schemas.openxmlformats.org/markup-compatibility/2006">
-  <p:cSld>
-    <p:spTree>
-      <p:nvGrpSpPr>
-        <p:cNvPr id="1" name=""/>
-        <p:cNvGrpSpPr/>
-        <p:nvPr/>
-      </p:nvGrpSpPr>
-      <p:grpSpPr>
-        <a:xfrm>
-          <a:off x="0" y="0"/>
-          <a:ext cx="0" cy="0"/>
-          <a:chOff x="0" y="0"/>
-          <a:chExt cx="0" cy="0"/>
-        </a:xfrm>
-      </p:grpSpPr>
-      <p:sp>
-        <p:nvSpPr>
-          <p:cNvPr id="171" name="PlaceHolder 1"/>
-          <p:cNvSpPr>
-            <a:spLocks noGrp="1"/>
-          </p:cNvSpPr>
-          <p:nvPr>
-            <p:ph/>
-          </p:nvPr>
-        </p:nvSpPr>
-        <p:spPr>
-          <a:xfrm>
-            <a:off x="838080" y="1825560"/>
-            <a:ext cx="10515240" cy="4350960"/>
-          </a:xfrm>
-          <a:prstGeom prst="rect">
-            <a:avLst/>
-          </a:prstGeom>
-          <a:noFill/>
-          <a:ln w="0">
-            <a:noFill/>
-          </a:ln>
-        </p:spPr>
-        <p:txBody>
-          <a:bodyPr lIns="91440" tIns="45720" rIns="91440" bIns="45720" anchor="t">
-            <a:normAutofit/>
-          </a:bodyPr>
-          <a:p>
-            <a:pPr indent="0" algn="ctr" defTabSz="914400">
-              <a:lnSpc>
-                <a:spcPct val="100000"/>
-              </a:lnSpc>
-              <a:buNone/>
-              <a:tabLst>
-                <a:tab pos="0" algn="l"/>
-              </a:tabLst>
-            </a:pPr>
-            <a:r>
-              <a:rPr lang="pt-BR" sz="7200" b="1" u="none" strike="noStrike">
-                <a:solidFill>
-                  <a:srgbClr val="FF0000"/>
-                </a:solidFill>
-                <a:effectLst/>
-                <a:uFillTx/>
-                <a:latin typeface="Aptos"/>
-              </a:rPr>
-              <a:t>R:</a:t>
-            </a:r>
-            <a:r>
-              <a:rPr lang="pt-BR" sz="7200" b="1" u="none" strike="noStrike">
-                <a:solidFill>
-                  <a:schemeClr val="dk1"/>
-                </a:solidFill>
-                <a:effectLst/>
-                <a:uFillTx/>
-                <a:latin typeface="Aptos"/>
-              </a:rPr>
-              <a:t> </a:t>
-            </a:r>
-            <a:r>
-              <a:rPr lang="pt-BR" sz="7200" b="1" u="none" strike="noStrike">
-                <a:solidFill>
-                  <a:schemeClr val="dk1"/>
-                </a:solidFill>
-                <a:effectLst/>
-                <a:uFillTx/>
-                <a:latin typeface="Aptos"/>
-                <a:ea typeface="Aptos"/>
-              </a:rPr>
-              <a:t>Vosso é o Reino, o poder e a glória para sempre! </a:t>
-            </a:r>
-            <a:endParaRPr lang="de-DE" sz="7200" b="0" u="none" strike="noStrike">
-              <a:solidFill>
-                <a:schemeClr val="dk1"/>
-              </a:solidFill>
-              <a:effectLst/>
-              <a:uFillTx/>
-              <a:latin typeface="Aptos"/>
-            </a:endParaRPr>
-          </a:p>
-        </p:txBody>
-      </p:sp>
-    </p:spTree>
-  </p:cSld>
-  <mc:AlternateContent>
-    <mc:Choice Requires="p14">
-      <p:transition spd="slow" p14:dur="2000"/>
-    </mc:Choice>
-    <mc:Fallback>
-      <p:transition spd="slow"/>
-    </mc:Fallback>
-  </mc:AlternateContent>
-</p:sld>
-</file>
-
-<file path=ppt/slides/slide5.xml><?xml version="1.0" encoding="utf-8"?>
-<p:sld xmlns:a="http://schemas.openxmlformats.org/drawingml/2006/main" xmlns:p="http://schemas.openxmlformats.org/presentationml/2006/main" xmlns:r="http://schemas.openxmlformats.org/officeDocument/2006/relationships" xmlns:p14="http://schemas.microsoft.com/office/powerpoint/2010/main" xmlns:p15="http://schemas.microsoft.com/office/powerpoint/2012/main" xmlns:mc="http://schemas.openxmlformats.org/markup-compatibility/2006">
-  <p:cSld>
-    <p:spTree>
-      <p:nvGrpSpPr>
-        <p:cNvPr id="1" name=""/>
-        <p:cNvGrpSpPr/>
-        <p:nvPr/>
-      </p:nvGrpSpPr>
-      <p:grpSpPr>
-        <a:xfrm>
-          <a:off x="0" y="0"/>
-          <a:ext cx="0" cy="0"/>
-          <a:chOff x="0" y="0"/>
-          <a:chExt cx="0" cy="0"/>
-        </a:xfrm>
-      </p:grpSpPr>
-      <p:sp>
-        <p:nvSpPr>
-          <p:cNvPr id="72" name="PlaceHolder 1"/>
-          <p:cNvSpPr>
-            <a:spLocks noGrp="1"/>
-          </p:cNvSpPr>
-          <p:nvPr>
-            <p:ph/>
-          </p:nvPr>
-        </p:nvSpPr>
-        <p:spPr>
-          <a:xfrm>
-            <a:off x="383760" y="1396080"/>
-            <a:ext cx="11423520" cy="5279040"/>
-          </a:xfrm>
-          <a:prstGeom prst="rect">
-            <a:avLst/>
-          </a:prstGeom>
-          <a:noFill/>
-          <a:ln w="0">
-            <a:noFill/>
-          </a:ln>
-        </p:spPr>
-        <p:txBody>
-          <a:bodyPr lIns="91440" tIns="45720" rIns="91440" bIns="45720" anchor="t">
-            <a:noAutofit/>
-          </a:bodyPr>
-          <a:p>
-            <a:pPr marL="228600" indent="-228600" algn="l" defTabSz="914400">
-              <a:lnSpc>
-                <a:spcPct val="90000"/>
-              </a:lnSpc>
-              <a:spcBef>
-                <a:spcPts val="1191"/>
-              </a:spcBef>
-              <a:spcAft>
-                <a:spcPts val="992"/>
-              </a:spcAft>
-              <a:buNone/>
-              <a:tabLst>
-                <a:tab pos="0" algn="l"/>
-              </a:tabLst>
-            </a:pPr>
-            <a:r>
-              <a:rPr lang="pt-BR" sz="4400" b="0" u="none" strike="noStrike">
-                <a:solidFill>
-                  <a:schemeClr val="dk1"/>
-                </a:solidFill>
-                <a:effectLst/>
-                <a:uFillTx/>
-                <a:latin typeface="Aptos"/>
-                <a:ea typeface="Aptos"/>
-              </a:rPr>
-              <a:t>{{canto.texto}}</a:t>
-            </a:r>
-            <a:endParaRPr lang="de-DE" sz="4400" b="0" u="none" strike="noStrike">
-              <a:solidFill>
-                <a:schemeClr val="dk1"/>
-              </a:solidFill>
-              <a:effectLst/>
-              <a:uFillTx/>
-              <a:latin typeface="Aptos"/>
-            </a:endParaRPr>
-          </a:p>
-        </p:txBody>
-      </p:sp>
-      <p:sp>
-        <p:nvSpPr>
-          <p:cNvPr id="73" name="CaixaDeTexto 4"/>
-          <p:cNvSpPr/>
-          <p:nvPr/>
-        </p:nvSpPr>
-        <p:spPr>
-          <a:xfrm>
-            <a:off x="240120" y="213480"/>
-            <a:ext cx="3038040" cy="522720"/>
-          </a:xfrm>
-          <a:prstGeom prst="rect">
-            <a:avLst/>
-          </a:prstGeom>
-          <a:noFill/>
-          <a:ln w="0">
-            <a:noFill/>
-          </a:ln>
-        </p:spPr>
-        <p:style>
-          <a:lnRef idx="0"/>
-          <a:fillRef idx="0"/>
-          <a:effectRef idx="0"/>
-          <a:fontRef idx="minor"/>
-        </p:style>
-        <p:txBody>
-          <a:bodyPr numCol="1" spcCol="0" horzOverflow="overflow" anchor="t">
-            <a:spAutoFit/>
-          </a:bodyPr>
-          <a:p>
-            <a:pPr defTabSz="914400">
-              <a:lnSpc>
-                <a:spcPct val="100000"/>
-              </a:lnSpc>
-            </a:pPr>
-            <a:r>
-              <a:rPr lang="pt-BR" sz="2800" b="1" u="none" strike="noStrike">
-                <a:solidFill>
-                  <a:srgbClr val="FF0000"/>
-                </a:solidFill>
-                <a:effectLst/>
-                <a:uFillTx/>
-                <a:latin typeface="Aptos"/>
-              </a:rPr>
-              <a:t>{{canto.rotulo}}</a:t>
-            </a:r>
-            <a:endParaRPr lang="pt-BR" sz="2800" b="0" u="none" strike="noStrike">
-              <a:solidFill>
-                <a:srgbClr val="000000"/>
-              </a:solidFill>
-              <a:effectLst/>
-              <a:uFillTx/>
-              <a:latin typeface="Arial"/>
-            </a:endParaRPr>
-          </a:p>
-        </p:txBody>
-      </p:sp>
-    </p:spTree>
-  </p:cSld>
-  <mc:AlternateContent>
-    <mc:Choice Requires="p14">
-      <p:transition spd="slow" p14:dur="2000"/>
-    </mc:Choice>
-    <mc:Fallback>
-      <p:transition spd="slow"/>
-    </mc:Fallback>
-  </mc:AlternateContent>
-</p:sld>
-</file>
-
-<file path=ppt/slides/slide50.xml><?xml version="1.0" encoding="utf-8"?>
-<p:sld xmlns:a="http://schemas.openxmlformats.org/drawingml/2006/main" xmlns:p="http://schemas.openxmlformats.org/presentationml/2006/main" xmlns:r="http://schemas.openxmlformats.org/officeDocument/2006/relationships" xmlns:p14="http://schemas.microsoft.com/office/powerpoint/2010/main" xmlns:p15="http://schemas.microsoft.com/office/powerpoint/2012/main" xmlns:mc="http://schemas.openxmlformats.org/markup-compatibility/2006">
-  <p:cSld>
-    <p:spTree>
-      <p:nvGrpSpPr>
-        <p:cNvPr id="1" name=""/>
-        <p:cNvGrpSpPr/>
-        <p:nvPr/>
-      </p:nvGrpSpPr>
-      <p:grpSpPr>
-        <a:xfrm>
-          <a:off x="0" y="0"/>
-          <a:ext cx="0" cy="0"/>
-          <a:chOff x="0" y="0"/>
-          <a:chExt cx="0" cy="0"/>
-        </a:xfrm>
-      </p:grpSpPr>
-      <p:sp>
-        <p:nvSpPr>
-          <p:cNvPr id="172" name="PlaceHolder 1"/>
-          <p:cNvSpPr>
-            <a:spLocks noGrp="1"/>
-          </p:cNvSpPr>
-          <p:nvPr>
-            <p:ph/>
-          </p:nvPr>
-        </p:nvSpPr>
-        <p:spPr>
-          <a:xfrm>
-            <a:off x="838080" y="1351800"/>
-            <a:ext cx="10515240" cy="4825080"/>
-          </a:xfrm>
-          <a:prstGeom prst="rect">
-            <a:avLst/>
-          </a:prstGeom>
-          <a:noFill/>
-          <a:ln w="0">
-            <a:noFill/>
-          </a:ln>
-        </p:spPr>
-        <p:txBody>
-          <a:bodyPr lIns="91440" tIns="45720" rIns="91440" bIns="45720" anchor="t">
-            <a:normAutofit/>
-          </a:bodyPr>
-          <a:p>
-            <a:pPr indent="0" algn="ctr" defTabSz="914400">
-              <a:lnSpc>
-                <a:spcPct val="100000"/>
-              </a:lnSpc>
-              <a:buNone/>
-              <a:tabLst>
-                <a:tab pos="0" algn="l"/>
-              </a:tabLst>
-            </a:pPr>
-            <a:endParaRPr lang="de-DE" sz="7200" b="0" u="none" strike="noStrike">
-              <a:solidFill>
-                <a:schemeClr val="dk1"/>
-              </a:solidFill>
-              <a:effectLst/>
-              <a:uFillTx/>
-              <a:latin typeface="Aptos"/>
-            </a:endParaRPr>
-          </a:p>
-          <a:p>
-            <a:pPr indent="0" algn="ctr" defTabSz="914400">
-              <a:lnSpc>
-                <a:spcPct val="100000"/>
-              </a:lnSpc>
-              <a:buNone/>
-              <a:tabLst>
-                <a:tab pos="0" algn="l"/>
-              </a:tabLst>
-            </a:pPr>
-            <a:r>
-              <a:rPr lang="pt-BR" sz="7200" b="1" u="none" strike="noStrike">
-                <a:solidFill>
-                  <a:srgbClr val="FF0000"/>
-                </a:solidFill>
-                <a:effectLst/>
-                <a:uFillTx/>
-                <a:latin typeface="Aptos"/>
-              </a:rPr>
-              <a:t>R:</a:t>
-            </a:r>
-            <a:r>
-              <a:rPr lang="pt-BR" sz="7200" b="1" u="none" strike="noStrike">
-                <a:solidFill>
-                  <a:schemeClr val="dk1"/>
-                </a:solidFill>
-                <a:effectLst/>
-                <a:uFillTx/>
-                <a:latin typeface="Aptos"/>
-              </a:rPr>
-              <a:t> Amém!</a:t>
-            </a:r>
-            <a:endParaRPr lang="de-DE" sz="7200" b="0" u="none" strike="noStrike">
-              <a:solidFill>
-                <a:schemeClr val="dk1"/>
-              </a:solidFill>
-              <a:effectLst/>
-              <a:uFillTx/>
-              <a:latin typeface="Aptos"/>
-            </a:endParaRPr>
-          </a:p>
-        </p:txBody>
-      </p:sp>
-    </p:spTree>
-  </p:cSld>
-  <mc:AlternateContent>
-    <mc:Choice Requires="p14">
-      <p:transition spd="slow" p14:dur="2000"/>
-    </mc:Choice>
-    <mc:Fallback>
-      <p:transition spd="slow"/>
-    </mc:Fallback>
-  </mc:AlternateContent>
-</p:sld>
-</file>
-
-<file path=ppt/slides/slide51.xml><?xml version="1.0" encoding="utf-8"?>
-<p:sld xmlns:a="http://schemas.openxmlformats.org/drawingml/2006/main" xmlns:p="http://schemas.openxmlformats.org/presentationml/2006/main" xmlns:r="http://schemas.openxmlformats.org/officeDocument/2006/relationships" xmlns:p14="http://schemas.microsoft.com/office/powerpoint/2010/main" xmlns:p15="http://schemas.microsoft.com/office/powerpoint/2012/main" xmlns:mc="http://schemas.openxmlformats.org/markup-compatibility/2006">
-  <p:cSld>
-    <p:spTree>
-      <p:nvGrpSpPr>
-        <p:cNvPr id="1" name=""/>
-        <p:cNvGrpSpPr/>
-        <p:nvPr/>
-      </p:nvGrpSpPr>
-      <p:grpSpPr>
-        <a:xfrm>
-          <a:off x="0" y="0"/>
-          <a:ext cx="0" cy="0"/>
-          <a:chOff x="0" y="0"/>
-          <a:chExt cx="0" cy="0"/>
-        </a:xfrm>
-      </p:grpSpPr>
-      <p:sp>
-        <p:nvSpPr>
-          <p:cNvPr id="173" name="PlaceHolder 1"/>
-          <p:cNvSpPr>
-            <a:spLocks noGrp="1"/>
-          </p:cNvSpPr>
-          <p:nvPr>
-            <p:ph/>
-          </p:nvPr>
-        </p:nvSpPr>
-        <p:spPr>
-          <a:xfrm>
-            <a:off x="838080" y="1825560"/>
-            <a:ext cx="10515240" cy="4350960"/>
-          </a:xfrm>
-          <a:prstGeom prst="rect">
-            <a:avLst/>
-          </a:prstGeom>
-          <a:noFill/>
-          <a:ln w="0">
-            <a:noFill/>
-          </a:ln>
-        </p:spPr>
-        <p:txBody>
-          <a:bodyPr lIns="91440" tIns="45720" rIns="91440" bIns="45720" anchor="t">
-            <a:normAutofit/>
-          </a:bodyPr>
-          <a:p>
-            <a:pPr indent="0" algn="ctr" defTabSz="914400">
-              <a:lnSpc>
-                <a:spcPct val="100000"/>
-              </a:lnSpc>
-              <a:buNone/>
-              <a:tabLst>
-                <a:tab pos="0" algn="l"/>
-              </a:tabLst>
-            </a:pPr>
-            <a:r>
-              <a:rPr lang="pt-BR" sz="7200" b="1" u="none" strike="noStrike">
-                <a:solidFill>
-                  <a:srgbClr val="FF0000"/>
-                </a:solidFill>
-                <a:effectLst/>
-                <a:uFillTx/>
-                <a:latin typeface="Aptos"/>
-              </a:rPr>
-              <a:t>R:</a:t>
-            </a:r>
-            <a:r>
-              <a:rPr lang="pt-BR" sz="7200" b="1" u="none" strike="noStrike">
-                <a:solidFill>
-                  <a:schemeClr val="dk1"/>
-                </a:solidFill>
-                <a:effectLst/>
-                <a:uFillTx/>
-                <a:latin typeface="Aptos"/>
-              </a:rPr>
-              <a:t> </a:t>
-            </a:r>
-            <a:r>
-              <a:rPr lang="pt-BR" sz="7200" b="1" u="none" strike="noStrike">
-                <a:solidFill>
-                  <a:schemeClr val="dk1"/>
-                </a:solidFill>
-                <a:effectLst/>
-                <a:uFillTx/>
-                <a:latin typeface="Aptos"/>
-                <a:ea typeface="Aptos"/>
-              </a:rPr>
-              <a:t>O amor de Cristo nos uniu!</a:t>
-            </a:r>
-            <a:endParaRPr lang="de-DE" sz="7200" b="0" u="none" strike="noStrike">
-              <a:solidFill>
-                <a:schemeClr val="dk1"/>
-              </a:solidFill>
-              <a:effectLst/>
-              <a:uFillTx/>
-              <a:latin typeface="Aptos"/>
-            </a:endParaRPr>
-          </a:p>
-        </p:txBody>
-      </p:sp>
-    </p:spTree>
-  </p:cSld>
-  <mc:AlternateContent>
-    <mc:Choice Requires="p14">
-      <p:transition spd="slow" p14:dur="2000"/>
-    </mc:Choice>
-    <mc:Fallback>
-      <p:transition spd="slow"/>
-    </mc:Fallback>
-  </mc:AlternateContent>
-</p:sld>
-</file>
-
-<file path=ppt/slides/slide52.xml><?xml version="1.0" encoding="utf-8"?>
-<p:sld xmlns:a="http://schemas.openxmlformats.org/drawingml/2006/main" xmlns:p="http://schemas.openxmlformats.org/presentationml/2006/main" xmlns:r="http://schemas.openxmlformats.org/officeDocument/2006/relationships" xmlns:p14="http://schemas.microsoft.com/office/powerpoint/2010/main" xmlns:p15="http://schemas.microsoft.com/office/powerpoint/2012/main" xmlns:mc="http://schemas.openxmlformats.org/markup-compatibility/2006">
-  <p:cSld>
-    <p:spTree>
-      <p:nvGrpSpPr>
-        <p:cNvPr id="1" name=""/>
-        <p:cNvGrpSpPr/>
-        <p:nvPr/>
-      </p:nvGrpSpPr>
-      <p:grpSpPr>
-        <a:xfrm>
-          <a:off x="0" y="0"/>
-          <a:ext cx="0" cy="0"/>
-          <a:chOff x="0" y="0"/>
-          <a:chExt cx="0" cy="0"/>
-        </a:xfrm>
-      </p:grpSpPr>
-      <p:pic>
-        <p:nvPicPr>
-          <p:cNvPr id="174" name="Espaço Reservado para Conteúdo 4"/>
-          <p:cNvPicPr/>
-          <p:nvPr/>
-        </p:nvPicPr>
-        <p:blipFill>
-          <a:blip r:embed="rId1"/>
-          <a:srcRect l="0" t="7" r="0" b="7"/>
-          <a:stretch/>
-        </p:blipFill>
-        <p:spPr>
-          <a:xfrm>
-            <a:off x="0" y="1440"/>
-            <a:ext cx="12202200" cy="6860160"/>
-          </a:xfrm>
-          <a:prstGeom prst="rect">
-            <a:avLst/>
-          </a:prstGeom>
-          <a:noFill/>
-          <a:ln w="0">
-            <a:noFill/>
-          </a:ln>
-        </p:spPr>
-      </p:pic>
-    </p:spTree>
-  </p:cSld>
-  <mc:AlternateContent>
-    <mc:Choice Requires="p14">
-      <p:transition spd="slow" p14:dur="2000"/>
-    </mc:Choice>
-    <mc:Fallback>
-      <p:transition spd="slow"/>
-    </mc:Fallback>
-  </mc:AlternateContent>
-</p:sld>
-</file>
-
-<file path=ppt/slides/slide53.xml><?xml version="1.0" encoding="utf-8"?>
-<p:sld xmlns:a="http://schemas.openxmlformats.org/drawingml/2006/main" xmlns:p="http://schemas.openxmlformats.org/presentationml/2006/main" xmlns:r="http://schemas.openxmlformats.org/officeDocument/2006/relationships" xmlns:p14="http://schemas.microsoft.com/office/powerpoint/2010/main" xmlns:p15="http://schemas.microsoft.com/office/powerpoint/2012/main" xmlns:mc="http://schemas.openxmlformats.org/markup-compatibility/2006">
-  <p:cSld>
-    <p:spTree>
-      <p:nvGrpSpPr>
-        <p:cNvPr id="1" name=""/>
-        <p:cNvGrpSpPr/>
-        <p:nvPr/>
-      </p:nvGrpSpPr>
-      <p:grpSpPr>
-        <a:xfrm>
-          <a:off x="0" y="0"/>
-          <a:ext cx="0" cy="0"/>
-          <a:chOff x="0" y="0"/>
-          <a:chExt cx="0" cy="0"/>
-        </a:xfrm>
-      </p:grpSpPr>
-      <p:sp>
-        <p:nvSpPr>
-          <p:cNvPr id="175" name="PlaceHolder 1"/>
-          <p:cNvSpPr>
-            <a:spLocks noGrp="1"/>
-          </p:cNvSpPr>
-          <p:nvPr>
-            <p:ph/>
-          </p:nvPr>
-        </p:nvSpPr>
-        <p:spPr>
-          <a:xfrm>
-            <a:off x="1108440" y="1211400"/>
-            <a:ext cx="9964800" cy="4944240"/>
-          </a:xfrm>
-          <a:prstGeom prst="rect">
-            <a:avLst/>
-          </a:prstGeom>
-          <a:noFill/>
-          <a:ln w="0">
-            <a:noFill/>
-          </a:ln>
-        </p:spPr>
-        <p:txBody>
-          <a:bodyPr lIns="91440" tIns="45720" rIns="91440" bIns="45720" anchor="t">
-            <a:noAutofit/>
-          </a:bodyPr>
-          <a:p>
-            <a:pPr marL="228600" indent="-228600" algn="ctr" defTabSz="914400">
-              <a:lnSpc>
-                <a:spcPct val="90000"/>
-              </a:lnSpc>
-              <a:spcBef>
-                <a:spcPts val="1001"/>
-              </a:spcBef>
-              <a:buNone/>
-              <a:tabLst>
-                <a:tab pos="0" algn="l"/>
-              </a:tabLst>
-            </a:pPr>
-            <a:r>
-              <a:rPr lang="pt-BR" sz="4800" b="1" u="none" strike="noStrike">
-                <a:solidFill>
-                  <a:schemeClr val="dk1"/>
-                </a:solidFill>
-                <a:effectLst/>
-                <a:highlight>
-                  <a:srgbClr val="FFFFFF"/>
-                </a:highlight>
-                <a:uFillTx/>
-                <a:latin typeface="Aptos"/>
-              </a:rPr>
-              <a:t>Cordeiro de Deus, que tirais o pecado do mundo</a:t>
-            </a:r>
-            <a:br>
-              <a:rPr sz="4800"/>
-            </a:br>
-            <a:r>
-              <a:rPr lang="pt-BR" sz="4800" b="1" u="none" strike="noStrike">
-                <a:solidFill>
-                  <a:schemeClr val="dk1"/>
-                </a:solidFill>
-                <a:effectLst/>
-                <a:highlight>
-                  <a:srgbClr val="FFFFFF"/>
-                </a:highlight>
-                <a:uFillTx/>
-                <a:latin typeface="Aptos"/>
-              </a:rPr>
-              <a:t>tende piedade de nós. (2x)</a:t>
-            </a:r>
-            <a:br>
-              <a:rPr sz="4800"/>
-            </a:br>
-            <a:br>
-              <a:rPr sz="4800"/>
-            </a:br>
-            <a:r>
-              <a:rPr lang="pt-BR" sz="4800" b="1" u="none" strike="noStrike">
-                <a:solidFill>
-                  <a:schemeClr val="dk1"/>
-                </a:solidFill>
-                <a:effectLst/>
-                <a:highlight>
-                  <a:srgbClr val="FFFFFF"/>
-                </a:highlight>
-                <a:uFillTx/>
-                <a:latin typeface="Aptos"/>
-              </a:rPr>
-              <a:t>Cordeiro de Deus, que tirais o pecado do mundo dai-nos a Paz.</a:t>
-            </a:r>
-            <a:endParaRPr lang="de-DE" sz="4800" b="0" u="none" strike="noStrike">
-              <a:solidFill>
-                <a:schemeClr val="dk1"/>
-              </a:solidFill>
-              <a:effectLst/>
-              <a:uFillTx/>
-              <a:latin typeface="Aptos"/>
-            </a:endParaRPr>
-          </a:p>
-        </p:txBody>
-      </p:sp>
-      <p:sp>
-        <p:nvSpPr>
-          <p:cNvPr id="176" name="CaixaDeTexto 4"/>
-          <p:cNvSpPr/>
-          <p:nvPr/>
-        </p:nvSpPr>
-        <p:spPr>
-          <a:xfrm>
-            <a:off x="240120" y="213480"/>
-            <a:ext cx="3038040" cy="522720"/>
-          </a:xfrm>
-          <a:prstGeom prst="rect">
-            <a:avLst/>
-          </a:prstGeom>
-          <a:noFill/>
-          <a:ln w="0">
-            <a:noFill/>
-          </a:ln>
-        </p:spPr>
-        <p:style>
-          <a:lnRef idx="0"/>
-          <a:fillRef idx="0"/>
-          <a:effectRef idx="0"/>
-          <a:fontRef idx="minor"/>
-        </p:style>
-        <p:txBody>
-          <a:bodyPr numCol="1" spcCol="0" horzOverflow="overflow" anchor="t">
-            <a:spAutoFit/>
-          </a:bodyPr>
-          <a:p>
-            <a:pPr defTabSz="914400">
-              <a:lnSpc>
-                <a:spcPct val="100000"/>
-              </a:lnSpc>
-            </a:pPr>
-            <a:r>
-              <a:rPr lang="pt-BR" sz="2800" b="1" u="none" strike="noStrike">
-                <a:solidFill>
-                  <a:srgbClr val="FF0000"/>
-                </a:solidFill>
-                <a:effectLst/>
-                <a:uFillTx/>
-                <a:latin typeface="Aptos"/>
-              </a:rPr>
-              <a:t>Cordeiro</a:t>
-            </a:r>
-            <a:endParaRPr lang="pt-BR" sz="2800" b="0" u="none" strike="noStrike">
-              <a:solidFill>
-                <a:srgbClr val="000000"/>
-              </a:solidFill>
-              <a:effectLst/>
-              <a:uFillTx/>
-              <a:latin typeface="Arial"/>
-            </a:endParaRPr>
-          </a:p>
-        </p:txBody>
-      </p:sp>
-    </p:spTree>
-  </p:cSld>
-  <mc:AlternateContent>
-    <mc:Choice Requires="p14">
-      <p:transition spd="slow" p14:dur="2000"/>
-    </mc:Choice>
-    <mc:Fallback>
-      <p:transition spd="slow"/>
-    </mc:Fallback>
-  </mc:AlternateContent>
-</p:sld>
-</file>
-
-<file path=ppt/slides/slide54.xml><?xml version="1.0" encoding="utf-8"?>
-<p:sld xmlns:a="http://schemas.openxmlformats.org/drawingml/2006/main" xmlns:p="http://schemas.openxmlformats.org/presentationml/2006/main" xmlns:r="http://schemas.openxmlformats.org/officeDocument/2006/relationships" xmlns:p14="http://schemas.microsoft.com/office/powerpoint/2010/main" xmlns:p15="http://schemas.microsoft.com/office/powerpoint/2012/main" xmlns:mc="http://schemas.openxmlformats.org/markup-compatibility/2006">
-  <p:cSld>
-    <p:spTree>
-      <p:nvGrpSpPr>
-        <p:cNvPr id="1" name=""/>
-        <p:cNvGrpSpPr/>
-        <p:nvPr/>
-      </p:nvGrpSpPr>
-      <p:grpSpPr>
-        <a:xfrm>
-          <a:off x="0" y="0"/>
-          <a:ext cx="0" cy="0"/>
-          <a:chOff x="0" y="0"/>
-          <a:chExt cx="0" cy="0"/>
-        </a:xfrm>
-      </p:grpSpPr>
-      <p:sp>
-        <p:nvSpPr>
-          <p:cNvPr id="177" name="PlaceHolder 1"/>
-          <p:cNvSpPr>
-            <a:spLocks noGrp="1"/>
-          </p:cNvSpPr>
-          <p:nvPr>
-            <p:ph/>
-          </p:nvPr>
-        </p:nvSpPr>
-        <p:spPr>
-          <a:xfrm>
-            <a:off x="838080" y="403920"/>
-            <a:ext cx="10515240" cy="6125760"/>
-          </a:xfrm>
-          <a:prstGeom prst="rect">
-            <a:avLst/>
-          </a:prstGeom>
-          <a:noFill/>
-          <a:ln w="0">
-            <a:noFill/>
-          </a:ln>
-        </p:spPr>
-        <p:txBody>
-          <a:bodyPr lIns="91440" tIns="45720" rIns="91440" bIns="45720" anchor="t">
-            <a:normAutofit/>
-          </a:bodyPr>
-          <a:p>
-            <a:pPr indent="0" algn="ctr" defTabSz="914400">
-              <a:lnSpc>
-                <a:spcPct val="100000"/>
-              </a:lnSpc>
-              <a:buNone/>
-              <a:tabLst>
-                <a:tab pos="0" algn="l"/>
-              </a:tabLst>
-            </a:pPr>
-            <a:r>
-              <a:rPr lang="pt-BR" sz="7200" b="1" u="none" strike="noStrike">
-                <a:solidFill>
-                  <a:schemeClr val="dk1"/>
-                </a:solidFill>
-                <a:effectLst/>
-                <a:uFillTx/>
-                <a:latin typeface="Aptos"/>
-                <a:ea typeface="Aptos"/>
-              </a:rPr>
-              <a:t>Senhor, eu não sou digno(a) de que entreis em minha morada, mas dizei uma palavra e serei salvo(a)!</a:t>
-            </a:r>
-            <a:endParaRPr lang="de-DE" sz="7200" b="0" u="none" strike="noStrike">
-              <a:solidFill>
-                <a:schemeClr val="dk1"/>
-              </a:solidFill>
-              <a:effectLst/>
-              <a:uFillTx/>
-              <a:latin typeface="Aptos"/>
-            </a:endParaRPr>
-          </a:p>
-        </p:txBody>
-      </p:sp>
-    </p:spTree>
-  </p:cSld>
-  <mc:AlternateContent>
-    <mc:Choice Requires="p14">
-      <p:transition spd="slow" p14:dur="2000"/>
-    </mc:Choice>
-    <mc:Fallback>
-      <p:transition spd="slow"/>
-    </mc:Fallback>
-  </mc:AlternateContent>
-</p:sld>
-</file>
-
-<file path=ppt/slides/slide55.xml><?xml version="1.0" encoding="utf-8"?>
-<p:sld xmlns:a="http://schemas.openxmlformats.org/drawingml/2006/main" xmlns:p="http://schemas.openxmlformats.org/presentationml/2006/main" xmlns:r="http://schemas.openxmlformats.org/officeDocument/2006/relationships" xmlns:p14="http://schemas.microsoft.com/office/powerpoint/2010/main" xmlns:p15="http://schemas.microsoft.com/office/powerpoint/2012/main" xmlns:mc="http://schemas.openxmlformats.org/markup-compatibility/2006">
+<p:sld xmlns:a="http://schemas.openxmlformats.org/drawingml/2006/main" xmlns:p="http://schemas.openxmlformats.org/presentationml/2006/main" xmlns:r="http://schemas.openxmlformats.org/officeDocument/2006/relationships">
   <p:cSld>
     <p:bg>
       <p:bgPr>
@@ -18830,7 +19223,7 @@
       </p:grpSpPr>
       <p:sp>
         <p:nvSpPr>
-          <p:cNvPr id="178" name="Rectangle 9">
+          <p:cNvPr id="153" name="Rectangle 9">
             <a:extLst>
               <a:ext uri="{C183D7F6-B498-43B3-948B-1728B52AA6E4}">
                 <adec:decorative xmlns:adec="http://schemas.microsoft.com/office/drawing/2017/decorative" val="1"/>
@@ -18885,12 +19278,12 @@
       </p:sp>
       <p:pic>
         <p:nvPicPr>
-          <p:cNvPr id="179" name="Espaço Reservado para Conteúdo 4"/>
+          <p:cNvPr id="154" name="Espaço Reservado para Conteúdo 4"/>
           <p:cNvPicPr/>
           <p:nvPr/>
         </p:nvPicPr>
         <p:blipFill>
-          <a:blip r:embed="rId1"/>
+          <a:blip r:embed="rId2"/>
           <a:srcRect l="0" t="7" r="0" b="7"/>
           <a:stretch/>
         </p:blipFill>
@@ -18910,7 +19303,937 @@
       </p:pic>
     </p:spTree>
   </p:cSld>
+  <mc:AlternateContent xmlns:mc="http://schemas.openxmlformats.org/markup-compatibility/2006" xmlns:p14="http://schemas.microsoft.com/office/powerpoint/2010/main">
+    <mc:Choice Requires="p14">
+      <p:transition spd="slow" p14:dur="2000"/>
+    </mc:Choice>
+    <mc:Fallback>
+      <p:transition spd="slow"/>
+    </mc:Fallback>
+  </mc:AlternateContent>
+</p:sld>
+</file>
+
+<file path=ppt/slides/slide49.xml><?xml version="1.0" encoding="utf-8"?>
+<p:sld xmlns:a="http://schemas.openxmlformats.org/drawingml/2006/main" xmlns:p="http://schemas.openxmlformats.org/presentationml/2006/main" xmlns:r="http://schemas.openxmlformats.org/officeDocument/2006/relationships">
+  <p:cSld>
+    <p:spTree>
+      <p:nvGrpSpPr>
+        <p:cNvPr id="1" name=""/>
+        <p:cNvGrpSpPr/>
+        <p:nvPr/>
+      </p:nvGrpSpPr>
+      <p:grpSpPr>
+        <a:xfrm>
+          <a:off x="0" y="0"/>
+          <a:ext cx="0" cy="0"/>
+          <a:chOff x="0" y="0"/>
+          <a:chExt cx="0" cy="0"/>
+        </a:xfrm>
+      </p:grpSpPr>
+      <p:sp>
+        <p:nvSpPr>
+          <p:cNvPr id="155" name="PlaceHolder 1"/>
+          <p:cNvSpPr>
+            <a:spLocks noGrp="1"/>
+          </p:cNvSpPr>
+          <p:nvPr>
+            <p:ph/>
+          </p:nvPr>
+        </p:nvSpPr>
+        <p:spPr>
+          <a:xfrm>
+            <a:off x="838080" y="1825560"/>
+            <a:ext cx="10515240" cy="4350960"/>
+          </a:xfrm>
+          <a:prstGeom prst="rect">
+            <a:avLst/>
+          </a:prstGeom>
+          <a:noFill/>
+          <a:ln w="0">
+            <a:noFill/>
+          </a:ln>
+        </p:spPr>
+        <p:txBody>
+          <a:bodyPr lIns="91440" tIns="45720" rIns="91440" bIns="45720" anchor="t">
+            <a:normAutofit/>
+          </a:bodyPr>
+          <a:p>
+            <a:pPr indent="0" algn="ctr" defTabSz="914400">
+              <a:lnSpc>
+                <a:spcPct val="100000"/>
+              </a:lnSpc>
+              <a:buNone/>
+              <a:tabLst>
+                <a:tab pos="0" algn="l"/>
+              </a:tabLst>
+            </a:pPr>
+            <a:r>
+              <a:rPr lang="pt-BR" sz="7200" b="1" u="none" strike="noStrike">
+                <a:solidFill>
+                  <a:srgbClr val="FF0000"/>
+                </a:solidFill>
+                <a:effectLst/>
+                <a:uFillTx/>
+                <a:latin typeface="Aptos"/>
+              </a:rPr>
+              <a:t>R:</a:t>
+            </a:r>
+            <a:r>
+              <a:rPr lang="pt-BR" sz="7200" b="1" u="none" strike="noStrike">
+                <a:solidFill>
+                  <a:schemeClr val="dk1"/>
+                </a:solidFill>
+                <a:effectLst/>
+                <a:uFillTx/>
+                <a:latin typeface="Aptos"/>
+              </a:rPr>
+              <a:t> </a:t>
+            </a:r>
+            <a:r>
+              <a:rPr lang="pt-BR" sz="7200" b="1" u="none" strike="noStrike">
+                <a:solidFill>
+                  <a:schemeClr val="dk1"/>
+                </a:solidFill>
+                <a:effectLst/>
+                <a:uFillTx/>
+                <a:latin typeface="Aptos"/>
+                <a:ea typeface="Aptos"/>
+              </a:rPr>
+              <a:t>Bendito o vosso Filho, presente entre nós!</a:t>
+            </a:r>
+            <a:endParaRPr lang="de-DE" sz="7200" b="0" u="none" strike="noStrike">
+              <a:solidFill>
+                <a:schemeClr val="dk1"/>
+              </a:solidFill>
+              <a:effectLst/>
+              <a:uFillTx/>
+              <a:latin typeface="Aptos"/>
+            </a:endParaRPr>
+          </a:p>
+        </p:txBody>
+      </p:sp>
+    </p:spTree>
+  </p:cSld>
+  <mc:AlternateContent xmlns:mc="http://schemas.openxmlformats.org/markup-compatibility/2006" xmlns:p14="http://schemas.microsoft.com/office/powerpoint/2010/main">
+    <mc:Choice Requires="p14">
+      <p:transition spd="slow" p14:dur="2000"/>
+    </mc:Choice>
+    <mc:Fallback>
+      <p:transition spd="slow"/>
+    </mc:Fallback>
+  </mc:AlternateContent>
+</p:sld>
+</file>
+
+<file path=ppt/slides/slide5.xml><?xml version="1.0" encoding="utf-8"?>
+<p:sld xmlns:a="http://schemas.openxmlformats.org/drawingml/2006/main" xmlns:p="http://schemas.openxmlformats.org/presentationml/2006/main" xmlns:r="http://schemas.openxmlformats.org/officeDocument/2006/relationships" xmlns:p14="http://schemas.microsoft.com/office/powerpoint/2010/main" xmlns:p15="http://schemas.microsoft.com/office/powerpoint/2012/main" xmlns:mc="http://schemas.openxmlformats.org/markup-compatibility/2006">
+  <p:cSld>
+    <p:spTree>
+      <p:nvGrpSpPr>
+        <p:cNvPr id="1" name=""/>
+        <p:cNvGrpSpPr/>
+        <p:nvPr/>
+      </p:nvGrpSpPr>
+      <p:grpSpPr>
+        <a:xfrm>
+          <a:off x="0" y="0"/>
+          <a:ext cx="0" cy="0"/>
+          <a:chOff x="0" y="0"/>
+          <a:chExt cx="0" cy="0"/>
+        </a:xfrm>
+      </p:grpSpPr>
+      <p:sp>
+        <p:nvSpPr>
+          <p:cNvPr id="72" name="PlaceHolder 1"/>
+          <p:cNvSpPr>
+            <a:spLocks noGrp="1"/>
+          </p:cNvSpPr>
+          <p:nvPr>
+            <p:ph/>
+          </p:nvPr>
+        </p:nvSpPr>
+        <p:spPr>
+          <a:xfrm>
+            <a:off x="383760" y="1396080"/>
+            <a:ext cx="11423520" cy="5279040"/>
+          </a:xfrm>
+          <a:prstGeom prst="rect">
+            <a:avLst/>
+          </a:prstGeom>
+          <a:noFill/>
+          <a:ln w="0">
+            <a:noFill/>
+          </a:ln>
+        </p:spPr>
+        <p:txBody>
+          <a:bodyPr lIns="91440" tIns="45720" rIns="91440" bIns="45720" anchor="t">
+            <a:noAutofit/>
+          </a:bodyPr>
+          <a:p>
+            <a:pPr marL="228600" indent="-228600" algn="l" defTabSz="914400">
+              <a:lnSpc>
+                <a:spcPct val="90000"/>
+              </a:lnSpc>
+              <a:spcBef>
+                <a:spcPts val="1191"/>
+              </a:spcBef>
+              <a:spcAft>
+                <a:spcPts val="992"/>
+              </a:spcAft>
+              <a:buNone/>
+              <a:tabLst>
+                <a:tab pos="0" algn="l"/>
+              </a:tabLst>
+            </a:pPr>
+            <a:r>
+              <a:rPr lang="pt-BR" sz="4400" b="0" u="none" strike="noStrike">
+                <a:solidFill>
+                  <a:schemeClr val="dk1"/>
+                </a:solidFill>
+                <a:effectLst/>
+                <a:uFillTx/>
+                <a:latin typeface="Aptos"/>
+                <a:ea typeface="Aptos"/>
+              </a:rPr>
+              <a:t>{{canto.texto}}</a:t>
+            </a:r>
+            <a:endParaRPr lang="de-DE" sz="4400" b="0" u="none" strike="noStrike">
+              <a:solidFill>
+                <a:schemeClr val="dk1"/>
+              </a:solidFill>
+              <a:effectLst/>
+              <a:uFillTx/>
+              <a:latin typeface="Aptos"/>
+            </a:endParaRPr>
+          </a:p>
+        </p:txBody>
+      </p:sp>
+      <p:sp>
+        <p:nvSpPr>
+          <p:cNvPr id="73" name="CaixaDeTexto 4"/>
+          <p:cNvSpPr/>
+          <p:nvPr/>
+        </p:nvSpPr>
+        <p:spPr>
+          <a:xfrm>
+            <a:off x="240120" y="213480"/>
+            <a:ext cx="3038040" cy="522720"/>
+          </a:xfrm>
+          <a:prstGeom prst="rect">
+            <a:avLst/>
+          </a:prstGeom>
+          <a:noFill/>
+          <a:ln w="0">
+            <a:noFill/>
+          </a:ln>
+        </p:spPr>
+        <p:style>
+          <a:lnRef idx="0"/>
+          <a:fillRef idx="0"/>
+          <a:effectRef idx="0"/>
+          <a:fontRef idx="minor"/>
+        </p:style>
+        <p:txBody>
+          <a:bodyPr numCol="1" spcCol="0" horzOverflow="overflow" anchor="t">
+            <a:spAutoFit/>
+          </a:bodyPr>
+          <a:p>
+            <a:pPr defTabSz="914400">
+              <a:lnSpc>
+                <a:spcPct val="100000"/>
+              </a:lnSpc>
+            </a:pPr>
+            <a:r>
+              <a:rPr lang="pt-BR" sz="2800" b="1" u="none" strike="noStrike">
+                <a:solidFill>
+                  <a:srgbClr val="FF0000"/>
+                </a:solidFill>
+                <a:effectLst/>
+                <a:uFillTx/>
+                <a:latin typeface="Aptos"/>
+              </a:rPr>
+              <a:t>{{canto.rotulo}}</a:t>
+            </a:r>
+            <a:endParaRPr lang="pt-BR" sz="2800" b="0" u="none" strike="noStrike">
+              <a:solidFill>
+                <a:srgbClr val="000000"/>
+              </a:solidFill>
+              <a:effectLst/>
+              <a:uFillTx/>
+              <a:latin typeface="Arial"/>
+            </a:endParaRPr>
+          </a:p>
+        </p:txBody>
+      </p:sp>
+    </p:spTree>
+  </p:cSld>
   <mc:AlternateContent>
+    <mc:Choice Requires="p14">
+      <p:transition spd="slow" p14:dur="2000"/>
+    </mc:Choice>
+    <mc:Fallback>
+      <p:transition spd="slow"/>
+    </mc:Fallback>
+  </mc:AlternateContent>
+</p:sld>
+</file>
+
+<file path=ppt/slides/slide50.xml><?xml version="1.0" encoding="utf-8"?>
+<p:sld xmlns:a="http://schemas.openxmlformats.org/drawingml/2006/main" xmlns:p="http://schemas.openxmlformats.org/presentationml/2006/main" xmlns:r="http://schemas.openxmlformats.org/officeDocument/2006/relationships">
+  <p:cSld>
+    <p:bg>
+      <p:bgPr>
+        <a:solidFill>
+          <a:schemeClr val="lt1"/>
+        </a:solidFill>
+      </p:bgPr>
+    </p:bg>
+    <p:spTree>
+      <p:nvGrpSpPr>
+        <p:cNvPr id="1" name=""/>
+        <p:cNvGrpSpPr/>
+        <p:nvPr/>
+      </p:nvGrpSpPr>
+      <p:grpSpPr>
+        <a:xfrm>
+          <a:off x="0" y="0"/>
+          <a:ext cx="0" cy="0"/>
+          <a:chOff x="0" y="0"/>
+          <a:chExt cx="0" cy="0"/>
+        </a:xfrm>
+      </p:grpSpPr>
+      <p:sp>
+        <p:nvSpPr>
+          <p:cNvPr id="153" name="Rectangle 9">
+            <a:extLst>
+              <a:ext uri="{C183D7F6-B498-43B3-948B-1728B52AA6E4}">
+                <adec:decorative xmlns:adec="http://schemas.microsoft.com/office/drawing/2017/decorative" val="1"/>
+              </a:ext>
+            </a:extLst>
+          </p:cNvPr>
+          <p:cNvSpPr/>
+          <p:nvPr/>
+        </p:nvSpPr>
+        <p:spPr>
+          <a:xfrm>
+            <a:off x="1440" y="0"/>
+            <a:ext cx="12188520" cy="6857640"/>
+          </a:xfrm>
+          <a:prstGeom prst="rect">
+            <a:avLst/>
+          </a:prstGeom>
+          <a:noFill/>
+          <a:ln>
+            <a:noFill/>
+          </a:ln>
+        </p:spPr>
+        <p:style>
+          <a:lnRef idx="2">
+            <a:schemeClr val="accent1">
+              <a:shade val="50000"/>
+            </a:schemeClr>
+          </a:lnRef>
+          <a:fillRef idx="1">
+            <a:schemeClr val="accent1"/>
+          </a:fillRef>
+          <a:effectRef idx="0">
+            <a:schemeClr val="accent1"/>
+          </a:effectRef>
+          <a:fontRef idx="minor"/>
+        </p:style>
+        <p:txBody>
+          <a:bodyPr lIns="90000" tIns="45000" rIns="90000" bIns="45000" anchor="ctr">
+            <a:noAutofit/>
+          </a:bodyPr>
+          <a:p>
+            <a:endParaRPr lang="en-US" sz="1800" b="0" u="none" strike="noStrike">
+              <a:solidFill>
+                <a:schemeClr val="lt1"/>
+              </a:solidFill>
+              <a:effectLst/>
+              <a:uFillTx/>
+              <a:latin typeface="Aptos"/>
+            </a:endParaRPr>
+          </a:p>
+        </p:txBody>
+      </p:sp>
+      <p:pic>
+        <p:nvPicPr>
+          <p:cNvPr id="154" name="Espaço Reservado para Conteúdo 4"/>
+          <p:cNvPicPr/>
+          <p:nvPr/>
+        </p:nvPicPr>
+        <p:blipFill>
+          <a:blip r:embed="rId2"/>
+          <a:srcRect l="0" t="7" r="0" b="7"/>
+          <a:stretch/>
+        </p:blipFill>
+        <p:spPr>
+          <a:xfrm>
+            <a:off x="0" y="1440"/>
+            <a:ext cx="12202200" cy="6860160"/>
+          </a:xfrm>
+          <a:prstGeom prst="rect">
+            <a:avLst/>
+          </a:prstGeom>
+          <a:noFill/>
+          <a:ln w="0">
+            <a:noFill/>
+          </a:ln>
+        </p:spPr>
+      </p:pic>
+    </p:spTree>
+  </p:cSld>
+  <mc:AlternateContent xmlns:mc="http://schemas.openxmlformats.org/markup-compatibility/2006" xmlns:p14="http://schemas.microsoft.com/office/powerpoint/2010/main">
+    <mc:Choice Requires="p14">
+      <p:transition spd="slow" p14:dur="2000"/>
+    </mc:Choice>
+    <mc:Fallback>
+      <p:transition spd="slow"/>
+    </mc:Fallback>
+  </mc:AlternateContent>
+</p:sld>
+</file>
+
+<file path=ppt/slides/slide51.xml><?xml version="1.0" encoding="utf-8"?>
+<p:sld xmlns:a="http://schemas.openxmlformats.org/drawingml/2006/main" xmlns:p="http://schemas.openxmlformats.org/presentationml/2006/main" xmlns:r="http://schemas.openxmlformats.org/officeDocument/2006/relationships">
+  <p:cSld>
+    <p:spTree>
+      <p:nvGrpSpPr>
+        <p:cNvPr id="1" name=""/>
+        <p:cNvGrpSpPr/>
+        <p:nvPr/>
+      </p:nvGrpSpPr>
+      <p:grpSpPr>
+        <a:xfrm>
+          <a:off x="0" y="0"/>
+          <a:ext cx="0" cy="0"/>
+          <a:chOff x="0" y="0"/>
+          <a:chExt cx="0" cy="0"/>
+        </a:xfrm>
+      </p:grpSpPr>
+      <p:sp>
+        <p:nvSpPr>
+          <p:cNvPr id="155" name="PlaceHolder 1"/>
+          <p:cNvSpPr>
+            <a:spLocks noGrp="1"/>
+          </p:cNvSpPr>
+          <p:nvPr>
+            <p:ph/>
+          </p:nvPr>
+        </p:nvSpPr>
+        <p:spPr>
+          <a:xfrm>
+            <a:off x="838080" y="1825560"/>
+            <a:ext cx="10515240" cy="4350960"/>
+          </a:xfrm>
+          <a:prstGeom prst="rect">
+            <a:avLst/>
+          </a:prstGeom>
+          <a:noFill/>
+          <a:ln w="0">
+            <a:noFill/>
+          </a:ln>
+        </p:spPr>
+        <p:txBody>
+          <a:bodyPr lIns="91440" tIns="45720" rIns="91440" bIns="45720" anchor="t">
+            <a:normAutofit/>
+          </a:bodyPr>
+          <a:p>
+            <a:pPr indent="0" algn="ctr" defTabSz="914400">
+              <a:lnSpc>
+                <a:spcPct val="100000"/>
+              </a:lnSpc>
+              <a:buNone/>
+              <a:tabLst>
+                <a:tab pos="0" algn="l"/>
+              </a:tabLst>
+            </a:pPr>
+            <a:r>
+              <a:rPr lang="pt-BR" sz="7200" b="1" u="none" strike="noStrike">
+                <a:solidFill>
+                  <a:srgbClr val="FF0000"/>
+                </a:solidFill>
+                <a:effectLst/>
+                <a:uFillTx/>
+                <a:latin typeface="Aptos"/>
+              </a:rPr>
+              <a:t>R:</a:t>
+            </a:r>
+            <a:r>
+              <a:rPr lang="pt-BR" sz="7200" b="1" u="none" strike="noStrike">
+                <a:solidFill>
+                  <a:schemeClr val="dk1"/>
+                </a:solidFill>
+                <a:effectLst/>
+                <a:uFillTx/>
+                <a:latin typeface="Aptos"/>
+              </a:rPr>
+              <a:t> </a:t>
+            </a:r>
+            <a:r>
+              <a:rPr lang="pt-BR" sz="7200" b="1" u="none" strike="noStrike">
+                <a:solidFill>
+                  <a:schemeClr val="dk1"/>
+                </a:solidFill>
+                <a:effectLst/>
+                <a:uFillTx/>
+                <a:latin typeface="Aptos"/>
+                <a:ea typeface="Aptos"/>
+              </a:rPr>
+              <a:t>Enviai o vosso Espírito Santo!</a:t>
+            </a:r>
+            <a:endParaRPr lang="de-DE" sz="7200" b="0" u="none" strike="noStrike">
+              <a:solidFill>
+                <a:schemeClr val="dk1"/>
+              </a:solidFill>
+              <a:effectLst/>
+              <a:uFillTx/>
+              <a:latin typeface="Aptos"/>
+            </a:endParaRPr>
+          </a:p>
+        </p:txBody>
+      </p:sp>
+    </p:spTree>
+  </p:cSld>
+  <mc:AlternateContent xmlns:mc="http://schemas.openxmlformats.org/markup-compatibility/2006" xmlns:p14="http://schemas.microsoft.com/office/powerpoint/2010/main">
+    <mc:Choice Requires="p14">
+      <p:transition spd="slow" p14:dur="2000"/>
+    </mc:Choice>
+    <mc:Fallback>
+      <p:transition spd="slow"/>
+    </mc:Fallback>
+  </mc:AlternateContent>
+</p:sld>
+</file>
+
+<file path=ppt/slides/slide52.xml><?xml version="1.0" encoding="utf-8"?>
+<p:sld xmlns:a="http://schemas.openxmlformats.org/drawingml/2006/main" xmlns:p="http://schemas.openxmlformats.org/presentationml/2006/main" xmlns:r="http://schemas.openxmlformats.org/officeDocument/2006/relationships">
+  <p:cSld>
+    <p:bg>
+      <p:bgPr>
+        <a:solidFill>
+          <a:schemeClr val="lt1"/>
+        </a:solidFill>
+      </p:bgPr>
+    </p:bg>
+    <p:spTree>
+      <p:nvGrpSpPr>
+        <p:cNvPr id="1" name=""/>
+        <p:cNvGrpSpPr/>
+        <p:nvPr/>
+      </p:nvGrpSpPr>
+      <p:grpSpPr>
+        <a:xfrm>
+          <a:off x="0" y="0"/>
+          <a:ext cx="0" cy="0"/>
+          <a:chOff x="0" y="0"/>
+          <a:chExt cx="0" cy="0"/>
+        </a:xfrm>
+      </p:grpSpPr>
+      <p:sp>
+        <p:nvSpPr>
+          <p:cNvPr id="153" name="Rectangle 9">
+            <a:extLst>
+              <a:ext uri="{C183D7F6-B498-43B3-948B-1728B52AA6E4}">
+                <adec:decorative xmlns:adec="http://schemas.microsoft.com/office/drawing/2017/decorative" val="1"/>
+              </a:ext>
+            </a:extLst>
+          </p:cNvPr>
+          <p:cNvSpPr/>
+          <p:nvPr/>
+        </p:nvSpPr>
+        <p:spPr>
+          <a:xfrm>
+            <a:off x="1440" y="0"/>
+            <a:ext cx="12188520" cy="6857640"/>
+          </a:xfrm>
+          <a:prstGeom prst="rect">
+            <a:avLst/>
+          </a:prstGeom>
+          <a:noFill/>
+          <a:ln>
+            <a:noFill/>
+          </a:ln>
+        </p:spPr>
+        <p:style>
+          <a:lnRef idx="2">
+            <a:schemeClr val="accent1">
+              <a:shade val="50000"/>
+            </a:schemeClr>
+          </a:lnRef>
+          <a:fillRef idx="1">
+            <a:schemeClr val="accent1"/>
+          </a:fillRef>
+          <a:effectRef idx="0">
+            <a:schemeClr val="accent1"/>
+          </a:effectRef>
+          <a:fontRef idx="minor"/>
+        </p:style>
+        <p:txBody>
+          <a:bodyPr lIns="90000" tIns="45000" rIns="90000" bIns="45000" anchor="ctr">
+            <a:noAutofit/>
+          </a:bodyPr>
+          <a:p>
+            <a:endParaRPr lang="en-US" sz="1800" b="0" u="none" strike="noStrike">
+              <a:solidFill>
+                <a:schemeClr val="lt1"/>
+              </a:solidFill>
+              <a:effectLst/>
+              <a:uFillTx/>
+              <a:latin typeface="Aptos"/>
+            </a:endParaRPr>
+          </a:p>
+        </p:txBody>
+      </p:sp>
+      <p:pic>
+        <p:nvPicPr>
+          <p:cNvPr id="154" name="Espaço Reservado para Conteúdo 4"/>
+          <p:cNvPicPr/>
+          <p:nvPr/>
+        </p:nvPicPr>
+        <p:blipFill>
+          <a:blip r:embed="rId2"/>
+          <a:srcRect l="0" t="7" r="0" b="7"/>
+          <a:stretch/>
+        </p:blipFill>
+        <p:spPr>
+          <a:xfrm>
+            <a:off x="0" y="1440"/>
+            <a:ext cx="12202200" cy="6860160"/>
+          </a:xfrm>
+          <a:prstGeom prst="rect">
+            <a:avLst/>
+          </a:prstGeom>
+          <a:noFill/>
+          <a:ln w="0">
+            <a:noFill/>
+          </a:ln>
+        </p:spPr>
+      </p:pic>
+    </p:spTree>
+  </p:cSld>
+  <mc:AlternateContent xmlns:mc="http://schemas.openxmlformats.org/markup-compatibility/2006" xmlns:p14="http://schemas.microsoft.com/office/powerpoint/2010/main">
+    <mc:Choice Requires="p14">
+      <p:transition spd="slow" p14:dur="2000"/>
+    </mc:Choice>
+    <mc:Fallback>
+      <p:transition spd="slow"/>
+    </mc:Fallback>
+  </mc:AlternateContent>
+</p:sld>
+</file>
+
+<file path=ppt/slides/slide53.xml><?xml version="1.0" encoding="utf-8"?>
+<p:sld xmlns:a="http://schemas.openxmlformats.org/drawingml/2006/main" xmlns:p="http://schemas.openxmlformats.org/presentationml/2006/main" xmlns:r="http://schemas.openxmlformats.org/officeDocument/2006/relationships">
+  <p:cSld>
+    <p:spTree>
+      <p:nvGrpSpPr>
+        <p:cNvPr id="1" name=""/>
+        <p:cNvGrpSpPr/>
+        <p:nvPr/>
+      </p:nvGrpSpPr>
+      <p:grpSpPr>
+        <a:xfrm>
+          <a:off x="0" y="0"/>
+          <a:ext cx="0" cy="0"/>
+          <a:chOff x="0" y="0"/>
+          <a:chExt cx="0" cy="0"/>
+        </a:xfrm>
+      </p:grpSpPr>
+      <p:sp>
+        <p:nvSpPr>
+          <p:cNvPr id="158" name="PlaceHolder 1"/>
+          <p:cNvSpPr>
+            <a:spLocks noGrp="1"/>
+          </p:cNvSpPr>
+          <p:nvPr>
+            <p:ph/>
+          </p:nvPr>
+        </p:nvSpPr>
+        <p:spPr>
+          <a:xfrm>
+            <a:off x="838080" y="403920"/>
+            <a:ext cx="10515240" cy="6125760"/>
+          </a:xfrm>
+          <a:prstGeom prst="rect">
+            <a:avLst/>
+          </a:prstGeom>
+          <a:noFill/>
+          <a:ln w="0">
+            <a:noFill/>
+          </a:ln>
+        </p:spPr>
+        <p:txBody>
+          <a:bodyPr lIns="91440" tIns="45720" rIns="91440" bIns="45720" anchor="t">
+            <a:normAutofit/>
+          </a:bodyPr>
+          <a:p>
+            <a:pPr indent="0" algn="ctr" defTabSz="914400">
+              <a:lnSpc>
+                <a:spcPct val="100000"/>
+              </a:lnSpc>
+              <a:buNone/>
+              <a:tabLst>
+                <a:tab pos="0" algn="l"/>
+              </a:tabLst>
+            </a:pPr>
+            <a:r>
+              <a:rPr lang="pt-BR" sz="7200" b="1" u="none" strike="noStrike">
+                <a:solidFill>
+                  <a:schemeClr val="dk1"/>
+                </a:solidFill>
+                <a:effectLst/>
+                <a:uFillTx/>
+                <a:latin typeface="Aptos"/>
+                <a:ea typeface="Aptos"/>
+              </a:rPr>
+              <a:t>{{liturgia.misterio_fe}}</a:t>
+            </a:r>
+            <a:endParaRPr lang="de-DE" sz="7200" b="0" u="none" strike="noStrike">
+              <a:solidFill>
+                <a:schemeClr val="dk1"/>
+              </a:solidFill>
+              <a:effectLst/>
+              <a:uFillTx/>
+              <a:latin typeface="Aptos"/>
+            </a:endParaRPr>
+          </a:p>
+        </p:txBody>
+      </p:sp>
+    </p:spTree>
+  </p:cSld>
+  <mc:AlternateContent xmlns:mc="http://schemas.openxmlformats.org/markup-compatibility/2006" xmlns:p14="http://schemas.microsoft.com/office/powerpoint/2010/main">
+    <mc:Choice Requires="p14">
+      <p:transition spd="slow" p14:dur="2000"/>
+    </mc:Choice>
+    <mc:Fallback>
+      <p:transition spd="slow"/>
+    </mc:Fallback>
+  </mc:AlternateContent>
+</p:sld>
+</file>
+
+<file path=ppt/slides/slide54.xml><?xml version="1.0" encoding="utf-8"?>
+<p:sld xmlns:a="http://schemas.openxmlformats.org/drawingml/2006/main" xmlns:p="http://schemas.openxmlformats.org/presentationml/2006/main" xmlns:r="http://schemas.openxmlformats.org/officeDocument/2006/relationships">
+  <p:cSld>
+    <p:bg>
+      <p:bgPr>
+        <a:solidFill>
+          <a:schemeClr val="lt1"/>
+        </a:solidFill>
+      </p:bgPr>
+    </p:bg>
+    <p:spTree>
+      <p:nvGrpSpPr>
+        <p:cNvPr id="1" name=""/>
+        <p:cNvGrpSpPr/>
+        <p:nvPr/>
+      </p:nvGrpSpPr>
+      <p:grpSpPr>
+        <a:xfrm>
+          <a:off x="0" y="0"/>
+          <a:ext cx="0" cy="0"/>
+          <a:chOff x="0" y="0"/>
+          <a:chExt cx="0" cy="0"/>
+        </a:xfrm>
+      </p:grpSpPr>
+      <p:sp>
+        <p:nvSpPr>
+          <p:cNvPr id="153" name="Rectangle 9">
+            <a:extLst>
+              <a:ext uri="{C183D7F6-B498-43B3-948B-1728B52AA6E4}">
+                <adec:decorative xmlns:adec="http://schemas.microsoft.com/office/drawing/2017/decorative" val="1"/>
+              </a:ext>
+            </a:extLst>
+          </p:cNvPr>
+          <p:cNvSpPr/>
+          <p:nvPr/>
+        </p:nvSpPr>
+        <p:spPr>
+          <a:xfrm>
+            <a:off x="1440" y="0"/>
+            <a:ext cx="12188520" cy="6857640"/>
+          </a:xfrm>
+          <a:prstGeom prst="rect">
+            <a:avLst/>
+          </a:prstGeom>
+          <a:noFill/>
+          <a:ln>
+            <a:noFill/>
+          </a:ln>
+        </p:spPr>
+        <p:style>
+          <a:lnRef idx="2">
+            <a:schemeClr val="accent1">
+              <a:shade val="50000"/>
+            </a:schemeClr>
+          </a:lnRef>
+          <a:fillRef idx="1">
+            <a:schemeClr val="accent1"/>
+          </a:fillRef>
+          <a:effectRef idx="0">
+            <a:schemeClr val="accent1"/>
+          </a:effectRef>
+          <a:fontRef idx="minor"/>
+        </p:style>
+        <p:txBody>
+          <a:bodyPr lIns="90000" tIns="45000" rIns="90000" bIns="45000" anchor="ctr">
+            <a:noAutofit/>
+          </a:bodyPr>
+          <a:p>
+            <a:endParaRPr lang="en-US" sz="1800" b="0" u="none" strike="noStrike">
+              <a:solidFill>
+                <a:schemeClr val="lt1"/>
+              </a:solidFill>
+              <a:effectLst/>
+              <a:uFillTx/>
+              <a:latin typeface="Aptos"/>
+            </a:endParaRPr>
+          </a:p>
+        </p:txBody>
+      </p:sp>
+      <p:pic>
+        <p:nvPicPr>
+          <p:cNvPr id="154" name="Espaço Reservado para Conteúdo 4"/>
+          <p:cNvPicPr/>
+          <p:nvPr/>
+        </p:nvPicPr>
+        <p:blipFill>
+          <a:blip r:embed="rId2"/>
+          <a:srcRect l="0" t="7" r="0" b="7"/>
+          <a:stretch/>
+        </p:blipFill>
+        <p:spPr>
+          <a:xfrm>
+            <a:off x="0" y="1440"/>
+            <a:ext cx="12202200" cy="6860160"/>
+          </a:xfrm>
+          <a:prstGeom prst="rect">
+            <a:avLst/>
+          </a:prstGeom>
+          <a:noFill/>
+          <a:ln w="0">
+            <a:noFill/>
+          </a:ln>
+        </p:spPr>
+      </p:pic>
+    </p:spTree>
+  </p:cSld>
+  <mc:AlternateContent xmlns:mc="http://schemas.openxmlformats.org/markup-compatibility/2006" xmlns:p14="http://schemas.microsoft.com/office/powerpoint/2010/main">
+    <mc:Choice Requires="p14">
+      <p:transition spd="slow" p14:dur="2000"/>
+    </mc:Choice>
+    <mc:Fallback>
+      <p:transition spd="slow"/>
+    </mc:Fallback>
+  </mc:AlternateContent>
+</p:sld>
+</file>
+
+<file path=ppt/slides/slide55.xml><?xml version="1.0" encoding="utf-8"?>
+<p:sld xmlns:a="http://schemas.openxmlformats.org/drawingml/2006/main" xmlns:p="http://schemas.openxmlformats.org/presentationml/2006/main" xmlns:r="http://schemas.openxmlformats.org/officeDocument/2006/relationships">
+  <p:cSld>
+    <p:spTree>
+      <p:nvGrpSpPr>
+        <p:cNvPr id="1" name=""/>
+        <p:cNvGrpSpPr/>
+        <p:nvPr/>
+      </p:nvGrpSpPr>
+      <p:grpSpPr>
+        <a:xfrm>
+          <a:off x="0" y="0"/>
+          <a:ext cx="0" cy="0"/>
+          <a:chOff x="0" y="0"/>
+          <a:chExt cx="0" cy="0"/>
+        </a:xfrm>
+      </p:grpSpPr>
+      <p:sp>
+        <p:nvSpPr>
+          <p:cNvPr id="161" name="PlaceHolder 1"/>
+          <p:cNvSpPr>
+            <a:spLocks noGrp="1"/>
+          </p:cNvSpPr>
+          <p:nvPr>
+            <p:ph/>
+          </p:nvPr>
+        </p:nvSpPr>
+        <p:spPr>
+          <a:xfrm>
+            <a:off x="838080" y="1825560"/>
+            <a:ext cx="10515240" cy="4350960"/>
+          </a:xfrm>
+          <a:prstGeom prst="rect">
+            <a:avLst/>
+          </a:prstGeom>
+          <a:noFill/>
+          <a:ln w="0">
+            <a:noFill/>
+          </a:ln>
+        </p:spPr>
+        <p:txBody>
+          <a:bodyPr lIns="91440" tIns="45720" rIns="91440" bIns="45720" anchor="t">
+            <a:normAutofit/>
+          </a:bodyPr>
+          <a:p>
+            <a:pPr indent="0" algn="ctr" defTabSz="914400">
+              <a:lnSpc>
+                <a:spcPct val="100000"/>
+              </a:lnSpc>
+              <a:buNone/>
+              <a:tabLst>
+                <a:tab pos="0" algn="l"/>
+              </a:tabLst>
+            </a:pPr>
+            <a:r>
+              <a:rPr lang="pt-BR" sz="7200" b="1" u="none" strike="noStrike">
+                <a:solidFill>
+                  <a:srgbClr val="FF0000"/>
+                </a:solidFill>
+                <a:effectLst/>
+                <a:uFillTx/>
+                <a:latin typeface="Aptos"/>
+              </a:rPr>
+              <a:t>R:</a:t>
+            </a:r>
+            <a:r>
+              <a:rPr lang="pt-BR" sz="7200" b="1" u="none" strike="noStrike">
+                <a:solidFill>
+                  <a:schemeClr val="dk1"/>
+                </a:solidFill>
+                <a:effectLst/>
+                <a:uFillTx/>
+                <a:latin typeface="Aptos"/>
+              </a:rPr>
+              <a:t> </a:t>
+            </a:r>
+            <a:r>
+              <a:rPr lang="pt-BR" sz="7200" b="1" u="none" strike="noStrike">
+                <a:solidFill>
+                  <a:schemeClr val="dk1"/>
+                </a:solidFill>
+                <a:effectLst/>
+                <a:uFillTx/>
+                <a:latin typeface="Aptos"/>
+                <a:ea typeface="Aptos"/>
+              </a:rPr>
+              <a:t>Aceitai, ó Senhor, a nossa oferta!</a:t>
+            </a:r>
+            <a:endParaRPr lang="de-DE" sz="7200" b="0" u="none" strike="noStrike">
+              <a:solidFill>
+                <a:schemeClr val="dk1"/>
+              </a:solidFill>
+              <a:effectLst/>
+              <a:uFillTx/>
+              <a:latin typeface="Aptos"/>
+            </a:endParaRPr>
+          </a:p>
+        </p:txBody>
+      </p:sp>
+    </p:spTree>
+  </p:cSld>
+  <mc:AlternateContent xmlns:mc="http://schemas.openxmlformats.org/markup-compatibility/2006" xmlns:p14="http://schemas.microsoft.com/office/powerpoint/2010/main">
     <mc:Choice Requires="p14">
       <p:transition spd="slow" p14:dur="2000"/>
     </mc:Choice>
@@ -18947,7 +20270,7 @@
       </p:grpSpPr>
       <p:sp>
         <p:nvSpPr>
-          <p:cNvPr id="70" name="Rectangle 23">
+          <p:cNvPr id="153" name="Rectangle 9">
             <a:extLst>
               <a:ext uri="{C183D7F6-B498-43B3-948B-1728B52AA6E4}">
                 <adec:decorative xmlns:adec="http://schemas.microsoft.com/office/drawing/2017/decorative" val="1"/>
@@ -19002,19 +20325,19 @@
       </p:sp>
       <p:pic>
         <p:nvPicPr>
-          <p:cNvPr id="71" name="Imagem 3"/>
+          <p:cNvPr id="154" name="Espaço Reservado para Conteúdo 4"/>
           <p:cNvPicPr/>
           <p:nvPr/>
         </p:nvPicPr>
         <p:blipFill>
           <a:blip r:embed="rId2"/>
-          <a:srcRect l="0" t="10428" r="0" b="10428"/>
+          <a:srcRect l="0" t="7" r="0" b="7"/>
           <a:stretch/>
         </p:blipFill>
         <p:spPr>
           <a:xfrm>
             <a:off x="0" y="1440"/>
-            <a:ext cx="12191760" cy="6856200"/>
+            <a:ext cx="12202200" cy="6860160"/>
           </a:xfrm>
           <a:prstGeom prst="rect">
             <a:avLst/>
@@ -19057,7 +20380,7 @@
       </p:grpSpPr>
       <p:sp>
         <p:nvSpPr>
-          <p:cNvPr id="133" name="PlaceHolder 1"/>
+          <p:cNvPr id="163" name="PlaceHolder 1"/>
           <p:cNvSpPr>
             <a:spLocks noGrp="1"/>
           </p:cNvSpPr>
@@ -19067,8 +20390,8 @@
         </p:nvSpPr>
         <p:spPr>
           <a:xfrm>
-            <a:off x="114480" y="1047600"/>
-            <a:ext cx="11944080" cy="5627520"/>
+            <a:off x="838080" y="1825560"/>
+            <a:ext cx="10515240" cy="4350960"/>
           </a:xfrm>
           <a:prstGeom prst="rect">
             <a:avLst/>
@@ -19080,26 +20403,42 @@
         </p:spPr>
         <p:txBody>
           <a:bodyPr lIns="91440" tIns="45720" rIns="91440" bIns="45720" anchor="t">
-            <a:noAutofit/>
+            <a:normAutofit/>
           </a:bodyPr>
           <a:p>
-            <a:pPr marL="228600" indent="-228600" algn="l" defTabSz="914400">
-              <a:lnSpc>
-                <a:spcPct val="90000"/>
-              </a:lnSpc>
-              <a:spcBef>
-                <a:spcPts val="1191"/>
-              </a:spcBef>
-              <a:spcAft>
-                <a:spcPts val="992"/>
-              </a:spcAft>
+            <a:pPr indent="0" algn="ctr" defTabSz="914400">
+              <a:lnSpc>
+                <a:spcPct val="100000"/>
+              </a:lnSpc>
               <a:buNone/>
               <a:tabLst>
                 <a:tab pos="0" algn="l"/>
               </a:tabLst>
             </a:pPr>
             <a:r>
-              <a:rPr lang="pt-BR" sz="4200" b="0" u="none" strike="noStrike">
+              <a:rPr lang="pt-BR" sz="7200" b="1" u="none" strike="noStrike">
+                <a:solidFill>
+                  <a:srgbClr val="FF0000"/>
+                </a:solidFill>
+                <a:effectLst/>
+                <a:uFillTx/>
+                <a:latin typeface="Aptos"/>
+              </a:rPr>
+              <a:t>R:</a:t>
+            </a:r>
+            <a:r>
+              <a:rPr lang="pt-BR" sz="7200" b="1" u="none" strike="noStrike">
+                <a:solidFill>
+                  <a:schemeClr val="dk1"/>
+                </a:solidFill>
+                <a:effectLst/>
+                <a:uFillTx/>
+                <a:latin typeface="Aptos"/>
+              </a:rPr>
+              <a:t> </a:t>
+            </a:r>
+            <a:r>
+              <a:rPr lang="pt-BR" sz="7200" b="1" u="none" strike="noStrike">
                 <a:solidFill>
                   <a:schemeClr val="dk1"/>
                 </a:solidFill>
@@ -19108,72 +20447,15 @@
                 <a:latin typeface="Aptos"/>
                 <a:ea typeface="Aptos"/>
               </a:rPr>
-              <a:t>{{canto.texto}}</a:t>
-            </a:r>
-            <a:endParaRPr lang="de-DE" sz="4200" b="0" u="none" strike="noStrike">
+              <a:t>O Espírito nos una num só corpo!</a:t>
+            </a:r>
+            <a:endParaRPr lang="de-DE" sz="7200" b="0" u="none" strike="noStrike">
               <a:solidFill>
                 <a:schemeClr val="dk1"/>
               </a:solidFill>
               <a:effectLst/>
               <a:uFillTx/>
               <a:latin typeface="Aptos"/>
-            </a:endParaRPr>
-          </a:p>
-        </p:txBody>
-      </p:sp>
-      <p:sp>
-        <p:nvSpPr>
-          <p:cNvPr id="134" name="CaixaDeTexto 4"/>
-          <p:cNvSpPr/>
-          <p:nvPr/>
-        </p:nvSpPr>
-        <p:spPr>
-          <a:xfrm>
-            <a:off x="240120" y="213480"/>
-            <a:ext cx="3038040" cy="522720"/>
-          </a:xfrm>
-          <a:prstGeom prst="rect">
-            <a:avLst/>
-          </a:prstGeom>
-          <a:noFill/>
-          <a:ln w="0">
-            <a:noFill/>
-          </a:ln>
-        </p:spPr>
-        <p:style>
-          <a:lnRef idx="0"/>
-          <a:fillRef idx="0"/>
-          <a:effectRef idx="0"/>
-          <a:fontRef idx="minor"/>
-        </p:style>
-        <p:txBody>
-          <a:bodyPr numCol="1" spcCol="0" horzOverflow="overflow" anchor="t">
-            <a:spAutoFit/>
-          </a:bodyPr>
-          <a:p>
-            <a:pPr defTabSz="914400">
-              <a:lnSpc>
-                <a:spcPct val="100000"/>
-              </a:lnSpc>
-            </a:pPr>
-            <a:r>
-              <a:rPr lang="pt-BR" sz="2800" b="1" u="none" strike="noStrike">
-                <a:solidFill>
-                  <a:srgbClr val="FF0000"/>
-                </a:solidFill>
-                <a:effectLst/>
-                <a:uFillTx/>
-                <a:latin typeface="Aptos"/>
-              </a:rPr>
-              <a:t>{{canto.rotulo}}</a:t>
-            </a:r>
-            <a:endParaRPr lang="pt-BR" sz="2800" b="0" u="none" strike="noStrike">
-              <a:solidFill>
-                <a:srgbClr val="000000"/>
-              </a:solidFill>
-              <a:effectLst/>
-              <a:uFillTx/>
-              <a:latin typeface="Arial"/>
             </a:endParaRPr>
           </a:p>
         </p:txBody>
@@ -19217,7 +20499,7 @@
       </p:grpSpPr>
       <p:sp>
         <p:nvSpPr>
-          <p:cNvPr id="70" name="Rectangle 23">
+          <p:cNvPr id="153" name="Rectangle 9">
             <a:extLst>
               <a:ext uri="{C183D7F6-B498-43B3-948B-1728B52AA6E4}">
                 <adec:decorative xmlns:adec="http://schemas.microsoft.com/office/drawing/2017/decorative" val="1"/>
@@ -19272,19 +20554,19 @@
       </p:sp>
       <p:pic>
         <p:nvPicPr>
-          <p:cNvPr id="71" name="Imagem 3"/>
+          <p:cNvPr id="154" name="Espaço Reservado para Conteúdo 4"/>
           <p:cNvPicPr/>
           <p:nvPr/>
         </p:nvPicPr>
         <p:blipFill>
           <a:blip r:embed="rId2"/>
-          <a:srcRect l="0" t="10428" r="0" b="10428"/>
+          <a:srcRect l="0" t="7" r="0" b="7"/>
           <a:stretch/>
         </p:blipFill>
         <p:spPr>
           <a:xfrm>
             <a:off x="0" y="1440"/>
-            <a:ext cx="12191760" cy="6856200"/>
+            <a:ext cx="12202200" cy="6860160"/>
           </a:xfrm>
           <a:prstGeom prst="rect">
             <a:avLst/>
@@ -19327,7 +20609,7 @@
       </p:grpSpPr>
       <p:sp>
         <p:nvSpPr>
-          <p:cNvPr id="133" name="PlaceHolder 1"/>
+          <p:cNvPr id="163" name="PlaceHolder 1"/>
           <p:cNvSpPr>
             <a:spLocks noGrp="1"/>
           </p:cNvSpPr>
@@ -19337,8 +20619,8 @@
         </p:nvSpPr>
         <p:spPr>
           <a:xfrm>
-            <a:off x="114480" y="1047600"/>
-            <a:ext cx="11944080" cy="5627520"/>
+            <a:off x="838080" y="1825560"/>
+            <a:ext cx="10515240" cy="4350960"/>
           </a:xfrm>
           <a:prstGeom prst="rect">
             <a:avLst/>
@@ -19350,26 +20632,42 @@
         </p:spPr>
         <p:txBody>
           <a:bodyPr lIns="91440" tIns="45720" rIns="91440" bIns="45720" anchor="t">
-            <a:noAutofit/>
+            <a:normAutofit/>
           </a:bodyPr>
           <a:p>
-            <a:pPr marL="228600" indent="-228600" algn="l" defTabSz="914400">
-              <a:lnSpc>
-                <a:spcPct val="90000"/>
-              </a:lnSpc>
-              <a:spcBef>
-                <a:spcPts val="1191"/>
-              </a:spcBef>
-              <a:spcAft>
-                <a:spcPts val="992"/>
-              </a:spcAft>
+            <a:pPr indent="0" algn="ctr" defTabSz="914400">
+              <a:lnSpc>
+                <a:spcPct val="100000"/>
+              </a:lnSpc>
               <a:buNone/>
               <a:tabLst>
                 <a:tab pos="0" algn="l"/>
               </a:tabLst>
             </a:pPr>
             <a:r>
-              <a:rPr lang="pt-BR" sz="4200" b="0" u="none" strike="noStrike">
+              <a:rPr lang="pt-BR" sz="7200" b="1" u="none" strike="noStrike">
+                <a:solidFill>
+                  <a:srgbClr val="FF0000"/>
+                </a:solidFill>
+                <a:effectLst/>
+                <a:uFillTx/>
+                <a:latin typeface="Aptos"/>
+              </a:rPr>
+              <a:t>R:</a:t>
+            </a:r>
+            <a:r>
+              <a:rPr lang="pt-BR" sz="7200" b="1" u="none" strike="noStrike">
+                <a:solidFill>
+                  <a:schemeClr val="dk1"/>
+                </a:solidFill>
+                <a:effectLst/>
+                <a:uFillTx/>
+                <a:latin typeface="Aptos"/>
+              </a:rPr>
+              <a:t> </a:t>
+            </a:r>
+            <a:r>
+              <a:rPr lang="pt-BR" sz="7200" b="1" u="none" strike="noStrike">
                 <a:solidFill>
                   <a:schemeClr val="dk1"/>
                 </a:solidFill>
@@ -19378,72 +20676,15 @@
                 <a:latin typeface="Aptos"/>
                 <a:ea typeface="Aptos"/>
               </a:rPr>
-              <a:t>{{canto.texto}}</a:t>
-            </a:r>
-            <a:endParaRPr lang="de-DE" sz="4200" b="0" u="none" strike="noStrike">
+              <a:t>Confirmai na unidade a vossa Igreja!</a:t>
+            </a:r>
+            <a:endParaRPr lang="de-DE" sz="7200" b="0" u="none" strike="noStrike">
               <a:solidFill>
                 <a:schemeClr val="dk1"/>
               </a:solidFill>
               <a:effectLst/>
               <a:uFillTx/>
               <a:latin typeface="Aptos"/>
-            </a:endParaRPr>
-          </a:p>
-        </p:txBody>
-      </p:sp>
-      <p:sp>
-        <p:nvSpPr>
-          <p:cNvPr id="134" name="CaixaDeTexto 4"/>
-          <p:cNvSpPr/>
-          <p:nvPr/>
-        </p:nvSpPr>
-        <p:spPr>
-          <a:xfrm>
-            <a:off x="240120" y="213480"/>
-            <a:ext cx="3038040" cy="522720"/>
-          </a:xfrm>
-          <a:prstGeom prst="rect">
-            <a:avLst/>
-          </a:prstGeom>
-          <a:noFill/>
-          <a:ln w="0">
-            <a:noFill/>
-          </a:ln>
-        </p:spPr>
-        <p:style>
-          <a:lnRef idx="0"/>
-          <a:fillRef idx="0"/>
-          <a:effectRef idx="0"/>
-          <a:fontRef idx="minor"/>
-        </p:style>
-        <p:txBody>
-          <a:bodyPr numCol="1" spcCol="0" horzOverflow="overflow" anchor="t">
-            <a:spAutoFit/>
-          </a:bodyPr>
-          <a:p>
-            <a:pPr defTabSz="914400">
-              <a:lnSpc>
-                <a:spcPct val="100000"/>
-              </a:lnSpc>
-            </a:pPr>
-            <a:r>
-              <a:rPr lang="pt-BR" sz="2800" b="1" u="none" strike="noStrike">
-                <a:solidFill>
-                  <a:srgbClr val="FF0000"/>
-                </a:solidFill>
-                <a:effectLst/>
-                <a:uFillTx/>
-                <a:latin typeface="Aptos"/>
-              </a:rPr>
-              <a:t>{{canto.rotulo}}</a:t>
-            </a:r>
-            <a:endParaRPr lang="pt-BR" sz="2800" b="0" u="none" strike="noStrike">
-              <a:solidFill>
-                <a:srgbClr val="000000"/>
-              </a:solidFill>
-              <a:effectLst/>
-              <a:uFillTx/>
-              <a:latin typeface="Arial"/>
             </a:endParaRPr>
           </a:p>
         </p:txBody>
@@ -19604,7 +20845,7 @@
       </p:grpSpPr>
       <p:sp>
         <p:nvSpPr>
-          <p:cNvPr id="70" name="Rectangle 23">
+          <p:cNvPr id="153" name="Rectangle 9">
             <a:extLst>
               <a:ext uri="{C183D7F6-B498-43B3-948B-1728B52AA6E4}">
                 <adec:decorative xmlns:adec="http://schemas.microsoft.com/office/drawing/2017/decorative" val="1"/>
@@ -19659,19 +20900,19 @@
       </p:sp>
       <p:pic>
         <p:nvPicPr>
-          <p:cNvPr id="71" name="Imagem 3"/>
+          <p:cNvPr id="154" name="Espaço Reservado para Conteúdo 4"/>
           <p:cNvPicPr/>
           <p:nvPr/>
         </p:nvPicPr>
         <p:blipFill>
           <a:blip r:embed="rId2"/>
-          <a:srcRect l="0" t="10428" r="0" b="10428"/>
+          <a:srcRect l="0" t="7" r="0" b="7"/>
           <a:stretch/>
         </p:blipFill>
         <p:spPr>
           <a:xfrm>
             <a:off x="0" y="1440"/>
-            <a:ext cx="12191760" cy="6856200"/>
+            <a:ext cx="12202200" cy="6860160"/>
           </a:xfrm>
           <a:prstGeom prst="rect">
             <a:avLst/>
@@ -19714,7 +20955,7 @@
       </p:grpSpPr>
       <p:sp>
         <p:nvSpPr>
-          <p:cNvPr id="133" name="PlaceHolder 1"/>
+          <p:cNvPr id="163" name="PlaceHolder 1"/>
           <p:cNvSpPr>
             <a:spLocks noGrp="1"/>
           </p:cNvSpPr>
@@ -19724,8 +20965,8 @@
         </p:nvSpPr>
         <p:spPr>
           <a:xfrm>
-            <a:off x="114480" y="1047600"/>
-            <a:ext cx="11944080" cy="5627520"/>
+            <a:off x="838080" y="1825560"/>
+            <a:ext cx="10515240" cy="4350960"/>
           </a:xfrm>
           <a:prstGeom prst="rect">
             <a:avLst/>
@@ -19737,26 +20978,42 @@
         </p:spPr>
         <p:txBody>
           <a:bodyPr lIns="91440" tIns="45720" rIns="91440" bIns="45720" anchor="t">
-            <a:noAutofit/>
+            <a:normAutofit/>
           </a:bodyPr>
           <a:p>
-            <a:pPr marL="228600" indent="-228600" algn="l" defTabSz="914400">
-              <a:lnSpc>
-                <a:spcPct val="90000"/>
-              </a:lnSpc>
-              <a:spcBef>
-                <a:spcPts val="1191"/>
-              </a:spcBef>
-              <a:spcAft>
-                <a:spcPts val="992"/>
-              </a:spcAft>
+            <a:pPr indent="0" algn="ctr" defTabSz="914400">
+              <a:lnSpc>
+                <a:spcPct val="100000"/>
+              </a:lnSpc>
               <a:buNone/>
               <a:tabLst>
                 <a:tab pos="0" algn="l"/>
               </a:tabLst>
             </a:pPr>
             <a:r>
-              <a:rPr lang="pt-BR" sz="4200" b="0" u="none" strike="noStrike">
+              <a:rPr lang="pt-BR" sz="7200" b="1" u="none" strike="noStrike">
+                <a:solidFill>
+                  <a:srgbClr val="FF0000"/>
+                </a:solidFill>
+                <a:effectLst/>
+                <a:uFillTx/>
+                <a:latin typeface="Aptos"/>
+              </a:rPr>
+              <a:t>R:</a:t>
+            </a:r>
+            <a:r>
+              <a:rPr lang="pt-BR" sz="7200" b="1" u="none" strike="noStrike">
+                <a:solidFill>
+                  <a:schemeClr val="dk1"/>
+                </a:solidFill>
+                <a:effectLst/>
+                <a:uFillTx/>
+                <a:latin typeface="Aptos"/>
+              </a:rPr>
+              <a:t> </a:t>
+            </a:r>
+            <a:r>
+              <a:rPr lang="pt-BR" sz="7200" b="1" u="none" strike="noStrike">
                 <a:solidFill>
                   <a:schemeClr val="dk1"/>
                 </a:solidFill>
@@ -19765,72 +21022,15 @@
                 <a:latin typeface="Aptos"/>
                 <a:ea typeface="Aptos"/>
               </a:rPr>
-              <a:t>{{canto.texto}}</a:t>
-            </a:r>
-            <a:endParaRPr lang="de-DE" sz="4200" b="0" u="none" strike="noStrike">
+              <a:t>Ajudai-nos a criar um mundo novo!</a:t>
+            </a:r>
+            <a:endParaRPr lang="de-DE" sz="7200" b="0" u="none" strike="noStrike">
               <a:solidFill>
                 <a:schemeClr val="dk1"/>
               </a:solidFill>
               <a:effectLst/>
               <a:uFillTx/>
               <a:latin typeface="Aptos"/>
-            </a:endParaRPr>
-          </a:p>
-        </p:txBody>
-      </p:sp>
-      <p:sp>
-        <p:nvSpPr>
-          <p:cNvPr id="134" name="CaixaDeTexto 4"/>
-          <p:cNvSpPr/>
-          <p:nvPr/>
-        </p:nvSpPr>
-        <p:spPr>
-          <a:xfrm>
-            <a:off x="240120" y="213480"/>
-            <a:ext cx="3038040" cy="522720"/>
-          </a:xfrm>
-          <a:prstGeom prst="rect">
-            <a:avLst/>
-          </a:prstGeom>
-          <a:noFill/>
-          <a:ln w="0">
-            <a:noFill/>
-          </a:ln>
-        </p:spPr>
-        <p:style>
-          <a:lnRef idx="0"/>
-          <a:fillRef idx="0"/>
-          <a:effectRef idx="0"/>
-          <a:fontRef idx="minor"/>
-        </p:style>
-        <p:txBody>
-          <a:bodyPr numCol="1" spcCol="0" horzOverflow="overflow" anchor="t">
-            <a:spAutoFit/>
-          </a:bodyPr>
-          <a:p>
-            <a:pPr defTabSz="914400">
-              <a:lnSpc>
-                <a:spcPct val="100000"/>
-              </a:lnSpc>
-            </a:pPr>
-            <a:r>
-              <a:rPr lang="pt-BR" sz="2800" b="1" u="none" strike="noStrike">
-                <a:solidFill>
-                  <a:srgbClr val="FF0000"/>
-                </a:solidFill>
-                <a:effectLst/>
-                <a:uFillTx/>
-                <a:latin typeface="Aptos"/>
-              </a:rPr>
-              <a:t>{{canto.rotulo}}</a:t>
-            </a:r>
-            <a:endParaRPr lang="pt-BR" sz="2800" b="0" u="none" strike="noStrike">
-              <a:solidFill>
-                <a:srgbClr val="000000"/>
-              </a:solidFill>
-              <a:effectLst/>
-              <a:uFillTx/>
-              <a:latin typeface="Arial"/>
             </a:endParaRPr>
           </a:p>
         </p:txBody>
@@ -19849,7 +21049,7 @@
 </file>
 
 <file path=ppt/slides/slide62.xml><?xml version="1.0" encoding="utf-8"?>
-<p:sld xmlns:a="http://schemas.openxmlformats.org/drawingml/2006/main" xmlns:p="http://schemas.openxmlformats.org/presentationml/2006/main" xmlns:r="http://schemas.openxmlformats.org/officeDocument/2006/relationships" xmlns:p14="http://schemas.microsoft.com/office/powerpoint/2010/main" xmlns:p15="http://schemas.microsoft.com/office/powerpoint/2012/main" xmlns:mc="http://schemas.openxmlformats.org/markup-compatibility/2006">
+<p:sld xmlns:a="http://schemas.openxmlformats.org/drawingml/2006/main" xmlns:p="http://schemas.openxmlformats.org/presentationml/2006/main" xmlns:r="http://schemas.openxmlformats.org/officeDocument/2006/relationships">
   <p:cSld>
     <p:bg>
       <p:bgPr>
@@ -19874,7 +21074,7 @@
       </p:grpSpPr>
       <p:sp>
         <p:nvSpPr>
-          <p:cNvPr id="180" name="Rectangle 23">
+          <p:cNvPr id="153" name="Rectangle 9">
             <a:extLst>
               <a:ext uri="{C183D7F6-B498-43B3-948B-1728B52AA6E4}">
                 <adec:decorative xmlns:adec="http://schemas.microsoft.com/office/drawing/2017/decorative" val="1"/>
@@ -19929,7 +21129,2284 @@
       </p:sp>
       <p:pic>
         <p:nvPicPr>
-          <p:cNvPr id="181" name="Imagem 3"/>
+          <p:cNvPr id="154" name="Espaço Reservado para Conteúdo 4"/>
+          <p:cNvPicPr/>
+          <p:nvPr/>
+        </p:nvPicPr>
+        <p:blipFill>
+          <a:blip r:embed="rId2"/>
+          <a:srcRect l="0" t="7" r="0" b="7"/>
+          <a:stretch/>
+        </p:blipFill>
+        <p:spPr>
+          <a:xfrm>
+            <a:off x="0" y="1440"/>
+            <a:ext cx="12202200" cy="6860160"/>
+          </a:xfrm>
+          <a:prstGeom prst="rect">
+            <a:avLst/>
+          </a:prstGeom>
+          <a:noFill/>
+          <a:ln w="0">
+            <a:noFill/>
+          </a:ln>
+        </p:spPr>
+      </p:pic>
+    </p:spTree>
+  </p:cSld>
+  <mc:AlternateContent xmlns:mc="http://schemas.openxmlformats.org/markup-compatibility/2006" xmlns:p14="http://schemas.microsoft.com/office/powerpoint/2010/main">
+    <mc:Choice Requires="p14">
+      <p:transition spd="slow" p14:dur="2000"/>
+    </mc:Choice>
+    <mc:Fallback>
+      <p:transition spd="slow"/>
+    </mc:Fallback>
+  </mc:AlternateContent>
+</p:sld>
+</file>
+
+<file path=ppt/slides/slide63.xml><?xml version="1.0" encoding="utf-8"?>
+<p:sld xmlns:a="http://schemas.openxmlformats.org/drawingml/2006/main" xmlns:p="http://schemas.openxmlformats.org/presentationml/2006/main" xmlns:r="http://schemas.openxmlformats.org/officeDocument/2006/relationships">
+  <p:cSld>
+    <p:spTree>
+      <p:nvGrpSpPr>
+        <p:cNvPr id="1" name=""/>
+        <p:cNvGrpSpPr/>
+        <p:nvPr/>
+      </p:nvGrpSpPr>
+      <p:grpSpPr>
+        <a:xfrm>
+          <a:off x="0" y="0"/>
+          <a:ext cx="0" cy="0"/>
+          <a:chOff x="0" y="0"/>
+          <a:chExt cx="0" cy="0"/>
+        </a:xfrm>
+      </p:grpSpPr>
+      <p:sp>
+        <p:nvSpPr>
+          <p:cNvPr id="163" name="PlaceHolder 1"/>
+          <p:cNvSpPr>
+            <a:spLocks noGrp="1"/>
+          </p:cNvSpPr>
+          <p:nvPr>
+            <p:ph/>
+          </p:nvPr>
+        </p:nvSpPr>
+        <p:spPr>
+          <a:xfrm>
+            <a:off x="838080" y="1825560"/>
+            <a:ext cx="10515240" cy="4350960"/>
+          </a:xfrm>
+          <a:prstGeom prst="rect">
+            <a:avLst/>
+          </a:prstGeom>
+          <a:noFill/>
+          <a:ln w="0">
+            <a:noFill/>
+          </a:ln>
+        </p:spPr>
+        <p:txBody>
+          <a:bodyPr lIns="91440" tIns="45720" rIns="91440" bIns="45720" anchor="t">
+            <a:normAutofit/>
+          </a:bodyPr>
+          <a:p>
+            <a:pPr indent="0" algn="ctr" defTabSz="914400">
+              <a:lnSpc>
+                <a:spcPct val="100000"/>
+              </a:lnSpc>
+              <a:buNone/>
+              <a:tabLst>
+                <a:tab pos="0" algn="l"/>
+              </a:tabLst>
+            </a:pPr>
+            <a:r>
+              <a:rPr lang="pt-BR" sz="7200" b="1" u="none" strike="noStrike">
+                <a:solidFill>
+                  <a:srgbClr val="FF0000"/>
+                </a:solidFill>
+                <a:effectLst/>
+                <a:uFillTx/>
+                <a:latin typeface="Aptos"/>
+              </a:rPr>
+              <a:t>R:</a:t>
+            </a:r>
+            <a:r>
+              <a:rPr lang="pt-BR" sz="7200" b="1" u="none" strike="noStrike">
+                <a:solidFill>
+                  <a:schemeClr val="dk1"/>
+                </a:solidFill>
+                <a:effectLst/>
+                <a:uFillTx/>
+                <a:latin typeface="Aptos"/>
+              </a:rPr>
+              <a:t> </a:t>
+            </a:r>
+            <a:r>
+              <a:rPr lang="pt-BR" sz="7200" b="1" u="none" strike="noStrike">
+                <a:solidFill>
+                  <a:schemeClr val="dk1"/>
+                </a:solidFill>
+                <a:effectLst/>
+                <a:uFillTx/>
+                <a:latin typeface="Aptos"/>
+                <a:ea typeface="Aptos"/>
+              </a:rPr>
+              <a:t>Concedei-lhes, ó Senhor, a luz eterna!</a:t>
+            </a:r>
+            <a:endParaRPr lang="de-DE" sz="7200" b="0" u="none" strike="noStrike">
+              <a:solidFill>
+                <a:schemeClr val="dk1"/>
+              </a:solidFill>
+              <a:effectLst/>
+              <a:uFillTx/>
+              <a:latin typeface="Aptos"/>
+            </a:endParaRPr>
+          </a:p>
+        </p:txBody>
+      </p:sp>
+    </p:spTree>
+  </p:cSld>
+  <mc:AlternateContent xmlns:mc="http://schemas.openxmlformats.org/markup-compatibility/2006" xmlns:p14="http://schemas.microsoft.com/office/powerpoint/2010/main">
+    <mc:Choice Requires="p14">
+      <p:transition spd="slow" p14:dur="2000"/>
+    </mc:Choice>
+    <mc:Fallback>
+      <p:transition spd="slow"/>
+    </mc:Fallback>
+  </mc:AlternateContent>
+</p:sld>
+</file>
+
+<file path=ppt/slides/slide64.xml><?xml version="1.0" encoding="utf-8"?>
+<p:sld xmlns:a="http://schemas.openxmlformats.org/drawingml/2006/main" xmlns:p="http://schemas.openxmlformats.org/presentationml/2006/main" xmlns:r="http://schemas.openxmlformats.org/officeDocument/2006/relationships">
+  <p:cSld>
+    <p:bg>
+      <p:bgPr>
+        <a:solidFill>
+          <a:schemeClr val="lt1"/>
+        </a:solidFill>
+      </p:bgPr>
+    </p:bg>
+    <p:spTree>
+      <p:nvGrpSpPr>
+        <p:cNvPr id="1" name=""/>
+        <p:cNvGrpSpPr/>
+        <p:nvPr/>
+      </p:nvGrpSpPr>
+      <p:grpSpPr>
+        <a:xfrm>
+          <a:off x="0" y="0"/>
+          <a:ext cx="0" cy="0"/>
+          <a:chOff x="0" y="0"/>
+          <a:chExt cx="0" cy="0"/>
+        </a:xfrm>
+      </p:grpSpPr>
+      <p:sp>
+        <p:nvSpPr>
+          <p:cNvPr id="153" name="Rectangle 9">
+            <a:extLst>
+              <a:ext uri="{C183D7F6-B498-43B3-948B-1728B52AA6E4}">
+                <adec:decorative xmlns:adec="http://schemas.microsoft.com/office/drawing/2017/decorative" val="1"/>
+              </a:ext>
+            </a:extLst>
+          </p:cNvPr>
+          <p:cNvSpPr/>
+          <p:nvPr/>
+        </p:nvSpPr>
+        <p:spPr>
+          <a:xfrm>
+            <a:off x="1440" y="0"/>
+            <a:ext cx="12188520" cy="6857640"/>
+          </a:xfrm>
+          <a:prstGeom prst="rect">
+            <a:avLst/>
+          </a:prstGeom>
+          <a:noFill/>
+          <a:ln>
+            <a:noFill/>
+          </a:ln>
+        </p:spPr>
+        <p:style>
+          <a:lnRef idx="2">
+            <a:schemeClr val="accent1">
+              <a:shade val="50000"/>
+            </a:schemeClr>
+          </a:lnRef>
+          <a:fillRef idx="1">
+            <a:schemeClr val="accent1"/>
+          </a:fillRef>
+          <a:effectRef idx="0">
+            <a:schemeClr val="accent1"/>
+          </a:effectRef>
+          <a:fontRef idx="minor"/>
+        </p:style>
+        <p:txBody>
+          <a:bodyPr lIns="90000" tIns="45000" rIns="90000" bIns="45000" anchor="ctr">
+            <a:noAutofit/>
+          </a:bodyPr>
+          <a:p>
+            <a:endParaRPr lang="en-US" sz="1800" b="0" u="none" strike="noStrike">
+              <a:solidFill>
+                <a:schemeClr val="lt1"/>
+              </a:solidFill>
+              <a:effectLst/>
+              <a:uFillTx/>
+              <a:latin typeface="Aptos"/>
+            </a:endParaRPr>
+          </a:p>
+        </p:txBody>
+      </p:sp>
+      <p:pic>
+        <p:nvPicPr>
+          <p:cNvPr id="154" name="Espaço Reservado para Conteúdo 4"/>
+          <p:cNvPicPr/>
+          <p:nvPr/>
+        </p:nvPicPr>
+        <p:blipFill>
+          <a:blip r:embed="rId2"/>
+          <a:srcRect l="0" t="7" r="0" b="7"/>
+          <a:stretch/>
+        </p:blipFill>
+        <p:spPr>
+          <a:xfrm>
+            <a:off x="0" y="1440"/>
+            <a:ext cx="12202200" cy="6860160"/>
+          </a:xfrm>
+          <a:prstGeom prst="rect">
+            <a:avLst/>
+          </a:prstGeom>
+          <a:noFill/>
+          <a:ln w="0">
+            <a:noFill/>
+          </a:ln>
+        </p:spPr>
+      </p:pic>
+    </p:spTree>
+  </p:cSld>
+  <mc:AlternateContent xmlns:mc="http://schemas.openxmlformats.org/markup-compatibility/2006" xmlns:p14="http://schemas.microsoft.com/office/powerpoint/2010/main">
+    <mc:Choice Requires="p14">
+      <p:transition spd="slow" p14:dur="2000"/>
+    </mc:Choice>
+    <mc:Fallback>
+      <p:transition spd="slow"/>
+    </mc:Fallback>
+  </mc:AlternateContent>
+</p:sld>
+</file>
+
+<file path=ppt/slides/slide65.xml><?xml version="1.0" encoding="utf-8"?>
+<p:sld xmlns:a="http://schemas.openxmlformats.org/drawingml/2006/main" xmlns:p="http://schemas.openxmlformats.org/presentationml/2006/main" xmlns:r="http://schemas.openxmlformats.org/officeDocument/2006/relationships">
+  <p:cSld>
+    <p:spTree>
+      <p:nvGrpSpPr>
+        <p:cNvPr id="1" name=""/>
+        <p:cNvGrpSpPr/>
+        <p:nvPr/>
+      </p:nvGrpSpPr>
+      <p:grpSpPr>
+        <a:xfrm>
+          <a:off x="0" y="0"/>
+          <a:ext cx="0" cy="0"/>
+          <a:chOff x="0" y="0"/>
+          <a:chExt cx="0" cy="0"/>
+        </a:xfrm>
+      </p:grpSpPr>
+      <p:sp>
+        <p:nvSpPr>
+          <p:cNvPr id="169" name="PlaceHolder 1"/>
+          <p:cNvSpPr>
+            <a:spLocks noGrp="1"/>
+          </p:cNvSpPr>
+          <p:nvPr>
+            <p:ph/>
+          </p:nvPr>
+        </p:nvSpPr>
+        <p:spPr>
+          <a:xfrm>
+            <a:off x="838080" y="1351800"/>
+            <a:ext cx="10515240" cy="4825080"/>
+          </a:xfrm>
+          <a:prstGeom prst="rect">
+            <a:avLst/>
+          </a:prstGeom>
+          <a:noFill/>
+          <a:ln w="0">
+            <a:noFill/>
+          </a:ln>
+        </p:spPr>
+        <p:txBody>
+          <a:bodyPr lIns="91440" tIns="45720" rIns="91440" bIns="45720" anchor="t">
+            <a:normAutofit/>
+          </a:bodyPr>
+          <a:p>
+            <a:pPr indent="0" algn="ctr" defTabSz="914400">
+              <a:lnSpc>
+                <a:spcPct val="100000"/>
+              </a:lnSpc>
+              <a:buNone/>
+              <a:tabLst>
+                <a:tab pos="0" algn="l"/>
+              </a:tabLst>
+            </a:pPr>
+            <a:endParaRPr lang="de-DE" sz="7200" b="0" u="none" strike="noStrike">
+              <a:solidFill>
+                <a:schemeClr val="dk1"/>
+              </a:solidFill>
+              <a:effectLst/>
+              <a:uFillTx/>
+              <a:latin typeface="Aptos"/>
+            </a:endParaRPr>
+          </a:p>
+          <a:p>
+            <a:pPr indent="0" algn="ctr" defTabSz="914400">
+              <a:lnSpc>
+                <a:spcPct val="100000"/>
+              </a:lnSpc>
+              <a:buNone/>
+              <a:tabLst>
+                <a:tab pos="0" algn="l"/>
+              </a:tabLst>
+            </a:pPr>
+            <a:r>
+              <a:rPr lang="pt-BR" sz="7200" b="1" u="none" strike="noStrike">
+                <a:solidFill>
+                  <a:srgbClr val="FF0000"/>
+                </a:solidFill>
+                <a:effectLst/>
+                <a:uFillTx/>
+                <a:latin typeface="Aptos"/>
+              </a:rPr>
+              <a:t>R:</a:t>
+            </a:r>
+            <a:r>
+              <a:rPr lang="pt-BR" sz="7200" b="1" u="none" strike="noStrike">
+                <a:solidFill>
+                  <a:schemeClr val="dk1"/>
+                </a:solidFill>
+                <a:effectLst/>
+                <a:uFillTx/>
+                <a:latin typeface="Aptos"/>
+              </a:rPr>
+              <a:t> Amém!</a:t>
+            </a:r>
+            <a:endParaRPr lang="de-DE" sz="7200" b="0" u="none" strike="noStrike">
+              <a:solidFill>
+                <a:schemeClr val="dk1"/>
+              </a:solidFill>
+              <a:effectLst/>
+              <a:uFillTx/>
+              <a:latin typeface="Aptos"/>
+            </a:endParaRPr>
+          </a:p>
+        </p:txBody>
+      </p:sp>
+    </p:spTree>
+  </p:cSld>
+  <mc:AlternateContent xmlns:mc="http://schemas.openxmlformats.org/markup-compatibility/2006" xmlns:p14="http://schemas.microsoft.com/office/powerpoint/2010/main">
+    <mc:Choice Requires="p14">
+      <p:transition spd="slow" p14:dur="2000"/>
+    </mc:Choice>
+    <mc:Fallback>
+      <p:transition spd="slow"/>
+    </mc:Fallback>
+  </mc:AlternateContent>
+</p:sld>
+</file>
+
+<file path=ppt/slides/slide66.xml><?xml version="1.0" encoding="utf-8"?>
+<p:sld xmlns:a="http://schemas.openxmlformats.org/drawingml/2006/main" xmlns:p="http://schemas.openxmlformats.org/presentationml/2006/main" xmlns:r="http://schemas.openxmlformats.org/officeDocument/2006/relationships" xmlns:p14="http://schemas.microsoft.com/office/powerpoint/2010/main" xmlns:p15="http://schemas.microsoft.com/office/powerpoint/2012/main" xmlns:mc="http://schemas.openxmlformats.org/markup-compatibility/2006">
+  <p:cSld>
+    <p:spTree>
+      <p:nvGrpSpPr>
+        <p:cNvPr id="1" name=""/>
+        <p:cNvGrpSpPr/>
+        <p:nvPr/>
+      </p:nvGrpSpPr>
+      <p:grpSpPr>
+        <a:xfrm>
+          <a:off x="0" y="0"/>
+          <a:ext cx="0" cy="0"/>
+          <a:chOff x="0" y="0"/>
+          <a:chExt cx="0" cy="0"/>
+        </a:xfrm>
+      </p:grpSpPr>
+      <p:pic>
+        <p:nvPicPr>
+          <p:cNvPr id="170" name="Espaço Reservado para Conteúdo 4"/>
+          <p:cNvPicPr/>
+          <p:nvPr/>
+        </p:nvPicPr>
+        <p:blipFill>
+          <a:blip r:embed="rId1"/>
+          <a:srcRect l="0" t="7" r="0" b="7"/>
+          <a:stretch/>
+        </p:blipFill>
+        <p:spPr>
+          <a:xfrm>
+            <a:off x="0" y="1440"/>
+            <a:ext cx="12202200" cy="6860160"/>
+          </a:xfrm>
+          <a:prstGeom prst="rect">
+            <a:avLst/>
+          </a:prstGeom>
+          <a:noFill/>
+          <a:ln w="0">
+            <a:noFill/>
+          </a:ln>
+        </p:spPr>
+      </p:pic>
+    </p:spTree>
+  </p:cSld>
+  <mc:AlternateContent>
+    <mc:Choice Requires="p14">
+      <p:transition spd="slow" p14:dur="2000"/>
+    </mc:Choice>
+    <mc:Fallback>
+      <p:transition spd="slow"/>
+    </mc:Fallback>
+  </mc:AlternateContent>
+</p:sld>
+</file>
+
+<file path=ppt/slides/slide67.xml><?xml version="1.0" encoding="utf-8"?>
+<p:sld xmlns:a="http://schemas.openxmlformats.org/drawingml/2006/main" xmlns:p="http://schemas.openxmlformats.org/presentationml/2006/main" xmlns:r="http://schemas.openxmlformats.org/officeDocument/2006/relationships" xmlns:p14="http://schemas.microsoft.com/office/powerpoint/2010/main" xmlns:p15="http://schemas.microsoft.com/office/powerpoint/2012/main" xmlns:mc="http://schemas.openxmlformats.org/markup-compatibility/2006">
+  <p:cSld>
+    <p:spTree>
+      <p:nvGrpSpPr>
+        <p:cNvPr id="1" name=""/>
+        <p:cNvGrpSpPr/>
+        <p:nvPr/>
+      </p:nvGrpSpPr>
+      <p:grpSpPr>
+        <a:xfrm>
+          <a:off x="0" y="0"/>
+          <a:ext cx="0" cy="0"/>
+          <a:chOff x="0" y="0"/>
+          <a:chExt cx="0" cy="0"/>
+        </a:xfrm>
+      </p:grpSpPr>
+      <p:sp>
+        <p:nvSpPr>
+          <p:cNvPr id="171" name="PlaceHolder 1"/>
+          <p:cNvSpPr>
+            <a:spLocks noGrp="1"/>
+          </p:cNvSpPr>
+          <p:nvPr>
+            <p:ph/>
+          </p:nvPr>
+        </p:nvSpPr>
+        <p:spPr>
+          <a:xfrm>
+            <a:off x="838080" y="1825560"/>
+            <a:ext cx="10515240" cy="4350960"/>
+          </a:xfrm>
+          <a:prstGeom prst="rect">
+            <a:avLst/>
+          </a:prstGeom>
+          <a:noFill/>
+          <a:ln w="0">
+            <a:noFill/>
+          </a:ln>
+        </p:spPr>
+        <p:txBody>
+          <a:bodyPr lIns="91440" tIns="45720" rIns="91440" bIns="45720" anchor="t">
+            <a:normAutofit/>
+          </a:bodyPr>
+          <a:p>
+            <a:pPr indent="0" algn="ctr" defTabSz="914400">
+              <a:lnSpc>
+                <a:spcPct val="100000"/>
+              </a:lnSpc>
+              <a:buNone/>
+              <a:tabLst>
+                <a:tab pos="0" algn="l"/>
+              </a:tabLst>
+            </a:pPr>
+            <a:r>
+              <a:rPr lang="pt-BR" sz="7200" b="1" u="none" strike="noStrike">
+                <a:solidFill>
+                  <a:srgbClr val="FF0000"/>
+                </a:solidFill>
+                <a:effectLst/>
+                <a:uFillTx/>
+                <a:latin typeface="Aptos"/>
+              </a:rPr>
+              <a:t>R:</a:t>
+            </a:r>
+            <a:r>
+              <a:rPr lang="pt-BR" sz="7200" b="1" u="none" strike="noStrike">
+                <a:solidFill>
+                  <a:schemeClr val="dk1"/>
+                </a:solidFill>
+                <a:effectLst/>
+                <a:uFillTx/>
+                <a:latin typeface="Aptos"/>
+              </a:rPr>
+              <a:t> </a:t>
+            </a:r>
+            <a:r>
+              <a:rPr lang="pt-BR" sz="7200" b="1" u="none" strike="noStrike">
+                <a:solidFill>
+                  <a:schemeClr val="dk1"/>
+                </a:solidFill>
+                <a:effectLst/>
+                <a:uFillTx/>
+                <a:latin typeface="Aptos"/>
+                <a:ea typeface="Aptos"/>
+              </a:rPr>
+              <a:t>Vosso é o Reino, o poder e a glória para sempre! </a:t>
+            </a:r>
+            <a:endParaRPr lang="de-DE" sz="7200" b="0" u="none" strike="noStrike">
+              <a:solidFill>
+                <a:schemeClr val="dk1"/>
+              </a:solidFill>
+              <a:effectLst/>
+              <a:uFillTx/>
+              <a:latin typeface="Aptos"/>
+            </a:endParaRPr>
+          </a:p>
+        </p:txBody>
+      </p:sp>
+    </p:spTree>
+  </p:cSld>
+  <mc:AlternateContent>
+    <mc:Choice Requires="p14">
+      <p:transition spd="slow" p14:dur="2000"/>
+    </mc:Choice>
+    <mc:Fallback>
+      <p:transition spd="slow"/>
+    </mc:Fallback>
+  </mc:AlternateContent>
+</p:sld>
+</file>
+
+<file path=ppt/slides/slide68.xml><?xml version="1.0" encoding="utf-8"?>
+<p:sld xmlns:a="http://schemas.openxmlformats.org/drawingml/2006/main" xmlns:p="http://schemas.openxmlformats.org/presentationml/2006/main" xmlns:r="http://schemas.openxmlformats.org/officeDocument/2006/relationships" xmlns:p14="http://schemas.microsoft.com/office/powerpoint/2010/main" xmlns:p15="http://schemas.microsoft.com/office/powerpoint/2012/main" xmlns:mc="http://schemas.openxmlformats.org/markup-compatibility/2006">
+  <p:cSld>
+    <p:spTree>
+      <p:nvGrpSpPr>
+        <p:cNvPr id="1" name=""/>
+        <p:cNvGrpSpPr/>
+        <p:nvPr/>
+      </p:nvGrpSpPr>
+      <p:grpSpPr>
+        <a:xfrm>
+          <a:off x="0" y="0"/>
+          <a:ext cx="0" cy="0"/>
+          <a:chOff x="0" y="0"/>
+          <a:chExt cx="0" cy="0"/>
+        </a:xfrm>
+      </p:grpSpPr>
+      <p:sp>
+        <p:nvSpPr>
+          <p:cNvPr id="172" name="PlaceHolder 1"/>
+          <p:cNvSpPr>
+            <a:spLocks noGrp="1"/>
+          </p:cNvSpPr>
+          <p:nvPr>
+            <p:ph/>
+          </p:nvPr>
+        </p:nvSpPr>
+        <p:spPr>
+          <a:xfrm>
+            <a:off x="838080" y="1351800"/>
+            <a:ext cx="10515240" cy="4825080"/>
+          </a:xfrm>
+          <a:prstGeom prst="rect">
+            <a:avLst/>
+          </a:prstGeom>
+          <a:noFill/>
+          <a:ln w="0">
+            <a:noFill/>
+          </a:ln>
+        </p:spPr>
+        <p:txBody>
+          <a:bodyPr lIns="91440" tIns="45720" rIns="91440" bIns="45720" anchor="t">
+            <a:normAutofit/>
+          </a:bodyPr>
+          <a:p>
+            <a:pPr indent="0" algn="ctr" defTabSz="914400">
+              <a:lnSpc>
+                <a:spcPct val="100000"/>
+              </a:lnSpc>
+              <a:buNone/>
+              <a:tabLst>
+                <a:tab pos="0" algn="l"/>
+              </a:tabLst>
+            </a:pPr>
+            <a:endParaRPr lang="de-DE" sz="7200" b="0" u="none" strike="noStrike">
+              <a:solidFill>
+                <a:schemeClr val="dk1"/>
+              </a:solidFill>
+              <a:effectLst/>
+              <a:uFillTx/>
+              <a:latin typeface="Aptos"/>
+            </a:endParaRPr>
+          </a:p>
+          <a:p>
+            <a:pPr indent="0" algn="ctr" defTabSz="914400">
+              <a:lnSpc>
+                <a:spcPct val="100000"/>
+              </a:lnSpc>
+              <a:buNone/>
+              <a:tabLst>
+                <a:tab pos="0" algn="l"/>
+              </a:tabLst>
+            </a:pPr>
+            <a:r>
+              <a:rPr lang="pt-BR" sz="7200" b="1" u="none" strike="noStrike">
+                <a:solidFill>
+                  <a:srgbClr val="FF0000"/>
+                </a:solidFill>
+                <a:effectLst/>
+                <a:uFillTx/>
+                <a:latin typeface="Aptos"/>
+              </a:rPr>
+              <a:t>R:</a:t>
+            </a:r>
+            <a:r>
+              <a:rPr lang="pt-BR" sz="7200" b="1" u="none" strike="noStrike">
+                <a:solidFill>
+                  <a:schemeClr val="dk1"/>
+                </a:solidFill>
+                <a:effectLst/>
+                <a:uFillTx/>
+                <a:latin typeface="Aptos"/>
+              </a:rPr>
+              <a:t> Amém!</a:t>
+            </a:r>
+            <a:endParaRPr lang="de-DE" sz="7200" b="0" u="none" strike="noStrike">
+              <a:solidFill>
+                <a:schemeClr val="dk1"/>
+              </a:solidFill>
+              <a:effectLst/>
+              <a:uFillTx/>
+              <a:latin typeface="Aptos"/>
+            </a:endParaRPr>
+          </a:p>
+        </p:txBody>
+      </p:sp>
+    </p:spTree>
+  </p:cSld>
+  <mc:AlternateContent>
+    <mc:Choice Requires="p14">
+      <p:transition spd="slow" p14:dur="2000"/>
+    </mc:Choice>
+    <mc:Fallback>
+      <p:transition spd="slow"/>
+    </mc:Fallback>
+  </mc:AlternateContent>
+</p:sld>
+</file>
+
+<file path=ppt/slides/slide69.xml><?xml version="1.0" encoding="utf-8"?>
+<p:sld xmlns:a="http://schemas.openxmlformats.org/drawingml/2006/main" xmlns:p="http://schemas.openxmlformats.org/presentationml/2006/main" xmlns:r="http://schemas.openxmlformats.org/officeDocument/2006/relationships" xmlns:p14="http://schemas.microsoft.com/office/powerpoint/2010/main" xmlns:p15="http://schemas.microsoft.com/office/powerpoint/2012/main" xmlns:mc="http://schemas.openxmlformats.org/markup-compatibility/2006">
+  <p:cSld>
+    <p:spTree>
+      <p:nvGrpSpPr>
+        <p:cNvPr id="1" name=""/>
+        <p:cNvGrpSpPr/>
+        <p:nvPr/>
+      </p:nvGrpSpPr>
+      <p:grpSpPr>
+        <a:xfrm>
+          <a:off x="0" y="0"/>
+          <a:ext cx="0" cy="0"/>
+          <a:chOff x="0" y="0"/>
+          <a:chExt cx="0" cy="0"/>
+        </a:xfrm>
+      </p:grpSpPr>
+      <p:sp>
+        <p:nvSpPr>
+          <p:cNvPr id="173" name="PlaceHolder 1"/>
+          <p:cNvSpPr>
+            <a:spLocks noGrp="1"/>
+          </p:cNvSpPr>
+          <p:nvPr>
+            <p:ph/>
+          </p:nvPr>
+        </p:nvSpPr>
+        <p:spPr>
+          <a:xfrm>
+            <a:off x="838080" y="1825560"/>
+            <a:ext cx="10515240" cy="4350960"/>
+          </a:xfrm>
+          <a:prstGeom prst="rect">
+            <a:avLst/>
+          </a:prstGeom>
+          <a:noFill/>
+          <a:ln w="0">
+            <a:noFill/>
+          </a:ln>
+        </p:spPr>
+        <p:txBody>
+          <a:bodyPr lIns="91440" tIns="45720" rIns="91440" bIns="45720" anchor="t">
+            <a:normAutofit/>
+          </a:bodyPr>
+          <a:p>
+            <a:pPr indent="0" algn="ctr" defTabSz="914400">
+              <a:lnSpc>
+                <a:spcPct val="100000"/>
+              </a:lnSpc>
+              <a:buNone/>
+              <a:tabLst>
+                <a:tab pos="0" algn="l"/>
+              </a:tabLst>
+            </a:pPr>
+            <a:r>
+              <a:rPr lang="pt-BR" sz="7200" b="1" u="none" strike="noStrike">
+                <a:solidFill>
+                  <a:srgbClr val="FF0000"/>
+                </a:solidFill>
+                <a:effectLst/>
+                <a:uFillTx/>
+                <a:latin typeface="Aptos"/>
+              </a:rPr>
+              <a:t>R:</a:t>
+            </a:r>
+            <a:r>
+              <a:rPr lang="pt-BR" sz="7200" b="1" u="none" strike="noStrike">
+                <a:solidFill>
+                  <a:schemeClr val="dk1"/>
+                </a:solidFill>
+                <a:effectLst/>
+                <a:uFillTx/>
+                <a:latin typeface="Aptos"/>
+              </a:rPr>
+              <a:t> </a:t>
+            </a:r>
+            <a:r>
+              <a:rPr lang="pt-BR" sz="7200" b="1" u="none" strike="noStrike">
+                <a:solidFill>
+                  <a:schemeClr val="dk1"/>
+                </a:solidFill>
+                <a:effectLst/>
+                <a:uFillTx/>
+                <a:latin typeface="Aptos"/>
+                <a:ea typeface="Aptos"/>
+              </a:rPr>
+              <a:t>O amor de Cristo nos uniu!</a:t>
+            </a:r>
+            <a:endParaRPr lang="de-DE" sz="7200" b="0" u="none" strike="noStrike">
+              <a:solidFill>
+                <a:schemeClr val="dk1"/>
+              </a:solidFill>
+              <a:effectLst/>
+              <a:uFillTx/>
+              <a:latin typeface="Aptos"/>
+            </a:endParaRPr>
+          </a:p>
+        </p:txBody>
+      </p:sp>
+    </p:spTree>
+  </p:cSld>
+  <mc:AlternateContent>
+    <mc:Choice Requires="p14">
+      <p:transition spd="slow" p14:dur="2000"/>
+    </mc:Choice>
+    <mc:Fallback>
+      <p:transition spd="slow"/>
+    </mc:Fallback>
+  </mc:AlternateContent>
+</p:sld>
+</file>
+
+<file path=ppt/slides/slide7.xml><?xml version="1.0" encoding="utf-8"?>
+<p:sld xmlns:a="http://schemas.openxmlformats.org/drawingml/2006/main" xmlns:p="http://schemas.openxmlformats.org/presentationml/2006/main" xmlns:r="http://schemas.openxmlformats.org/officeDocument/2006/relationships" xmlns:p14="http://schemas.microsoft.com/office/powerpoint/2010/main" xmlns:p15="http://schemas.microsoft.com/office/powerpoint/2012/main" xmlns:mc="http://schemas.openxmlformats.org/markup-compatibility/2006">
+  <p:cSld>
+    <p:spTree>
+      <p:nvGrpSpPr>
+        <p:cNvPr id="1" name=""/>
+        <p:cNvGrpSpPr/>
+        <p:nvPr/>
+      </p:nvGrpSpPr>
+      <p:grpSpPr>
+        <a:xfrm>
+          <a:off x="0" y="0"/>
+          <a:ext cx="0" cy="0"/>
+          <a:chOff x="0" y="0"/>
+          <a:chExt cx="0" cy="0"/>
+        </a:xfrm>
+      </p:grpSpPr>
+      <p:sp>
+        <p:nvSpPr>
+          <p:cNvPr id="82" name="PlaceHolder 1"/>
+          <p:cNvSpPr>
+            <a:spLocks noGrp="1"/>
+          </p:cNvSpPr>
+          <p:nvPr>
+            <p:ph/>
+          </p:nvPr>
+        </p:nvSpPr>
+        <p:spPr>
+          <a:xfrm>
+            <a:off x="114480" y="1248480"/>
+            <a:ext cx="11944080" cy="5426640"/>
+          </a:xfrm>
+          <a:prstGeom prst="rect">
+            <a:avLst/>
+          </a:prstGeom>
+          <a:noFill/>
+          <a:ln w="0">
+            <a:noFill/>
+          </a:ln>
+        </p:spPr>
+        <p:txBody>
+          <a:bodyPr lIns="91440" tIns="45720" rIns="91440" bIns="45720" anchor="t" anchorCtr="1">
+            <a:noAutofit/>
+          </a:bodyPr>
+          <a:p>
+            <a:pPr marL="228600" indent="-228600" algn="ctr" defTabSz="914400">
+              <a:lnSpc>
+                <a:spcPct val="90000"/>
+              </a:lnSpc>
+              <a:spcBef>
+                <a:spcPts val="1191"/>
+              </a:spcBef>
+              <a:spcAft>
+                <a:spcPts val="992"/>
+              </a:spcAft>
+              <a:buNone/>
+              <a:tabLst>
+                <a:tab pos="0" algn="l"/>
+              </a:tabLst>
+            </a:pPr>
+            <a:r>
+              <a:rPr lang="pt-BR" sz="5400" b="0" u="none" strike="noStrike">
+                <a:solidFill>
+                  <a:schemeClr val="dk1"/>
+                </a:solidFill>
+                <a:effectLst/>
+                <a:uFillTx/>
+                <a:latin typeface="Aptos"/>
+                <a:ea typeface="Aptos"/>
+              </a:rPr>
+              <a:t>{{canto.texto}}</a:t>
+            </a:r>
+            <a:endParaRPr lang="de-DE" sz="5400" b="0" u="none" strike="noStrike">
+              <a:solidFill>
+                <a:schemeClr val="dk1"/>
+              </a:solidFill>
+              <a:effectLst/>
+              <a:uFillTx/>
+              <a:latin typeface="Aptos"/>
+            </a:endParaRPr>
+          </a:p>
+        </p:txBody>
+      </p:sp>
+      <p:sp>
+        <p:nvSpPr>
+          <p:cNvPr id="83" name="CaixaDeTexto 4"/>
+          <p:cNvSpPr/>
+          <p:nvPr/>
+        </p:nvSpPr>
+        <p:spPr>
+          <a:xfrm>
+            <a:off x="240120" y="213480"/>
+            <a:ext cx="3038040" cy="522720"/>
+          </a:xfrm>
+          <a:prstGeom prst="rect">
+            <a:avLst/>
+          </a:prstGeom>
+          <a:noFill/>
+          <a:ln w="0">
+            <a:noFill/>
+          </a:ln>
+        </p:spPr>
+        <p:style>
+          <a:lnRef idx="0"/>
+          <a:fillRef idx="0"/>
+          <a:effectRef idx="0"/>
+          <a:fontRef idx="minor"/>
+        </p:style>
+        <p:txBody>
+          <a:bodyPr numCol="1" spcCol="0" horzOverflow="overflow" anchor="t">
+            <a:spAutoFit/>
+          </a:bodyPr>
+          <a:p>
+            <a:pPr defTabSz="914400">
+              <a:lnSpc>
+                <a:spcPct val="100000"/>
+              </a:lnSpc>
+            </a:pPr>
+            <a:r>
+              <a:rPr lang="pt-BR" sz="2800" b="1" u="none" strike="noStrike">
+                <a:solidFill>
+                  <a:srgbClr val="FF0000"/>
+                </a:solidFill>
+                <a:effectLst/>
+                <a:uFillTx/>
+                <a:latin typeface="Aptos"/>
+              </a:rPr>
+              <a:t>{{canto.rotulo}}</a:t>
+            </a:r>
+            <a:endParaRPr lang="pt-BR" sz="2800" b="0" u="none" strike="noStrike">
+              <a:solidFill>
+                <a:srgbClr val="000000"/>
+              </a:solidFill>
+              <a:effectLst/>
+              <a:uFillTx/>
+              <a:latin typeface="Arial"/>
+            </a:endParaRPr>
+          </a:p>
+        </p:txBody>
+      </p:sp>
+    </p:spTree>
+  </p:cSld>
+  <mc:AlternateContent>
+    <mc:Choice Requires="p14">
+      <p:transition spd="slow" p14:dur="2000"/>
+    </mc:Choice>
+    <mc:Fallback>
+      <p:transition spd="slow"/>
+    </mc:Fallback>
+  </mc:AlternateContent>
+</p:sld>
+</file>
+
+<file path=ppt/slides/slide70.xml><?xml version="1.0" encoding="utf-8"?>
+<p:sld xmlns:a="http://schemas.openxmlformats.org/drawingml/2006/main" xmlns:p="http://schemas.openxmlformats.org/presentationml/2006/main" xmlns:r="http://schemas.openxmlformats.org/officeDocument/2006/relationships" xmlns:p14="http://schemas.microsoft.com/office/powerpoint/2010/main" xmlns:p15="http://schemas.microsoft.com/office/powerpoint/2012/main" xmlns:mc="http://schemas.openxmlformats.org/markup-compatibility/2006">
+  <p:cSld>
+    <p:spTree>
+      <p:nvGrpSpPr>
+        <p:cNvPr id="1" name=""/>
+        <p:cNvGrpSpPr/>
+        <p:nvPr/>
+      </p:nvGrpSpPr>
+      <p:grpSpPr>
+        <a:xfrm>
+          <a:off x="0" y="0"/>
+          <a:ext cx="0" cy="0"/>
+          <a:chOff x="0" y="0"/>
+          <a:chExt cx="0" cy="0"/>
+        </a:xfrm>
+      </p:grpSpPr>
+      <p:pic>
+        <p:nvPicPr>
+          <p:cNvPr id="174" name="Espaço Reservado para Conteúdo 4"/>
+          <p:cNvPicPr/>
+          <p:nvPr/>
+        </p:nvPicPr>
+        <p:blipFill>
+          <a:blip r:embed="rId1"/>
+          <a:srcRect l="0" t="7" r="0" b="7"/>
+          <a:stretch/>
+        </p:blipFill>
+        <p:spPr>
+          <a:xfrm>
+            <a:off x="0" y="1440"/>
+            <a:ext cx="12202200" cy="6860160"/>
+          </a:xfrm>
+          <a:prstGeom prst="rect">
+            <a:avLst/>
+          </a:prstGeom>
+          <a:noFill/>
+          <a:ln w="0">
+            <a:noFill/>
+          </a:ln>
+        </p:spPr>
+      </p:pic>
+    </p:spTree>
+  </p:cSld>
+  <mc:AlternateContent>
+    <mc:Choice Requires="p14">
+      <p:transition spd="slow" p14:dur="2000"/>
+    </mc:Choice>
+    <mc:Fallback>
+      <p:transition spd="slow"/>
+    </mc:Fallback>
+  </mc:AlternateContent>
+</p:sld>
+</file>
+
+<file path=ppt/slides/slide71.xml><?xml version="1.0" encoding="utf-8"?>
+<p:sld xmlns:a="http://schemas.openxmlformats.org/drawingml/2006/main" xmlns:p="http://schemas.openxmlformats.org/presentationml/2006/main" xmlns:r="http://schemas.openxmlformats.org/officeDocument/2006/relationships" xmlns:p14="http://schemas.microsoft.com/office/powerpoint/2010/main" xmlns:p15="http://schemas.microsoft.com/office/powerpoint/2012/main" xmlns:mc="http://schemas.openxmlformats.org/markup-compatibility/2006">
+  <p:cSld>
+    <p:spTree>
+      <p:nvGrpSpPr>
+        <p:cNvPr id="1" name=""/>
+        <p:cNvGrpSpPr/>
+        <p:nvPr/>
+      </p:nvGrpSpPr>
+      <p:grpSpPr>
+        <a:xfrm>
+          <a:off x="0" y="0"/>
+          <a:ext cx="0" cy="0"/>
+          <a:chOff x="0" y="0"/>
+          <a:chExt cx="0" cy="0"/>
+        </a:xfrm>
+      </p:grpSpPr>
+      <p:sp>
+        <p:nvSpPr>
+          <p:cNvPr id="175" name="PlaceHolder 1"/>
+          <p:cNvSpPr>
+            <a:spLocks noGrp="1"/>
+          </p:cNvSpPr>
+          <p:nvPr>
+            <p:ph/>
+          </p:nvPr>
+        </p:nvSpPr>
+        <p:spPr>
+          <a:xfrm>
+            <a:off x="1108440" y="1211400"/>
+            <a:ext cx="9964800" cy="4944240"/>
+          </a:xfrm>
+          <a:prstGeom prst="rect">
+            <a:avLst/>
+          </a:prstGeom>
+          <a:noFill/>
+          <a:ln w="0">
+            <a:noFill/>
+          </a:ln>
+        </p:spPr>
+        <p:txBody>
+          <a:bodyPr lIns="91440" tIns="45720" rIns="91440" bIns="45720" anchor="t">
+            <a:noAutofit/>
+          </a:bodyPr>
+          <a:p>
+            <a:pPr marL="228600" indent="-228600" algn="ctr" defTabSz="914400">
+              <a:lnSpc>
+                <a:spcPct val="90000"/>
+              </a:lnSpc>
+              <a:spcBef>
+                <a:spcPts val="1001"/>
+              </a:spcBef>
+              <a:buNone/>
+              <a:tabLst>
+                <a:tab pos="0" algn="l"/>
+              </a:tabLst>
+            </a:pPr>
+            <a:r>
+              <a:rPr lang="pt-BR" sz="4800" b="1" u="none" strike="noStrike">
+                <a:solidFill>
+                  <a:schemeClr val="dk1"/>
+                </a:solidFill>
+                <a:effectLst/>
+                <a:highlight>
+                  <a:srgbClr val="FFFFFF"/>
+                </a:highlight>
+                <a:uFillTx/>
+                <a:latin typeface="Aptos"/>
+              </a:rPr>
+              <a:t>Cordeiro de Deus, que tirais o pecado do mundo</a:t>
+            </a:r>
+            <a:br>
+              <a:rPr sz="4800"/>
+            </a:br>
+            <a:r>
+              <a:rPr lang="pt-BR" sz="4800" b="1" u="none" strike="noStrike">
+                <a:solidFill>
+                  <a:schemeClr val="dk1"/>
+                </a:solidFill>
+                <a:effectLst/>
+                <a:highlight>
+                  <a:srgbClr val="FFFFFF"/>
+                </a:highlight>
+                <a:uFillTx/>
+                <a:latin typeface="Aptos"/>
+              </a:rPr>
+              <a:t>tende piedade de nós. (2x)</a:t>
+            </a:r>
+            <a:br>
+              <a:rPr sz="4800"/>
+            </a:br>
+            <a:br>
+              <a:rPr sz="4800"/>
+            </a:br>
+            <a:r>
+              <a:rPr lang="pt-BR" sz="4800" b="1" u="none" strike="noStrike">
+                <a:solidFill>
+                  <a:schemeClr val="dk1"/>
+                </a:solidFill>
+                <a:effectLst/>
+                <a:highlight>
+                  <a:srgbClr val="FFFFFF"/>
+                </a:highlight>
+                <a:uFillTx/>
+                <a:latin typeface="Aptos"/>
+              </a:rPr>
+              <a:t>Cordeiro de Deus, que tirais o pecado do mundo dai-nos a Paz.</a:t>
+            </a:r>
+            <a:endParaRPr lang="de-DE" sz="4800" b="0" u="none" strike="noStrike">
+              <a:solidFill>
+                <a:schemeClr val="dk1"/>
+              </a:solidFill>
+              <a:effectLst/>
+              <a:uFillTx/>
+              <a:latin typeface="Aptos"/>
+            </a:endParaRPr>
+          </a:p>
+        </p:txBody>
+      </p:sp>
+      <p:sp>
+        <p:nvSpPr>
+          <p:cNvPr id="176" name="CaixaDeTexto 4"/>
+          <p:cNvSpPr/>
+          <p:nvPr/>
+        </p:nvSpPr>
+        <p:spPr>
+          <a:xfrm>
+            <a:off x="240120" y="213480"/>
+            <a:ext cx="3038040" cy="522720"/>
+          </a:xfrm>
+          <a:prstGeom prst="rect">
+            <a:avLst/>
+          </a:prstGeom>
+          <a:noFill/>
+          <a:ln w="0">
+            <a:noFill/>
+          </a:ln>
+        </p:spPr>
+        <p:style>
+          <a:lnRef idx="0"/>
+          <a:fillRef idx="0"/>
+          <a:effectRef idx="0"/>
+          <a:fontRef idx="minor"/>
+        </p:style>
+        <p:txBody>
+          <a:bodyPr numCol="1" spcCol="0" horzOverflow="overflow" anchor="t">
+            <a:spAutoFit/>
+          </a:bodyPr>
+          <a:p>
+            <a:pPr defTabSz="914400">
+              <a:lnSpc>
+                <a:spcPct val="100000"/>
+              </a:lnSpc>
+            </a:pPr>
+            <a:r>
+              <a:rPr lang="pt-BR" sz="2800" b="1" u="none" strike="noStrike">
+                <a:solidFill>
+                  <a:srgbClr val="FF0000"/>
+                </a:solidFill>
+                <a:effectLst/>
+                <a:uFillTx/>
+                <a:latin typeface="Aptos"/>
+              </a:rPr>
+              <a:t>Cordeiro</a:t>
+            </a:r>
+            <a:endParaRPr lang="pt-BR" sz="2800" b="0" u="none" strike="noStrike">
+              <a:solidFill>
+                <a:srgbClr val="000000"/>
+              </a:solidFill>
+              <a:effectLst/>
+              <a:uFillTx/>
+              <a:latin typeface="Arial"/>
+            </a:endParaRPr>
+          </a:p>
+        </p:txBody>
+      </p:sp>
+    </p:spTree>
+  </p:cSld>
+  <mc:AlternateContent>
+    <mc:Choice Requires="p14">
+      <p:transition spd="slow" p14:dur="2000"/>
+    </mc:Choice>
+    <mc:Fallback>
+      <p:transition spd="slow"/>
+    </mc:Fallback>
+  </mc:AlternateContent>
+</p:sld>
+</file>
+
+<file path=ppt/slides/slide72.xml><?xml version="1.0" encoding="utf-8"?>
+<p:sld xmlns:a="http://schemas.openxmlformats.org/drawingml/2006/main" xmlns:p="http://schemas.openxmlformats.org/presentationml/2006/main" xmlns:r="http://schemas.openxmlformats.org/officeDocument/2006/relationships" xmlns:p14="http://schemas.microsoft.com/office/powerpoint/2010/main" xmlns:p15="http://schemas.microsoft.com/office/powerpoint/2012/main" xmlns:mc="http://schemas.openxmlformats.org/markup-compatibility/2006">
+  <p:cSld>
+    <p:spTree>
+      <p:nvGrpSpPr>
+        <p:cNvPr id="1" name=""/>
+        <p:cNvGrpSpPr/>
+        <p:nvPr/>
+      </p:nvGrpSpPr>
+      <p:grpSpPr>
+        <a:xfrm>
+          <a:off x="0" y="0"/>
+          <a:ext cx="0" cy="0"/>
+          <a:chOff x="0" y="0"/>
+          <a:chExt cx="0" cy="0"/>
+        </a:xfrm>
+      </p:grpSpPr>
+      <p:sp>
+        <p:nvSpPr>
+          <p:cNvPr id="177" name="PlaceHolder 1"/>
+          <p:cNvSpPr>
+            <a:spLocks noGrp="1"/>
+          </p:cNvSpPr>
+          <p:nvPr>
+            <p:ph/>
+          </p:nvPr>
+        </p:nvSpPr>
+        <p:spPr>
+          <a:xfrm>
+            <a:off x="838080" y="403920"/>
+            <a:ext cx="10515240" cy="6125760"/>
+          </a:xfrm>
+          <a:prstGeom prst="rect">
+            <a:avLst/>
+          </a:prstGeom>
+          <a:noFill/>
+          <a:ln w="0">
+            <a:noFill/>
+          </a:ln>
+        </p:spPr>
+        <p:txBody>
+          <a:bodyPr lIns="91440" tIns="45720" rIns="91440" bIns="45720" anchor="t">
+            <a:normAutofit/>
+          </a:bodyPr>
+          <a:p>
+            <a:pPr indent="0" algn="ctr" defTabSz="914400">
+              <a:lnSpc>
+                <a:spcPct val="100000"/>
+              </a:lnSpc>
+              <a:buNone/>
+              <a:tabLst>
+                <a:tab pos="0" algn="l"/>
+              </a:tabLst>
+            </a:pPr>
+            <a:r>
+              <a:rPr lang="pt-BR" sz="7200" b="1" u="none" strike="noStrike">
+                <a:solidFill>
+                  <a:schemeClr val="dk1"/>
+                </a:solidFill>
+                <a:effectLst/>
+                <a:uFillTx/>
+                <a:latin typeface="Aptos"/>
+                <a:ea typeface="Aptos"/>
+              </a:rPr>
+              <a:t>Senhor, eu não sou digno(a) de que entreis em minha morada, mas dizei uma palavra e serei salvo(a)!</a:t>
+            </a:r>
+            <a:endParaRPr lang="de-DE" sz="7200" b="0" u="none" strike="noStrike">
+              <a:solidFill>
+                <a:schemeClr val="dk1"/>
+              </a:solidFill>
+              <a:effectLst/>
+              <a:uFillTx/>
+              <a:latin typeface="Aptos"/>
+            </a:endParaRPr>
+          </a:p>
+        </p:txBody>
+      </p:sp>
+    </p:spTree>
+  </p:cSld>
+  <mc:AlternateContent>
+    <mc:Choice Requires="p14">
+      <p:transition spd="slow" p14:dur="2000"/>
+    </mc:Choice>
+    <mc:Fallback>
+      <p:transition spd="slow"/>
+    </mc:Fallback>
+  </mc:AlternateContent>
+</p:sld>
+</file>
+
+<file path=ppt/slides/slide73.xml><?xml version="1.0" encoding="utf-8"?>
+<p:sld xmlns:a="http://schemas.openxmlformats.org/drawingml/2006/main" xmlns:p="http://schemas.openxmlformats.org/presentationml/2006/main" xmlns:r="http://schemas.openxmlformats.org/officeDocument/2006/relationships" xmlns:p14="http://schemas.microsoft.com/office/powerpoint/2010/main" xmlns:p15="http://schemas.microsoft.com/office/powerpoint/2012/main" xmlns:mc="http://schemas.openxmlformats.org/markup-compatibility/2006">
+  <p:cSld>
+    <p:bg>
+      <p:bgPr>
+        <a:solidFill>
+          <a:schemeClr val="lt1"/>
+        </a:solidFill>
+      </p:bgPr>
+    </p:bg>
+    <p:spTree>
+      <p:nvGrpSpPr>
+        <p:cNvPr id="1" name=""/>
+        <p:cNvGrpSpPr/>
+        <p:nvPr/>
+      </p:nvGrpSpPr>
+      <p:grpSpPr>
+        <a:xfrm>
+          <a:off x="0" y="0"/>
+          <a:ext cx="0" cy="0"/>
+          <a:chOff x="0" y="0"/>
+          <a:chExt cx="0" cy="0"/>
+        </a:xfrm>
+      </p:grpSpPr>
+      <p:sp>
+        <p:nvSpPr>
+          <p:cNvPr id="178" name="Rectangle 9">
+            <a:extLst>
+              <a:ext uri="{C183D7F6-B498-43B3-948B-1728B52AA6E4}">
+                <adec:decorative xmlns:adec="http://schemas.microsoft.com/office/drawing/2017/decorative" val="1"/>
+              </a:ext>
+            </a:extLst>
+          </p:cNvPr>
+          <p:cNvSpPr/>
+          <p:nvPr/>
+        </p:nvSpPr>
+        <p:spPr>
+          <a:xfrm>
+            <a:off x="1440" y="0"/>
+            <a:ext cx="12188520" cy="6857640"/>
+          </a:xfrm>
+          <a:prstGeom prst="rect">
+            <a:avLst/>
+          </a:prstGeom>
+          <a:noFill/>
+          <a:ln>
+            <a:noFill/>
+          </a:ln>
+        </p:spPr>
+        <p:style>
+          <a:lnRef idx="2">
+            <a:schemeClr val="accent1">
+              <a:shade val="50000"/>
+            </a:schemeClr>
+          </a:lnRef>
+          <a:fillRef idx="1">
+            <a:schemeClr val="accent1"/>
+          </a:fillRef>
+          <a:effectRef idx="0">
+            <a:schemeClr val="accent1"/>
+          </a:effectRef>
+          <a:fontRef idx="minor"/>
+        </p:style>
+        <p:txBody>
+          <a:bodyPr lIns="90000" tIns="45000" rIns="90000" bIns="45000" anchor="ctr">
+            <a:noAutofit/>
+          </a:bodyPr>
+          <a:p>
+            <a:endParaRPr lang="en-US" sz="1800" b="0" u="none" strike="noStrike">
+              <a:solidFill>
+                <a:schemeClr val="lt1"/>
+              </a:solidFill>
+              <a:effectLst/>
+              <a:uFillTx/>
+              <a:latin typeface="Aptos"/>
+            </a:endParaRPr>
+          </a:p>
+        </p:txBody>
+      </p:sp>
+      <p:pic>
+        <p:nvPicPr>
+          <p:cNvPr id="179" name="Espaço Reservado para Conteúdo 4"/>
+          <p:cNvPicPr/>
+          <p:nvPr/>
+        </p:nvPicPr>
+        <p:blipFill>
+          <a:blip r:embed="rId1"/>
+          <a:srcRect l="0" t="7" r="0" b="7"/>
+          <a:stretch/>
+        </p:blipFill>
+        <p:spPr>
+          <a:xfrm>
+            <a:off x="0" y="1440"/>
+            <a:ext cx="12202200" cy="6860160"/>
+          </a:xfrm>
+          <a:prstGeom prst="rect">
+            <a:avLst/>
+          </a:prstGeom>
+          <a:noFill/>
+          <a:ln w="0">
+            <a:noFill/>
+          </a:ln>
+        </p:spPr>
+      </p:pic>
+    </p:spTree>
+  </p:cSld>
+  <mc:AlternateContent>
+    <mc:Choice Requires="p14">
+      <p:transition spd="slow" p14:dur="2000"/>
+    </mc:Choice>
+    <mc:Fallback>
+      <p:transition spd="slow"/>
+    </mc:Fallback>
+  </mc:AlternateContent>
+</p:sld>
+</file>
+
+<file path=ppt/slides/slide74.xml><?xml version="1.0" encoding="utf-8"?>
+<p:sld xmlns:a="http://schemas.openxmlformats.org/drawingml/2006/main" xmlns:p="http://schemas.openxmlformats.org/presentationml/2006/main" xmlns:r="http://schemas.openxmlformats.org/officeDocument/2006/relationships">
+  <p:cSld>
+    <p:bg>
+      <p:bgPr>
+        <a:solidFill>
+          <a:schemeClr val="lt1"/>
+        </a:solidFill>
+      </p:bgPr>
+    </p:bg>
+    <p:spTree>
+      <p:nvGrpSpPr>
+        <p:cNvPr id="1" name=""/>
+        <p:cNvGrpSpPr/>
+        <p:nvPr/>
+      </p:nvGrpSpPr>
+      <p:grpSpPr>
+        <a:xfrm>
+          <a:off x="0" y="0"/>
+          <a:ext cx="0" cy="0"/>
+          <a:chOff x="0" y="0"/>
+          <a:chExt cx="0" cy="0"/>
+        </a:xfrm>
+      </p:grpSpPr>
+      <p:sp>
+        <p:nvSpPr>
+          <p:cNvPr id="70" name="Rectangle 23">
+            <a:extLst>
+              <a:ext uri="{C183D7F6-B498-43B3-948B-1728B52AA6E4}">
+                <adec:decorative xmlns:adec="http://schemas.microsoft.com/office/drawing/2017/decorative" val="1"/>
+              </a:ext>
+            </a:extLst>
+          </p:cNvPr>
+          <p:cNvSpPr/>
+          <p:nvPr/>
+        </p:nvSpPr>
+        <p:spPr>
+          <a:xfrm>
+            <a:off x="1440" y="0"/>
+            <a:ext cx="12188520" cy="6857640"/>
+          </a:xfrm>
+          <a:prstGeom prst="rect">
+            <a:avLst/>
+          </a:prstGeom>
+          <a:noFill/>
+          <a:ln>
+            <a:noFill/>
+          </a:ln>
+        </p:spPr>
+        <p:style>
+          <a:lnRef idx="2">
+            <a:schemeClr val="accent1">
+              <a:shade val="50000"/>
+            </a:schemeClr>
+          </a:lnRef>
+          <a:fillRef idx="1">
+            <a:schemeClr val="accent1"/>
+          </a:fillRef>
+          <a:effectRef idx="0">
+            <a:schemeClr val="accent1"/>
+          </a:effectRef>
+          <a:fontRef idx="minor"/>
+        </p:style>
+        <p:txBody>
+          <a:bodyPr lIns="90000" tIns="45000" rIns="90000" bIns="45000" anchor="ctr">
+            <a:noAutofit/>
+          </a:bodyPr>
+          <a:p>
+            <a:endParaRPr lang="en-US" sz="1800" b="0" u="none" strike="noStrike">
+              <a:solidFill>
+                <a:schemeClr val="lt1"/>
+              </a:solidFill>
+              <a:effectLst/>
+              <a:uFillTx/>
+              <a:latin typeface="Aptos"/>
+            </a:endParaRPr>
+          </a:p>
+        </p:txBody>
+      </p:sp>
+      <p:pic>
+        <p:nvPicPr>
+          <p:cNvPr id="71" name="Imagem 3"/>
+          <p:cNvPicPr/>
+          <p:nvPr/>
+        </p:nvPicPr>
+        <p:blipFill>
+          <a:blip r:embed="rId2"/>
+          <a:srcRect l="0" t="10428" r="0" b="10428"/>
+          <a:stretch/>
+        </p:blipFill>
+        <p:spPr>
+          <a:xfrm>
+            <a:off x="0" y="1440"/>
+            <a:ext cx="12191760" cy="6856200"/>
+          </a:xfrm>
+          <a:prstGeom prst="rect">
+            <a:avLst/>
+          </a:prstGeom>
+          <a:noFill/>
+          <a:ln w="0">
+            <a:noFill/>
+          </a:ln>
+        </p:spPr>
+      </p:pic>
+    </p:spTree>
+  </p:cSld>
+  <mc:AlternateContent xmlns:mc="http://schemas.openxmlformats.org/markup-compatibility/2006" xmlns:p14="http://schemas.microsoft.com/office/powerpoint/2010/main">
+    <mc:Choice Requires="p14">
+      <p:transition spd="slow" p14:dur="2000"/>
+    </mc:Choice>
+    <mc:Fallback>
+      <p:transition spd="slow"/>
+    </mc:Fallback>
+  </mc:AlternateContent>
+</p:sld>
+</file>
+
+<file path=ppt/slides/slide75.xml><?xml version="1.0" encoding="utf-8"?>
+<p:sld xmlns:a="http://schemas.openxmlformats.org/drawingml/2006/main" xmlns:p="http://schemas.openxmlformats.org/presentationml/2006/main" xmlns:r="http://schemas.openxmlformats.org/officeDocument/2006/relationships">
+  <p:cSld>
+    <p:spTree>
+      <p:nvGrpSpPr>
+        <p:cNvPr id="1" name=""/>
+        <p:cNvGrpSpPr/>
+        <p:nvPr/>
+      </p:nvGrpSpPr>
+      <p:grpSpPr>
+        <a:xfrm>
+          <a:off x="0" y="0"/>
+          <a:ext cx="0" cy="0"/>
+          <a:chOff x="0" y="0"/>
+          <a:chExt cx="0" cy="0"/>
+        </a:xfrm>
+      </p:grpSpPr>
+      <p:sp>
+        <p:nvSpPr>
+          <p:cNvPr id="133" name="PlaceHolder 1"/>
+          <p:cNvSpPr>
+            <a:spLocks noGrp="1"/>
+          </p:cNvSpPr>
+          <p:nvPr>
+            <p:ph/>
+          </p:nvPr>
+        </p:nvSpPr>
+        <p:spPr>
+          <a:xfrm>
+            <a:off x="114480" y="1047600"/>
+            <a:ext cx="11944080" cy="5627520"/>
+          </a:xfrm>
+          <a:prstGeom prst="rect">
+            <a:avLst/>
+          </a:prstGeom>
+          <a:noFill/>
+          <a:ln w="0">
+            <a:noFill/>
+          </a:ln>
+        </p:spPr>
+        <p:txBody>
+          <a:bodyPr lIns="91440" tIns="45720" rIns="91440" bIns="45720" anchor="t">
+            <a:noAutofit/>
+          </a:bodyPr>
+          <a:p>
+            <a:pPr marL="228600" indent="-228600" algn="l" defTabSz="914400">
+              <a:lnSpc>
+                <a:spcPct val="90000"/>
+              </a:lnSpc>
+              <a:spcBef>
+                <a:spcPts val="1191"/>
+              </a:spcBef>
+              <a:spcAft>
+                <a:spcPts val="992"/>
+              </a:spcAft>
+              <a:buNone/>
+              <a:tabLst>
+                <a:tab pos="0" algn="l"/>
+              </a:tabLst>
+            </a:pPr>
+            <a:r>
+              <a:rPr lang="pt-BR" sz="4200" b="0" u="none" strike="noStrike">
+                <a:solidFill>
+                  <a:schemeClr val="dk1"/>
+                </a:solidFill>
+                <a:effectLst/>
+                <a:uFillTx/>
+                <a:latin typeface="Aptos"/>
+                <a:ea typeface="Aptos"/>
+              </a:rPr>
+              <a:t>{{canto.texto}}</a:t>
+            </a:r>
+            <a:endParaRPr lang="de-DE" sz="4200" b="0" u="none" strike="noStrike">
+              <a:solidFill>
+                <a:schemeClr val="dk1"/>
+              </a:solidFill>
+              <a:effectLst/>
+              <a:uFillTx/>
+              <a:latin typeface="Aptos"/>
+            </a:endParaRPr>
+          </a:p>
+        </p:txBody>
+      </p:sp>
+      <p:sp>
+        <p:nvSpPr>
+          <p:cNvPr id="134" name="CaixaDeTexto 4"/>
+          <p:cNvSpPr/>
+          <p:nvPr/>
+        </p:nvSpPr>
+        <p:spPr>
+          <a:xfrm>
+            <a:off x="240120" y="213480"/>
+            <a:ext cx="3038040" cy="522720"/>
+          </a:xfrm>
+          <a:prstGeom prst="rect">
+            <a:avLst/>
+          </a:prstGeom>
+          <a:noFill/>
+          <a:ln w="0">
+            <a:noFill/>
+          </a:ln>
+        </p:spPr>
+        <p:style>
+          <a:lnRef idx="0"/>
+          <a:fillRef idx="0"/>
+          <a:effectRef idx="0"/>
+          <a:fontRef idx="minor"/>
+        </p:style>
+        <p:txBody>
+          <a:bodyPr numCol="1" spcCol="0" horzOverflow="overflow" anchor="t">
+            <a:spAutoFit/>
+          </a:bodyPr>
+          <a:p>
+            <a:pPr defTabSz="914400">
+              <a:lnSpc>
+                <a:spcPct val="100000"/>
+              </a:lnSpc>
+            </a:pPr>
+            <a:r>
+              <a:rPr lang="pt-BR" sz="2800" b="1" u="none" strike="noStrike">
+                <a:solidFill>
+                  <a:srgbClr val="FF0000"/>
+                </a:solidFill>
+                <a:effectLst/>
+                <a:uFillTx/>
+                <a:latin typeface="Aptos"/>
+              </a:rPr>
+              <a:t>{{canto.rotulo}}</a:t>
+            </a:r>
+            <a:endParaRPr lang="pt-BR" sz="2800" b="0" u="none" strike="noStrike">
+              <a:solidFill>
+                <a:srgbClr val="000000"/>
+              </a:solidFill>
+              <a:effectLst/>
+              <a:uFillTx/>
+              <a:latin typeface="Arial"/>
+            </a:endParaRPr>
+          </a:p>
+        </p:txBody>
+      </p:sp>
+    </p:spTree>
+  </p:cSld>
+  <mc:AlternateContent xmlns:mc="http://schemas.openxmlformats.org/markup-compatibility/2006" xmlns:p14="http://schemas.microsoft.com/office/powerpoint/2010/main">
+    <mc:Choice Requires="p14">
+      <p:transition spd="slow" p14:dur="2000"/>
+    </mc:Choice>
+    <mc:Fallback>
+      <p:transition spd="slow"/>
+    </mc:Fallback>
+  </mc:AlternateContent>
+</p:sld>
+</file>
+
+<file path=ppt/slides/slide76.xml><?xml version="1.0" encoding="utf-8"?>
+<p:sld xmlns:a="http://schemas.openxmlformats.org/drawingml/2006/main" xmlns:p="http://schemas.openxmlformats.org/presentationml/2006/main" xmlns:r="http://schemas.openxmlformats.org/officeDocument/2006/relationships">
+  <p:cSld>
+    <p:bg>
+      <p:bgPr>
+        <a:solidFill>
+          <a:schemeClr val="lt1"/>
+        </a:solidFill>
+      </p:bgPr>
+    </p:bg>
+    <p:spTree>
+      <p:nvGrpSpPr>
+        <p:cNvPr id="1" name=""/>
+        <p:cNvGrpSpPr/>
+        <p:nvPr/>
+      </p:nvGrpSpPr>
+      <p:grpSpPr>
+        <a:xfrm>
+          <a:off x="0" y="0"/>
+          <a:ext cx="0" cy="0"/>
+          <a:chOff x="0" y="0"/>
+          <a:chExt cx="0" cy="0"/>
+        </a:xfrm>
+      </p:grpSpPr>
+      <p:sp>
+        <p:nvSpPr>
+          <p:cNvPr id="70" name="Rectangle 23">
+            <a:extLst>
+              <a:ext uri="{C183D7F6-B498-43B3-948B-1728B52AA6E4}">
+                <adec:decorative xmlns:adec="http://schemas.microsoft.com/office/drawing/2017/decorative" val="1"/>
+              </a:ext>
+            </a:extLst>
+          </p:cNvPr>
+          <p:cNvSpPr/>
+          <p:nvPr/>
+        </p:nvSpPr>
+        <p:spPr>
+          <a:xfrm>
+            <a:off x="1440" y="0"/>
+            <a:ext cx="12188520" cy="6857640"/>
+          </a:xfrm>
+          <a:prstGeom prst="rect">
+            <a:avLst/>
+          </a:prstGeom>
+          <a:noFill/>
+          <a:ln>
+            <a:noFill/>
+          </a:ln>
+        </p:spPr>
+        <p:style>
+          <a:lnRef idx="2">
+            <a:schemeClr val="accent1">
+              <a:shade val="50000"/>
+            </a:schemeClr>
+          </a:lnRef>
+          <a:fillRef idx="1">
+            <a:schemeClr val="accent1"/>
+          </a:fillRef>
+          <a:effectRef idx="0">
+            <a:schemeClr val="accent1"/>
+          </a:effectRef>
+          <a:fontRef idx="minor"/>
+        </p:style>
+        <p:txBody>
+          <a:bodyPr lIns="90000" tIns="45000" rIns="90000" bIns="45000" anchor="ctr">
+            <a:noAutofit/>
+          </a:bodyPr>
+          <a:p>
+            <a:endParaRPr lang="en-US" sz="1800" b="0" u="none" strike="noStrike">
+              <a:solidFill>
+                <a:schemeClr val="lt1"/>
+              </a:solidFill>
+              <a:effectLst/>
+              <a:uFillTx/>
+              <a:latin typeface="Aptos"/>
+            </a:endParaRPr>
+          </a:p>
+        </p:txBody>
+      </p:sp>
+      <p:pic>
+        <p:nvPicPr>
+          <p:cNvPr id="71" name="Imagem 3"/>
+          <p:cNvPicPr/>
+          <p:nvPr/>
+        </p:nvPicPr>
+        <p:blipFill>
+          <a:blip r:embed="rId2"/>
+          <a:srcRect l="0" t="10428" r="0" b="10428"/>
+          <a:stretch/>
+        </p:blipFill>
+        <p:spPr>
+          <a:xfrm>
+            <a:off x="0" y="1440"/>
+            <a:ext cx="12191760" cy="6856200"/>
+          </a:xfrm>
+          <a:prstGeom prst="rect">
+            <a:avLst/>
+          </a:prstGeom>
+          <a:noFill/>
+          <a:ln w="0">
+            <a:noFill/>
+          </a:ln>
+        </p:spPr>
+      </p:pic>
+    </p:spTree>
+  </p:cSld>
+  <mc:AlternateContent xmlns:mc="http://schemas.openxmlformats.org/markup-compatibility/2006" xmlns:p14="http://schemas.microsoft.com/office/powerpoint/2010/main">
+    <mc:Choice Requires="p14">
+      <p:transition spd="slow" p14:dur="2000"/>
+    </mc:Choice>
+    <mc:Fallback>
+      <p:transition spd="slow"/>
+    </mc:Fallback>
+  </mc:AlternateContent>
+</p:sld>
+</file>
+
+<file path=ppt/slides/slide77.xml><?xml version="1.0" encoding="utf-8"?>
+<p:sld xmlns:a="http://schemas.openxmlformats.org/drawingml/2006/main" xmlns:p="http://schemas.openxmlformats.org/presentationml/2006/main" xmlns:r="http://schemas.openxmlformats.org/officeDocument/2006/relationships">
+  <p:cSld>
+    <p:spTree>
+      <p:nvGrpSpPr>
+        <p:cNvPr id="1" name=""/>
+        <p:cNvGrpSpPr/>
+        <p:nvPr/>
+      </p:nvGrpSpPr>
+      <p:grpSpPr>
+        <a:xfrm>
+          <a:off x="0" y="0"/>
+          <a:ext cx="0" cy="0"/>
+          <a:chOff x="0" y="0"/>
+          <a:chExt cx="0" cy="0"/>
+        </a:xfrm>
+      </p:grpSpPr>
+      <p:sp>
+        <p:nvSpPr>
+          <p:cNvPr id="133" name="PlaceHolder 1"/>
+          <p:cNvSpPr>
+            <a:spLocks noGrp="1"/>
+          </p:cNvSpPr>
+          <p:nvPr>
+            <p:ph/>
+          </p:nvPr>
+        </p:nvSpPr>
+        <p:spPr>
+          <a:xfrm>
+            <a:off x="114480" y="1047600"/>
+            <a:ext cx="11944080" cy="5627520"/>
+          </a:xfrm>
+          <a:prstGeom prst="rect">
+            <a:avLst/>
+          </a:prstGeom>
+          <a:noFill/>
+          <a:ln w="0">
+            <a:noFill/>
+          </a:ln>
+        </p:spPr>
+        <p:txBody>
+          <a:bodyPr lIns="91440" tIns="45720" rIns="91440" bIns="45720" anchor="t">
+            <a:noAutofit/>
+          </a:bodyPr>
+          <a:p>
+            <a:pPr marL="228600" indent="-228600" algn="l" defTabSz="914400">
+              <a:lnSpc>
+                <a:spcPct val="90000"/>
+              </a:lnSpc>
+              <a:spcBef>
+                <a:spcPts val="1191"/>
+              </a:spcBef>
+              <a:spcAft>
+                <a:spcPts val="992"/>
+              </a:spcAft>
+              <a:buNone/>
+              <a:tabLst>
+                <a:tab pos="0" algn="l"/>
+              </a:tabLst>
+            </a:pPr>
+            <a:r>
+              <a:rPr lang="pt-BR" sz="4200" b="0" u="none" strike="noStrike">
+                <a:solidFill>
+                  <a:schemeClr val="dk1"/>
+                </a:solidFill>
+                <a:effectLst/>
+                <a:uFillTx/>
+                <a:latin typeface="Aptos"/>
+                <a:ea typeface="Aptos"/>
+              </a:rPr>
+              <a:t>{{canto.texto}}</a:t>
+            </a:r>
+            <a:endParaRPr lang="de-DE" sz="4200" b="0" u="none" strike="noStrike">
+              <a:solidFill>
+                <a:schemeClr val="dk1"/>
+              </a:solidFill>
+              <a:effectLst/>
+              <a:uFillTx/>
+              <a:latin typeface="Aptos"/>
+            </a:endParaRPr>
+          </a:p>
+        </p:txBody>
+      </p:sp>
+      <p:sp>
+        <p:nvSpPr>
+          <p:cNvPr id="134" name="CaixaDeTexto 4"/>
+          <p:cNvSpPr/>
+          <p:nvPr/>
+        </p:nvSpPr>
+        <p:spPr>
+          <a:xfrm>
+            <a:off x="240120" y="213480"/>
+            <a:ext cx="3038040" cy="522720"/>
+          </a:xfrm>
+          <a:prstGeom prst="rect">
+            <a:avLst/>
+          </a:prstGeom>
+          <a:noFill/>
+          <a:ln w="0">
+            <a:noFill/>
+          </a:ln>
+        </p:spPr>
+        <p:style>
+          <a:lnRef idx="0"/>
+          <a:fillRef idx="0"/>
+          <a:effectRef idx="0"/>
+          <a:fontRef idx="minor"/>
+        </p:style>
+        <p:txBody>
+          <a:bodyPr numCol="1" spcCol="0" horzOverflow="overflow" anchor="t">
+            <a:spAutoFit/>
+          </a:bodyPr>
+          <a:p>
+            <a:pPr defTabSz="914400">
+              <a:lnSpc>
+                <a:spcPct val="100000"/>
+              </a:lnSpc>
+            </a:pPr>
+            <a:r>
+              <a:rPr lang="pt-BR" sz="2800" b="1" u="none" strike="noStrike">
+                <a:solidFill>
+                  <a:srgbClr val="FF0000"/>
+                </a:solidFill>
+                <a:effectLst/>
+                <a:uFillTx/>
+                <a:latin typeface="Aptos"/>
+              </a:rPr>
+              <a:t>{{canto.rotulo}}</a:t>
+            </a:r>
+            <a:endParaRPr lang="pt-BR" sz="2800" b="0" u="none" strike="noStrike">
+              <a:solidFill>
+                <a:srgbClr val="000000"/>
+              </a:solidFill>
+              <a:effectLst/>
+              <a:uFillTx/>
+              <a:latin typeface="Arial"/>
+            </a:endParaRPr>
+          </a:p>
+        </p:txBody>
+      </p:sp>
+    </p:spTree>
+  </p:cSld>
+  <mc:AlternateContent xmlns:mc="http://schemas.openxmlformats.org/markup-compatibility/2006" xmlns:p14="http://schemas.microsoft.com/office/powerpoint/2010/main">
+    <mc:Choice Requires="p14">
+      <p:transition spd="slow" p14:dur="2000"/>
+    </mc:Choice>
+    <mc:Fallback>
+      <p:transition spd="slow"/>
+    </mc:Fallback>
+  </mc:AlternateContent>
+</p:sld>
+</file>
+
+<file path=ppt/slides/slide78.xml><?xml version="1.0" encoding="utf-8"?>
+<p:sld xmlns:a="http://schemas.openxmlformats.org/drawingml/2006/main" xmlns:p="http://schemas.openxmlformats.org/presentationml/2006/main" xmlns:r="http://schemas.openxmlformats.org/officeDocument/2006/relationships">
+  <p:cSld>
+    <p:bg>
+      <p:bgPr>
+        <a:solidFill>
+          <a:schemeClr val="lt1"/>
+        </a:solidFill>
+      </p:bgPr>
+    </p:bg>
+    <p:spTree>
+      <p:nvGrpSpPr>
+        <p:cNvPr id="1" name=""/>
+        <p:cNvGrpSpPr/>
+        <p:nvPr/>
+      </p:nvGrpSpPr>
+      <p:grpSpPr>
+        <a:xfrm>
+          <a:off x="0" y="0"/>
+          <a:ext cx="0" cy="0"/>
+          <a:chOff x="0" y="0"/>
+          <a:chExt cx="0" cy="0"/>
+        </a:xfrm>
+      </p:grpSpPr>
+      <p:sp>
+        <p:nvSpPr>
+          <p:cNvPr id="70" name="Rectangle 23">
+            <a:extLst>
+              <a:ext uri="{C183D7F6-B498-43B3-948B-1728B52AA6E4}">
+                <adec:decorative xmlns:adec="http://schemas.microsoft.com/office/drawing/2017/decorative" val="1"/>
+              </a:ext>
+            </a:extLst>
+          </p:cNvPr>
+          <p:cNvSpPr/>
+          <p:nvPr/>
+        </p:nvSpPr>
+        <p:spPr>
+          <a:xfrm>
+            <a:off x="1440" y="0"/>
+            <a:ext cx="12188520" cy="6857640"/>
+          </a:xfrm>
+          <a:prstGeom prst="rect">
+            <a:avLst/>
+          </a:prstGeom>
+          <a:noFill/>
+          <a:ln>
+            <a:noFill/>
+          </a:ln>
+        </p:spPr>
+        <p:style>
+          <a:lnRef idx="2">
+            <a:schemeClr val="accent1">
+              <a:shade val="50000"/>
+            </a:schemeClr>
+          </a:lnRef>
+          <a:fillRef idx="1">
+            <a:schemeClr val="accent1"/>
+          </a:fillRef>
+          <a:effectRef idx="0">
+            <a:schemeClr val="accent1"/>
+          </a:effectRef>
+          <a:fontRef idx="minor"/>
+        </p:style>
+        <p:txBody>
+          <a:bodyPr lIns="90000" tIns="45000" rIns="90000" bIns="45000" anchor="ctr">
+            <a:noAutofit/>
+          </a:bodyPr>
+          <a:p>
+            <a:endParaRPr lang="en-US" sz="1800" b="0" u="none" strike="noStrike">
+              <a:solidFill>
+                <a:schemeClr val="lt1"/>
+              </a:solidFill>
+              <a:effectLst/>
+              <a:uFillTx/>
+              <a:latin typeface="Aptos"/>
+            </a:endParaRPr>
+          </a:p>
+        </p:txBody>
+      </p:sp>
+      <p:pic>
+        <p:nvPicPr>
+          <p:cNvPr id="71" name="Imagem 3"/>
+          <p:cNvPicPr/>
+          <p:nvPr/>
+        </p:nvPicPr>
+        <p:blipFill>
+          <a:blip r:embed="rId2"/>
+          <a:srcRect l="0" t="10428" r="0" b="10428"/>
+          <a:stretch/>
+        </p:blipFill>
+        <p:spPr>
+          <a:xfrm>
+            <a:off x="0" y="1440"/>
+            <a:ext cx="12191760" cy="6856200"/>
+          </a:xfrm>
+          <a:prstGeom prst="rect">
+            <a:avLst/>
+          </a:prstGeom>
+          <a:noFill/>
+          <a:ln w="0">
+            <a:noFill/>
+          </a:ln>
+        </p:spPr>
+      </p:pic>
+    </p:spTree>
+  </p:cSld>
+  <mc:AlternateContent xmlns:mc="http://schemas.openxmlformats.org/markup-compatibility/2006" xmlns:p14="http://schemas.microsoft.com/office/powerpoint/2010/main">
+    <mc:Choice Requires="p14">
+      <p:transition spd="slow" p14:dur="2000"/>
+    </mc:Choice>
+    <mc:Fallback>
+      <p:transition spd="slow"/>
+    </mc:Fallback>
+  </mc:AlternateContent>
+</p:sld>
+</file>
+
+<file path=ppt/slides/slide79.xml><?xml version="1.0" encoding="utf-8"?>
+<p:sld xmlns:a="http://schemas.openxmlformats.org/drawingml/2006/main" xmlns:p="http://schemas.openxmlformats.org/presentationml/2006/main" xmlns:r="http://schemas.openxmlformats.org/officeDocument/2006/relationships">
+  <p:cSld>
+    <p:spTree>
+      <p:nvGrpSpPr>
+        <p:cNvPr id="1" name=""/>
+        <p:cNvGrpSpPr/>
+        <p:nvPr/>
+      </p:nvGrpSpPr>
+      <p:grpSpPr>
+        <a:xfrm>
+          <a:off x="0" y="0"/>
+          <a:ext cx="0" cy="0"/>
+          <a:chOff x="0" y="0"/>
+          <a:chExt cx="0" cy="0"/>
+        </a:xfrm>
+      </p:grpSpPr>
+      <p:sp>
+        <p:nvSpPr>
+          <p:cNvPr id="133" name="PlaceHolder 1"/>
+          <p:cNvSpPr>
+            <a:spLocks noGrp="1"/>
+          </p:cNvSpPr>
+          <p:nvPr>
+            <p:ph/>
+          </p:nvPr>
+        </p:nvSpPr>
+        <p:spPr>
+          <a:xfrm>
+            <a:off x="114480" y="1047600"/>
+            <a:ext cx="11944080" cy="5627520"/>
+          </a:xfrm>
+          <a:prstGeom prst="rect">
+            <a:avLst/>
+          </a:prstGeom>
+          <a:noFill/>
+          <a:ln w="0">
+            <a:noFill/>
+          </a:ln>
+        </p:spPr>
+        <p:txBody>
+          <a:bodyPr lIns="91440" tIns="45720" rIns="91440" bIns="45720" anchor="t">
+            <a:noAutofit/>
+          </a:bodyPr>
+          <a:p>
+            <a:pPr marL="228600" indent="-228600" algn="l" defTabSz="914400">
+              <a:lnSpc>
+                <a:spcPct val="90000"/>
+              </a:lnSpc>
+              <a:spcBef>
+                <a:spcPts val="1191"/>
+              </a:spcBef>
+              <a:spcAft>
+                <a:spcPts val="992"/>
+              </a:spcAft>
+              <a:buNone/>
+              <a:tabLst>
+                <a:tab pos="0" algn="l"/>
+              </a:tabLst>
+            </a:pPr>
+            <a:r>
+              <a:rPr lang="pt-BR" sz="4200" b="0" u="none" strike="noStrike">
+                <a:solidFill>
+                  <a:schemeClr val="dk1"/>
+                </a:solidFill>
+                <a:effectLst/>
+                <a:uFillTx/>
+                <a:latin typeface="Aptos"/>
+                <a:ea typeface="Aptos"/>
+              </a:rPr>
+              <a:t>{{canto.texto}}</a:t>
+            </a:r>
+            <a:endParaRPr lang="de-DE" sz="4200" b="0" u="none" strike="noStrike">
+              <a:solidFill>
+                <a:schemeClr val="dk1"/>
+              </a:solidFill>
+              <a:effectLst/>
+              <a:uFillTx/>
+              <a:latin typeface="Aptos"/>
+            </a:endParaRPr>
+          </a:p>
+        </p:txBody>
+      </p:sp>
+      <p:sp>
+        <p:nvSpPr>
+          <p:cNvPr id="134" name="CaixaDeTexto 4"/>
+          <p:cNvSpPr/>
+          <p:nvPr/>
+        </p:nvSpPr>
+        <p:spPr>
+          <a:xfrm>
+            <a:off x="240120" y="213480"/>
+            <a:ext cx="3038040" cy="522720"/>
+          </a:xfrm>
+          <a:prstGeom prst="rect">
+            <a:avLst/>
+          </a:prstGeom>
+          <a:noFill/>
+          <a:ln w="0">
+            <a:noFill/>
+          </a:ln>
+        </p:spPr>
+        <p:style>
+          <a:lnRef idx="0"/>
+          <a:fillRef idx="0"/>
+          <a:effectRef idx="0"/>
+          <a:fontRef idx="minor"/>
+        </p:style>
+        <p:txBody>
+          <a:bodyPr numCol="1" spcCol="0" horzOverflow="overflow" anchor="t">
+            <a:spAutoFit/>
+          </a:bodyPr>
+          <a:p>
+            <a:pPr defTabSz="914400">
+              <a:lnSpc>
+                <a:spcPct val="100000"/>
+              </a:lnSpc>
+            </a:pPr>
+            <a:r>
+              <a:rPr lang="pt-BR" sz="2800" b="1" u="none" strike="noStrike">
+                <a:solidFill>
+                  <a:srgbClr val="FF0000"/>
+                </a:solidFill>
+                <a:effectLst/>
+                <a:uFillTx/>
+                <a:latin typeface="Aptos"/>
+              </a:rPr>
+              <a:t>{{canto.rotulo}}</a:t>
+            </a:r>
+            <a:endParaRPr lang="pt-BR" sz="2800" b="0" u="none" strike="noStrike">
+              <a:solidFill>
+                <a:srgbClr val="000000"/>
+              </a:solidFill>
+              <a:effectLst/>
+              <a:uFillTx/>
+              <a:latin typeface="Arial"/>
+            </a:endParaRPr>
+          </a:p>
+        </p:txBody>
+      </p:sp>
+    </p:spTree>
+  </p:cSld>
+  <mc:AlternateContent xmlns:mc="http://schemas.openxmlformats.org/markup-compatibility/2006" xmlns:p14="http://schemas.microsoft.com/office/powerpoint/2010/main">
+    <mc:Choice Requires="p14">
+      <p:transition spd="slow" p14:dur="2000"/>
+    </mc:Choice>
+    <mc:Fallback>
+      <p:transition spd="slow"/>
+    </mc:Fallback>
+  </mc:AlternateContent>
+</p:sld>
+</file>
+
+<file path=ppt/slides/slide8.xml><?xml version="1.0" encoding="utf-8"?>
+<p:sld xmlns:a="http://schemas.openxmlformats.org/drawingml/2006/main" xmlns:p="http://schemas.openxmlformats.org/presentationml/2006/main" xmlns:r="http://schemas.openxmlformats.org/officeDocument/2006/relationships" xmlns:p14="http://schemas.microsoft.com/office/powerpoint/2010/main" xmlns:p15="http://schemas.microsoft.com/office/powerpoint/2012/main" xmlns:mc="http://schemas.openxmlformats.org/markup-compatibility/2006">
+  <p:cSld>
+    <p:bg>
+      <p:bgPr>
+        <a:solidFill>
+          <a:schemeClr val="lt1"/>
+        </a:solidFill>
+      </p:bgPr>
+    </p:bg>
+    <p:spTree>
+      <p:nvGrpSpPr>
+        <p:cNvPr id="1" name=""/>
+        <p:cNvGrpSpPr/>
+        <p:nvPr/>
+      </p:nvGrpSpPr>
+      <p:grpSpPr>
+        <a:xfrm>
+          <a:off x="0" y="0"/>
+          <a:ext cx="0" cy="0"/>
+          <a:chOff x="0" y="0"/>
+          <a:chExt cx="0" cy="0"/>
+        </a:xfrm>
+      </p:grpSpPr>
+      <p:sp>
+        <p:nvSpPr>
+          <p:cNvPr id="90" name="Rectangle 23">
+            <a:extLst>
+              <a:ext uri="{C183D7F6-B498-43B3-948B-1728B52AA6E4}">
+                <adec:decorative xmlns:adec="http://schemas.microsoft.com/office/drawing/2017/decorative" val="1"/>
+              </a:ext>
+            </a:extLst>
+          </p:cNvPr>
+          <p:cNvSpPr/>
+          <p:nvPr/>
+        </p:nvSpPr>
+        <p:spPr>
+          <a:xfrm>
+            <a:off x="1440" y="0"/>
+            <a:ext cx="12188520" cy="6857640"/>
+          </a:xfrm>
+          <a:prstGeom prst="rect">
+            <a:avLst/>
+          </a:prstGeom>
+          <a:noFill/>
+          <a:ln>
+            <a:noFill/>
+          </a:ln>
+        </p:spPr>
+        <p:style>
+          <a:lnRef idx="2">
+            <a:schemeClr val="accent1">
+              <a:shade val="50000"/>
+            </a:schemeClr>
+          </a:lnRef>
+          <a:fillRef idx="1">
+            <a:schemeClr val="accent1"/>
+          </a:fillRef>
+          <a:effectRef idx="0">
+            <a:schemeClr val="accent1"/>
+          </a:effectRef>
+          <a:fontRef idx="minor"/>
+        </p:style>
+        <p:txBody>
+          <a:bodyPr lIns="90000" tIns="45000" rIns="90000" bIns="45000" anchor="ctr">
+            <a:noAutofit/>
+          </a:bodyPr>
+          <a:p>
+            <a:endParaRPr lang="en-US" sz="1800" b="0" u="none" strike="noStrike">
+              <a:solidFill>
+                <a:schemeClr val="lt1"/>
+              </a:solidFill>
+              <a:effectLst/>
+              <a:uFillTx/>
+              <a:latin typeface="Aptos"/>
+            </a:endParaRPr>
+          </a:p>
+        </p:txBody>
+      </p:sp>
+      <p:pic>
+        <p:nvPicPr>
+          <p:cNvPr id="91" name="Imagem 3"/>
           <p:cNvPicPr/>
           <p:nvPr/>
         </p:nvPicPr>
@@ -19965,160 +23442,7 @@
 </p:sld>
 </file>
 
-<file path=ppt/slides/slide7.xml><?xml version="1.0" encoding="utf-8"?>
-<p:sld xmlns:a="http://schemas.openxmlformats.org/drawingml/2006/main" xmlns:p="http://schemas.openxmlformats.org/presentationml/2006/main" xmlns:r="http://schemas.openxmlformats.org/officeDocument/2006/relationships" xmlns:p14="http://schemas.microsoft.com/office/powerpoint/2010/main" xmlns:p15="http://schemas.microsoft.com/office/powerpoint/2012/main" xmlns:mc="http://schemas.openxmlformats.org/markup-compatibility/2006">
-  <p:cSld>
-    <p:spTree>
-      <p:nvGrpSpPr>
-        <p:cNvPr id="1" name=""/>
-        <p:cNvGrpSpPr/>
-        <p:nvPr/>
-      </p:nvGrpSpPr>
-      <p:grpSpPr>
-        <a:xfrm>
-          <a:off x="0" y="0"/>
-          <a:ext cx="0" cy="0"/>
-          <a:chOff x="0" y="0"/>
-          <a:chExt cx="0" cy="0"/>
-        </a:xfrm>
-      </p:grpSpPr>
-      <p:sp>
-        <p:nvSpPr>
-          <p:cNvPr id="82" name="PlaceHolder 1"/>
-          <p:cNvSpPr>
-            <a:spLocks noGrp="1"/>
-          </p:cNvSpPr>
-          <p:nvPr>
-            <p:ph/>
-          </p:nvPr>
-        </p:nvSpPr>
-        <p:spPr>
-          <a:xfrm>
-            <a:off x="114480" y="1248480"/>
-            <a:ext cx="11944080" cy="5426640"/>
-          </a:xfrm>
-          <a:prstGeom prst="rect">
-            <a:avLst/>
-          </a:prstGeom>
-          <a:noFill/>
-          <a:ln w="0">
-            <a:noFill/>
-          </a:ln>
-        </p:spPr>
-        <p:txBody>
-          <a:bodyPr lIns="91440" tIns="45720" rIns="91440" bIns="45720" anchor="t" anchorCtr="1">
-            <a:noAutofit/>
-          </a:bodyPr>
-          <a:p>
-            <a:pPr marL="228600" indent="-228600" algn="ctr" defTabSz="914400">
-              <a:lnSpc>
-                <a:spcPct val="90000"/>
-              </a:lnSpc>
-              <a:spcBef>
-                <a:spcPts val="1191"/>
-              </a:spcBef>
-              <a:spcAft>
-                <a:spcPts val="992"/>
-              </a:spcAft>
-              <a:buNone/>
-              <a:tabLst>
-                <a:tab pos="0" algn="l"/>
-              </a:tabLst>
-            </a:pPr>
-            <a:r>
-              <a:rPr lang="pt-BR" sz="5400" b="0" u="none" strike="noStrike">
-                <a:solidFill>
-                  <a:schemeClr val="dk1"/>
-                </a:solidFill>
-                <a:effectLst/>
-                <a:uFillTx/>
-                <a:latin typeface="Aptos"/>
-                <a:ea typeface="Aptos"/>
-              </a:rPr>
-              <a:t>{{canto.texto}}</a:t>
-            </a:r>
-            <a:endParaRPr lang="de-DE" sz="5400" b="0" u="none" strike="noStrike">
-              <a:solidFill>
-                <a:schemeClr val="dk1"/>
-              </a:solidFill>
-              <a:effectLst/>
-              <a:uFillTx/>
-              <a:latin typeface="Aptos"/>
-            </a:endParaRPr>
-          </a:p>
-        </p:txBody>
-      </p:sp>
-      <p:sp>
-        <p:nvSpPr>
-          <p:cNvPr id="83" name="CaixaDeTexto 4"/>
-          <p:cNvSpPr/>
-          <p:nvPr/>
-        </p:nvSpPr>
-        <p:spPr>
-          <a:xfrm>
-            <a:off x="240120" y="213480"/>
-            <a:ext cx="3038040" cy="522720"/>
-          </a:xfrm>
-          <a:prstGeom prst="rect">
-            <a:avLst/>
-          </a:prstGeom>
-          <a:noFill/>
-          <a:ln w="0">
-            <a:noFill/>
-          </a:ln>
-        </p:spPr>
-        <p:style>
-          <a:lnRef idx="0"/>
-          <a:fillRef idx="0"/>
-          <a:effectRef idx="0"/>
-          <a:fontRef idx="minor"/>
-        </p:style>
-        <p:txBody>
-          <a:bodyPr numCol="1" spcCol="0" horzOverflow="overflow" anchor="t">
-            <a:spAutoFit/>
-          </a:bodyPr>
-          <a:p>
-            <a:pPr defTabSz="914400">
-              <a:lnSpc>
-                <a:spcPct val="100000"/>
-              </a:lnSpc>
-            </a:pPr>
-            <a:r>
-              <a:rPr lang="pt-BR" sz="2800" b="1" u="none" strike="noStrike">
-                <a:solidFill>
-                  <a:srgbClr val="FF0000"/>
-                </a:solidFill>
-                <a:effectLst/>
-                <a:uFillTx/>
-                <a:latin typeface="Aptos"/>
-              </a:rPr>
-              <a:t>{{canto.rotulo}}</a:t>
-            </a:r>
-            <a:endParaRPr lang="pt-BR" sz="2800" b="0" u="none" strike="noStrike">
-              <a:solidFill>
-                <a:srgbClr val="000000"/>
-              </a:solidFill>
-              <a:effectLst/>
-              <a:uFillTx/>
-              <a:latin typeface="Arial"/>
-            </a:endParaRPr>
-          </a:p>
-        </p:txBody>
-      </p:sp>
-    </p:spTree>
-  </p:cSld>
-  <mc:AlternateContent>
-    <mc:Choice Requires="p14">
-      <p:transition spd="slow" p14:dur="2000"/>
-    </mc:Choice>
-    <mc:Fallback>
-      <p:transition spd="slow"/>
-    </mc:Fallback>
-  </mc:AlternateContent>
-</p:sld>
-</file>
-
-<file path=ppt/slides/slide8.xml><?xml version="1.0" encoding="utf-8"?>
+<file path=ppt/slides/slide80.xml><?xml version="1.0" encoding="utf-8"?>
 <p:sld xmlns:a="http://schemas.openxmlformats.org/drawingml/2006/main" xmlns:p="http://schemas.openxmlformats.org/presentationml/2006/main" xmlns:r="http://schemas.openxmlformats.org/officeDocument/2006/relationships" xmlns:p14="http://schemas.microsoft.com/office/powerpoint/2010/main" xmlns:p15="http://schemas.microsoft.com/office/powerpoint/2012/main" xmlns:mc="http://schemas.openxmlformats.org/markup-compatibility/2006">
   <p:cSld>
     <p:bg>
@@ -20144,7 +23468,7 @@
       </p:grpSpPr>
       <p:sp>
         <p:nvSpPr>
-          <p:cNvPr id="90" name="Rectangle 23">
+          <p:cNvPr id="180" name="Rectangle 23">
             <a:extLst>
               <a:ext uri="{C183D7F6-B498-43B3-948B-1728B52AA6E4}">
                 <adec:decorative xmlns:adec="http://schemas.microsoft.com/office/drawing/2017/decorative" val="1"/>
@@ -20199,7 +23523,7 @@
       </p:sp>
       <p:pic>
         <p:nvPicPr>
-          <p:cNvPr id="91" name="Imagem 3"/>
+          <p:cNvPr id="181" name="Imagem 3"/>
           <p:cNvPicPr/>
           <p:nvPr/>
         </p:nvPicPr>

--- a/src/pallotti_slides/resources/template/mass_template.pptx
+++ b/src/pallotti_slides/resources/template/mass_template.pptx
@@ -38,38 +38,7 @@
     <p:sldId id="299" r:id="rId46"/>
     <p:sldId id="300" r:id="rId47"/>
     <p:sldId id="301" r:id="rId48"/>
-    <p:sldId id="302" r:id="rId49"/>
-    <p:sldId id="303" r:id="rId50"/>
-    <p:sldId id="304" r:id="rId51"/>
-    <p:sldId id="305" r:id="rId52"/>
-    <p:sldId id="306" r:id="rId53"/>
-    <p:sldId id="307" r:id="rId54"/>
-    <p:sldId id="308" r:id="rId55"/>
-    <p:sldId id="309" r:id="rId56"/>
-    <p:sldId id="310" r:id="rId57"/>
-    <p:sldId id="311" r:id="rId58"/>
-    <p:sldId id="312" r:id="rId59"/>
-    <p:sldId id="313" r:id="rId60"/>
-    <p:sldId id="314" r:id="rId61"/>
-    <p:sldId id="315" r:id="rId62"/>
-    <p:sldId id="325" r:id="rId73"/>
-    <p:sldId id="326" r:id="rId74"/>
-    <p:sldId id="327" r:id="rId75"/>
-    <p:sldId id="328" r:id="rId76"/>
-    <p:sldId id="329" r:id="rId77"/>
-    <p:sldId id="330" r:id="rId78"/>
-    <p:sldId id="331" r:id="rId79"/>
-    <p:sldId id="332" r:id="rId80"/>
-    <p:sldId id="333" r:id="rId81"/>
-    <p:sldId id="334" r:id="rId82"/>
-    <p:sldId id="335" r:id="rId83"/>
-    <p:sldId id="336" r:id="rId84"/>
-    <p:sldId id="337" r:id="rId85"/>
-    <p:sldId id="338" r:id="rId86"/>
-    <p:sldId id="339" r:id="rId87"/>
-    <p:sldId id="340" r:id="rId88"/>
-    <p:sldId id="341" r:id="rId89"/>
-    <p:sldId id="342" r:id="rId90"/>
+    <p:sldId id="349" r:id="rId40"/>
     <p:sldId id="316" r:id="rId63"/>
     <p:sldId id="317" r:id="rId64"/>
     <p:sldId id="318" r:id="rId65"/>
@@ -2331,426 +2300,6 @@
 </p:notes>
 </file>
 
-<file path=ppt/notesSlides/notesSlide34.xml><?xml version="1.0" encoding="utf-8"?>
-<p:notes xmlns:a="http://schemas.openxmlformats.org/drawingml/2006/main" xmlns:p="http://schemas.openxmlformats.org/presentationml/2006/main" xmlns:r="http://schemas.openxmlformats.org/officeDocument/2006/relationships">
-  <p:cSld>
-    <p:spTree>
-      <p:nvGrpSpPr>
-        <p:cNvPr id="1" name=""/>
-        <p:cNvGrpSpPr/>
-        <p:nvPr/>
-      </p:nvGrpSpPr>
-      <p:grpSpPr>
-        <a:xfrm>
-          <a:off x="0" y="0"/>
-          <a:ext cx="0" cy="0"/>
-          <a:chOff x="0" y="0"/>
-          <a:chExt cx="0" cy="0"/>
-        </a:xfrm>
-      </p:grpSpPr>
-      <p:sp>
-        <p:nvSpPr>
-          <p:cNvPr id="2" name="Slide Image Placeholder 1"/>
-          <p:cNvSpPr>
-            <a:spLocks noGrp="1"/>
-          </p:cNvSpPr>
-          <p:nvPr>
-            <p:ph type="sldImg" idx="2"/>
-          </p:nvPr>
-        </p:nvSpPr>
-        <p:spPr/>
-      </p:sp>
-      <p:sp>
-        <p:nvSpPr>
-          <p:cNvPr id="3" name="Notes Placeholder 2"/>
-          <p:cNvSpPr>
-            <a:spLocks noGrp="1"/>
-          </p:cNvSpPr>
-          <p:nvPr>
-            <p:ph type="body" idx="3" sz="quarter"/>
-          </p:nvPr>
-        </p:nvSpPr>
-        <p:spPr/>
-        <p:txBody>
-          <a:bodyPr/>
-          <a:lstStyle/>
-          <a:p>
-            <a:r>
-              <a:t>@pallotti oe=III</a:t>
-            </a:r>
-          </a:p>
-        </p:txBody>
-      </p:sp>
-      <p:sp>
-        <p:nvSpPr>
-          <p:cNvPr id="4" name="Slide Number Placeholder 3"/>
-          <p:cNvSpPr>
-            <a:spLocks noGrp="1"/>
-          </p:cNvSpPr>
-          <p:nvPr>
-            <p:ph type="sldNum" idx="5" sz="quarter"/>
-          </p:nvPr>
-        </p:nvSpPr>
-        <p:spPr/>
-      </p:sp>
-    </p:spTree>
-  </p:cSld>
-  <p:clrMapOvr>
-    <a:masterClrMapping/>
-  </p:clrMapOvr>
-</p:notes>
-</file>
-
-<file path=ppt/notesSlides/notesSlide35.xml><?xml version="1.0" encoding="utf-8"?>
-<p:notes xmlns:a="http://schemas.openxmlformats.org/drawingml/2006/main" xmlns:p="http://schemas.openxmlformats.org/presentationml/2006/main" xmlns:r="http://schemas.openxmlformats.org/officeDocument/2006/relationships">
-  <p:cSld>
-    <p:spTree>
-      <p:nvGrpSpPr>
-        <p:cNvPr id="1" name=""/>
-        <p:cNvGrpSpPr/>
-        <p:nvPr/>
-      </p:nvGrpSpPr>
-      <p:grpSpPr>
-        <a:xfrm>
-          <a:off x="0" y="0"/>
-          <a:ext cx="0" cy="0"/>
-          <a:chOff x="0" y="0"/>
-          <a:chExt cx="0" cy="0"/>
-        </a:xfrm>
-      </p:grpSpPr>
-      <p:sp>
-        <p:nvSpPr>
-          <p:cNvPr id="2" name="Slide Image Placeholder 1"/>
-          <p:cNvSpPr>
-            <a:spLocks noGrp="1"/>
-          </p:cNvSpPr>
-          <p:nvPr>
-            <p:ph type="sldImg" idx="2"/>
-          </p:nvPr>
-        </p:nvSpPr>
-        <p:spPr/>
-      </p:sp>
-      <p:sp>
-        <p:nvSpPr>
-          <p:cNvPr id="3" name="Notes Placeholder 2"/>
-          <p:cNvSpPr>
-            <a:spLocks noGrp="1"/>
-          </p:cNvSpPr>
-          <p:nvPr>
-            <p:ph type="body" idx="3" sz="quarter"/>
-          </p:nvPr>
-        </p:nvSpPr>
-        <p:spPr/>
-        <p:txBody>
-          <a:bodyPr/>
-          <a:lstStyle/>
-          <a:p>
-            <a:r>
-              <a:t>@pallotti oe=III</a:t>
-            </a:r>
-          </a:p>
-        </p:txBody>
-      </p:sp>
-      <p:sp>
-        <p:nvSpPr>
-          <p:cNvPr id="4" name="Slide Number Placeholder 3"/>
-          <p:cNvSpPr>
-            <a:spLocks noGrp="1"/>
-          </p:cNvSpPr>
-          <p:nvPr>
-            <p:ph type="sldNum" idx="5" sz="quarter"/>
-          </p:nvPr>
-        </p:nvSpPr>
-        <p:spPr/>
-      </p:sp>
-    </p:spTree>
-  </p:cSld>
-  <p:clrMapOvr>
-    <a:masterClrMapping/>
-  </p:clrMapOvr>
-</p:notes>
-</file>
-
-<file path=ppt/notesSlides/notesSlide36.xml><?xml version="1.0" encoding="utf-8"?>
-<p:notes xmlns:a="http://schemas.openxmlformats.org/drawingml/2006/main" xmlns:p="http://schemas.openxmlformats.org/presentationml/2006/main" xmlns:r="http://schemas.openxmlformats.org/officeDocument/2006/relationships">
-  <p:cSld>
-    <p:spTree>
-      <p:nvGrpSpPr>
-        <p:cNvPr id="1" name=""/>
-        <p:cNvGrpSpPr/>
-        <p:nvPr/>
-      </p:nvGrpSpPr>
-      <p:grpSpPr>
-        <a:xfrm>
-          <a:off x="0" y="0"/>
-          <a:ext cx="0" cy="0"/>
-          <a:chOff x="0" y="0"/>
-          <a:chExt cx="0" cy="0"/>
-        </a:xfrm>
-      </p:grpSpPr>
-      <p:sp>
-        <p:nvSpPr>
-          <p:cNvPr id="2" name="Slide Image Placeholder 1"/>
-          <p:cNvSpPr>
-            <a:spLocks noGrp="1"/>
-          </p:cNvSpPr>
-          <p:nvPr>
-            <p:ph type="sldImg" idx="2"/>
-          </p:nvPr>
-        </p:nvSpPr>
-        <p:spPr/>
-      </p:sp>
-      <p:sp>
-        <p:nvSpPr>
-          <p:cNvPr id="3" name="Notes Placeholder 2"/>
-          <p:cNvSpPr>
-            <a:spLocks noGrp="1"/>
-          </p:cNvSpPr>
-          <p:nvPr>
-            <p:ph type="body" idx="3" sz="quarter"/>
-          </p:nvPr>
-        </p:nvSpPr>
-        <p:spPr/>
-        <p:txBody>
-          <a:bodyPr/>
-          <a:lstStyle/>
-          <a:p>
-            <a:r>
-              <a:t>@pallotti oe=III</a:t>
-            </a:r>
-          </a:p>
-        </p:txBody>
-      </p:sp>
-      <p:sp>
-        <p:nvSpPr>
-          <p:cNvPr id="4" name="Slide Number Placeholder 3"/>
-          <p:cNvSpPr>
-            <a:spLocks noGrp="1"/>
-          </p:cNvSpPr>
-          <p:nvPr>
-            <p:ph type="sldNum" idx="5" sz="quarter"/>
-          </p:nvPr>
-        </p:nvSpPr>
-        <p:spPr/>
-      </p:sp>
-    </p:spTree>
-  </p:cSld>
-  <p:clrMapOvr>
-    <a:masterClrMapping/>
-  </p:clrMapOvr>
-</p:notes>
-</file>
-
-<file path=ppt/notesSlides/notesSlide37.xml><?xml version="1.0" encoding="utf-8"?>
-<p:notes xmlns:a="http://schemas.openxmlformats.org/drawingml/2006/main" xmlns:p="http://schemas.openxmlformats.org/presentationml/2006/main" xmlns:r="http://schemas.openxmlformats.org/officeDocument/2006/relationships">
-  <p:cSld>
-    <p:spTree>
-      <p:nvGrpSpPr>
-        <p:cNvPr id="1" name=""/>
-        <p:cNvGrpSpPr/>
-        <p:nvPr/>
-      </p:nvGrpSpPr>
-      <p:grpSpPr>
-        <a:xfrm>
-          <a:off x="0" y="0"/>
-          <a:ext cx="0" cy="0"/>
-          <a:chOff x="0" y="0"/>
-          <a:chExt cx="0" cy="0"/>
-        </a:xfrm>
-      </p:grpSpPr>
-      <p:sp>
-        <p:nvSpPr>
-          <p:cNvPr id="2" name="Slide Image Placeholder 1"/>
-          <p:cNvSpPr>
-            <a:spLocks noGrp="1"/>
-          </p:cNvSpPr>
-          <p:nvPr>
-            <p:ph type="sldImg" idx="2"/>
-          </p:nvPr>
-        </p:nvSpPr>
-        <p:spPr/>
-      </p:sp>
-      <p:sp>
-        <p:nvSpPr>
-          <p:cNvPr id="3" name="Notes Placeholder 2"/>
-          <p:cNvSpPr>
-            <a:spLocks noGrp="1"/>
-          </p:cNvSpPr>
-          <p:nvPr>
-            <p:ph type="body" idx="3" sz="quarter"/>
-          </p:nvPr>
-        </p:nvSpPr>
-        <p:spPr/>
-        <p:txBody>
-          <a:bodyPr/>
-          <a:lstStyle/>
-          <a:p>
-            <a:r>
-              <a:t>@pallotti oe=III</a:t>
-            </a:r>
-          </a:p>
-        </p:txBody>
-      </p:sp>
-      <p:sp>
-        <p:nvSpPr>
-          <p:cNvPr id="4" name="Slide Number Placeholder 3"/>
-          <p:cNvSpPr>
-            <a:spLocks noGrp="1"/>
-          </p:cNvSpPr>
-          <p:nvPr>
-            <p:ph type="sldNum" idx="5" sz="quarter"/>
-          </p:nvPr>
-        </p:nvSpPr>
-        <p:spPr/>
-      </p:sp>
-    </p:spTree>
-  </p:cSld>
-  <p:clrMapOvr>
-    <a:masterClrMapping/>
-  </p:clrMapOvr>
-</p:notes>
-</file>
-
-<file path=ppt/notesSlides/notesSlide38.xml><?xml version="1.0" encoding="utf-8"?>
-<p:notes xmlns:a="http://schemas.openxmlformats.org/drawingml/2006/main" xmlns:p="http://schemas.openxmlformats.org/presentationml/2006/main" xmlns:r="http://schemas.openxmlformats.org/officeDocument/2006/relationships">
-  <p:cSld>
-    <p:spTree>
-      <p:nvGrpSpPr>
-        <p:cNvPr id="1" name=""/>
-        <p:cNvGrpSpPr/>
-        <p:nvPr/>
-      </p:nvGrpSpPr>
-      <p:grpSpPr>
-        <a:xfrm>
-          <a:off x="0" y="0"/>
-          <a:ext cx="0" cy="0"/>
-          <a:chOff x="0" y="0"/>
-          <a:chExt cx="0" cy="0"/>
-        </a:xfrm>
-      </p:grpSpPr>
-      <p:sp>
-        <p:nvSpPr>
-          <p:cNvPr id="2" name="Slide Image Placeholder 1"/>
-          <p:cNvSpPr>
-            <a:spLocks noGrp="1"/>
-          </p:cNvSpPr>
-          <p:nvPr>
-            <p:ph type="sldImg" idx="2"/>
-          </p:nvPr>
-        </p:nvSpPr>
-        <p:spPr/>
-      </p:sp>
-      <p:sp>
-        <p:nvSpPr>
-          <p:cNvPr id="3" name="Notes Placeholder 2"/>
-          <p:cNvSpPr>
-            <a:spLocks noGrp="1"/>
-          </p:cNvSpPr>
-          <p:nvPr>
-            <p:ph type="body" idx="3" sz="quarter"/>
-          </p:nvPr>
-        </p:nvSpPr>
-        <p:spPr/>
-        <p:txBody>
-          <a:bodyPr/>
-          <a:lstStyle/>
-          <a:p>
-            <a:r>
-              <a:t>@pallotti oe=III</a:t>
-            </a:r>
-          </a:p>
-        </p:txBody>
-      </p:sp>
-      <p:sp>
-        <p:nvSpPr>
-          <p:cNvPr id="4" name="Slide Number Placeholder 3"/>
-          <p:cNvSpPr>
-            <a:spLocks noGrp="1"/>
-          </p:cNvSpPr>
-          <p:nvPr>
-            <p:ph type="sldNum" idx="5" sz="quarter"/>
-          </p:nvPr>
-        </p:nvSpPr>
-        <p:spPr/>
-      </p:sp>
-    </p:spTree>
-  </p:cSld>
-  <p:clrMapOvr>
-    <a:masterClrMapping/>
-  </p:clrMapOvr>
-</p:notes>
-</file>
-
-<file path=ppt/notesSlides/notesSlide39.xml><?xml version="1.0" encoding="utf-8"?>
-<p:notes xmlns:a="http://schemas.openxmlformats.org/drawingml/2006/main" xmlns:p="http://schemas.openxmlformats.org/presentationml/2006/main" xmlns:r="http://schemas.openxmlformats.org/officeDocument/2006/relationships">
-  <p:cSld>
-    <p:spTree>
-      <p:nvGrpSpPr>
-        <p:cNvPr id="1" name=""/>
-        <p:cNvGrpSpPr/>
-        <p:nvPr/>
-      </p:nvGrpSpPr>
-      <p:grpSpPr>
-        <a:xfrm>
-          <a:off x="0" y="0"/>
-          <a:ext cx="0" cy="0"/>
-          <a:chOff x="0" y="0"/>
-          <a:chExt cx="0" cy="0"/>
-        </a:xfrm>
-      </p:grpSpPr>
-      <p:sp>
-        <p:nvSpPr>
-          <p:cNvPr id="2" name="Slide Image Placeholder 1"/>
-          <p:cNvSpPr>
-            <a:spLocks noGrp="1"/>
-          </p:cNvSpPr>
-          <p:nvPr>
-            <p:ph type="sldImg" idx="2"/>
-          </p:nvPr>
-        </p:nvSpPr>
-        <p:spPr/>
-      </p:sp>
-      <p:sp>
-        <p:nvSpPr>
-          <p:cNvPr id="3" name="Notes Placeholder 2"/>
-          <p:cNvSpPr>
-            <a:spLocks noGrp="1"/>
-          </p:cNvSpPr>
-          <p:nvPr>
-            <p:ph type="body" idx="3" sz="quarter"/>
-          </p:nvPr>
-        </p:nvSpPr>
-        <p:spPr/>
-        <p:txBody>
-          <a:bodyPr/>
-          <a:lstStyle/>
-          <a:p>
-            <a:r>
-              <a:t>@pallotti oe=III</a:t>
-            </a:r>
-          </a:p>
-        </p:txBody>
-      </p:sp>
-      <p:sp>
-        <p:nvSpPr>
-          <p:cNvPr id="4" name="Slide Number Placeholder 3"/>
-          <p:cNvSpPr>
-            <a:spLocks noGrp="1"/>
-          </p:cNvSpPr>
-          <p:nvPr>
-            <p:ph type="sldNum" idx="5" sz="quarter"/>
-          </p:nvPr>
-        </p:nvSpPr>
-        <p:spPr/>
-      </p:sp>
-    </p:spTree>
-  </p:cSld>
-  <p:clrMapOvr>
-    <a:masterClrMapping/>
-  </p:clrMapOvr>
-</p:notes>
-</file>
-
 <file path=ppt/notesSlides/notesSlide4.xml><?xml version="1.0" encoding="utf-8"?>
 <p:notes xmlns:a="http://schemas.openxmlformats.org/drawingml/2006/main" xmlns:p="http://schemas.openxmlformats.org/presentationml/2006/main" xmlns:r="http://schemas.openxmlformats.org/officeDocument/2006/relationships">
   <p:cSld>
@@ -2797,706 +2346,6 @@
           <a:p>
             <a:r>
               <a:t>@pallotti grupo=canto:entrada</a:t>
-            </a:r>
-          </a:p>
-        </p:txBody>
-      </p:sp>
-      <p:sp>
-        <p:nvSpPr>
-          <p:cNvPr id="4" name="Slide Number Placeholder 3"/>
-          <p:cNvSpPr>
-            <a:spLocks noGrp="1"/>
-          </p:cNvSpPr>
-          <p:nvPr>
-            <p:ph type="sldNum" idx="5" sz="quarter"/>
-          </p:nvPr>
-        </p:nvSpPr>
-        <p:spPr/>
-      </p:sp>
-    </p:spTree>
-  </p:cSld>
-  <p:clrMapOvr>
-    <a:masterClrMapping/>
-  </p:clrMapOvr>
-</p:notes>
-</file>
-
-<file path=ppt/notesSlides/notesSlide40.xml><?xml version="1.0" encoding="utf-8"?>
-<p:notes xmlns:a="http://schemas.openxmlformats.org/drawingml/2006/main" xmlns:p="http://schemas.openxmlformats.org/presentationml/2006/main" xmlns:r="http://schemas.openxmlformats.org/officeDocument/2006/relationships">
-  <p:cSld>
-    <p:spTree>
-      <p:nvGrpSpPr>
-        <p:cNvPr id="1" name=""/>
-        <p:cNvGrpSpPr/>
-        <p:nvPr/>
-      </p:nvGrpSpPr>
-      <p:grpSpPr>
-        <a:xfrm>
-          <a:off x="0" y="0"/>
-          <a:ext cx="0" cy="0"/>
-          <a:chOff x="0" y="0"/>
-          <a:chExt cx="0" cy="0"/>
-        </a:xfrm>
-      </p:grpSpPr>
-      <p:sp>
-        <p:nvSpPr>
-          <p:cNvPr id="2" name="Slide Image Placeholder 1"/>
-          <p:cNvSpPr>
-            <a:spLocks noGrp="1"/>
-          </p:cNvSpPr>
-          <p:nvPr>
-            <p:ph type="sldImg" idx="2"/>
-          </p:nvPr>
-        </p:nvSpPr>
-        <p:spPr/>
-      </p:sp>
-      <p:sp>
-        <p:nvSpPr>
-          <p:cNvPr id="3" name="Notes Placeholder 2"/>
-          <p:cNvSpPr>
-            <a:spLocks noGrp="1"/>
-          </p:cNvSpPr>
-          <p:nvPr>
-            <p:ph type="body" idx="3" sz="quarter"/>
-          </p:nvPr>
-        </p:nvSpPr>
-        <p:spPr/>
-        <p:txBody>
-          <a:bodyPr/>
-          <a:lstStyle/>
-          <a:p>
-            <a:r>
-              <a:t>@pallotti oe=III</a:t>
-            </a:r>
-          </a:p>
-        </p:txBody>
-      </p:sp>
-      <p:sp>
-        <p:nvSpPr>
-          <p:cNvPr id="4" name="Slide Number Placeholder 3"/>
-          <p:cNvSpPr>
-            <a:spLocks noGrp="1"/>
-          </p:cNvSpPr>
-          <p:nvPr>
-            <p:ph type="sldNum" idx="5" sz="quarter"/>
-          </p:nvPr>
-        </p:nvSpPr>
-        <p:spPr/>
-      </p:sp>
-    </p:spTree>
-  </p:cSld>
-  <p:clrMapOvr>
-    <a:masterClrMapping/>
-  </p:clrMapOvr>
-</p:notes>
-</file>
-
-<file path=ppt/notesSlides/notesSlide41.xml><?xml version="1.0" encoding="utf-8"?>
-<p:notes xmlns:a="http://schemas.openxmlformats.org/drawingml/2006/main" xmlns:p="http://schemas.openxmlformats.org/presentationml/2006/main" xmlns:r="http://schemas.openxmlformats.org/officeDocument/2006/relationships">
-  <p:cSld>
-    <p:spTree>
-      <p:nvGrpSpPr>
-        <p:cNvPr id="1" name=""/>
-        <p:cNvGrpSpPr/>
-        <p:nvPr/>
-      </p:nvGrpSpPr>
-      <p:grpSpPr>
-        <a:xfrm>
-          <a:off x="0" y="0"/>
-          <a:ext cx="0" cy="0"/>
-          <a:chOff x="0" y="0"/>
-          <a:chExt cx="0" cy="0"/>
-        </a:xfrm>
-      </p:grpSpPr>
-      <p:sp>
-        <p:nvSpPr>
-          <p:cNvPr id="2" name="Slide Image Placeholder 1"/>
-          <p:cNvSpPr>
-            <a:spLocks noGrp="1"/>
-          </p:cNvSpPr>
-          <p:nvPr>
-            <p:ph type="sldImg" idx="2"/>
-          </p:nvPr>
-        </p:nvSpPr>
-        <p:spPr/>
-      </p:sp>
-      <p:sp>
-        <p:nvSpPr>
-          <p:cNvPr id="3" name="Notes Placeholder 2"/>
-          <p:cNvSpPr>
-            <a:spLocks noGrp="1"/>
-          </p:cNvSpPr>
-          <p:nvPr>
-            <p:ph type="body" idx="3" sz="quarter"/>
-          </p:nvPr>
-        </p:nvSpPr>
-        <p:spPr/>
-        <p:txBody>
-          <a:bodyPr/>
-          <a:lstStyle/>
-          <a:p>
-            <a:r>
-              <a:t>@pallotti oe=III</a:t>
-            </a:r>
-          </a:p>
-        </p:txBody>
-      </p:sp>
-      <p:sp>
-        <p:nvSpPr>
-          <p:cNvPr id="4" name="Slide Number Placeholder 3"/>
-          <p:cNvSpPr>
-            <a:spLocks noGrp="1"/>
-          </p:cNvSpPr>
-          <p:nvPr>
-            <p:ph type="sldNum" idx="5" sz="quarter"/>
-          </p:nvPr>
-        </p:nvSpPr>
-        <p:spPr/>
-      </p:sp>
-    </p:spTree>
-  </p:cSld>
-  <p:clrMapOvr>
-    <a:masterClrMapping/>
-  </p:clrMapOvr>
-</p:notes>
-</file>
-
-<file path=ppt/notesSlides/notesSlide42.xml><?xml version="1.0" encoding="utf-8"?>
-<p:notes xmlns:a="http://schemas.openxmlformats.org/drawingml/2006/main" xmlns:p="http://schemas.openxmlformats.org/presentationml/2006/main" xmlns:r="http://schemas.openxmlformats.org/officeDocument/2006/relationships">
-  <p:cSld>
-    <p:spTree>
-      <p:nvGrpSpPr>
-        <p:cNvPr id="1" name=""/>
-        <p:cNvGrpSpPr/>
-        <p:nvPr/>
-      </p:nvGrpSpPr>
-      <p:grpSpPr>
-        <a:xfrm>
-          <a:off x="0" y="0"/>
-          <a:ext cx="0" cy="0"/>
-          <a:chOff x="0" y="0"/>
-          <a:chExt cx="0" cy="0"/>
-        </a:xfrm>
-      </p:grpSpPr>
-      <p:sp>
-        <p:nvSpPr>
-          <p:cNvPr id="2" name="Slide Image Placeholder 1"/>
-          <p:cNvSpPr>
-            <a:spLocks noGrp="1"/>
-          </p:cNvSpPr>
-          <p:nvPr>
-            <p:ph type="sldImg" idx="2"/>
-          </p:nvPr>
-        </p:nvSpPr>
-        <p:spPr/>
-      </p:sp>
-      <p:sp>
-        <p:nvSpPr>
-          <p:cNvPr id="3" name="Notes Placeholder 2"/>
-          <p:cNvSpPr>
-            <a:spLocks noGrp="1"/>
-          </p:cNvSpPr>
-          <p:nvPr>
-            <p:ph type="body" idx="3" sz="quarter"/>
-          </p:nvPr>
-        </p:nvSpPr>
-        <p:spPr/>
-        <p:txBody>
-          <a:bodyPr/>
-          <a:lstStyle/>
-          <a:p>
-            <a:r>
-              <a:t>@pallotti oe=III</a:t>
-            </a:r>
-          </a:p>
-        </p:txBody>
-      </p:sp>
-      <p:sp>
-        <p:nvSpPr>
-          <p:cNvPr id="4" name="Slide Number Placeholder 3"/>
-          <p:cNvSpPr>
-            <a:spLocks noGrp="1"/>
-          </p:cNvSpPr>
-          <p:nvPr>
-            <p:ph type="sldNum" idx="5" sz="quarter"/>
-          </p:nvPr>
-        </p:nvSpPr>
-        <p:spPr/>
-      </p:sp>
-    </p:spTree>
-  </p:cSld>
-  <p:clrMapOvr>
-    <a:masterClrMapping/>
-  </p:clrMapOvr>
-</p:notes>
-</file>
-
-<file path=ppt/notesSlides/notesSlide43.xml><?xml version="1.0" encoding="utf-8"?>
-<p:notes xmlns:a="http://schemas.openxmlformats.org/drawingml/2006/main" xmlns:p="http://schemas.openxmlformats.org/presentationml/2006/main" xmlns:r="http://schemas.openxmlformats.org/officeDocument/2006/relationships">
-  <p:cSld>
-    <p:spTree>
-      <p:nvGrpSpPr>
-        <p:cNvPr id="1" name=""/>
-        <p:cNvGrpSpPr/>
-        <p:nvPr/>
-      </p:nvGrpSpPr>
-      <p:grpSpPr>
-        <a:xfrm>
-          <a:off x="0" y="0"/>
-          <a:ext cx="0" cy="0"/>
-          <a:chOff x="0" y="0"/>
-          <a:chExt cx="0" cy="0"/>
-        </a:xfrm>
-      </p:grpSpPr>
-      <p:sp>
-        <p:nvSpPr>
-          <p:cNvPr id="2" name="Slide Image Placeholder 1"/>
-          <p:cNvSpPr>
-            <a:spLocks noGrp="1"/>
-          </p:cNvSpPr>
-          <p:nvPr>
-            <p:ph type="sldImg" idx="2"/>
-          </p:nvPr>
-        </p:nvSpPr>
-        <p:spPr/>
-      </p:sp>
-      <p:sp>
-        <p:nvSpPr>
-          <p:cNvPr id="3" name="Notes Placeholder 2"/>
-          <p:cNvSpPr>
-            <a:spLocks noGrp="1"/>
-          </p:cNvSpPr>
-          <p:nvPr>
-            <p:ph type="body" idx="3" sz="quarter"/>
-          </p:nvPr>
-        </p:nvSpPr>
-        <p:spPr/>
-        <p:txBody>
-          <a:bodyPr/>
-          <a:lstStyle/>
-          <a:p>
-            <a:r>
-              <a:t>@pallotti oe=III</a:t>
-            </a:r>
-          </a:p>
-        </p:txBody>
-      </p:sp>
-      <p:sp>
-        <p:nvSpPr>
-          <p:cNvPr id="4" name="Slide Number Placeholder 3"/>
-          <p:cNvSpPr>
-            <a:spLocks noGrp="1"/>
-          </p:cNvSpPr>
-          <p:nvPr>
-            <p:ph type="sldNum" idx="5" sz="quarter"/>
-          </p:nvPr>
-        </p:nvSpPr>
-        <p:spPr/>
-      </p:sp>
-    </p:spTree>
-  </p:cSld>
-  <p:clrMapOvr>
-    <a:masterClrMapping/>
-  </p:clrMapOvr>
-</p:notes>
-</file>
-
-<file path=ppt/notesSlides/notesSlide44.xml><?xml version="1.0" encoding="utf-8"?>
-<p:notes xmlns:a="http://schemas.openxmlformats.org/drawingml/2006/main" xmlns:p="http://schemas.openxmlformats.org/presentationml/2006/main" xmlns:r="http://schemas.openxmlformats.org/officeDocument/2006/relationships">
-  <p:cSld>
-    <p:spTree>
-      <p:nvGrpSpPr>
-        <p:cNvPr id="1" name=""/>
-        <p:cNvGrpSpPr/>
-        <p:nvPr/>
-      </p:nvGrpSpPr>
-      <p:grpSpPr>
-        <a:xfrm>
-          <a:off x="0" y="0"/>
-          <a:ext cx="0" cy="0"/>
-          <a:chOff x="0" y="0"/>
-          <a:chExt cx="0" cy="0"/>
-        </a:xfrm>
-      </p:grpSpPr>
-      <p:sp>
-        <p:nvSpPr>
-          <p:cNvPr id="2" name="Slide Image Placeholder 1"/>
-          <p:cNvSpPr>
-            <a:spLocks noGrp="1"/>
-          </p:cNvSpPr>
-          <p:nvPr>
-            <p:ph type="sldImg" idx="2"/>
-          </p:nvPr>
-        </p:nvSpPr>
-        <p:spPr/>
-      </p:sp>
-      <p:sp>
-        <p:nvSpPr>
-          <p:cNvPr id="3" name="Notes Placeholder 2"/>
-          <p:cNvSpPr>
-            <a:spLocks noGrp="1"/>
-          </p:cNvSpPr>
-          <p:nvPr>
-            <p:ph type="body" idx="3" sz="quarter"/>
-          </p:nvPr>
-        </p:nvSpPr>
-        <p:spPr/>
-        <p:txBody>
-          <a:bodyPr/>
-          <a:lstStyle/>
-          <a:p>
-            <a:r>
-              <a:t>@pallotti oe=III</a:t>
-            </a:r>
-          </a:p>
-        </p:txBody>
-      </p:sp>
-      <p:sp>
-        <p:nvSpPr>
-          <p:cNvPr id="4" name="Slide Number Placeholder 3"/>
-          <p:cNvSpPr>
-            <a:spLocks noGrp="1"/>
-          </p:cNvSpPr>
-          <p:nvPr>
-            <p:ph type="sldNum" idx="5" sz="quarter"/>
-          </p:nvPr>
-        </p:nvSpPr>
-        <p:spPr/>
-      </p:sp>
-    </p:spTree>
-  </p:cSld>
-  <p:clrMapOvr>
-    <a:masterClrMapping/>
-  </p:clrMapOvr>
-</p:notes>
-</file>
-
-<file path=ppt/notesSlides/notesSlide45.xml><?xml version="1.0" encoding="utf-8"?>
-<p:notes xmlns:a="http://schemas.openxmlformats.org/drawingml/2006/main" xmlns:p="http://schemas.openxmlformats.org/presentationml/2006/main" xmlns:r="http://schemas.openxmlformats.org/officeDocument/2006/relationships">
-  <p:cSld>
-    <p:spTree>
-      <p:nvGrpSpPr>
-        <p:cNvPr id="1" name=""/>
-        <p:cNvGrpSpPr/>
-        <p:nvPr/>
-      </p:nvGrpSpPr>
-      <p:grpSpPr>
-        <a:xfrm>
-          <a:off x="0" y="0"/>
-          <a:ext cx="0" cy="0"/>
-          <a:chOff x="0" y="0"/>
-          <a:chExt cx="0" cy="0"/>
-        </a:xfrm>
-      </p:grpSpPr>
-      <p:sp>
-        <p:nvSpPr>
-          <p:cNvPr id="2" name="Slide Image Placeholder 1"/>
-          <p:cNvSpPr>
-            <a:spLocks noGrp="1"/>
-          </p:cNvSpPr>
-          <p:nvPr>
-            <p:ph type="sldImg" idx="2"/>
-          </p:nvPr>
-        </p:nvSpPr>
-        <p:spPr/>
-      </p:sp>
-      <p:sp>
-        <p:nvSpPr>
-          <p:cNvPr id="3" name="Notes Placeholder 2"/>
-          <p:cNvSpPr>
-            <a:spLocks noGrp="1"/>
-          </p:cNvSpPr>
-          <p:nvPr>
-            <p:ph type="body" idx="3" sz="quarter"/>
-          </p:nvPr>
-        </p:nvSpPr>
-        <p:spPr/>
-        <p:txBody>
-          <a:bodyPr/>
-          <a:lstStyle/>
-          <a:p>
-            <a:r>
-              <a:t>@pallotti oe=III</a:t>
-            </a:r>
-          </a:p>
-        </p:txBody>
-      </p:sp>
-      <p:sp>
-        <p:nvSpPr>
-          <p:cNvPr id="4" name="Slide Number Placeholder 3"/>
-          <p:cNvSpPr>
-            <a:spLocks noGrp="1"/>
-          </p:cNvSpPr>
-          <p:nvPr>
-            <p:ph type="sldNum" idx="5" sz="quarter"/>
-          </p:nvPr>
-        </p:nvSpPr>
-        <p:spPr/>
-      </p:sp>
-    </p:spTree>
-  </p:cSld>
-  <p:clrMapOvr>
-    <a:masterClrMapping/>
-  </p:clrMapOvr>
-</p:notes>
-</file>
-
-<file path=ppt/notesSlides/notesSlide46.xml><?xml version="1.0" encoding="utf-8"?>
-<p:notes xmlns:a="http://schemas.openxmlformats.org/drawingml/2006/main" xmlns:p="http://schemas.openxmlformats.org/presentationml/2006/main" xmlns:r="http://schemas.openxmlformats.org/officeDocument/2006/relationships">
-  <p:cSld>
-    <p:spTree>
-      <p:nvGrpSpPr>
-        <p:cNvPr id="1" name=""/>
-        <p:cNvGrpSpPr/>
-        <p:nvPr/>
-      </p:nvGrpSpPr>
-      <p:grpSpPr>
-        <a:xfrm>
-          <a:off x="0" y="0"/>
-          <a:ext cx="0" cy="0"/>
-          <a:chOff x="0" y="0"/>
-          <a:chExt cx="0" cy="0"/>
-        </a:xfrm>
-      </p:grpSpPr>
-      <p:sp>
-        <p:nvSpPr>
-          <p:cNvPr id="2" name="Slide Image Placeholder 1"/>
-          <p:cNvSpPr>
-            <a:spLocks noGrp="1"/>
-          </p:cNvSpPr>
-          <p:nvPr>
-            <p:ph type="sldImg" idx="2"/>
-          </p:nvPr>
-        </p:nvSpPr>
-        <p:spPr/>
-      </p:sp>
-      <p:sp>
-        <p:nvSpPr>
-          <p:cNvPr id="3" name="Notes Placeholder 2"/>
-          <p:cNvSpPr>
-            <a:spLocks noGrp="1"/>
-          </p:cNvSpPr>
-          <p:nvPr>
-            <p:ph type="body" idx="3" sz="quarter"/>
-          </p:nvPr>
-        </p:nvSpPr>
-        <p:spPr/>
-        <p:txBody>
-          <a:bodyPr/>
-          <a:lstStyle/>
-          <a:p>
-            <a:r>
-              <a:t>@pallotti oe=III</a:t>
-            </a:r>
-          </a:p>
-        </p:txBody>
-      </p:sp>
-      <p:sp>
-        <p:nvSpPr>
-          <p:cNvPr id="4" name="Slide Number Placeholder 3"/>
-          <p:cNvSpPr>
-            <a:spLocks noGrp="1"/>
-          </p:cNvSpPr>
-          <p:nvPr>
-            <p:ph type="sldNum" idx="5" sz="quarter"/>
-          </p:nvPr>
-        </p:nvSpPr>
-        <p:spPr/>
-      </p:sp>
-    </p:spTree>
-  </p:cSld>
-  <p:clrMapOvr>
-    <a:masterClrMapping/>
-  </p:clrMapOvr>
-</p:notes>
-</file>
-
-<file path=ppt/notesSlides/notesSlide47.xml><?xml version="1.0" encoding="utf-8"?>
-<p:notes xmlns:a="http://schemas.openxmlformats.org/drawingml/2006/main" xmlns:p="http://schemas.openxmlformats.org/presentationml/2006/main" xmlns:r="http://schemas.openxmlformats.org/officeDocument/2006/relationships">
-  <p:cSld>
-    <p:spTree>
-      <p:nvGrpSpPr>
-        <p:cNvPr id="1" name=""/>
-        <p:cNvGrpSpPr/>
-        <p:nvPr/>
-      </p:nvGrpSpPr>
-      <p:grpSpPr>
-        <a:xfrm>
-          <a:off x="0" y="0"/>
-          <a:ext cx="0" cy="0"/>
-          <a:chOff x="0" y="0"/>
-          <a:chExt cx="0" cy="0"/>
-        </a:xfrm>
-      </p:grpSpPr>
-      <p:sp>
-        <p:nvSpPr>
-          <p:cNvPr id="2" name="Slide Image Placeholder 1"/>
-          <p:cNvSpPr>
-            <a:spLocks noGrp="1"/>
-          </p:cNvSpPr>
-          <p:nvPr>
-            <p:ph type="sldImg" idx="2"/>
-          </p:nvPr>
-        </p:nvSpPr>
-        <p:spPr/>
-      </p:sp>
-      <p:sp>
-        <p:nvSpPr>
-          <p:cNvPr id="3" name="Notes Placeholder 2"/>
-          <p:cNvSpPr>
-            <a:spLocks noGrp="1"/>
-          </p:cNvSpPr>
-          <p:nvPr>
-            <p:ph type="body" idx="3" sz="quarter"/>
-          </p:nvPr>
-        </p:nvSpPr>
-        <p:spPr/>
-        <p:txBody>
-          <a:bodyPr/>
-          <a:lstStyle/>
-          <a:p>
-            <a:r>
-              <a:t>@pallotti oe=III</a:t>
-            </a:r>
-          </a:p>
-        </p:txBody>
-      </p:sp>
-      <p:sp>
-        <p:nvSpPr>
-          <p:cNvPr id="4" name="Slide Number Placeholder 3"/>
-          <p:cNvSpPr>
-            <a:spLocks noGrp="1"/>
-          </p:cNvSpPr>
-          <p:nvPr>
-            <p:ph type="sldNum" idx="5" sz="quarter"/>
-          </p:nvPr>
-        </p:nvSpPr>
-        <p:spPr/>
-      </p:sp>
-    </p:spTree>
-  </p:cSld>
-  <p:clrMapOvr>
-    <a:masterClrMapping/>
-  </p:clrMapOvr>
-</p:notes>
-</file>
-
-<file path=ppt/notesSlides/notesSlide48.xml><?xml version="1.0" encoding="utf-8"?>
-<p:notes xmlns:a="http://schemas.openxmlformats.org/drawingml/2006/main" xmlns:p="http://schemas.openxmlformats.org/presentationml/2006/main" xmlns:r="http://schemas.openxmlformats.org/officeDocument/2006/relationships">
-  <p:cSld>
-    <p:spTree>
-      <p:nvGrpSpPr>
-        <p:cNvPr id="1" name=""/>
-        <p:cNvGrpSpPr/>
-        <p:nvPr/>
-      </p:nvGrpSpPr>
-      <p:grpSpPr>
-        <a:xfrm>
-          <a:off x="0" y="0"/>
-          <a:ext cx="0" cy="0"/>
-          <a:chOff x="0" y="0"/>
-          <a:chExt cx="0" cy="0"/>
-        </a:xfrm>
-      </p:grpSpPr>
-      <p:sp>
-        <p:nvSpPr>
-          <p:cNvPr id="2" name="Slide Image Placeholder 1"/>
-          <p:cNvSpPr>
-            <a:spLocks noGrp="1"/>
-          </p:cNvSpPr>
-          <p:nvPr>
-            <p:ph type="sldImg" idx="2"/>
-          </p:nvPr>
-        </p:nvSpPr>
-        <p:spPr/>
-      </p:sp>
-      <p:sp>
-        <p:nvSpPr>
-          <p:cNvPr id="3" name="Notes Placeholder 2"/>
-          <p:cNvSpPr>
-            <a:spLocks noGrp="1"/>
-          </p:cNvSpPr>
-          <p:nvPr>
-            <p:ph type="body" idx="3" sz="quarter"/>
-          </p:nvPr>
-        </p:nvSpPr>
-        <p:spPr/>
-        <p:txBody>
-          <a:bodyPr/>
-          <a:lstStyle/>
-          <a:p>
-            <a:r>
-              <a:t>@pallotti oe=DC_IV</a:t>
-            </a:r>
-          </a:p>
-        </p:txBody>
-      </p:sp>
-      <p:sp>
-        <p:nvSpPr>
-          <p:cNvPr id="4" name="Slide Number Placeholder 3"/>
-          <p:cNvSpPr>
-            <a:spLocks noGrp="1"/>
-          </p:cNvSpPr>
-          <p:nvPr>
-            <p:ph type="sldNum" idx="5" sz="quarter"/>
-          </p:nvPr>
-        </p:nvSpPr>
-        <p:spPr/>
-      </p:sp>
-    </p:spTree>
-  </p:cSld>
-  <p:clrMapOvr>
-    <a:masterClrMapping/>
-  </p:clrMapOvr>
-</p:notes>
-</file>
-
-<file path=ppt/notesSlides/notesSlide49.xml><?xml version="1.0" encoding="utf-8"?>
-<p:notes xmlns:a="http://schemas.openxmlformats.org/drawingml/2006/main" xmlns:p="http://schemas.openxmlformats.org/presentationml/2006/main" xmlns:r="http://schemas.openxmlformats.org/officeDocument/2006/relationships">
-  <p:cSld>
-    <p:spTree>
-      <p:nvGrpSpPr>
-        <p:cNvPr id="1" name=""/>
-        <p:cNvGrpSpPr/>
-        <p:nvPr/>
-      </p:nvGrpSpPr>
-      <p:grpSpPr>
-        <a:xfrm>
-          <a:off x="0" y="0"/>
-          <a:ext cx="0" cy="0"/>
-          <a:chOff x="0" y="0"/>
-          <a:chExt cx="0" cy="0"/>
-        </a:xfrm>
-      </p:grpSpPr>
-      <p:sp>
-        <p:nvSpPr>
-          <p:cNvPr id="2" name="Slide Image Placeholder 1"/>
-          <p:cNvSpPr>
-            <a:spLocks noGrp="1"/>
-          </p:cNvSpPr>
-          <p:nvPr>
-            <p:ph type="sldImg" idx="2"/>
-          </p:nvPr>
-        </p:nvSpPr>
-        <p:spPr/>
-      </p:sp>
-      <p:sp>
-        <p:nvSpPr>
-          <p:cNvPr id="3" name="Notes Placeholder 2"/>
-          <p:cNvSpPr>
-            <a:spLocks noGrp="1"/>
-          </p:cNvSpPr>
-          <p:nvPr>
-            <p:ph type="body" idx="3" sz="quarter"/>
-          </p:nvPr>
-        </p:nvSpPr>
-        <p:spPr/>
-        <p:txBody>
-          <a:bodyPr/>
-          <a:lstStyle/>
-          <a:p>
-            <a:r>
-              <a:t>@pallotti oe=DC_IV</a:t>
             </a:r>
           </a:p>
         </p:txBody>
@@ -3591,706 +2440,6 @@
 </p:notes>
 </file>
 
-<file path=ppt/notesSlides/notesSlide50.xml><?xml version="1.0" encoding="utf-8"?>
-<p:notes xmlns:a="http://schemas.openxmlformats.org/drawingml/2006/main" xmlns:p="http://schemas.openxmlformats.org/presentationml/2006/main" xmlns:r="http://schemas.openxmlformats.org/officeDocument/2006/relationships">
-  <p:cSld>
-    <p:spTree>
-      <p:nvGrpSpPr>
-        <p:cNvPr id="1" name=""/>
-        <p:cNvGrpSpPr/>
-        <p:nvPr/>
-      </p:nvGrpSpPr>
-      <p:grpSpPr>
-        <a:xfrm>
-          <a:off x="0" y="0"/>
-          <a:ext cx="0" cy="0"/>
-          <a:chOff x="0" y="0"/>
-          <a:chExt cx="0" cy="0"/>
-        </a:xfrm>
-      </p:grpSpPr>
-      <p:sp>
-        <p:nvSpPr>
-          <p:cNvPr id="2" name="Slide Image Placeholder 1"/>
-          <p:cNvSpPr>
-            <a:spLocks noGrp="1"/>
-          </p:cNvSpPr>
-          <p:nvPr>
-            <p:ph type="sldImg" idx="2"/>
-          </p:nvPr>
-        </p:nvSpPr>
-        <p:spPr/>
-      </p:sp>
-      <p:sp>
-        <p:nvSpPr>
-          <p:cNvPr id="3" name="Notes Placeholder 2"/>
-          <p:cNvSpPr>
-            <a:spLocks noGrp="1"/>
-          </p:cNvSpPr>
-          <p:nvPr>
-            <p:ph type="body" idx="3" sz="quarter"/>
-          </p:nvPr>
-        </p:nvSpPr>
-        <p:spPr/>
-        <p:txBody>
-          <a:bodyPr/>
-          <a:lstStyle/>
-          <a:p>
-            <a:r>
-              <a:t>@pallotti oe=DC_IV</a:t>
-            </a:r>
-          </a:p>
-        </p:txBody>
-      </p:sp>
-      <p:sp>
-        <p:nvSpPr>
-          <p:cNvPr id="4" name="Slide Number Placeholder 3"/>
-          <p:cNvSpPr>
-            <a:spLocks noGrp="1"/>
-          </p:cNvSpPr>
-          <p:nvPr>
-            <p:ph type="sldNum" idx="5" sz="quarter"/>
-          </p:nvPr>
-        </p:nvSpPr>
-        <p:spPr/>
-      </p:sp>
-    </p:spTree>
-  </p:cSld>
-  <p:clrMapOvr>
-    <a:masterClrMapping/>
-  </p:clrMapOvr>
-</p:notes>
-</file>
-
-<file path=ppt/notesSlides/notesSlide51.xml><?xml version="1.0" encoding="utf-8"?>
-<p:notes xmlns:a="http://schemas.openxmlformats.org/drawingml/2006/main" xmlns:p="http://schemas.openxmlformats.org/presentationml/2006/main" xmlns:r="http://schemas.openxmlformats.org/officeDocument/2006/relationships">
-  <p:cSld>
-    <p:spTree>
-      <p:nvGrpSpPr>
-        <p:cNvPr id="1" name=""/>
-        <p:cNvGrpSpPr/>
-        <p:nvPr/>
-      </p:nvGrpSpPr>
-      <p:grpSpPr>
-        <a:xfrm>
-          <a:off x="0" y="0"/>
-          <a:ext cx="0" cy="0"/>
-          <a:chOff x="0" y="0"/>
-          <a:chExt cx="0" cy="0"/>
-        </a:xfrm>
-      </p:grpSpPr>
-      <p:sp>
-        <p:nvSpPr>
-          <p:cNvPr id="2" name="Slide Image Placeholder 1"/>
-          <p:cNvSpPr>
-            <a:spLocks noGrp="1"/>
-          </p:cNvSpPr>
-          <p:nvPr>
-            <p:ph type="sldImg" idx="2"/>
-          </p:nvPr>
-        </p:nvSpPr>
-        <p:spPr/>
-      </p:sp>
-      <p:sp>
-        <p:nvSpPr>
-          <p:cNvPr id="3" name="Notes Placeholder 2"/>
-          <p:cNvSpPr>
-            <a:spLocks noGrp="1"/>
-          </p:cNvSpPr>
-          <p:nvPr>
-            <p:ph type="body" idx="3" sz="quarter"/>
-          </p:nvPr>
-        </p:nvSpPr>
-        <p:spPr/>
-        <p:txBody>
-          <a:bodyPr/>
-          <a:lstStyle/>
-          <a:p>
-            <a:r>
-              <a:t>@pallotti oe=DC_IV</a:t>
-            </a:r>
-          </a:p>
-        </p:txBody>
-      </p:sp>
-      <p:sp>
-        <p:nvSpPr>
-          <p:cNvPr id="4" name="Slide Number Placeholder 3"/>
-          <p:cNvSpPr>
-            <a:spLocks noGrp="1"/>
-          </p:cNvSpPr>
-          <p:nvPr>
-            <p:ph type="sldNum" idx="5" sz="quarter"/>
-          </p:nvPr>
-        </p:nvSpPr>
-        <p:spPr/>
-      </p:sp>
-    </p:spTree>
-  </p:cSld>
-  <p:clrMapOvr>
-    <a:masterClrMapping/>
-  </p:clrMapOvr>
-</p:notes>
-</file>
-
-<file path=ppt/notesSlides/notesSlide52.xml><?xml version="1.0" encoding="utf-8"?>
-<p:notes xmlns:a="http://schemas.openxmlformats.org/drawingml/2006/main" xmlns:p="http://schemas.openxmlformats.org/presentationml/2006/main" xmlns:r="http://schemas.openxmlformats.org/officeDocument/2006/relationships">
-  <p:cSld>
-    <p:spTree>
-      <p:nvGrpSpPr>
-        <p:cNvPr id="1" name=""/>
-        <p:cNvGrpSpPr/>
-        <p:nvPr/>
-      </p:nvGrpSpPr>
-      <p:grpSpPr>
-        <a:xfrm>
-          <a:off x="0" y="0"/>
-          <a:ext cx="0" cy="0"/>
-          <a:chOff x="0" y="0"/>
-          <a:chExt cx="0" cy="0"/>
-        </a:xfrm>
-      </p:grpSpPr>
-      <p:sp>
-        <p:nvSpPr>
-          <p:cNvPr id="2" name="Slide Image Placeholder 1"/>
-          <p:cNvSpPr>
-            <a:spLocks noGrp="1"/>
-          </p:cNvSpPr>
-          <p:nvPr>
-            <p:ph type="sldImg" idx="2"/>
-          </p:nvPr>
-        </p:nvSpPr>
-        <p:spPr/>
-      </p:sp>
-      <p:sp>
-        <p:nvSpPr>
-          <p:cNvPr id="3" name="Notes Placeholder 2"/>
-          <p:cNvSpPr>
-            <a:spLocks noGrp="1"/>
-          </p:cNvSpPr>
-          <p:nvPr>
-            <p:ph type="body" idx="3" sz="quarter"/>
-          </p:nvPr>
-        </p:nvSpPr>
-        <p:spPr/>
-        <p:txBody>
-          <a:bodyPr/>
-          <a:lstStyle/>
-          <a:p>
-            <a:r>
-              <a:t>@pallotti oe=DC_IV</a:t>
-            </a:r>
-          </a:p>
-        </p:txBody>
-      </p:sp>
-      <p:sp>
-        <p:nvSpPr>
-          <p:cNvPr id="4" name="Slide Number Placeholder 3"/>
-          <p:cNvSpPr>
-            <a:spLocks noGrp="1"/>
-          </p:cNvSpPr>
-          <p:nvPr>
-            <p:ph type="sldNum" idx="5" sz="quarter"/>
-          </p:nvPr>
-        </p:nvSpPr>
-        <p:spPr/>
-      </p:sp>
-    </p:spTree>
-  </p:cSld>
-  <p:clrMapOvr>
-    <a:masterClrMapping/>
-  </p:clrMapOvr>
-</p:notes>
-</file>
-
-<file path=ppt/notesSlides/notesSlide53.xml><?xml version="1.0" encoding="utf-8"?>
-<p:notes xmlns:a="http://schemas.openxmlformats.org/drawingml/2006/main" xmlns:p="http://schemas.openxmlformats.org/presentationml/2006/main" xmlns:r="http://schemas.openxmlformats.org/officeDocument/2006/relationships">
-  <p:cSld>
-    <p:spTree>
-      <p:nvGrpSpPr>
-        <p:cNvPr id="1" name=""/>
-        <p:cNvGrpSpPr/>
-        <p:nvPr/>
-      </p:nvGrpSpPr>
-      <p:grpSpPr>
-        <a:xfrm>
-          <a:off x="0" y="0"/>
-          <a:ext cx="0" cy="0"/>
-          <a:chOff x="0" y="0"/>
-          <a:chExt cx="0" cy="0"/>
-        </a:xfrm>
-      </p:grpSpPr>
-      <p:sp>
-        <p:nvSpPr>
-          <p:cNvPr id="2" name="Slide Image Placeholder 1"/>
-          <p:cNvSpPr>
-            <a:spLocks noGrp="1"/>
-          </p:cNvSpPr>
-          <p:nvPr>
-            <p:ph type="sldImg" idx="2"/>
-          </p:nvPr>
-        </p:nvSpPr>
-        <p:spPr/>
-      </p:sp>
-      <p:sp>
-        <p:nvSpPr>
-          <p:cNvPr id="3" name="Notes Placeholder 2"/>
-          <p:cNvSpPr>
-            <a:spLocks noGrp="1"/>
-          </p:cNvSpPr>
-          <p:nvPr>
-            <p:ph type="body" idx="3" sz="quarter"/>
-          </p:nvPr>
-        </p:nvSpPr>
-        <p:spPr/>
-        <p:txBody>
-          <a:bodyPr/>
-          <a:lstStyle/>
-          <a:p>
-            <a:r>
-              <a:t>@pallotti oe=DC_IV</a:t>
-            </a:r>
-          </a:p>
-        </p:txBody>
-      </p:sp>
-      <p:sp>
-        <p:nvSpPr>
-          <p:cNvPr id="4" name="Slide Number Placeholder 3"/>
-          <p:cNvSpPr>
-            <a:spLocks noGrp="1"/>
-          </p:cNvSpPr>
-          <p:nvPr>
-            <p:ph type="sldNum" idx="5" sz="quarter"/>
-          </p:nvPr>
-        </p:nvSpPr>
-        <p:spPr/>
-      </p:sp>
-    </p:spTree>
-  </p:cSld>
-  <p:clrMapOvr>
-    <a:masterClrMapping/>
-  </p:clrMapOvr>
-</p:notes>
-</file>
-
-<file path=ppt/notesSlides/notesSlide54.xml><?xml version="1.0" encoding="utf-8"?>
-<p:notes xmlns:a="http://schemas.openxmlformats.org/drawingml/2006/main" xmlns:p="http://schemas.openxmlformats.org/presentationml/2006/main" xmlns:r="http://schemas.openxmlformats.org/officeDocument/2006/relationships">
-  <p:cSld>
-    <p:spTree>
-      <p:nvGrpSpPr>
-        <p:cNvPr id="1" name=""/>
-        <p:cNvGrpSpPr/>
-        <p:nvPr/>
-      </p:nvGrpSpPr>
-      <p:grpSpPr>
-        <a:xfrm>
-          <a:off x="0" y="0"/>
-          <a:ext cx="0" cy="0"/>
-          <a:chOff x="0" y="0"/>
-          <a:chExt cx="0" cy="0"/>
-        </a:xfrm>
-      </p:grpSpPr>
-      <p:sp>
-        <p:nvSpPr>
-          <p:cNvPr id="2" name="Slide Image Placeholder 1"/>
-          <p:cNvSpPr>
-            <a:spLocks noGrp="1"/>
-          </p:cNvSpPr>
-          <p:nvPr>
-            <p:ph type="sldImg" idx="2"/>
-          </p:nvPr>
-        </p:nvSpPr>
-        <p:spPr/>
-      </p:sp>
-      <p:sp>
-        <p:nvSpPr>
-          <p:cNvPr id="3" name="Notes Placeholder 2"/>
-          <p:cNvSpPr>
-            <a:spLocks noGrp="1"/>
-          </p:cNvSpPr>
-          <p:nvPr>
-            <p:ph type="body" idx="3" sz="quarter"/>
-          </p:nvPr>
-        </p:nvSpPr>
-        <p:spPr/>
-        <p:txBody>
-          <a:bodyPr/>
-          <a:lstStyle/>
-          <a:p>
-            <a:r>
-              <a:t>@pallotti oe=DC_IV</a:t>
-            </a:r>
-          </a:p>
-        </p:txBody>
-      </p:sp>
-      <p:sp>
-        <p:nvSpPr>
-          <p:cNvPr id="4" name="Slide Number Placeholder 3"/>
-          <p:cNvSpPr>
-            <a:spLocks noGrp="1"/>
-          </p:cNvSpPr>
-          <p:nvPr>
-            <p:ph type="sldNum" idx="5" sz="quarter"/>
-          </p:nvPr>
-        </p:nvSpPr>
-        <p:spPr/>
-      </p:sp>
-    </p:spTree>
-  </p:cSld>
-  <p:clrMapOvr>
-    <a:masterClrMapping/>
-  </p:clrMapOvr>
-</p:notes>
-</file>
-
-<file path=ppt/notesSlides/notesSlide55.xml><?xml version="1.0" encoding="utf-8"?>
-<p:notes xmlns:a="http://schemas.openxmlformats.org/drawingml/2006/main" xmlns:p="http://schemas.openxmlformats.org/presentationml/2006/main" xmlns:r="http://schemas.openxmlformats.org/officeDocument/2006/relationships">
-  <p:cSld>
-    <p:spTree>
-      <p:nvGrpSpPr>
-        <p:cNvPr id="1" name=""/>
-        <p:cNvGrpSpPr/>
-        <p:nvPr/>
-      </p:nvGrpSpPr>
-      <p:grpSpPr>
-        <a:xfrm>
-          <a:off x="0" y="0"/>
-          <a:ext cx="0" cy="0"/>
-          <a:chOff x="0" y="0"/>
-          <a:chExt cx="0" cy="0"/>
-        </a:xfrm>
-      </p:grpSpPr>
-      <p:sp>
-        <p:nvSpPr>
-          <p:cNvPr id="2" name="Slide Image Placeholder 1"/>
-          <p:cNvSpPr>
-            <a:spLocks noGrp="1"/>
-          </p:cNvSpPr>
-          <p:nvPr>
-            <p:ph type="sldImg" idx="2"/>
-          </p:nvPr>
-        </p:nvSpPr>
-        <p:spPr/>
-      </p:sp>
-      <p:sp>
-        <p:nvSpPr>
-          <p:cNvPr id="3" name="Notes Placeholder 2"/>
-          <p:cNvSpPr>
-            <a:spLocks noGrp="1"/>
-          </p:cNvSpPr>
-          <p:nvPr>
-            <p:ph type="body" idx="3" sz="quarter"/>
-          </p:nvPr>
-        </p:nvSpPr>
-        <p:spPr/>
-        <p:txBody>
-          <a:bodyPr/>
-          <a:lstStyle/>
-          <a:p>
-            <a:r>
-              <a:t>@pallotti oe=DC_IV</a:t>
-            </a:r>
-          </a:p>
-        </p:txBody>
-      </p:sp>
-      <p:sp>
-        <p:nvSpPr>
-          <p:cNvPr id="4" name="Slide Number Placeholder 3"/>
-          <p:cNvSpPr>
-            <a:spLocks noGrp="1"/>
-          </p:cNvSpPr>
-          <p:nvPr>
-            <p:ph type="sldNum" idx="5" sz="quarter"/>
-          </p:nvPr>
-        </p:nvSpPr>
-        <p:spPr/>
-      </p:sp>
-    </p:spTree>
-  </p:cSld>
-  <p:clrMapOvr>
-    <a:masterClrMapping/>
-  </p:clrMapOvr>
-</p:notes>
-</file>
-
-<file path=ppt/notesSlides/notesSlide56.xml><?xml version="1.0" encoding="utf-8"?>
-<p:notes xmlns:a="http://schemas.openxmlformats.org/drawingml/2006/main" xmlns:p="http://schemas.openxmlformats.org/presentationml/2006/main" xmlns:r="http://schemas.openxmlformats.org/officeDocument/2006/relationships">
-  <p:cSld>
-    <p:spTree>
-      <p:nvGrpSpPr>
-        <p:cNvPr id="1" name=""/>
-        <p:cNvGrpSpPr/>
-        <p:nvPr/>
-      </p:nvGrpSpPr>
-      <p:grpSpPr>
-        <a:xfrm>
-          <a:off x="0" y="0"/>
-          <a:ext cx="0" cy="0"/>
-          <a:chOff x="0" y="0"/>
-          <a:chExt cx="0" cy="0"/>
-        </a:xfrm>
-      </p:grpSpPr>
-      <p:sp>
-        <p:nvSpPr>
-          <p:cNvPr id="2" name="Slide Image Placeholder 1"/>
-          <p:cNvSpPr>
-            <a:spLocks noGrp="1"/>
-          </p:cNvSpPr>
-          <p:nvPr>
-            <p:ph type="sldImg" idx="2"/>
-          </p:nvPr>
-        </p:nvSpPr>
-        <p:spPr/>
-      </p:sp>
-      <p:sp>
-        <p:nvSpPr>
-          <p:cNvPr id="3" name="Notes Placeholder 2"/>
-          <p:cNvSpPr>
-            <a:spLocks noGrp="1"/>
-          </p:cNvSpPr>
-          <p:nvPr>
-            <p:ph type="body" idx="3" sz="quarter"/>
-          </p:nvPr>
-        </p:nvSpPr>
-        <p:spPr/>
-        <p:txBody>
-          <a:bodyPr/>
-          <a:lstStyle/>
-          <a:p>
-            <a:r>
-              <a:t>@pallotti oe=DC_IV</a:t>
-            </a:r>
-          </a:p>
-        </p:txBody>
-      </p:sp>
-      <p:sp>
-        <p:nvSpPr>
-          <p:cNvPr id="4" name="Slide Number Placeholder 3"/>
-          <p:cNvSpPr>
-            <a:spLocks noGrp="1"/>
-          </p:cNvSpPr>
-          <p:nvPr>
-            <p:ph type="sldNum" idx="5" sz="quarter"/>
-          </p:nvPr>
-        </p:nvSpPr>
-        <p:spPr/>
-      </p:sp>
-    </p:spTree>
-  </p:cSld>
-  <p:clrMapOvr>
-    <a:masterClrMapping/>
-  </p:clrMapOvr>
-</p:notes>
-</file>
-
-<file path=ppt/notesSlides/notesSlide57.xml><?xml version="1.0" encoding="utf-8"?>
-<p:notes xmlns:a="http://schemas.openxmlformats.org/drawingml/2006/main" xmlns:p="http://schemas.openxmlformats.org/presentationml/2006/main" xmlns:r="http://schemas.openxmlformats.org/officeDocument/2006/relationships">
-  <p:cSld>
-    <p:spTree>
-      <p:nvGrpSpPr>
-        <p:cNvPr id="1" name=""/>
-        <p:cNvGrpSpPr/>
-        <p:nvPr/>
-      </p:nvGrpSpPr>
-      <p:grpSpPr>
-        <a:xfrm>
-          <a:off x="0" y="0"/>
-          <a:ext cx="0" cy="0"/>
-          <a:chOff x="0" y="0"/>
-          <a:chExt cx="0" cy="0"/>
-        </a:xfrm>
-      </p:grpSpPr>
-      <p:sp>
-        <p:nvSpPr>
-          <p:cNvPr id="2" name="Slide Image Placeholder 1"/>
-          <p:cNvSpPr>
-            <a:spLocks noGrp="1"/>
-          </p:cNvSpPr>
-          <p:nvPr>
-            <p:ph type="sldImg" idx="2"/>
-          </p:nvPr>
-        </p:nvSpPr>
-        <p:spPr/>
-      </p:sp>
-      <p:sp>
-        <p:nvSpPr>
-          <p:cNvPr id="3" name="Notes Placeholder 2"/>
-          <p:cNvSpPr>
-            <a:spLocks noGrp="1"/>
-          </p:cNvSpPr>
-          <p:nvPr>
-            <p:ph type="body" idx="3" sz="quarter"/>
-          </p:nvPr>
-        </p:nvSpPr>
-        <p:spPr/>
-        <p:txBody>
-          <a:bodyPr/>
-          <a:lstStyle/>
-          <a:p>
-            <a:r>
-              <a:t>@pallotti oe=DC_IV</a:t>
-            </a:r>
-          </a:p>
-        </p:txBody>
-      </p:sp>
-      <p:sp>
-        <p:nvSpPr>
-          <p:cNvPr id="4" name="Slide Number Placeholder 3"/>
-          <p:cNvSpPr>
-            <a:spLocks noGrp="1"/>
-          </p:cNvSpPr>
-          <p:nvPr>
-            <p:ph type="sldNum" idx="5" sz="quarter"/>
-          </p:nvPr>
-        </p:nvSpPr>
-        <p:spPr/>
-      </p:sp>
-    </p:spTree>
-  </p:cSld>
-  <p:clrMapOvr>
-    <a:masterClrMapping/>
-  </p:clrMapOvr>
-</p:notes>
-</file>
-
-<file path=ppt/notesSlides/notesSlide58.xml><?xml version="1.0" encoding="utf-8"?>
-<p:notes xmlns:a="http://schemas.openxmlformats.org/drawingml/2006/main" xmlns:p="http://schemas.openxmlformats.org/presentationml/2006/main" xmlns:r="http://schemas.openxmlformats.org/officeDocument/2006/relationships">
-  <p:cSld>
-    <p:spTree>
-      <p:nvGrpSpPr>
-        <p:cNvPr id="1" name=""/>
-        <p:cNvGrpSpPr/>
-        <p:nvPr/>
-      </p:nvGrpSpPr>
-      <p:grpSpPr>
-        <a:xfrm>
-          <a:off x="0" y="0"/>
-          <a:ext cx="0" cy="0"/>
-          <a:chOff x="0" y="0"/>
-          <a:chExt cx="0" cy="0"/>
-        </a:xfrm>
-      </p:grpSpPr>
-      <p:sp>
-        <p:nvSpPr>
-          <p:cNvPr id="2" name="Slide Image Placeholder 1"/>
-          <p:cNvSpPr>
-            <a:spLocks noGrp="1"/>
-          </p:cNvSpPr>
-          <p:nvPr>
-            <p:ph type="sldImg" idx="2"/>
-          </p:nvPr>
-        </p:nvSpPr>
-        <p:spPr/>
-      </p:sp>
-      <p:sp>
-        <p:nvSpPr>
-          <p:cNvPr id="3" name="Notes Placeholder 2"/>
-          <p:cNvSpPr>
-            <a:spLocks noGrp="1"/>
-          </p:cNvSpPr>
-          <p:nvPr>
-            <p:ph type="body" idx="3" sz="quarter"/>
-          </p:nvPr>
-        </p:nvSpPr>
-        <p:spPr/>
-        <p:txBody>
-          <a:bodyPr/>
-          <a:lstStyle/>
-          <a:p>
-            <a:r>
-              <a:t>@pallotti oe=DC_IV</a:t>
-            </a:r>
-          </a:p>
-        </p:txBody>
-      </p:sp>
-      <p:sp>
-        <p:nvSpPr>
-          <p:cNvPr id="4" name="Slide Number Placeholder 3"/>
-          <p:cNvSpPr>
-            <a:spLocks noGrp="1"/>
-          </p:cNvSpPr>
-          <p:nvPr>
-            <p:ph type="sldNum" idx="5" sz="quarter"/>
-          </p:nvPr>
-        </p:nvSpPr>
-        <p:spPr/>
-      </p:sp>
-    </p:spTree>
-  </p:cSld>
-  <p:clrMapOvr>
-    <a:masterClrMapping/>
-  </p:clrMapOvr>
-</p:notes>
-</file>
-
-<file path=ppt/notesSlides/notesSlide59.xml><?xml version="1.0" encoding="utf-8"?>
-<p:notes xmlns:a="http://schemas.openxmlformats.org/drawingml/2006/main" xmlns:p="http://schemas.openxmlformats.org/presentationml/2006/main" xmlns:r="http://schemas.openxmlformats.org/officeDocument/2006/relationships">
-  <p:cSld>
-    <p:spTree>
-      <p:nvGrpSpPr>
-        <p:cNvPr id="1" name=""/>
-        <p:cNvGrpSpPr/>
-        <p:nvPr/>
-      </p:nvGrpSpPr>
-      <p:grpSpPr>
-        <a:xfrm>
-          <a:off x="0" y="0"/>
-          <a:ext cx="0" cy="0"/>
-          <a:chOff x="0" y="0"/>
-          <a:chExt cx="0" cy="0"/>
-        </a:xfrm>
-      </p:grpSpPr>
-      <p:sp>
-        <p:nvSpPr>
-          <p:cNvPr id="2" name="Slide Image Placeholder 1"/>
-          <p:cNvSpPr>
-            <a:spLocks noGrp="1"/>
-          </p:cNvSpPr>
-          <p:nvPr>
-            <p:ph type="sldImg" idx="2"/>
-          </p:nvPr>
-        </p:nvSpPr>
-        <p:spPr/>
-      </p:sp>
-      <p:sp>
-        <p:nvSpPr>
-          <p:cNvPr id="3" name="Notes Placeholder 2"/>
-          <p:cNvSpPr>
-            <a:spLocks noGrp="1"/>
-          </p:cNvSpPr>
-          <p:nvPr>
-            <p:ph type="body" idx="3" sz="quarter"/>
-          </p:nvPr>
-        </p:nvSpPr>
-        <p:spPr/>
-        <p:txBody>
-          <a:bodyPr/>
-          <a:lstStyle/>
-          <a:p>
-            <a:r>
-              <a:t>@pallotti oe=DC_IV</a:t>
-            </a:r>
-          </a:p>
-        </p:txBody>
-      </p:sp>
-      <p:sp>
-        <p:nvSpPr>
-          <p:cNvPr id="4" name="Slide Number Placeholder 3"/>
-          <p:cNvSpPr>
-            <a:spLocks noGrp="1"/>
-          </p:cNvSpPr>
-          <p:nvPr>
-            <p:ph type="sldNum" idx="5" sz="quarter"/>
-          </p:nvPr>
-        </p:nvSpPr>
-        <p:spPr/>
-      </p:sp>
-    </p:spTree>
-  </p:cSld>
-  <p:clrMapOvr>
-    <a:masterClrMapping/>
-  </p:clrMapOvr>
-</p:notes>
-</file>
-
 <file path=ppt/notesSlides/notesSlide6.xml><?xml version="1.0" encoding="utf-8"?>
 <p:notes xmlns:a="http://schemas.openxmlformats.org/drawingml/2006/main" xmlns:p="http://schemas.openxmlformats.org/presentationml/2006/main" xmlns:r="http://schemas.openxmlformats.org/officeDocument/2006/relationships">
   <p:cSld>
@@ -4337,426 +2486,6 @@
           <a:p>
             <a:r>
               <a:t>@pallotti grupo=canto:ato_penitencial</a:t>
-            </a:r>
-          </a:p>
-        </p:txBody>
-      </p:sp>
-      <p:sp>
-        <p:nvSpPr>
-          <p:cNvPr id="4" name="Slide Number Placeholder 3"/>
-          <p:cNvSpPr>
-            <a:spLocks noGrp="1"/>
-          </p:cNvSpPr>
-          <p:nvPr>
-            <p:ph type="sldNum" idx="5" sz="quarter"/>
-          </p:nvPr>
-        </p:nvSpPr>
-        <p:spPr/>
-      </p:sp>
-    </p:spTree>
-  </p:cSld>
-  <p:clrMapOvr>
-    <a:masterClrMapping/>
-  </p:clrMapOvr>
-</p:notes>
-</file>
-
-<file path=ppt/notesSlides/notesSlide60.xml><?xml version="1.0" encoding="utf-8"?>
-<p:notes xmlns:a="http://schemas.openxmlformats.org/drawingml/2006/main" xmlns:p="http://schemas.openxmlformats.org/presentationml/2006/main" xmlns:r="http://schemas.openxmlformats.org/officeDocument/2006/relationships">
-  <p:cSld>
-    <p:spTree>
-      <p:nvGrpSpPr>
-        <p:cNvPr id="1" name=""/>
-        <p:cNvGrpSpPr/>
-        <p:nvPr/>
-      </p:nvGrpSpPr>
-      <p:grpSpPr>
-        <a:xfrm>
-          <a:off x="0" y="0"/>
-          <a:ext cx="0" cy="0"/>
-          <a:chOff x="0" y="0"/>
-          <a:chExt cx="0" cy="0"/>
-        </a:xfrm>
-      </p:grpSpPr>
-      <p:sp>
-        <p:nvSpPr>
-          <p:cNvPr id="2" name="Slide Image Placeholder 1"/>
-          <p:cNvSpPr>
-            <a:spLocks noGrp="1"/>
-          </p:cNvSpPr>
-          <p:nvPr>
-            <p:ph type="sldImg" idx="2"/>
-          </p:nvPr>
-        </p:nvSpPr>
-        <p:spPr/>
-      </p:sp>
-      <p:sp>
-        <p:nvSpPr>
-          <p:cNvPr id="3" name="Notes Placeholder 2"/>
-          <p:cNvSpPr>
-            <a:spLocks noGrp="1"/>
-          </p:cNvSpPr>
-          <p:nvPr>
-            <p:ph type="body" idx="3" sz="quarter"/>
-          </p:nvPr>
-        </p:nvSpPr>
-        <p:spPr/>
-        <p:txBody>
-          <a:bodyPr/>
-          <a:lstStyle/>
-          <a:p>
-            <a:r>
-              <a:t>@pallotti oe=DC_IV</a:t>
-            </a:r>
-          </a:p>
-        </p:txBody>
-      </p:sp>
-      <p:sp>
-        <p:nvSpPr>
-          <p:cNvPr id="4" name="Slide Number Placeholder 3"/>
-          <p:cNvSpPr>
-            <a:spLocks noGrp="1"/>
-          </p:cNvSpPr>
-          <p:nvPr>
-            <p:ph type="sldNum" idx="5" sz="quarter"/>
-          </p:nvPr>
-        </p:nvSpPr>
-        <p:spPr/>
-      </p:sp>
-    </p:spTree>
-  </p:cSld>
-  <p:clrMapOvr>
-    <a:masterClrMapping/>
-  </p:clrMapOvr>
-</p:notes>
-</file>
-
-<file path=ppt/notesSlides/notesSlide61.xml><?xml version="1.0" encoding="utf-8"?>
-<p:notes xmlns:a="http://schemas.openxmlformats.org/drawingml/2006/main" xmlns:p="http://schemas.openxmlformats.org/presentationml/2006/main" xmlns:r="http://schemas.openxmlformats.org/officeDocument/2006/relationships">
-  <p:cSld>
-    <p:spTree>
-      <p:nvGrpSpPr>
-        <p:cNvPr id="1" name=""/>
-        <p:cNvGrpSpPr/>
-        <p:nvPr/>
-      </p:nvGrpSpPr>
-      <p:grpSpPr>
-        <a:xfrm>
-          <a:off x="0" y="0"/>
-          <a:ext cx="0" cy="0"/>
-          <a:chOff x="0" y="0"/>
-          <a:chExt cx="0" cy="0"/>
-        </a:xfrm>
-      </p:grpSpPr>
-      <p:sp>
-        <p:nvSpPr>
-          <p:cNvPr id="2" name="Slide Image Placeholder 1"/>
-          <p:cNvSpPr>
-            <a:spLocks noGrp="1"/>
-          </p:cNvSpPr>
-          <p:nvPr>
-            <p:ph type="sldImg" idx="2"/>
-          </p:nvPr>
-        </p:nvSpPr>
-        <p:spPr/>
-      </p:sp>
-      <p:sp>
-        <p:nvSpPr>
-          <p:cNvPr id="3" name="Notes Placeholder 2"/>
-          <p:cNvSpPr>
-            <a:spLocks noGrp="1"/>
-          </p:cNvSpPr>
-          <p:nvPr>
-            <p:ph type="body" idx="3" sz="quarter"/>
-          </p:nvPr>
-        </p:nvSpPr>
-        <p:spPr/>
-        <p:txBody>
-          <a:bodyPr/>
-          <a:lstStyle/>
-          <a:p>
-            <a:r>
-              <a:t>@pallotti oe=DC_IV</a:t>
-            </a:r>
-          </a:p>
-        </p:txBody>
-      </p:sp>
-      <p:sp>
-        <p:nvSpPr>
-          <p:cNvPr id="4" name="Slide Number Placeholder 3"/>
-          <p:cNvSpPr>
-            <a:spLocks noGrp="1"/>
-          </p:cNvSpPr>
-          <p:nvPr>
-            <p:ph type="sldNum" idx="5" sz="quarter"/>
-          </p:nvPr>
-        </p:nvSpPr>
-        <p:spPr/>
-      </p:sp>
-    </p:spTree>
-  </p:cSld>
-  <p:clrMapOvr>
-    <a:masterClrMapping/>
-  </p:clrMapOvr>
-</p:notes>
-</file>
-
-<file path=ppt/notesSlides/notesSlide62.xml><?xml version="1.0" encoding="utf-8"?>
-<p:notes xmlns:a="http://schemas.openxmlformats.org/drawingml/2006/main" xmlns:p="http://schemas.openxmlformats.org/presentationml/2006/main" xmlns:r="http://schemas.openxmlformats.org/officeDocument/2006/relationships">
-  <p:cSld>
-    <p:spTree>
-      <p:nvGrpSpPr>
-        <p:cNvPr id="1" name=""/>
-        <p:cNvGrpSpPr/>
-        <p:nvPr/>
-      </p:nvGrpSpPr>
-      <p:grpSpPr>
-        <a:xfrm>
-          <a:off x="0" y="0"/>
-          <a:ext cx="0" cy="0"/>
-          <a:chOff x="0" y="0"/>
-          <a:chExt cx="0" cy="0"/>
-        </a:xfrm>
-      </p:grpSpPr>
-      <p:sp>
-        <p:nvSpPr>
-          <p:cNvPr id="2" name="Slide Image Placeholder 1"/>
-          <p:cNvSpPr>
-            <a:spLocks noGrp="1"/>
-          </p:cNvSpPr>
-          <p:nvPr>
-            <p:ph type="sldImg" idx="2"/>
-          </p:nvPr>
-        </p:nvSpPr>
-        <p:spPr/>
-      </p:sp>
-      <p:sp>
-        <p:nvSpPr>
-          <p:cNvPr id="3" name="Notes Placeholder 2"/>
-          <p:cNvSpPr>
-            <a:spLocks noGrp="1"/>
-          </p:cNvSpPr>
-          <p:nvPr>
-            <p:ph type="body" idx="3" sz="quarter"/>
-          </p:nvPr>
-        </p:nvSpPr>
-        <p:spPr/>
-        <p:txBody>
-          <a:bodyPr/>
-          <a:lstStyle/>
-          <a:p>
-            <a:r>
-              <a:t>@pallotti oe=DC_IV</a:t>
-            </a:r>
-          </a:p>
-        </p:txBody>
-      </p:sp>
-      <p:sp>
-        <p:nvSpPr>
-          <p:cNvPr id="4" name="Slide Number Placeholder 3"/>
-          <p:cNvSpPr>
-            <a:spLocks noGrp="1"/>
-          </p:cNvSpPr>
-          <p:nvPr>
-            <p:ph type="sldNum" idx="5" sz="quarter"/>
-          </p:nvPr>
-        </p:nvSpPr>
-        <p:spPr/>
-      </p:sp>
-    </p:spTree>
-  </p:cSld>
-  <p:clrMapOvr>
-    <a:masterClrMapping/>
-  </p:clrMapOvr>
-</p:notes>
-</file>
-
-<file path=ppt/notesSlides/notesSlide63.xml><?xml version="1.0" encoding="utf-8"?>
-<p:notes xmlns:a="http://schemas.openxmlformats.org/drawingml/2006/main" xmlns:p="http://schemas.openxmlformats.org/presentationml/2006/main" xmlns:r="http://schemas.openxmlformats.org/officeDocument/2006/relationships">
-  <p:cSld>
-    <p:spTree>
-      <p:nvGrpSpPr>
-        <p:cNvPr id="1" name=""/>
-        <p:cNvGrpSpPr/>
-        <p:nvPr/>
-      </p:nvGrpSpPr>
-      <p:grpSpPr>
-        <a:xfrm>
-          <a:off x="0" y="0"/>
-          <a:ext cx="0" cy="0"/>
-          <a:chOff x="0" y="0"/>
-          <a:chExt cx="0" cy="0"/>
-        </a:xfrm>
-      </p:grpSpPr>
-      <p:sp>
-        <p:nvSpPr>
-          <p:cNvPr id="2" name="Slide Image Placeholder 1"/>
-          <p:cNvSpPr>
-            <a:spLocks noGrp="1"/>
-          </p:cNvSpPr>
-          <p:nvPr>
-            <p:ph type="sldImg" idx="2"/>
-          </p:nvPr>
-        </p:nvSpPr>
-        <p:spPr/>
-      </p:sp>
-      <p:sp>
-        <p:nvSpPr>
-          <p:cNvPr id="3" name="Notes Placeholder 2"/>
-          <p:cNvSpPr>
-            <a:spLocks noGrp="1"/>
-          </p:cNvSpPr>
-          <p:nvPr>
-            <p:ph type="body" idx="3" sz="quarter"/>
-          </p:nvPr>
-        </p:nvSpPr>
-        <p:spPr/>
-        <p:txBody>
-          <a:bodyPr/>
-          <a:lstStyle/>
-          <a:p>
-            <a:r>
-              <a:t>@pallotti oe=DC_IV</a:t>
-            </a:r>
-          </a:p>
-        </p:txBody>
-      </p:sp>
-      <p:sp>
-        <p:nvSpPr>
-          <p:cNvPr id="4" name="Slide Number Placeholder 3"/>
-          <p:cNvSpPr>
-            <a:spLocks noGrp="1"/>
-          </p:cNvSpPr>
-          <p:nvPr>
-            <p:ph type="sldNum" idx="5" sz="quarter"/>
-          </p:nvPr>
-        </p:nvSpPr>
-        <p:spPr/>
-      </p:sp>
-    </p:spTree>
-  </p:cSld>
-  <p:clrMapOvr>
-    <a:masterClrMapping/>
-  </p:clrMapOvr>
-</p:notes>
-</file>
-
-<file path=ppt/notesSlides/notesSlide64.xml><?xml version="1.0" encoding="utf-8"?>
-<p:notes xmlns:a="http://schemas.openxmlformats.org/drawingml/2006/main" xmlns:p="http://schemas.openxmlformats.org/presentationml/2006/main" xmlns:r="http://schemas.openxmlformats.org/officeDocument/2006/relationships">
-  <p:cSld>
-    <p:spTree>
-      <p:nvGrpSpPr>
-        <p:cNvPr id="1" name=""/>
-        <p:cNvGrpSpPr/>
-        <p:nvPr/>
-      </p:nvGrpSpPr>
-      <p:grpSpPr>
-        <a:xfrm>
-          <a:off x="0" y="0"/>
-          <a:ext cx="0" cy="0"/>
-          <a:chOff x="0" y="0"/>
-          <a:chExt cx="0" cy="0"/>
-        </a:xfrm>
-      </p:grpSpPr>
-      <p:sp>
-        <p:nvSpPr>
-          <p:cNvPr id="2" name="Slide Image Placeholder 1"/>
-          <p:cNvSpPr>
-            <a:spLocks noGrp="1"/>
-          </p:cNvSpPr>
-          <p:nvPr>
-            <p:ph type="sldImg" idx="2"/>
-          </p:nvPr>
-        </p:nvSpPr>
-        <p:spPr/>
-      </p:sp>
-      <p:sp>
-        <p:nvSpPr>
-          <p:cNvPr id="3" name="Notes Placeholder 2"/>
-          <p:cNvSpPr>
-            <a:spLocks noGrp="1"/>
-          </p:cNvSpPr>
-          <p:nvPr>
-            <p:ph type="body" idx="3" sz="quarter"/>
-          </p:nvPr>
-        </p:nvSpPr>
-        <p:spPr/>
-        <p:txBody>
-          <a:bodyPr/>
-          <a:lstStyle/>
-          <a:p>
-            <a:r>
-              <a:t>@pallotti oe=DC_IV</a:t>
-            </a:r>
-          </a:p>
-        </p:txBody>
-      </p:sp>
-      <p:sp>
-        <p:nvSpPr>
-          <p:cNvPr id="4" name="Slide Number Placeholder 3"/>
-          <p:cNvSpPr>
-            <a:spLocks noGrp="1"/>
-          </p:cNvSpPr>
-          <p:nvPr>
-            <p:ph type="sldNum" idx="5" sz="quarter"/>
-          </p:nvPr>
-        </p:nvSpPr>
-        <p:spPr/>
-      </p:sp>
-    </p:spTree>
-  </p:cSld>
-  <p:clrMapOvr>
-    <a:masterClrMapping/>
-  </p:clrMapOvr>
-</p:notes>
-</file>
-
-<file path=ppt/notesSlides/notesSlide65.xml><?xml version="1.0" encoding="utf-8"?>
-<p:notes xmlns:a="http://schemas.openxmlformats.org/drawingml/2006/main" xmlns:p="http://schemas.openxmlformats.org/presentationml/2006/main" xmlns:r="http://schemas.openxmlformats.org/officeDocument/2006/relationships">
-  <p:cSld>
-    <p:spTree>
-      <p:nvGrpSpPr>
-        <p:cNvPr id="1" name=""/>
-        <p:cNvGrpSpPr/>
-        <p:nvPr/>
-      </p:nvGrpSpPr>
-      <p:grpSpPr>
-        <a:xfrm>
-          <a:off x="0" y="0"/>
-          <a:ext cx="0" cy="0"/>
-          <a:chOff x="0" y="0"/>
-          <a:chExt cx="0" cy="0"/>
-        </a:xfrm>
-      </p:grpSpPr>
-      <p:sp>
-        <p:nvSpPr>
-          <p:cNvPr id="2" name="Slide Image Placeholder 1"/>
-          <p:cNvSpPr>
-            <a:spLocks noGrp="1"/>
-          </p:cNvSpPr>
-          <p:nvPr>
-            <p:ph type="sldImg" idx="2"/>
-          </p:nvPr>
-        </p:nvSpPr>
-        <p:spPr/>
-      </p:sp>
-      <p:sp>
-        <p:nvSpPr>
-          <p:cNvPr id="3" name="Notes Placeholder 2"/>
-          <p:cNvSpPr>
-            <a:spLocks noGrp="1"/>
-          </p:cNvSpPr>
-          <p:nvPr>
-            <p:ph type="body" idx="3" sz="quarter"/>
-          </p:nvPr>
-        </p:nvSpPr>
-        <p:spPr/>
-        <p:txBody>
-          <a:bodyPr/>
-          <a:lstStyle/>
-          <a:p>
-            <a:r>
-              <a:t>@pallotti oe=DC_IV</a:t>
             </a:r>
           </a:p>
         </p:txBody>
@@ -5947,6 +3676,76 @@
           <a:p>
             <a:r>
               <a:t>@pallotti fixo</a:t>
+            </a:r>
+          </a:p>
+        </p:txBody>
+      </p:sp>
+      <p:sp>
+        <p:nvSpPr>
+          <p:cNvPr id="4" name="Slide Number Placeholder 3"/>
+          <p:cNvSpPr>
+            <a:spLocks noGrp="1"/>
+          </p:cNvSpPr>
+          <p:nvPr>
+            <p:ph type="sldNum" idx="5" sz="quarter"/>
+          </p:nvPr>
+        </p:nvSpPr>
+        <p:spPr/>
+      </p:sp>
+    </p:spTree>
+  </p:cSld>
+  <p:clrMapOvr>
+    <a:masterClrMapping/>
+  </p:clrMapOvr>
+</p:notes>
+</file>
+
+<file path=ppt/notesSlides/notesSlide81.xml><?xml version="1.0" encoding="utf-8"?>
+<p:notes xmlns:a="http://schemas.openxmlformats.org/drawingml/2006/main" xmlns:p="http://schemas.openxmlformats.org/presentationml/2006/main" xmlns:r="http://schemas.openxmlformats.org/officeDocument/2006/relationships">
+  <p:cSld>
+    <p:spTree>
+      <p:nvGrpSpPr>
+        <p:cNvPr id="1" name=""/>
+        <p:cNvGrpSpPr/>
+        <p:nvPr/>
+      </p:nvGrpSpPr>
+      <p:grpSpPr>
+        <a:xfrm>
+          <a:off x="0" y="0"/>
+          <a:ext cx="0" cy="0"/>
+          <a:chOff x="0" y="0"/>
+          <a:chExt cx="0" cy="0"/>
+        </a:xfrm>
+      </p:grpSpPr>
+      <p:sp>
+        <p:nvSpPr>
+          <p:cNvPr id="2" name="Slide Image Placeholder 1"/>
+          <p:cNvSpPr>
+            <a:spLocks noGrp="1"/>
+          </p:cNvSpPr>
+          <p:nvPr>
+            <p:ph type="sldImg" idx="2"/>
+          </p:nvPr>
+        </p:nvSpPr>
+        <p:spPr/>
+      </p:sp>
+      <p:sp>
+        <p:nvSpPr>
+          <p:cNvPr id="3" name="Notes Placeholder 2"/>
+          <p:cNvSpPr>
+            <a:spLocks noGrp="1"/>
+          </p:cNvSpPr>
+          <p:nvPr>
+            <p:ph type="body" idx="3" sz="quarter"/>
+          </p:nvPr>
+        </p:nvSpPr>
+        <p:spPr/>
+        <p:txBody>
+          <a:bodyPr/>
+          <a:lstStyle/>
+          <a:p>
+            <a:r>
+              <a:t>@pallotti oe=slot</a:t>
             </a:r>
           </a:p>
         </p:txBody>
@@ -17741,7 +15540,7 @@
 </file>
 
 <file path=ppt/slides/slide34.xml><?xml version="1.0" encoding="utf-8"?>
-<p:sld xmlns:a="http://schemas.openxmlformats.org/drawingml/2006/main" xmlns:p="http://schemas.openxmlformats.org/presentationml/2006/main" xmlns:r="http://schemas.openxmlformats.org/officeDocument/2006/relationships" xmlns:p14="http://schemas.microsoft.com/office/powerpoint/2010/main" xmlns:p15="http://schemas.microsoft.com/office/powerpoint/2012/main" xmlns:mc="http://schemas.openxmlformats.org/markup-compatibility/2006">
+<p:sld xmlns:a="http://schemas.openxmlformats.org/drawingml/2006/main" xmlns:p="http://schemas.openxmlformats.org/presentationml/2006/main" xmlns:r="http://schemas.openxmlformats.org/officeDocument/2006/relationships">
   <p:cSld>
     <p:bg>
       <p:bgPr>
@@ -17822,6 +15621,61 @@
       <p:pic>
         <p:nvPicPr>
           <p:cNvPr id="154" name="Espaço Reservado para Conteúdo 4"/>
+          <p:cNvPicPr/>
+          <p:nvPr/>
+        </p:nvPicPr>
+        <p:blipFill>
+          <a:blip r:embed="rId2"/>
+          <a:srcRect l="0" t="7" r="0" b="7"/>
+          <a:stretch/>
+        </p:blipFill>
+        <p:spPr>
+          <a:xfrm>
+            <a:off x="0" y="1440"/>
+            <a:ext cx="12202200" cy="6860160"/>
+          </a:xfrm>
+          <a:prstGeom prst="rect">
+            <a:avLst/>
+          </a:prstGeom>
+          <a:noFill/>
+          <a:ln w="0">
+            <a:noFill/>
+          </a:ln>
+        </p:spPr>
+      </p:pic>
+    </p:spTree>
+  </p:cSld>
+  <mc:AlternateContent xmlns:mc="http://schemas.openxmlformats.org/markup-compatibility/2006" xmlns:p14="http://schemas.microsoft.com/office/powerpoint/2010/main">
+    <mc:Choice Requires="p14">
+      <p:transition spd="slow" p14:dur="2000"/>
+    </mc:Choice>
+    <mc:Fallback>
+      <p:transition spd="slow"/>
+    </mc:Fallback>
+  </mc:AlternateContent>
+</p:sld>
+</file>
+
+<file path=ppt/slides/slide35.xml><?xml version="1.0" encoding="utf-8"?>
+<p:sld xmlns:a="http://schemas.openxmlformats.org/drawingml/2006/main" xmlns:p="http://schemas.openxmlformats.org/presentationml/2006/main" xmlns:r="http://schemas.openxmlformats.org/officeDocument/2006/relationships" xmlns:p14="http://schemas.microsoft.com/office/powerpoint/2010/main" xmlns:p15="http://schemas.microsoft.com/office/powerpoint/2012/main" xmlns:mc="http://schemas.openxmlformats.org/markup-compatibility/2006">
+  <p:cSld>
+    <p:spTree>
+      <p:nvGrpSpPr>
+        <p:cNvPr id="1" name=""/>
+        <p:cNvGrpSpPr/>
+        <p:nvPr/>
+      </p:nvGrpSpPr>
+      <p:grpSpPr>
+        <a:xfrm>
+          <a:off x="0" y="0"/>
+          <a:ext cx="0" cy="0"/>
+          <a:chOff x="0" y="0"/>
+          <a:chExt cx="0" cy="0"/>
+        </a:xfrm>
+      </p:grpSpPr>
+      <p:pic>
+        <p:nvPicPr>
+          <p:cNvPr id="170" name="Espaço Reservado para Conteúdo 4"/>
           <p:cNvPicPr/>
           <p:nvPr/>
         </p:nvPicPr>
@@ -17857,7 +15711,7 @@
 </p:sld>
 </file>
 
-<file path=ppt/slides/slide35.xml><?xml version="1.0" encoding="utf-8"?>
+<file path=ppt/slides/slide36.xml><?xml version="1.0" encoding="utf-8"?>
 <p:sld xmlns:a="http://schemas.openxmlformats.org/drawingml/2006/main" xmlns:p="http://schemas.openxmlformats.org/presentationml/2006/main" xmlns:r="http://schemas.openxmlformats.org/officeDocument/2006/relationships" xmlns:p14="http://schemas.microsoft.com/office/powerpoint/2010/main" xmlns:p15="http://schemas.microsoft.com/office/powerpoint/2012/main" xmlns:mc="http://schemas.openxmlformats.org/markup-compatibility/2006">
   <p:cSld>
     <p:spTree>
@@ -17876,7 +15730,7 @@
       </p:grpSpPr>
       <p:sp>
         <p:nvSpPr>
-          <p:cNvPr id="155" name="PlaceHolder 1"/>
+          <p:cNvPr id="171" name="PlaceHolder 1"/>
           <p:cNvSpPr>
             <a:spLocks noGrp="1"/>
           </p:cNvSpPr>
@@ -17931,7 +15785,7 @@
                 <a:uFillTx/>
                 <a:latin typeface="Aptos"/>
               </a:rPr>
-              <a:t> </a:t>
+              <a:t> </a:t>
             </a:r>
             <a:r>
               <a:rPr lang="pt-BR" sz="7200" b="1" u="none" strike="noStrike">
@@ -17943,7 +15797,7 @@
                 <a:latin typeface="Aptos"/>
                 <a:ea typeface="Aptos"/>
               </a:rPr>
-              <a:t>Enviai o vosso Espírito Santo!</a:t>
+              <a:t>Vosso é o Reino, o poder e a glória para sempre! </a:t>
             </a:r>
             <a:endParaRPr lang="de-DE" sz="7200" b="0" u="none" strike="noStrike">
               <a:solidFill>
@@ -17956,123 +15810,6 @@
           </a:p>
         </p:txBody>
       </p:sp>
-    </p:spTree>
-  </p:cSld>
-  <mc:AlternateContent>
-    <mc:Choice Requires="p14">
-      <p:transition spd="slow" p14:dur="2000"/>
-    </mc:Choice>
-    <mc:Fallback>
-      <p:transition spd="slow"/>
-    </mc:Fallback>
-  </mc:AlternateContent>
-</p:sld>
-</file>
-
-<file path=ppt/slides/slide36.xml><?xml version="1.0" encoding="utf-8"?>
-<p:sld xmlns:a="http://schemas.openxmlformats.org/drawingml/2006/main" xmlns:p="http://schemas.openxmlformats.org/presentationml/2006/main" xmlns:r="http://schemas.openxmlformats.org/officeDocument/2006/relationships" xmlns:p14="http://schemas.microsoft.com/office/powerpoint/2010/main" xmlns:p15="http://schemas.microsoft.com/office/powerpoint/2012/main" xmlns:mc="http://schemas.openxmlformats.org/markup-compatibility/2006">
-  <p:cSld>
-    <p:bg>
-      <p:bgPr>
-        <a:solidFill>
-          <a:schemeClr val="lt1"/>
-        </a:solidFill>
-      </p:bgPr>
-    </p:bg>
-    <p:spTree>
-      <p:nvGrpSpPr>
-        <p:cNvPr id="1" name=""/>
-        <p:cNvGrpSpPr/>
-        <p:nvPr/>
-      </p:nvGrpSpPr>
-      <p:grpSpPr>
-        <a:xfrm>
-          <a:off x="0" y="0"/>
-          <a:ext cx="0" cy="0"/>
-          <a:chOff x="0" y="0"/>
-          <a:chExt cx="0" cy="0"/>
-        </a:xfrm>
-      </p:grpSpPr>
-      <p:sp>
-        <p:nvSpPr>
-          <p:cNvPr id="156" name="Rectangle 9">
-            <a:extLst>
-              <a:ext uri="{C183D7F6-B498-43B3-948B-1728B52AA6E4}">
-                <adec:decorative xmlns:adec="http://schemas.microsoft.com/office/drawing/2017/decorative" val="1"/>
-              </a:ext>
-            </a:extLst>
-          </p:cNvPr>
-          <p:cNvSpPr/>
-          <p:nvPr/>
-        </p:nvSpPr>
-        <p:spPr>
-          <a:xfrm>
-            <a:off x="1440" y="0"/>
-            <a:ext cx="12188520" cy="6857640"/>
-          </a:xfrm>
-          <a:prstGeom prst="rect">
-            <a:avLst/>
-          </a:prstGeom>
-          <a:noFill/>
-          <a:ln>
-            <a:noFill/>
-          </a:ln>
-        </p:spPr>
-        <p:style>
-          <a:lnRef idx="2">
-            <a:schemeClr val="accent1">
-              <a:shade val="50000"/>
-            </a:schemeClr>
-          </a:lnRef>
-          <a:fillRef idx="1">
-            <a:schemeClr val="accent1"/>
-          </a:fillRef>
-          <a:effectRef idx="0">
-            <a:schemeClr val="accent1"/>
-          </a:effectRef>
-          <a:fontRef idx="minor"/>
-        </p:style>
-        <p:txBody>
-          <a:bodyPr lIns="90000" tIns="45000" rIns="90000" bIns="45000" anchor="ctr">
-            <a:noAutofit/>
-          </a:bodyPr>
-          <a:p>
-            <a:endParaRPr lang="en-US" sz="1800" b="0" u="none" strike="noStrike">
-              <a:solidFill>
-                <a:schemeClr val="lt1"/>
-              </a:solidFill>
-              <a:effectLst/>
-              <a:uFillTx/>
-              <a:latin typeface="Aptos"/>
-            </a:endParaRPr>
-          </a:p>
-        </p:txBody>
-      </p:sp>
-      <p:pic>
-        <p:nvPicPr>
-          <p:cNvPr id="157" name="Espaço Reservado para Conteúdo 4"/>
-          <p:cNvPicPr/>
-          <p:nvPr/>
-        </p:nvPicPr>
-        <p:blipFill>
-          <a:blip r:embed="rId1"/>
-          <a:srcRect l="0" t="7" r="0" b="7"/>
-          <a:stretch/>
-        </p:blipFill>
-        <p:spPr>
-          <a:xfrm>
-            <a:off x="0" y="1440"/>
-            <a:ext cx="12202200" cy="6860160"/>
-          </a:xfrm>
-          <a:prstGeom prst="rect">
-            <a:avLst/>
-          </a:prstGeom>
-          <a:noFill/>
-          <a:ln w="0">
-            <a:noFill/>
-          </a:ln>
-        </p:spPr>
-      </p:pic>
     </p:spTree>
   </p:cSld>
   <mc:AlternateContent>
@@ -18105,7 +15842,7 @@
       </p:grpSpPr>
       <p:sp>
         <p:nvSpPr>
-          <p:cNvPr id="158" name="PlaceHolder 1"/>
+          <p:cNvPr id="172" name="PlaceHolder 1"/>
           <p:cNvSpPr>
             <a:spLocks noGrp="1"/>
           </p:cNvSpPr>
@@ -18115,8 +15852,8 @@
         </p:nvSpPr>
         <p:spPr>
           <a:xfrm>
-            <a:off x="838080" y="403920"/>
-            <a:ext cx="10515240" cy="6125760"/>
+            <a:off x="838080" y="1351800"/>
+            <a:ext cx="10515240" cy="4825080"/>
           </a:xfrm>
           <a:prstGeom prst="rect">
             <a:avLst/>
@@ -18140,17 +15877,46 @@
                 <a:tab pos="0" algn="l"/>
               </a:tabLst>
             </a:pPr>
+            <a:endParaRPr lang="de-DE" sz="7200" b="0" u="none" strike="noStrike">
+              <a:solidFill>
+                <a:schemeClr val="dk1"/>
+              </a:solidFill>
+              <a:effectLst/>
+              <a:uFillTx/>
+              <a:latin typeface="Aptos"/>
+            </a:endParaRPr>
+          </a:p>
+          <a:p>
+            <a:pPr indent="0" algn="ctr" defTabSz="914400">
+              <a:lnSpc>
+                <a:spcPct val="100000"/>
+              </a:lnSpc>
+              <a:buNone/>
+              <a:tabLst>
+                <a:tab pos="0" algn="l"/>
+              </a:tabLst>
+            </a:pPr>
             <a:r>
               <a:rPr lang="pt-BR" sz="7200" b="1" u="none" strike="noStrike">
                 <a:solidFill>
+                  <a:srgbClr val="FF0000"/>
+                </a:solidFill>
+                <a:effectLst/>
+                <a:uFillTx/>
+                <a:latin typeface="Aptos"/>
+              </a:rPr>
+              <a:t>R:</a:t>
+            </a:r>
+            <a:r>
+              <a:rPr lang="pt-BR" sz="7200" b="1" u="none" strike="noStrike">
+                <a:solidFill>
                   <a:schemeClr val="dk1"/>
                 </a:solidFill>
                 <a:effectLst/>
                 <a:uFillTx/>
                 <a:latin typeface="Aptos"/>
-                <a:ea typeface="Aptos"/>
               </a:rPr>
-              <a:t>{{liturgia.misterio_fe}}</a:t>
+              <a:t> Amém!</a:t>
             </a:r>
             <a:endParaRPr lang="de-DE" sz="7200" b="0" u="none" strike="noStrike">
               <a:solidFill>
@@ -18179,13 +15945,6 @@
 <file path=ppt/slides/slide38.xml><?xml version="1.0" encoding="utf-8"?>
 <p:sld xmlns:a="http://schemas.openxmlformats.org/drawingml/2006/main" xmlns:p="http://schemas.openxmlformats.org/presentationml/2006/main" xmlns:r="http://schemas.openxmlformats.org/officeDocument/2006/relationships" xmlns:p14="http://schemas.microsoft.com/office/powerpoint/2010/main" xmlns:p15="http://schemas.microsoft.com/office/powerpoint/2012/main" xmlns:mc="http://schemas.openxmlformats.org/markup-compatibility/2006">
   <p:cSld>
-    <p:bg>
-      <p:bgPr>
-        <a:solidFill>
-          <a:schemeClr val="lt1"/>
-        </a:solidFill>
-      </p:bgPr>
-    </p:bg>
     <p:spTree>
       <p:nvGrpSpPr>
         <p:cNvPr id="1" name=""/>
@@ -18202,74 +15961,18 @@
       </p:grpSpPr>
       <p:sp>
         <p:nvSpPr>
-          <p:cNvPr id="159" name="Rectangle 9">
-            <a:extLst>
-              <a:ext uri="{C183D7F6-B498-43B3-948B-1728B52AA6E4}">
-                <adec:decorative xmlns:adec="http://schemas.microsoft.com/office/drawing/2017/decorative" val="1"/>
-              </a:ext>
-            </a:extLst>
-          </p:cNvPr>
-          <p:cNvSpPr/>
-          <p:nvPr/>
+          <p:cNvPr id="173" name="PlaceHolder 1"/>
+          <p:cNvSpPr>
+            <a:spLocks noGrp="1"/>
+          </p:cNvSpPr>
+          <p:nvPr>
+            <p:ph/>
+          </p:nvPr>
         </p:nvSpPr>
         <p:spPr>
           <a:xfrm>
-            <a:off x="1440" y="0"/>
-            <a:ext cx="12188520" cy="6857640"/>
-          </a:xfrm>
-          <a:prstGeom prst="rect">
-            <a:avLst/>
-          </a:prstGeom>
-          <a:noFill/>
-          <a:ln>
-            <a:noFill/>
-          </a:ln>
-        </p:spPr>
-        <p:style>
-          <a:lnRef idx="2">
-            <a:schemeClr val="accent1">
-              <a:shade val="50000"/>
-            </a:schemeClr>
-          </a:lnRef>
-          <a:fillRef idx="1">
-            <a:schemeClr val="accent1"/>
-          </a:fillRef>
-          <a:effectRef idx="0">
-            <a:schemeClr val="accent1"/>
-          </a:effectRef>
-          <a:fontRef idx="minor"/>
-        </p:style>
-        <p:txBody>
-          <a:bodyPr lIns="90000" tIns="45000" rIns="90000" bIns="45000" anchor="ctr">
-            <a:noAutofit/>
-          </a:bodyPr>
-          <a:p>
-            <a:endParaRPr lang="en-US" sz="1800" b="0" u="none" strike="noStrike">
-              <a:solidFill>
-                <a:schemeClr val="lt1"/>
-              </a:solidFill>
-              <a:effectLst/>
-              <a:uFillTx/>
-              <a:latin typeface="Aptos"/>
-            </a:endParaRPr>
-          </a:p>
-        </p:txBody>
-      </p:sp>
-      <p:pic>
-        <p:nvPicPr>
-          <p:cNvPr id="160" name="Espaço Reservado para Conteúdo 4"/>
-          <p:cNvPicPr/>
-          <p:nvPr/>
-        </p:nvPicPr>
-        <p:blipFill>
-          <a:blip r:embed="rId1"/>
-          <a:srcRect l="0" t="7" r="0" b="7"/>
-          <a:stretch/>
-        </p:blipFill>
-        <p:spPr>
-          <a:xfrm>
-            <a:off x="0" y="1440"/>
-            <a:ext cx="12202200" cy="6860160"/>
+            <a:off x="838080" y="1825560"/>
+            <a:ext cx="10515240" cy="4350960"/>
           </a:xfrm>
           <a:prstGeom prst="rect">
             <a:avLst/>
@@ -18279,7 +15982,65 @@
             <a:noFill/>
           </a:ln>
         </p:spPr>
-      </p:pic>
+        <p:txBody>
+          <a:bodyPr lIns="91440" tIns="45720" rIns="91440" bIns="45720" anchor="t">
+            <a:normAutofit/>
+          </a:bodyPr>
+          <a:p>
+            <a:pPr indent="0" algn="ctr" defTabSz="914400">
+              <a:lnSpc>
+                <a:spcPct val="100000"/>
+              </a:lnSpc>
+              <a:buNone/>
+              <a:tabLst>
+                <a:tab pos="0" algn="l"/>
+              </a:tabLst>
+            </a:pPr>
+            <a:r>
+              <a:rPr lang="pt-BR" sz="7200" b="1" u="none" strike="noStrike">
+                <a:solidFill>
+                  <a:srgbClr val="FF0000"/>
+                </a:solidFill>
+                <a:effectLst/>
+                <a:uFillTx/>
+                <a:latin typeface="Aptos"/>
+              </a:rPr>
+              <a:t>R:</a:t>
+            </a:r>
+            <a:r>
+              <a:rPr lang="pt-BR" sz="7200" b="1" u="none" strike="noStrike">
+                <a:solidFill>
+                  <a:schemeClr val="dk1"/>
+                </a:solidFill>
+                <a:effectLst/>
+                <a:uFillTx/>
+                <a:latin typeface="Aptos"/>
+              </a:rPr>
+              <a:t> </a:t>
+            </a:r>
+            <a:r>
+              <a:rPr lang="pt-BR" sz="7200" b="1" u="none" strike="noStrike">
+                <a:solidFill>
+                  <a:schemeClr val="dk1"/>
+                </a:solidFill>
+                <a:effectLst/>
+                <a:uFillTx/>
+                <a:latin typeface="Aptos"/>
+                <a:ea typeface="Aptos"/>
+              </a:rPr>
+              <a:t>O amor de Cristo nos uniu!</a:t>
+            </a:r>
+            <a:endParaRPr lang="de-DE" sz="7200" b="0" u="none" strike="noStrike">
+              <a:solidFill>
+                <a:schemeClr val="dk1"/>
+              </a:solidFill>
+              <a:effectLst/>
+              <a:uFillTx/>
+              <a:latin typeface="Aptos"/>
+            </a:endParaRPr>
+          </a:p>
+        </p:txBody>
+      </p:sp>
     </p:spTree>
   </p:cSld>
   <mc:AlternateContent>
@@ -18310,20 +16071,21 @@
           <a:chExt cx="0" cy="0"/>
         </a:xfrm>
       </p:grpSpPr>
-      <p:sp>
-        <p:nvSpPr>
-          <p:cNvPr id="161" name="PlaceHolder 1"/>
-          <p:cNvSpPr>
-            <a:spLocks noGrp="1"/>
-          </p:cNvSpPr>
-          <p:nvPr>
-            <p:ph/>
-          </p:nvPr>
-        </p:nvSpPr>
+      <p:pic>
+        <p:nvPicPr>
+          <p:cNvPr id="174" name="Espaço Reservado para Conteúdo 4"/>
+          <p:cNvPicPr/>
+          <p:nvPr/>
+        </p:nvPicPr>
+        <p:blipFill>
+          <a:blip r:embed="rId1"/>
+          <a:srcRect l="0" t="7" r="0" b="7"/>
+          <a:stretch/>
+        </p:blipFill>
         <p:spPr>
           <a:xfrm>
-            <a:off x="838080" y="1825560"/>
-            <a:ext cx="10515240" cy="4350960"/>
+            <a:off x="0" y="1440"/>
+            <a:ext cx="12202200" cy="6860160"/>
           </a:xfrm>
           <a:prstGeom prst="rect">
             <a:avLst/>
@@ -18333,65 +16095,7 @@
             <a:noFill/>
           </a:ln>
         </p:spPr>
-        <p:txBody>
-          <a:bodyPr lIns="91440" tIns="45720" rIns="91440" bIns="45720" anchor="t">
-            <a:normAutofit/>
-          </a:bodyPr>
-          <a:p>
-            <a:pPr indent="0" algn="ctr" defTabSz="914400">
-              <a:lnSpc>
-                <a:spcPct val="100000"/>
-              </a:lnSpc>
-              <a:buNone/>
-              <a:tabLst>
-                <a:tab pos="0" algn="l"/>
-              </a:tabLst>
-            </a:pPr>
-            <a:r>
-              <a:rPr lang="pt-BR" sz="7200" b="1" u="none" strike="noStrike">
-                <a:solidFill>
-                  <a:srgbClr val="FF0000"/>
-                </a:solidFill>
-                <a:effectLst/>
-                <a:uFillTx/>
-                <a:latin typeface="Aptos"/>
-              </a:rPr>
-              <a:t>R:</a:t>
-            </a:r>
-            <a:r>
-              <a:rPr lang="pt-BR" sz="7200" b="1" u="none" strike="noStrike">
-                <a:solidFill>
-                  <a:schemeClr val="dk1"/>
-                </a:solidFill>
-                <a:effectLst/>
-                <a:uFillTx/>
-                <a:latin typeface="Aptos"/>
-              </a:rPr>
-              <a:t> </a:t>
-            </a:r>
-            <a:r>
-              <a:rPr lang="pt-BR" sz="7200" b="1" u="none" strike="noStrike">
-                <a:solidFill>
-                  <a:schemeClr val="dk1"/>
-                </a:solidFill>
-                <a:effectLst/>
-                <a:uFillTx/>
-                <a:latin typeface="Aptos"/>
-                <a:ea typeface="Aptos"/>
-              </a:rPr>
-              <a:t>Aceitai, ó Senhor, a nossa oferta! </a:t>
-            </a:r>
-            <a:endParaRPr lang="de-DE" sz="7200" b="0" u="none" strike="noStrike">
-              <a:solidFill>
-                <a:schemeClr val="dk1"/>
-              </a:solidFill>
-              <a:effectLst/>
-              <a:uFillTx/>
-              <a:latin typeface="Aptos"/>
-            </a:endParaRPr>
-          </a:p>
-        </p:txBody>
-      </p:sp>
+      </p:pic>
     </p:spTree>
   </p:cSld>
   <mc:AlternateContent>
@@ -18539,21 +16243,20 @@
           <a:chExt cx="0" cy="0"/>
         </a:xfrm>
       </p:grpSpPr>
-      <p:pic>
-        <p:nvPicPr>
-          <p:cNvPr id="162" name="Espaço Reservado para Conteúdo 4"/>
-          <p:cNvPicPr/>
-          <p:nvPr/>
-        </p:nvPicPr>
-        <p:blipFill>
-          <a:blip r:embed="rId1"/>
-          <a:srcRect l="0" t="7" r="0" b="7"/>
-          <a:stretch/>
-        </p:blipFill>
+      <p:sp>
+        <p:nvSpPr>
+          <p:cNvPr id="175" name="PlaceHolder 1"/>
+          <p:cNvSpPr>
+            <a:spLocks noGrp="1"/>
+          </p:cNvSpPr>
+          <p:nvPr>
+            <p:ph/>
+          </p:nvPr>
+        </p:nvSpPr>
         <p:spPr>
           <a:xfrm>
-            <a:off x="0" y="1440"/>
-            <a:ext cx="12202200" cy="6860160"/>
+            <a:off x="1108440" y="1211400"/>
+            <a:ext cx="9964800" cy="4944240"/>
           </a:xfrm>
           <a:prstGeom prst="rect">
             <a:avLst/>
@@ -18563,7 +16266,142 @@
             <a:noFill/>
           </a:ln>
         </p:spPr>
-      </p:pic>
+        <p:txBody>
+          <a:bodyPr lIns="91440" tIns="45720" rIns="91440" bIns="45720" anchor="t">
+            <a:noAutofit/>
+          </a:bodyPr>
+          <a:p>
+            <a:pPr marL="228600" indent="-228600" algn="ctr" defTabSz="914400">
+              <a:lnSpc>
+                <a:spcPct val="90000"/>
+              </a:lnSpc>
+              <a:spcBef>
+                <a:spcPts val="1001"/>
+              </a:spcBef>
+              <a:buNone/>
+              <a:tabLst>
+                <a:tab pos="0" algn="l"/>
+              </a:tabLst>
+            </a:pPr>
+            <a:r>
+              <a:rPr lang="pt-BR" sz="4800" b="1" u="none" strike="noStrike">
+                <a:solidFill>
+                  <a:schemeClr val="dk1"/>
+                </a:solidFill>
+                <a:effectLst/>
+                <a:highlight>
+                  <a:srgbClr val="FFFFFF"/>
+                </a:highlight>
+                <a:uFillTx/>
+                <a:latin typeface="Aptos"/>
+              </a:rPr>
+              <a:t>Cordeiro de Deus, que tirais o pecado do mundo</a:t>
+            </a:r>
+            <a:br>
+              <a:rPr sz="4800"/>
+            </a:br>
+            <a:r>
+              <a:rPr lang="pt-BR" sz="4800" b="1" u="none" strike="noStrike">
+                <a:solidFill>
+                  <a:schemeClr val="dk1"/>
+                </a:solidFill>
+                <a:effectLst/>
+                <a:highlight>
+                  <a:srgbClr val="FFFFFF"/>
+                </a:highlight>
+                <a:uFillTx/>
+                <a:latin typeface="Aptos"/>
+              </a:rPr>
+              <a:t>tende piedade de nós. (2x)</a:t>
+            </a:r>
+            <a:br>
+              <a:rPr sz="4800"/>
+            </a:br>
+            <a:br>
+              <a:rPr sz="4800"/>
+            </a:br>
+            <a:r>
+              <a:rPr lang="pt-BR" sz="4800" b="1" u="none" strike="noStrike">
+                <a:solidFill>
+                  <a:schemeClr val="dk1"/>
+                </a:solidFill>
+                <a:effectLst/>
+                <a:highlight>
+                  <a:srgbClr val="FFFFFF"/>
+                </a:highlight>
+                <a:uFillTx/>
+                <a:latin typeface="Aptos"/>
+              </a:rPr>
+              <a:t>Cordeiro de Deus, que tirais o pecado do mundo dai-nos a Paz.</a:t>
+            </a:r>
+            <a:endParaRPr lang="de-DE" sz="4800" b="0" u="none" strike="noStrike">
+              <a:solidFill>
+                <a:schemeClr val="dk1"/>
+              </a:solidFill>
+              <a:effectLst/>
+              <a:uFillTx/>
+              <a:latin typeface="Aptos"/>
+            </a:endParaRPr>
+          </a:p>
+        </p:txBody>
+      </p:sp>
+      <p:sp>
+        <p:nvSpPr>
+          <p:cNvPr id="176" name="CaixaDeTexto 4"/>
+          <p:cNvSpPr/>
+          <p:nvPr/>
+        </p:nvSpPr>
+        <p:spPr>
+          <a:xfrm>
+            <a:off x="240120" y="213480"/>
+            <a:ext cx="3038040" cy="522720"/>
+          </a:xfrm>
+          <a:prstGeom prst="rect">
+            <a:avLst/>
+          </a:prstGeom>
+          <a:noFill/>
+          <a:ln w="0">
+            <a:noFill/>
+          </a:ln>
+        </p:spPr>
+        <p:style>
+          <a:lnRef idx="0"/>
+          <a:fillRef idx="0"/>
+          <a:effectRef idx="0"/>
+          <a:fontRef idx="minor"/>
+        </p:style>
+        <p:txBody>
+          <a:bodyPr numCol="1" spcCol="0" horzOverflow="overflow" anchor="t">
+            <a:spAutoFit/>
+          </a:bodyPr>
+          <a:p>
+            <a:pPr defTabSz="914400">
+              <a:lnSpc>
+                <a:spcPct val="100000"/>
+              </a:lnSpc>
+            </a:pPr>
+            <a:r>
+              <a:rPr lang="pt-BR" sz="2800" b="1" u="none" strike="noStrike">
+                <a:solidFill>
+                  <a:srgbClr val="FF0000"/>
+                </a:solidFill>
+                <a:effectLst/>
+                <a:uFillTx/>
+                <a:latin typeface="Aptos"/>
+              </a:rPr>
+              <a:t>Cordeiro</a:t>
+            </a:r>
+            <a:endParaRPr lang="pt-BR" sz="2800" b="0" u="none" strike="noStrike">
+              <a:solidFill>
+                <a:srgbClr val="000000"/>
+              </a:solidFill>
+              <a:effectLst/>
+              <a:uFillTx/>
+              <a:latin typeface="Arial"/>
+            </a:endParaRPr>
+          </a:p>
+        </p:txBody>
+      </p:sp>
     </p:spTree>
   </p:cSld>
   <mc:AlternateContent>
@@ -18596,7 +16434,7 @@
       </p:grpSpPr>
       <p:sp>
         <p:nvSpPr>
-          <p:cNvPr id="163" name="PlaceHolder 1"/>
+          <p:cNvPr id="177" name="PlaceHolder 1"/>
           <p:cNvSpPr>
             <a:spLocks noGrp="1"/>
           </p:cNvSpPr>
@@ -18606,8 +16444,8 @@
         </p:nvSpPr>
         <p:spPr>
           <a:xfrm>
-            <a:off x="838080" y="1825560"/>
-            <a:ext cx="10515240" cy="4350960"/>
+            <a:off x="838080" y="403920"/>
+            <a:ext cx="10515240" cy="6125760"/>
           </a:xfrm>
           <a:prstGeom prst="rect">
             <a:avLst/>
@@ -18634,28 +16472,6 @@
             <a:r>
               <a:rPr lang="pt-BR" sz="7200" b="1" u="none" strike="noStrike">
                 <a:solidFill>
-                  <a:srgbClr val="FF0000"/>
-                </a:solidFill>
-                <a:effectLst/>
-                <a:uFillTx/>
-                <a:latin typeface="Aptos"/>
-              </a:rPr>
-              <a:t>R:</a:t>
-            </a:r>
-            <a:r>
-              <a:rPr lang="pt-BR" sz="7200" b="1" u="none" strike="noStrike">
-                <a:solidFill>
-                  <a:schemeClr val="dk1"/>
-                </a:solidFill>
-                <a:effectLst/>
-                <a:uFillTx/>
-                <a:latin typeface="Aptos"/>
-              </a:rPr>
-              <a:t> </a:t>
-            </a:r>
-            <a:r>
-              <a:rPr lang="pt-BR" sz="7200" b="1" u="none" strike="noStrike">
-                <a:solidFill>
                   <a:schemeClr val="dk1"/>
                 </a:solidFill>
                 <a:effectLst/>
@@ -18663,7 +16479,7 @@
                 <a:latin typeface="Aptos"/>
                 <a:ea typeface="Aptos"/>
               </a:rPr>
-              <a:t>O Espírito nos una num só corpo! </a:t>
+              <a:t>Senhor, eu não sou digno(a) de que entreis em minha morada, mas dizei uma palavra e serei salvo(a)!</a:t>
             </a:r>
             <a:endParaRPr lang="de-DE" sz="7200" b="0" u="none" strike="noStrike">
               <a:solidFill>
@@ -18692,6 +16508,13 @@
 <file path=ppt/slides/slide42.xml><?xml version="1.0" encoding="utf-8"?>
 <p:sld xmlns:a="http://schemas.openxmlformats.org/drawingml/2006/main" xmlns:p="http://schemas.openxmlformats.org/presentationml/2006/main" xmlns:r="http://schemas.openxmlformats.org/officeDocument/2006/relationships" xmlns:p14="http://schemas.microsoft.com/office/powerpoint/2010/main" xmlns:p15="http://schemas.microsoft.com/office/powerpoint/2012/main" xmlns:mc="http://schemas.openxmlformats.org/markup-compatibility/2006">
   <p:cSld>
+    <p:bg>
+      <p:bgPr>
+        <a:solidFill>
+          <a:schemeClr val="lt1"/>
+        </a:solidFill>
+      </p:bgPr>
+    </p:bg>
     <p:spTree>
       <p:nvGrpSpPr>
         <p:cNvPr id="1" name=""/>
@@ -18706,9 +16529,64 @@
           <a:chExt cx="0" cy="0"/>
         </a:xfrm>
       </p:grpSpPr>
+      <p:sp>
+        <p:nvSpPr>
+          <p:cNvPr id="178" name="Rectangle 9">
+            <a:extLst>
+              <a:ext uri="{C183D7F6-B498-43B3-948B-1728B52AA6E4}">
+                <adec:decorative xmlns:adec="http://schemas.microsoft.com/office/drawing/2017/decorative" val="1"/>
+              </a:ext>
+            </a:extLst>
+          </p:cNvPr>
+          <p:cNvSpPr/>
+          <p:nvPr/>
+        </p:nvSpPr>
+        <p:spPr>
+          <a:xfrm>
+            <a:off x="1440" y="0"/>
+            <a:ext cx="12188520" cy="6857640"/>
+          </a:xfrm>
+          <a:prstGeom prst="rect">
+            <a:avLst/>
+          </a:prstGeom>
+          <a:noFill/>
+          <a:ln>
+            <a:noFill/>
+          </a:ln>
+        </p:spPr>
+        <p:style>
+          <a:lnRef idx="2">
+            <a:schemeClr val="accent1">
+              <a:shade val="50000"/>
+            </a:schemeClr>
+          </a:lnRef>
+          <a:fillRef idx="1">
+            <a:schemeClr val="accent1"/>
+          </a:fillRef>
+          <a:effectRef idx="0">
+            <a:schemeClr val="accent1"/>
+          </a:effectRef>
+          <a:fontRef idx="minor"/>
+        </p:style>
+        <p:txBody>
+          <a:bodyPr lIns="90000" tIns="45000" rIns="90000" bIns="45000" anchor="ctr">
+            <a:noAutofit/>
+          </a:bodyPr>
+          <a:p>
+            <a:endParaRPr lang="en-US" sz="1800" b="0" u="none" strike="noStrike">
+              <a:solidFill>
+                <a:schemeClr val="lt1"/>
+              </a:solidFill>
+              <a:effectLst/>
+              <a:uFillTx/>
+              <a:latin typeface="Aptos"/>
+            </a:endParaRPr>
+          </a:p>
+        </p:txBody>
+      </p:sp>
       <p:pic>
         <p:nvPicPr>
-          <p:cNvPr id="164" name="Espaço Reservado para Conteúdo 4"/>
+          <p:cNvPr id="179" name="Espaço Reservado para Conteúdo 4"/>
           <p:cNvPicPr/>
           <p:nvPr/>
         </p:nvPicPr>
@@ -18745,459 +16623,6 @@
 </file>
 
 <file path=ppt/slides/slide43.xml><?xml version="1.0" encoding="utf-8"?>
-<p:sld xmlns:a="http://schemas.openxmlformats.org/drawingml/2006/main" xmlns:p="http://schemas.openxmlformats.org/presentationml/2006/main" xmlns:r="http://schemas.openxmlformats.org/officeDocument/2006/relationships" xmlns:p14="http://schemas.microsoft.com/office/powerpoint/2010/main" xmlns:p15="http://schemas.microsoft.com/office/powerpoint/2012/main" xmlns:mc="http://schemas.openxmlformats.org/markup-compatibility/2006">
-  <p:cSld>
-    <p:spTree>
-      <p:nvGrpSpPr>
-        <p:cNvPr id="1" name=""/>
-        <p:cNvGrpSpPr/>
-        <p:nvPr/>
-      </p:nvGrpSpPr>
-      <p:grpSpPr>
-        <a:xfrm>
-          <a:off x="0" y="0"/>
-          <a:ext cx="0" cy="0"/>
-          <a:chOff x="0" y="0"/>
-          <a:chExt cx="0" cy="0"/>
-        </a:xfrm>
-      </p:grpSpPr>
-      <p:sp>
-        <p:nvSpPr>
-          <p:cNvPr id="165" name="PlaceHolder 1"/>
-          <p:cNvSpPr>
-            <a:spLocks noGrp="1"/>
-          </p:cNvSpPr>
-          <p:nvPr>
-            <p:ph/>
-          </p:nvPr>
-        </p:nvSpPr>
-        <p:spPr>
-          <a:xfrm>
-            <a:off x="838080" y="1825560"/>
-            <a:ext cx="10515240" cy="4350960"/>
-          </a:xfrm>
-          <a:prstGeom prst="rect">
-            <a:avLst/>
-          </a:prstGeom>
-          <a:noFill/>
-          <a:ln w="0">
-            <a:noFill/>
-          </a:ln>
-        </p:spPr>
-        <p:txBody>
-          <a:bodyPr lIns="91440" tIns="45720" rIns="91440" bIns="45720" anchor="t">
-            <a:normAutofit/>
-          </a:bodyPr>
-          <a:p>
-            <a:pPr indent="0" algn="ctr" defTabSz="914400">
-              <a:lnSpc>
-                <a:spcPct val="100000"/>
-              </a:lnSpc>
-              <a:buNone/>
-              <a:tabLst>
-                <a:tab pos="0" algn="l"/>
-              </a:tabLst>
-            </a:pPr>
-            <a:r>
-              <a:rPr lang="pt-BR" sz="7200" b="1" u="none" strike="noStrike">
-                <a:solidFill>
-                  <a:srgbClr val="FF0000"/>
-                </a:solidFill>
-                <a:effectLst/>
-                <a:uFillTx/>
-                <a:latin typeface="Aptos"/>
-              </a:rPr>
-              <a:t>R:</a:t>
-            </a:r>
-            <a:r>
-              <a:rPr lang="pt-BR" sz="7200" b="1" u="none" strike="noStrike">
-                <a:solidFill>
-                  <a:schemeClr val="dk1"/>
-                </a:solidFill>
-                <a:effectLst/>
-                <a:uFillTx/>
-                <a:latin typeface="Aptos"/>
-              </a:rPr>
-              <a:t> </a:t>
-            </a:r>
-            <a:r>
-              <a:rPr lang="pt-BR" sz="7200" b="1" u="none" strike="noStrike">
-                <a:solidFill>
-                  <a:schemeClr val="dk1"/>
-                </a:solidFill>
-                <a:effectLst/>
-                <a:uFillTx/>
-                <a:latin typeface="Aptos"/>
-                <a:ea typeface="Aptos"/>
-              </a:rPr>
-              <a:t>Fazei de nós uma perfeita oferenda!</a:t>
-            </a:r>
-            <a:endParaRPr lang="de-DE" sz="7200" b="0" u="none" strike="noStrike">
-              <a:solidFill>
-                <a:schemeClr val="dk1"/>
-              </a:solidFill>
-              <a:effectLst/>
-              <a:uFillTx/>
-              <a:latin typeface="Aptos"/>
-            </a:endParaRPr>
-          </a:p>
-        </p:txBody>
-      </p:sp>
-    </p:spTree>
-  </p:cSld>
-  <mc:AlternateContent>
-    <mc:Choice Requires="p14">
-      <p:transition spd="slow" p14:dur="2000"/>
-    </mc:Choice>
-    <mc:Fallback>
-      <p:transition spd="slow"/>
-    </mc:Fallback>
-  </mc:AlternateContent>
-</p:sld>
-</file>
-
-<file path=ppt/slides/slide44.xml><?xml version="1.0" encoding="utf-8"?>
-<p:sld xmlns:a="http://schemas.openxmlformats.org/drawingml/2006/main" xmlns:p="http://schemas.openxmlformats.org/presentationml/2006/main" xmlns:r="http://schemas.openxmlformats.org/officeDocument/2006/relationships" xmlns:p14="http://schemas.microsoft.com/office/powerpoint/2010/main" xmlns:p15="http://schemas.microsoft.com/office/powerpoint/2012/main" xmlns:mc="http://schemas.openxmlformats.org/markup-compatibility/2006">
-  <p:cSld>
-    <p:spTree>
-      <p:nvGrpSpPr>
-        <p:cNvPr id="1" name=""/>
-        <p:cNvGrpSpPr/>
-        <p:nvPr/>
-      </p:nvGrpSpPr>
-      <p:grpSpPr>
-        <a:xfrm>
-          <a:off x="0" y="0"/>
-          <a:ext cx="0" cy="0"/>
-          <a:chOff x="0" y="0"/>
-          <a:chExt cx="0" cy="0"/>
-        </a:xfrm>
-      </p:grpSpPr>
-      <p:pic>
-        <p:nvPicPr>
-          <p:cNvPr id="166" name="Espaço Reservado para Conteúdo 4"/>
-          <p:cNvPicPr/>
-          <p:nvPr/>
-        </p:nvPicPr>
-        <p:blipFill>
-          <a:blip r:embed="rId1"/>
-          <a:srcRect l="0" t="7" r="0" b="7"/>
-          <a:stretch/>
-        </p:blipFill>
-        <p:spPr>
-          <a:xfrm>
-            <a:off x="0" y="1440"/>
-            <a:ext cx="12202200" cy="6860160"/>
-          </a:xfrm>
-          <a:prstGeom prst="rect">
-            <a:avLst/>
-          </a:prstGeom>
-          <a:noFill/>
-          <a:ln w="0">
-            <a:noFill/>
-          </a:ln>
-        </p:spPr>
-      </p:pic>
-    </p:spTree>
-  </p:cSld>
-  <mc:AlternateContent>
-    <mc:Choice Requires="p14">
-      <p:transition spd="slow" p14:dur="2000"/>
-    </mc:Choice>
-    <mc:Fallback>
-      <p:transition spd="slow"/>
-    </mc:Fallback>
-  </mc:AlternateContent>
-</p:sld>
-</file>
-
-<file path=ppt/slides/slide45.xml><?xml version="1.0" encoding="utf-8"?>
-<p:sld xmlns:a="http://schemas.openxmlformats.org/drawingml/2006/main" xmlns:p="http://schemas.openxmlformats.org/presentationml/2006/main" xmlns:r="http://schemas.openxmlformats.org/officeDocument/2006/relationships" xmlns:p14="http://schemas.microsoft.com/office/powerpoint/2010/main" xmlns:p15="http://schemas.microsoft.com/office/powerpoint/2012/main" xmlns:mc="http://schemas.openxmlformats.org/markup-compatibility/2006">
-  <p:cSld>
-    <p:spTree>
-      <p:nvGrpSpPr>
-        <p:cNvPr id="1" name=""/>
-        <p:cNvGrpSpPr/>
-        <p:nvPr/>
-      </p:nvGrpSpPr>
-      <p:grpSpPr>
-        <a:xfrm>
-          <a:off x="0" y="0"/>
-          <a:ext cx="0" cy="0"/>
-          <a:chOff x="0" y="0"/>
-          <a:chExt cx="0" cy="0"/>
-        </a:xfrm>
-      </p:grpSpPr>
-      <p:sp>
-        <p:nvSpPr>
-          <p:cNvPr id="167" name="PlaceHolder 1"/>
-          <p:cNvSpPr>
-            <a:spLocks noGrp="1"/>
-          </p:cNvSpPr>
-          <p:nvPr>
-            <p:ph/>
-          </p:nvPr>
-        </p:nvSpPr>
-        <p:spPr>
-          <a:xfrm>
-            <a:off x="838080" y="1825560"/>
-            <a:ext cx="10515240" cy="4350960"/>
-          </a:xfrm>
-          <a:prstGeom prst="rect">
-            <a:avLst/>
-          </a:prstGeom>
-          <a:noFill/>
-          <a:ln w="0">
-            <a:noFill/>
-          </a:ln>
-        </p:spPr>
-        <p:txBody>
-          <a:bodyPr lIns="91440" tIns="45720" rIns="91440" bIns="45720" anchor="t">
-            <a:normAutofit/>
-          </a:bodyPr>
-          <a:p>
-            <a:pPr indent="0" algn="ctr" defTabSz="914400">
-              <a:lnSpc>
-                <a:spcPct val="100000"/>
-              </a:lnSpc>
-              <a:buNone/>
-              <a:tabLst>
-                <a:tab pos="0" algn="l"/>
-              </a:tabLst>
-            </a:pPr>
-            <a:r>
-              <a:rPr lang="pt-BR" sz="7200" b="1" u="none" strike="noStrike">
-                <a:solidFill>
-                  <a:srgbClr val="FF0000"/>
-                </a:solidFill>
-                <a:effectLst/>
-                <a:uFillTx/>
-                <a:latin typeface="Aptos"/>
-              </a:rPr>
-              <a:t>R:</a:t>
-            </a:r>
-            <a:r>
-              <a:rPr lang="pt-BR" sz="7200" b="1" u="none" strike="noStrike">
-                <a:solidFill>
-                  <a:schemeClr val="dk1"/>
-                </a:solidFill>
-                <a:effectLst/>
-                <a:uFillTx/>
-                <a:latin typeface="Aptos"/>
-              </a:rPr>
-              <a:t> </a:t>
-            </a:r>
-            <a:r>
-              <a:rPr lang="pt-BR" sz="7200" b="1" u="none" strike="noStrike">
-                <a:solidFill>
-                  <a:schemeClr val="dk1"/>
-                </a:solidFill>
-                <a:effectLst/>
-                <a:uFillTx/>
-                <a:latin typeface="Aptos"/>
-                <a:ea typeface="Aptos"/>
-              </a:rPr>
-              <a:t>Lembrai-vos, ó Pai, da vossa Igreja!</a:t>
-            </a:r>
-            <a:endParaRPr lang="de-DE" sz="7200" b="0" u="none" strike="noStrike">
-              <a:solidFill>
-                <a:schemeClr val="dk1"/>
-              </a:solidFill>
-              <a:effectLst/>
-              <a:uFillTx/>
-              <a:latin typeface="Aptos"/>
-            </a:endParaRPr>
-          </a:p>
-        </p:txBody>
-      </p:sp>
-    </p:spTree>
-  </p:cSld>
-  <mc:AlternateContent>
-    <mc:Choice Requires="p14">
-      <p:transition spd="slow" p14:dur="2000"/>
-    </mc:Choice>
-    <mc:Fallback>
-      <p:transition spd="slow"/>
-    </mc:Fallback>
-  </mc:AlternateContent>
-</p:sld>
-</file>
-
-<file path=ppt/slides/slide46.xml><?xml version="1.0" encoding="utf-8"?>
-<p:sld xmlns:a="http://schemas.openxmlformats.org/drawingml/2006/main" xmlns:p="http://schemas.openxmlformats.org/presentationml/2006/main" xmlns:r="http://schemas.openxmlformats.org/officeDocument/2006/relationships" xmlns:p14="http://schemas.microsoft.com/office/powerpoint/2010/main" xmlns:p15="http://schemas.microsoft.com/office/powerpoint/2012/main" xmlns:mc="http://schemas.openxmlformats.org/markup-compatibility/2006">
-  <p:cSld>
-    <p:spTree>
-      <p:nvGrpSpPr>
-        <p:cNvPr id="1" name=""/>
-        <p:cNvGrpSpPr/>
-        <p:nvPr/>
-      </p:nvGrpSpPr>
-      <p:grpSpPr>
-        <a:xfrm>
-          <a:off x="0" y="0"/>
-          <a:ext cx="0" cy="0"/>
-          <a:chOff x="0" y="0"/>
-          <a:chExt cx="0" cy="0"/>
-        </a:xfrm>
-      </p:grpSpPr>
-      <p:pic>
-        <p:nvPicPr>
-          <p:cNvPr id="168" name="Espaço Reservado para Conteúdo 4"/>
-          <p:cNvPicPr/>
-          <p:nvPr/>
-        </p:nvPicPr>
-        <p:blipFill>
-          <a:blip r:embed="rId1"/>
-          <a:srcRect l="0" t="7" r="0" b="7"/>
-          <a:stretch/>
-        </p:blipFill>
-        <p:spPr>
-          <a:xfrm>
-            <a:off x="0" y="1440"/>
-            <a:ext cx="12202200" cy="6860160"/>
-          </a:xfrm>
-          <a:prstGeom prst="rect">
-            <a:avLst/>
-          </a:prstGeom>
-          <a:noFill/>
-          <a:ln w="0">
-            <a:noFill/>
-          </a:ln>
-        </p:spPr>
-      </p:pic>
-    </p:spTree>
-  </p:cSld>
-  <mc:AlternateContent>
-    <mc:Choice Requires="p14">
-      <p:transition spd="slow" p14:dur="2000"/>
-    </mc:Choice>
-    <mc:Fallback>
-      <p:transition spd="slow"/>
-    </mc:Fallback>
-  </mc:AlternateContent>
-</p:sld>
-</file>
-
-<file path=ppt/slides/slide47.xml><?xml version="1.0" encoding="utf-8"?>
-<p:sld xmlns:a="http://schemas.openxmlformats.org/drawingml/2006/main" xmlns:p="http://schemas.openxmlformats.org/presentationml/2006/main" xmlns:r="http://schemas.openxmlformats.org/officeDocument/2006/relationships" xmlns:p14="http://schemas.microsoft.com/office/powerpoint/2010/main" xmlns:p15="http://schemas.microsoft.com/office/powerpoint/2012/main" xmlns:mc="http://schemas.openxmlformats.org/markup-compatibility/2006">
-  <p:cSld>
-    <p:spTree>
-      <p:nvGrpSpPr>
-        <p:cNvPr id="1" name=""/>
-        <p:cNvGrpSpPr/>
-        <p:nvPr/>
-      </p:nvGrpSpPr>
-      <p:grpSpPr>
-        <a:xfrm>
-          <a:off x="0" y="0"/>
-          <a:ext cx="0" cy="0"/>
-          <a:chOff x="0" y="0"/>
-          <a:chExt cx="0" cy="0"/>
-        </a:xfrm>
-      </p:grpSpPr>
-      <p:sp>
-        <p:nvSpPr>
-          <p:cNvPr id="169" name="PlaceHolder 1"/>
-          <p:cNvSpPr>
-            <a:spLocks noGrp="1"/>
-          </p:cNvSpPr>
-          <p:nvPr>
-            <p:ph/>
-          </p:nvPr>
-        </p:nvSpPr>
-        <p:spPr>
-          <a:xfrm>
-            <a:off x="838080" y="1351800"/>
-            <a:ext cx="10515240" cy="4825080"/>
-          </a:xfrm>
-          <a:prstGeom prst="rect">
-            <a:avLst/>
-          </a:prstGeom>
-          <a:noFill/>
-          <a:ln w="0">
-            <a:noFill/>
-          </a:ln>
-        </p:spPr>
-        <p:txBody>
-          <a:bodyPr lIns="91440" tIns="45720" rIns="91440" bIns="45720" anchor="t">
-            <a:normAutofit/>
-          </a:bodyPr>
-          <a:p>
-            <a:pPr indent="0" algn="ctr" defTabSz="914400">
-              <a:lnSpc>
-                <a:spcPct val="100000"/>
-              </a:lnSpc>
-              <a:buNone/>
-              <a:tabLst>
-                <a:tab pos="0" algn="l"/>
-              </a:tabLst>
-            </a:pPr>
-            <a:endParaRPr lang="de-DE" sz="7200" b="0" u="none" strike="noStrike">
-              <a:solidFill>
-                <a:schemeClr val="dk1"/>
-              </a:solidFill>
-              <a:effectLst/>
-              <a:uFillTx/>
-              <a:latin typeface="Aptos"/>
-            </a:endParaRPr>
-          </a:p>
-          <a:p>
-            <a:pPr indent="0" algn="ctr" defTabSz="914400">
-              <a:lnSpc>
-                <a:spcPct val="100000"/>
-              </a:lnSpc>
-              <a:buNone/>
-              <a:tabLst>
-                <a:tab pos="0" algn="l"/>
-              </a:tabLst>
-            </a:pPr>
-            <a:r>
-              <a:rPr lang="pt-BR" sz="7200" b="1" u="none" strike="noStrike">
-                <a:solidFill>
-                  <a:srgbClr val="FF0000"/>
-                </a:solidFill>
-                <a:effectLst/>
-                <a:uFillTx/>
-                <a:latin typeface="Aptos"/>
-              </a:rPr>
-              <a:t>R:</a:t>
-            </a:r>
-            <a:r>
-              <a:rPr lang="pt-BR" sz="7200" b="1" u="none" strike="noStrike">
-                <a:solidFill>
-                  <a:schemeClr val="dk1"/>
-                </a:solidFill>
-                <a:effectLst/>
-                <a:uFillTx/>
-                <a:latin typeface="Aptos"/>
-              </a:rPr>
-              <a:t> Amém!</a:t>
-            </a:r>
-            <a:endParaRPr lang="de-DE" sz="7200" b="0" u="none" strike="noStrike">
-              <a:solidFill>
-                <a:schemeClr val="dk1"/>
-              </a:solidFill>
-              <a:effectLst/>
-              <a:uFillTx/>
-              <a:latin typeface="Aptos"/>
-            </a:endParaRPr>
-          </a:p>
-        </p:txBody>
-      </p:sp>
-    </p:spTree>
-  </p:cSld>
-  <mc:AlternateContent>
-    <mc:Choice Requires="p14">
-      <p:transition spd="slow" p14:dur="2000"/>
-    </mc:Choice>
-    <mc:Fallback>
-      <p:transition spd="slow"/>
-    </mc:Fallback>
-  </mc:AlternateContent>
-</p:sld>
-</file>
-
-<file path=ppt/slides/slide48.xml><?xml version="1.0" encoding="utf-8"?>
 <p:sld xmlns:a="http://schemas.openxmlformats.org/drawingml/2006/main" xmlns:p="http://schemas.openxmlformats.org/presentationml/2006/main" xmlns:r="http://schemas.openxmlformats.org/officeDocument/2006/relationships">
   <p:cSld>
     <p:bg>
@@ -19223,7 +16648,7 @@
       </p:grpSpPr>
       <p:sp>
         <p:nvSpPr>
-          <p:cNvPr id="153" name="Rectangle 9">
+          <p:cNvPr id="70" name="Rectangle 23">
             <a:extLst>
               <a:ext uri="{C183D7F6-B498-43B3-948B-1728B52AA6E4}">
                 <adec:decorative xmlns:adec="http://schemas.microsoft.com/office/drawing/2017/decorative" val="1"/>
@@ -19278,19 +16703,19 @@
       </p:sp>
       <p:pic>
         <p:nvPicPr>
-          <p:cNvPr id="154" name="Espaço Reservado para Conteúdo 4"/>
+          <p:cNvPr id="71" name="Imagem 3"/>
           <p:cNvPicPr/>
           <p:nvPr/>
         </p:nvPicPr>
         <p:blipFill>
           <a:blip r:embed="rId2"/>
-          <a:srcRect l="0" t="7" r="0" b="7"/>
+          <a:srcRect l="0" t="10428" r="0" b="10428"/>
           <a:stretch/>
         </p:blipFill>
         <p:spPr>
           <a:xfrm>
             <a:off x="0" y="1440"/>
-            <a:ext cx="12202200" cy="6860160"/>
+            <a:ext cx="12191760" cy="6856200"/>
           </a:xfrm>
           <a:prstGeom prst="rect">
             <a:avLst/>
@@ -19314,7 +16739,7 @@
 </p:sld>
 </file>
 
-<file path=ppt/slides/slide49.xml><?xml version="1.0" encoding="utf-8"?>
+<file path=ppt/slides/slide44.xml><?xml version="1.0" encoding="utf-8"?>
 <p:sld xmlns:a="http://schemas.openxmlformats.org/drawingml/2006/main" xmlns:p="http://schemas.openxmlformats.org/presentationml/2006/main" xmlns:r="http://schemas.openxmlformats.org/officeDocument/2006/relationships">
   <p:cSld>
     <p:spTree>
@@ -19333,7 +16758,7 @@
       </p:grpSpPr>
       <p:sp>
         <p:nvSpPr>
-          <p:cNvPr id="155" name="PlaceHolder 1"/>
+          <p:cNvPr id="133" name="PlaceHolder 1"/>
           <p:cNvSpPr>
             <a:spLocks noGrp="1"/>
           </p:cNvSpPr>
@@ -19343,120 +16768,8 @@
         </p:nvSpPr>
         <p:spPr>
           <a:xfrm>
-            <a:off x="838080" y="1825560"/>
-            <a:ext cx="10515240" cy="4350960"/>
-          </a:xfrm>
-          <a:prstGeom prst="rect">
-            <a:avLst/>
-          </a:prstGeom>
-          <a:noFill/>
-          <a:ln w="0">
-            <a:noFill/>
-          </a:ln>
-        </p:spPr>
-        <p:txBody>
-          <a:bodyPr lIns="91440" tIns="45720" rIns="91440" bIns="45720" anchor="t">
-            <a:normAutofit/>
-          </a:bodyPr>
-          <a:p>
-            <a:pPr indent="0" algn="ctr" defTabSz="914400">
-              <a:lnSpc>
-                <a:spcPct val="100000"/>
-              </a:lnSpc>
-              <a:buNone/>
-              <a:tabLst>
-                <a:tab pos="0" algn="l"/>
-              </a:tabLst>
-            </a:pPr>
-            <a:r>
-              <a:rPr lang="pt-BR" sz="7200" b="1" u="none" strike="noStrike">
-                <a:solidFill>
-                  <a:srgbClr val="FF0000"/>
-                </a:solidFill>
-                <a:effectLst/>
-                <a:uFillTx/>
-                <a:latin typeface="Aptos"/>
-              </a:rPr>
-              <a:t>R:</a:t>
-            </a:r>
-            <a:r>
-              <a:rPr lang="pt-BR" sz="7200" b="1" u="none" strike="noStrike">
-                <a:solidFill>
-                  <a:schemeClr val="dk1"/>
-                </a:solidFill>
-                <a:effectLst/>
-                <a:uFillTx/>
-                <a:latin typeface="Aptos"/>
-              </a:rPr>
-              <a:t> </a:t>
-            </a:r>
-            <a:r>
-              <a:rPr lang="pt-BR" sz="7200" b="1" u="none" strike="noStrike">
-                <a:solidFill>
-                  <a:schemeClr val="dk1"/>
-                </a:solidFill>
-                <a:effectLst/>
-                <a:uFillTx/>
-                <a:latin typeface="Aptos"/>
-                <a:ea typeface="Aptos"/>
-              </a:rPr>
-              <a:t>Bendito o vosso Filho, presente entre nós!</a:t>
-            </a:r>
-            <a:endParaRPr lang="de-DE" sz="7200" b="0" u="none" strike="noStrike">
-              <a:solidFill>
-                <a:schemeClr val="dk1"/>
-              </a:solidFill>
-              <a:effectLst/>
-              <a:uFillTx/>
-              <a:latin typeface="Aptos"/>
-            </a:endParaRPr>
-          </a:p>
-        </p:txBody>
-      </p:sp>
-    </p:spTree>
-  </p:cSld>
-  <mc:AlternateContent xmlns:mc="http://schemas.openxmlformats.org/markup-compatibility/2006" xmlns:p14="http://schemas.microsoft.com/office/powerpoint/2010/main">
-    <mc:Choice Requires="p14">
-      <p:transition spd="slow" p14:dur="2000"/>
-    </mc:Choice>
-    <mc:Fallback>
-      <p:transition spd="slow"/>
-    </mc:Fallback>
-  </mc:AlternateContent>
-</p:sld>
-</file>
-
-<file path=ppt/slides/slide5.xml><?xml version="1.0" encoding="utf-8"?>
-<p:sld xmlns:a="http://schemas.openxmlformats.org/drawingml/2006/main" xmlns:p="http://schemas.openxmlformats.org/presentationml/2006/main" xmlns:r="http://schemas.openxmlformats.org/officeDocument/2006/relationships" xmlns:p14="http://schemas.microsoft.com/office/powerpoint/2010/main" xmlns:p15="http://schemas.microsoft.com/office/powerpoint/2012/main" xmlns:mc="http://schemas.openxmlformats.org/markup-compatibility/2006">
-  <p:cSld>
-    <p:spTree>
-      <p:nvGrpSpPr>
-        <p:cNvPr id="1" name=""/>
-        <p:cNvGrpSpPr/>
-        <p:nvPr/>
-      </p:nvGrpSpPr>
-      <p:grpSpPr>
-        <a:xfrm>
-          <a:off x="0" y="0"/>
-          <a:ext cx="0" cy="0"/>
-          <a:chOff x="0" y="0"/>
-          <a:chExt cx="0" cy="0"/>
-        </a:xfrm>
-      </p:grpSpPr>
-      <p:sp>
-        <p:nvSpPr>
-          <p:cNvPr id="72" name="PlaceHolder 1"/>
-          <p:cNvSpPr>
-            <a:spLocks noGrp="1"/>
-          </p:cNvSpPr>
-          <p:nvPr>
-            <p:ph/>
-          </p:nvPr>
-        </p:nvSpPr>
-        <p:spPr>
-          <a:xfrm>
-            <a:off x="383760" y="1396080"/>
-            <a:ext cx="11423520" cy="5279040"/>
+            <a:off x="114480" y="1047600"/>
+            <a:ext cx="11944080" cy="5627520"/>
           </a:xfrm>
           <a:prstGeom prst="rect">
             <a:avLst/>
@@ -19487,7 +16800,7 @@
               </a:tabLst>
             </a:pPr>
             <a:r>
-              <a:rPr lang="pt-BR" sz="4400" b="0" u="none" strike="noStrike">
+              <a:rPr lang="pt-BR" sz="4200" b="0" u="none" strike="noStrike">
                 <a:solidFill>
                   <a:schemeClr val="dk1"/>
                 </a:solidFill>
@@ -19498,7 +16811,7 @@
               </a:rPr>
               <a:t>{{canto.texto}}</a:t>
             </a:r>
-            <a:endParaRPr lang="de-DE" sz="4400" b="0" u="none" strike="noStrike">
+            <a:endParaRPr lang="de-DE" sz="4200" b="0" u="none" strike="noStrike">
               <a:solidFill>
                 <a:schemeClr val="dk1"/>
               </a:solidFill>
@@ -19511,7 +16824,7 @@
       </p:sp>
       <p:sp>
         <p:nvSpPr>
-          <p:cNvPr id="73" name="CaixaDeTexto 4"/>
+          <p:cNvPr id="134" name="CaixaDeTexto 4"/>
           <p:cNvSpPr/>
           <p:nvPr/>
         </p:nvSpPr>
@@ -19568,7 +16881,7 @@
       </p:sp>
     </p:spTree>
   </p:cSld>
-  <mc:AlternateContent>
+  <mc:AlternateContent xmlns:mc="http://schemas.openxmlformats.org/markup-compatibility/2006" xmlns:p14="http://schemas.microsoft.com/office/powerpoint/2010/main">
     <mc:Choice Requires="p14">
       <p:transition spd="slow" p14:dur="2000"/>
     </mc:Choice>
@@ -19579,7 +16892,7 @@
 </p:sld>
 </file>
 
-<file path=ppt/slides/slide50.xml><?xml version="1.0" encoding="utf-8"?>
+<file path=ppt/slides/slide45.xml><?xml version="1.0" encoding="utf-8"?>
 <p:sld xmlns:a="http://schemas.openxmlformats.org/drawingml/2006/main" xmlns:p="http://schemas.openxmlformats.org/presentationml/2006/main" xmlns:r="http://schemas.openxmlformats.org/officeDocument/2006/relationships">
   <p:cSld>
     <p:bg>
@@ -19605,7 +16918,7 @@
       </p:grpSpPr>
       <p:sp>
         <p:nvSpPr>
-          <p:cNvPr id="153" name="Rectangle 9">
+          <p:cNvPr id="70" name="Rectangle 23">
             <a:extLst>
               <a:ext uri="{C183D7F6-B498-43B3-948B-1728B52AA6E4}">
                 <adec:decorative xmlns:adec="http://schemas.microsoft.com/office/drawing/2017/decorative" val="1"/>
@@ -19660,19 +16973,19 @@
       </p:sp>
       <p:pic>
         <p:nvPicPr>
-          <p:cNvPr id="154" name="Espaço Reservado para Conteúdo 4"/>
+          <p:cNvPr id="71" name="Imagem 3"/>
           <p:cNvPicPr/>
           <p:nvPr/>
         </p:nvPicPr>
         <p:blipFill>
           <a:blip r:embed="rId2"/>
-          <a:srcRect l="0" t="7" r="0" b="7"/>
+          <a:srcRect l="0" t="10428" r="0" b="10428"/>
           <a:stretch/>
         </p:blipFill>
         <p:spPr>
           <a:xfrm>
             <a:off x="0" y="1440"/>
-            <a:ext cx="12202200" cy="6860160"/>
+            <a:ext cx="12191760" cy="6856200"/>
           </a:xfrm>
           <a:prstGeom prst="rect">
             <a:avLst/>
@@ -19696,7 +17009,7 @@
 </p:sld>
 </file>
 
-<file path=ppt/slides/slide51.xml><?xml version="1.0" encoding="utf-8"?>
+<file path=ppt/slides/slide46.xml><?xml version="1.0" encoding="utf-8"?>
 <p:sld xmlns:a="http://schemas.openxmlformats.org/drawingml/2006/main" xmlns:p="http://schemas.openxmlformats.org/presentationml/2006/main" xmlns:r="http://schemas.openxmlformats.org/officeDocument/2006/relationships">
   <p:cSld>
     <p:spTree>
@@ -19715,7 +17028,7 @@
       </p:grpSpPr>
       <p:sp>
         <p:nvSpPr>
-          <p:cNvPr id="155" name="PlaceHolder 1"/>
+          <p:cNvPr id="133" name="PlaceHolder 1"/>
           <p:cNvSpPr>
             <a:spLocks noGrp="1"/>
           </p:cNvSpPr>
@@ -19725,8 +17038,8 @@
         </p:nvSpPr>
         <p:spPr>
           <a:xfrm>
-            <a:off x="838080" y="1825560"/>
-            <a:ext cx="10515240" cy="4350960"/>
+            <a:off x="114480" y="1047600"/>
+            <a:ext cx="11944080" cy="5627520"/>
           </a:xfrm>
           <a:prstGeom prst="rect">
             <a:avLst/>
@@ -19738,42 +17051,26 @@
         </p:spPr>
         <p:txBody>
           <a:bodyPr lIns="91440" tIns="45720" rIns="91440" bIns="45720" anchor="t">
-            <a:normAutofit/>
+            <a:noAutofit/>
           </a:bodyPr>
           <a:p>
-            <a:pPr indent="0" algn="ctr" defTabSz="914400">
-              <a:lnSpc>
-                <a:spcPct val="100000"/>
-              </a:lnSpc>
+            <a:pPr marL="228600" indent="-228600" algn="l" defTabSz="914400">
+              <a:lnSpc>
+                <a:spcPct val="90000"/>
+              </a:lnSpc>
+              <a:spcBef>
+                <a:spcPts val="1191"/>
+              </a:spcBef>
+              <a:spcAft>
+                <a:spcPts val="992"/>
+              </a:spcAft>
               <a:buNone/>
               <a:tabLst>
                 <a:tab pos="0" algn="l"/>
               </a:tabLst>
             </a:pPr>
             <a:r>
-              <a:rPr lang="pt-BR" sz="7200" b="1" u="none" strike="noStrike">
-                <a:solidFill>
-                  <a:srgbClr val="FF0000"/>
-                </a:solidFill>
-                <a:effectLst/>
-                <a:uFillTx/>
-                <a:latin typeface="Aptos"/>
-              </a:rPr>
-              <a:t>R:</a:t>
-            </a:r>
-            <a:r>
-              <a:rPr lang="pt-BR" sz="7200" b="1" u="none" strike="noStrike">
-                <a:solidFill>
-                  <a:schemeClr val="dk1"/>
-                </a:solidFill>
-                <a:effectLst/>
-                <a:uFillTx/>
-                <a:latin typeface="Aptos"/>
-              </a:rPr>
-              <a:t> </a:t>
-            </a:r>
-            <a:r>
-              <a:rPr lang="pt-BR" sz="7200" b="1" u="none" strike="noStrike">
+              <a:rPr lang="pt-BR" sz="4200" b="0" u="none" strike="noStrike">
                 <a:solidFill>
                   <a:schemeClr val="dk1"/>
                 </a:solidFill>
@@ -19782,15 +17079,72 @@
                 <a:latin typeface="Aptos"/>
                 <a:ea typeface="Aptos"/>
               </a:rPr>
-              <a:t>Enviai o vosso Espírito Santo!</a:t>
-            </a:r>
-            <a:endParaRPr lang="de-DE" sz="7200" b="0" u="none" strike="noStrike">
+              <a:t>{{canto.texto}}</a:t>
+            </a:r>
+            <a:endParaRPr lang="de-DE" sz="4200" b="0" u="none" strike="noStrike">
               <a:solidFill>
                 <a:schemeClr val="dk1"/>
               </a:solidFill>
               <a:effectLst/>
               <a:uFillTx/>
               <a:latin typeface="Aptos"/>
+            </a:endParaRPr>
+          </a:p>
+        </p:txBody>
+      </p:sp>
+      <p:sp>
+        <p:nvSpPr>
+          <p:cNvPr id="134" name="CaixaDeTexto 4"/>
+          <p:cNvSpPr/>
+          <p:nvPr/>
+        </p:nvSpPr>
+        <p:spPr>
+          <a:xfrm>
+            <a:off x="240120" y="213480"/>
+            <a:ext cx="3038040" cy="522720"/>
+          </a:xfrm>
+          <a:prstGeom prst="rect">
+            <a:avLst/>
+          </a:prstGeom>
+          <a:noFill/>
+          <a:ln w="0">
+            <a:noFill/>
+          </a:ln>
+        </p:spPr>
+        <p:style>
+          <a:lnRef idx="0"/>
+          <a:fillRef idx="0"/>
+          <a:effectRef idx="0"/>
+          <a:fontRef idx="minor"/>
+        </p:style>
+        <p:txBody>
+          <a:bodyPr numCol="1" spcCol="0" horzOverflow="overflow" anchor="t">
+            <a:spAutoFit/>
+          </a:bodyPr>
+          <a:p>
+            <a:pPr defTabSz="914400">
+              <a:lnSpc>
+                <a:spcPct val="100000"/>
+              </a:lnSpc>
+            </a:pPr>
+            <a:r>
+              <a:rPr lang="pt-BR" sz="2800" b="1" u="none" strike="noStrike">
+                <a:solidFill>
+                  <a:srgbClr val="FF0000"/>
+                </a:solidFill>
+                <a:effectLst/>
+                <a:uFillTx/>
+                <a:latin typeface="Aptos"/>
+              </a:rPr>
+              <a:t>{{canto.rotulo}}</a:t>
+            </a:r>
+            <a:endParaRPr lang="pt-BR" sz="2800" b="0" u="none" strike="noStrike">
+              <a:solidFill>
+                <a:srgbClr val="000000"/>
+              </a:solidFill>
+              <a:effectLst/>
+              <a:uFillTx/>
+              <a:latin typeface="Arial"/>
             </a:endParaRPr>
           </a:p>
         </p:txBody>
@@ -19808,7 +17162,7 @@
 </p:sld>
 </file>
 
-<file path=ppt/slides/slide52.xml><?xml version="1.0" encoding="utf-8"?>
+<file path=ppt/slides/slide47.xml><?xml version="1.0" encoding="utf-8"?>
 <p:sld xmlns:a="http://schemas.openxmlformats.org/drawingml/2006/main" xmlns:p="http://schemas.openxmlformats.org/presentationml/2006/main" xmlns:r="http://schemas.openxmlformats.org/officeDocument/2006/relationships">
   <p:cSld>
     <p:bg>
@@ -19834,7 +17188,7 @@
       </p:grpSpPr>
       <p:sp>
         <p:nvSpPr>
-          <p:cNvPr id="153" name="Rectangle 9">
+          <p:cNvPr id="70" name="Rectangle 23">
             <a:extLst>
               <a:ext uri="{C183D7F6-B498-43B3-948B-1728B52AA6E4}">
                 <adec:decorative xmlns:adec="http://schemas.microsoft.com/office/drawing/2017/decorative" val="1"/>
@@ -19889,19 +17243,19 @@
       </p:sp>
       <p:pic>
         <p:nvPicPr>
-          <p:cNvPr id="154" name="Espaço Reservado para Conteúdo 4"/>
+          <p:cNvPr id="71" name="Imagem 3"/>
           <p:cNvPicPr/>
           <p:nvPr/>
         </p:nvPicPr>
         <p:blipFill>
           <a:blip r:embed="rId2"/>
-          <a:srcRect l="0" t="7" r="0" b="7"/>
+          <a:srcRect l="0" t="10428" r="0" b="10428"/>
           <a:stretch/>
         </p:blipFill>
         <p:spPr>
           <a:xfrm>
             <a:off x="0" y="1440"/>
-            <a:ext cx="12202200" cy="6860160"/>
+            <a:ext cx="12191760" cy="6856200"/>
           </a:xfrm>
           <a:prstGeom prst="rect">
             <a:avLst/>
@@ -19925,7 +17279,7 @@
 </p:sld>
 </file>
 
-<file path=ppt/slides/slide53.xml><?xml version="1.0" encoding="utf-8"?>
+<file path=ppt/slides/slide48.xml><?xml version="1.0" encoding="utf-8"?>
 <p:sld xmlns:a="http://schemas.openxmlformats.org/drawingml/2006/main" xmlns:p="http://schemas.openxmlformats.org/presentationml/2006/main" xmlns:r="http://schemas.openxmlformats.org/officeDocument/2006/relationships">
   <p:cSld>
     <p:spTree>
@@ -19944,7 +17298,7 @@
       </p:grpSpPr>
       <p:sp>
         <p:nvSpPr>
-          <p:cNvPr id="158" name="PlaceHolder 1"/>
+          <p:cNvPr id="133" name="PlaceHolder 1"/>
           <p:cNvSpPr>
             <a:spLocks noGrp="1"/>
           </p:cNvSpPr>
@@ -19954,8 +17308,8 @@
         </p:nvSpPr>
         <p:spPr>
           <a:xfrm>
-            <a:off x="838080" y="403920"/>
-            <a:ext cx="10515240" cy="6125760"/>
+            <a:off x="114480" y="1047600"/>
+            <a:ext cx="11944080" cy="5627520"/>
           </a:xfrm>
           <a:prstGeom prst="rect">
             <a:avLst/>
@@ -19967,20 +17321,26 @@
         </p:spPr>
         <p:txBody>
           <a:bodyPr lIns="91440" tIns="45720" rIns="91440" bIns="45720" anchor="t">
-            <a:normAutofit/>
+            <a:noAutofit/>
           </a:bodyPr>
           <a:p>
-            <a:pPr indent="0" algn="ctr" defTabSz="914400">
-              <a:lnSpc>
-                <a:spcPct val="100000"/>
-              </a:lnSpc>
+            <a:pPr marL="228600" indent="-228600" algn="l" defTabSz="914400">
+              <a:lnSpc>
+                <a:spcPct val="90000"/>
+              </a:lnSpc>
+              <a:spcBef>
+                <a:spcPts val="1191"/>
+              </a:spcBef>
+              <a:spcAft>
+                <a:spcPts val="992"/>
+              </a:spcAft>
               <a:buNone/>
               <a:tabLst>
                 <a:tab pos="0" algn="l"/>
               </a:tabLst>
             </a:pPr>
             <a:r>
-              <a:rPr lang="pt-BR" sz="7200" b="1" u="none" strike="noStrike">
+              <a:rPr lang="pt-BR" sz="4200" b="0" u="none" strike="noStrike">
                 <a:solidFill>
                   <a:schemeClr val="dk1"/>
                 </a:solidFill>
@@ -19989,15 +17349,72 @@
                 <a:latin typeface="Aptos"/>
                 <a:ea typeface="Aptos"/>
               </a:rPr>
-              <a:t>{{liturgia.misterio_fe}}</a:t>
-            </a:r>
-            <a:endParaRPr lang="de-DE" sz="7200" b="0" u="none" strike="noStrike">
+              <a:t>{{canto.texto}}</a:t>
+            </a:r>
+            <a:endParaRPr lang="de-DE" sz="4200" b="0" u="none" strike="noStrike">
               <a:solidFill>
                 <a:schemeClr val="dk1"/>
               </a:solidFill>
               <a:effectLst/>
               <a:uFillTx/>
               <a:latin typeface="Aptos"/>
+            </a:endParaRPr>
+          </a:p>
+        </p:txBody>
+      </p:sp>
+      <p:sp>
+        <p:nvSpPr>
+          <p:cNvPr id="134" name="CaixaDeTexto 4"/>
+          <p:cNvSpPr/>
+          <p:nvPr/>
+        </p:nvSpPr>
+        <p:spPr>
+          <a:xfrm>
+            <a:off x="240120" y="213480"/>
+            <a:ext cx="3038040" cy="522720"/>
+          </a:xfrm>
+          <a:prstGeom prst="rect">
+            <a:avLst/>
+          </a:prstGeom>
+          <a:noFill/>
+          <a:ln w="0">
+            <a:noFill/>
+          </a:ln>
+        </p:spPr>
+        <p:style>
+          <a:lnRef idx="0"/>
+          <a:fillRef idx="0"/>
+          <a:effectRef idx="0"/>
+          <a:fontRef idx="minor"/>
+        </p:style>
+        <p:txBody>
+          <a:bodyPr numCol="1" spcCol="0" horzOverflow="overflow" anchor="t">
+            <a:spAutoFit/>
+          </a:bodyPr>
+          <a:p>
+            <a:pPr defTabSz="914400">
+              <a:lnSpc>
+                <a:spcPct val="100000"/>
+              </a:lnSpc>
+            </a:pPr>
+            <a:r>
+              <a:rPr lang="pt-BR" sz="2800" b="1" u="none" strike="noStrike">
+                <a:solidFill>
+                  <a:srgbClr val="FF0000"/>
+                </a:solidFill>
+                <a:effectLst/>
+                <a:uFillTx/>
+                <a:latin typeface="Aptos"/>
+              </a:rPr>
+              <a:t>{{canto.rotulo}}</a:t>
+            </a:r>
+            <a:endParaRPr lang="pt-BR" sz="2800" b="0" u="none" strike="noStrike">
+              <a:solidFill>
+                <a:srgbClr val="000000"/>
+              </a:solidFill>
+              <a:effectLst/>
+              <a:uFillTx/>
+              <a:latin typeface="Arial"/>
             </a:endParaRPr>
           </a:p>
         </p:txBody>
@@ -20015,8 +17432,8 @@
 </p:sld>
 </file>
 
-<file path=ppt/slides/slide54.xml><?xml version="1.0" encoding="utf-8"?>
-<p:sld xmlns:a="http://schemas.openxmlformats.org/drawingml/2006/main" xmlns:p="http://schemas.openxmlformats.org/presentationml/2006/main" xmlns:r="http://schemas.openxmlformats.org/officeDocument/2006/relationships">
+<file path=ppt/slides/slide49.xml><?xml version="1.0" encoding="utf-8"?>
+<p:sld xmlns:a="http://schemas.openxmlformats.org/drawingml/2006/main" xmlns:p="http://schemas.openxmlformats.org/presentationml/2006/main" xmlns:r="http://schemas.openxmlformats.org/officeDocument/2006/relationships" xmlns:p14="http://schemas.microsoft.com/office/powerpoint/2010/main" xmlns:p15="http://schemas.microsoft.com/office/powerpoint/2012/main" xmlns:mc="http://schemas.openxmlformats.org/markup-compatibility/2006">
   <p:cSld>
     <p:bg>
       <p:bgPr>
@@ -20041,7 +17458,7 @@
       </p:grpSpPr>
       <p:sp>
         <p:nvSpPr>
-          <p:cNvPr id="153" name="Rectangle 9">
+          <p:cNvPr id="180" name="Rectangle 23">
             <a:extLst>
               <a:ext uri="{C183D7F6-B498-43B3-948B-1728B52AA6E4}">
                 <adec:decorative xmlns:adec="http://schemas.microsoft.com/office/drawing/2017/decorative" val="1"/>
@@ -20096,19 +17513,19 @@
       </p:sp>
       <p:pic>
         <p:nvPicPr>
-          <p:cNvPr id="154" name="Espaço Reservado para Conteúdo 4"/>
+          <p:cNvPr id="181" name="Imagem 3"/>
           <p:cNvPicPr/>
           <p:nvPr/>
         </p:nvPicPr>
         <p:blipFill>
-          <a:blip r:embed="rId2"/>
-          <a:srcRect l="0" t="7" r="0" b="7"/>
+          <a:blip r:embed="rId1"/>
+          <a:srcRect l="0" t="10428" r="0" b="10428"/>
           <a:stretch/>
         </p:blipFill>
         <p:spPr>
           <a:xfrm>
             <a:off x="0" y="1440"/>
-            <a:ext cx="12202200" cy="6860160"/>
+            <a:ext cx="12191760" cy="6856200"/>
           </a:xfrm>
           <a:prstGeom prst="rect">
             <a:avLst/>
@@ -20121,7 +17538,7 @@
       </p:pic>
     </p:spTree>
   </p:cSld>
-  <mc:AlternateContent xmlns:mc="http://schemas.openxmlformats.org/markup-compatibility/2006" xmlns:p14="http://schemas.microsoft.com/office/powerpoint/2010/main">
+  <mc:AlternateContent>
     <mc:Choice Requires="p14">
       <p:transition spd="slow" p14:dur="2000"/>
     </mc:Choice>
@@ -20132,8 +17549,8 @@
 </p:sld>
 </file>
 
-<file path=ppt/slides/slide55.xml><?xml version="1.0" encoding="utf-8"?>
-<p:sld xmlns:a="http://schemas.openxmlformats.org/drawingml/2006/main" xmlns:p="http://schemas.openxmlformats.org/presentationml/2006/main" xmlns:r="http://schemas.openxmlformats.org/officeDocument/2006/relationships">
+<file path=ppt/slides/slide5.xml><?xml version="1.0" encoding="utf-8"?>
+<p:sld xmlns:a="http://schemas.openxmlformats.org/drawingml/2006/main" xmlns:p="http://schemas.openxmlformats.org/presentationml/2006/main" xmlns:r="http://schemas.openxmlformats.org/officeDocument/2006/relationships" xmlns:p14="http://schemas.microsoft.com/office/powerpoint/2010/main" xmlns:p15="http://schemas.microsoft.com/office/powerpoint/2012/main" xmlns:mc="http://schemas.openxmlformats.org/markup-compatibility/2006">
   <p:cSld>
     <p:spTree>
       <p:nvGrpSpPr>
@@ -20151,7 +17568,7 @@
       </p:grpSpPr>
       <p:sp>
         <p:nvSpPr>
-          <p:cNvPr id="161" name="PlaceHolder 1"/>
+          <p:cNvPr id="72" name="PlaceHolder 1"/>
           <p:cNvSpPr>
             <a:spLocks noGrp="1"/>
           </p:cNvSpPr>
@@ -20161,8 +17578,8 @@
         </p:nvSpPr>
         <p:spPr>
           <a:xfrm>
-            <a:off x="838080" y="1825560"/>
-            <a:ext cx="10515240" cy="4350960"/>
+            <a:off x="383760" y="1396080"/>
+            <a:ext cx="11423520" cy="5279040"/>
           </a:xfrm>
           <a:prstGeom prst="rect">
             <a:avLst/>
@@ -20174,42 +17591,26 @@
         </p:spPr>
         <p:txBody>
           <a:bodyPr lIns="91440" tIns="45720" rIns="91440" bIns="45720" anchor="t">
-            <a:normAutofit/>
+            <a:noAutofit/>
           </a:bodyPr>
           <a:p>
-            <a:pPr indent="0" algn="ctr" defTabSz="914400">
-              <a:lnSpc>
-                <a:spcPct val="100000"/>
-              </a:lnSpc>
+            <a:pPr marL="228600" indent="-228600" algn="l" defTabSz="914400">
+              <a:lnSpc>
+                <a:spcPct val="90000"/>
+              </a:lnSpc>
+              <a:spcBef>
+                <a:spcPts val="1191"/>
+              </a:spcBef>
+              <a:spcAft>
+                <a:spcPts val="992"/>
+              </a:spcAft>
               <a:buNone/>
               <a:tabLst>
                 <a:tab pos="0" algn="l"/>
               </a:tabLst>
             </a:pPr>
             <a:r>
-              <a:rPr lang="pt-BR" sz="7200" b="1" u="none" strike="noStrike">
-                <a:solidFill>
-                  <a:srgbClr val="FF0000"/>
-                </a:solidFill>
-                <a:effectLst/>
-                <a:uFillTx/>
-                <a:latin typeface="Aptos"/>
-              </a:rPr>
-              <a:t>R:</a:t>
-            </a:r>
-            <a:r>
-              <a:rPr lang="pt-BR" sz="7200" b="1" u="none" strike="noStrike">
-                <a:solidFill>
-                  <a:schemeClr val="dk1"/>
-                </a:solidFill>
-                <a:effectLst/>
-                <a:uFillTx/>
-                <a:latin typeface="Aptos"/>
-              </a:rPr>
-              <a:t> </a:t>
-            </a:r>
-            <a:r>
-              <a:rPr lang="pt-BR" sz="7200" b="1" u="none" strike="noStrike">
+              <a:rPr lang="pt-BR" sz="4400" b="0" u="none" strike="noStrike">
                 <a:solidFill>
                   <a:schemeClr val="dk1"/>
                 </a:solidFill>
@@ -20218,9 +17619,9 @@
                 <a:latin typeface="Aptos"/>
                 <a:ea typeface="Aptos"/>
               </a:rPr>
-              <a:t>Aceitai, ó Senhor, a nossa oferta!</a:t>
-            </a:r>
-            <a:endParaRPr lang="de-DE" sz="7200" b="0" u="none" strike="noStrike">
+              <a:t>{{canto.texto}}</a:t>
+            </a:r>
+            <a:endParaRPr lang="de-DE" sz="4400" b="0" u="none" strike="noStrike">
               <a:solidFill>
                 <a:schemeClr val="dk1"/>
               </a:solidFill>
@@ -20231,113 +17632,16 @@
           </a:p>
         </p:txBody>
       </p:sp>
-    </p:spTree>
-  </p:cSld>
-  <mc:AlternateContent xmlns:mc="http://schemas.openxmlformats.org/markup-compatibility/2006" xmlns:p14="http://schemas.microsoft.com/office/powerpoint/2010/main">
-    <mc:Choice Requires="p14">
-      <p:transition spd="slow" p14:dur="2000"/>
-    </mc:Choice>
-    <mc:Fallback>
-      <p:transition spd="slow"/>
-    </mc:Fallback>
-  </mc:AlternateContent>
-</p:sld>
-</file>
-
-<file path=ppt/slides/slide56.xml><?xml version="1.0" encoding="utf-8"?>
-<p:sld xmlns:a="http://schemas.openxmlformats.org/drawingml/2006/main" xmlns:p="http://schemas.openxmlformats.org/presentationml/2006/main" xmlns:r="http://schemas.openxmlformats.org/officeDocument/2006/relationships">
-  <p:cSld>
-    <p:bg>
-      <p:bgPr>
-        <a:solidFill>
-          <a:schemeClr val="lt1"/>
-        </a:solidFill>
-      </p:bgPr>
-    </p:bg>
-    <p:spTree>
-      <p:nvGrpSpPr>
-        <p:cNvPr id="1" name=""/>
-        <p:cNvGrpSpPr/>
-        <p:nvPr/>
-      </p:nvGrpSpPr>
-      <p:grpSpPr>
-        <a:xfrm>
-          <a:off x="0" y="0"/>
-          <a:ext cx="0" cy="0"/>
-          <a:chOff x="0" y="0"/>
-          <a:chExt cx="0" cy="0"/>
-        </a:xfrm>
-      </p:grpSpPr>
-      <p:sp>
-        <p:nvSpPr>
-          <p:cNvPr id="153" name="Rectangle 9">
-            <a:extLst>
-              <a:ext uri="{C183D7F6-B498-43B3-948B-1728B52AA6E4}">
-                <adec:decorative xmlns:adec="http://schemas.microsoft.com/office/drawing/2017/decorative" val="1"/>
-              </a:ext>
-            </a:extLst>
-          </p:cNvPr>
+      <p:sp>
+        <p:nvSpPr>
+          <p:cNvPr id="73" name="CaixaDeTexto 4"/>
           <p:cNvSpPr/>
           <p:nvPr/>
         </p:nvSpPr>
         <p:spPr>
           <a:xfrm>
-            <a:off x="1440" y="0"/>
-            <a:ext cx="12188520" cy="6857640"/>
-          </a:xfrm>
-          <a:prstGeom prst="rect">
-            <a:avLst/>
-          </a:prstGeom>
-          <a:noFill/>
-          <a:ln>
-            <a:noFill/>
-          </a:ln>
-        </p:spPr>
-        <p:style>
-          <a:lnRef idx="2">
-            <a:schemeClr val="accent1">
-              <a:shade val="50000"/>
-            </a:schemeClr>
-          </a:lnRef>
-          <a:fillRef idx="1">
-            <a:schemeClr val="accent1"/>
-          </a:fillRef>
-          <a:effectRef idx="0">
-            <a:schemeClr val="accent1"/>
-          </a:effectRef>
-          <a:fontRef idx="minor"/>
-        </p:style>
-        <p:txBody>
-          <a:bodyPr lIns="90000" tIns="45000" rIns="90000" bIns="45000" anchor="ctr">
-            <a:noAutofit/>
-          </a:bodyPr>
-          <a:p>
-            <a:endParaRPr lang="en-US" sz="1800" b="0" u="none" strike="noStrike">
-              <a:solidFill>
-                <a:schemeClr val="lt1"/>
-              </a:solidFill>
-              <a:effectLst/>
-              <a:uFillTx/>
-              <a:latin typeface="Aptos"/>
-            </a:endParaRPr>
-          </a:p>
-        </p:txBody>
-      </p:sp>
-      <p:pic>
-        <p:nvPicPr>
-          <p:cNvPr id="154" name="Espaço Reservado para Conteúdo 4"/>
-          <p:cNvPicPr/>
-          <p:nvPr/>
-        </p:nvPicPr>
-        <p:blipFill>
-          <a:blip r:embed="rId2"/>
-          <a:srcRect l="0" t="7" r="0" b="7"/>
-          <a:stretch/>
-        </p:blipFill>
-        <p:spPr>
-          <a:xfrm>
-            <a:off x="0" y="1440"/>
-            <a:ext cx="12202200" cy="6860160"/>
+            <a:off x="240120" y="213480"/>
+            <a:ext cx="3038040" cy="522720"/>
           </a:xfrm>
           <a:prstGeom prst="rect">
             <a:avLst/>
@@ -20347,76 +17651,24 @@
             <a:noFill/>
           </a:ln>
         </p:spPr>
-      </p:pic>
-    </p:spTree>
-  </p:cSld>
-  <mc:AlternateContent xmlns:mc="http://schemas.openxmlformats.org/markup-compatibility/2006" xmlns:p14="http://schemas.microsoft.com/office/powerpoint/2010/main">
-    <mc:Choice Requires="p14">
-      <p:transition spd="slow" p14:dur="2000"/>
-    </mc:Choice>
-    <mc:Fallback>
-      <p:transition spd="slow"/>
-    </mc:Fallback>
-  </mc:AlternateContent>
-</p:sld>
-</file>
-
-<file path=ppt/slides/slide57.xml><?xml version="1.0" encoding="utf-8"?>
-<p:sld xmlns:a="http://schemas.openxmlformats.org/drawingml/2006/main" xmlns:p="http://schemas.openxmlformats.org/presentationml/2006/main" xmlns:r="http://schemas.openxmlformats.org/officeDocument/2006/relationships">
-  <p:cSld>
-    <p:spTree>
-      <p:nvGrpSpPr>
-        <p:cNvPr id="1" name=""/>
-        <p:cNvGrpSpPr/>
-        <p:nvPr/>
-      </p:nvGrpSpPr>
-      <p:grpSpPr>
-        <a:xfrm>
-          <a:off x="0" y="0"/>
-          <a:ext cx="0" cy="0"/>
-          <a:chOff x="0" y="0"/>
-          <a:chExt cx="0" cy="0"/>
-        </a:xfrm>
-      </p:grpSpPr>
-      <p:sp>
-        <p:nvSpPr>
-          <p:cNvPr id="163" name="PlaceHolder 1"/>
-          <p:cNvSpPr>
-            <a:spLocks noGrp="1"/>
-          </p:cNvSpPr>
-          <p:nvPr>
-            <p:ph/>
-          </p:nvPr>
-        </p:nvSpPr>
-        <p:spPr>
-          <a:xfrm>
-            <a:off x="838080" y="1825560"/>
-            <a:ext cx="10515240" cy="4350960"/>
-          </a:xfrm>
-          <a:prstGeom prst="rect">
-            <a:avLst/>
-          </a:prstGeom>
-          <a:noFill/>
-          <a:ln w="0">
-            <a:noFill/>
-          </a:ln>
-        </p:spPr>
+        <p:style>
+          <a:lnRef idx="0"/>
+          <a:fillRef idx="0"/>
+          <a:effectRef idx="0"/>
+          <a:fontRef idx="minor"/>
+        </p:style>
         <p:txBody>
-          <a:bodyPr lIns="91440" tIns="45720" rIns="91440" bIns="45720" anchor="t">
-            <a:normAutofit/>
+          <a:bodyPr numCol="1" spcCol="0" horzOverflow="overflow" anchor="t">
+            <a:spAutoFit/>
           </a:bodyPr>
           <a:p>
-            <a:pPr indent="0" algn="ctr" defTabSz="914400">
+            <a:pPr defTabSz="914400">
               <a:lnSpc>
                 <a:spcPct val="100000"/>
               </a:lnSpc>
-              <a:buNone/>
-              <a:tabLst>
-                <a:tab pos="0" algn="l"/>
-              </a:tabLst>
             </a:pPr>
             <a:r>
-              <a:rPr lang="pt-BR" sz="7200" b="1" u="none" strike="noStrike">
+              <a:rPr lang="pt-BR" sz="2800" b="1" u="none" strike="noStrike">
                 <a:solidFill>
                   <a:srgbClr val="FF0000"/>
                 </a:solidFill>
@@ -20424,274 +17676,22 @@
                 <a:uFillTx/>
                 <a:latin typeface="Aptos"/>
               </a:rPr>
-              <a:t>R:</a:t>
-            </a:r>
-            <a:r>
-              <a:rPr lang="pt-BR" sz="7200" b="1" u="none" strike="noStrike">
-                <a:solidFill>
-                  <a:schemeClr val="dk1"/>
-                </a:solidFill>
-                <a:effectLst/>
-                <a:uFillTx/>
-                <a:latin typeface="Aptos"/>
-              </a:rPr>
-              <a:t> </a:t>
-            </a:r>
-            <a:r>
-              <a:rPr lang="pt-BR" sz="7200" b="1" u="none" strike="noStrike">
-                <a:solidFill>
-                  <a:schemeClr val="dk1"/>
-                </a:solidFill>
-                <a:effectLst/>
-                <a:uFillTx/>
-                <a:latin typeface="Aptos"/>
-                <a:ea typeface="Aptos"/>
-              </a:rPr>
-              <a:t>O Espírito nos una num só corpo!</a:t>
-            </a:r>
-            <a:endParaRPr lang="de-DE" sz="7200" b="0" u="none" strike="noStrike">
+              <a:t>{{canto.rotulo}}</a:t>
+            </a:r>
+            <a:endParaRPr lang="pt-BR" sz="2800" b="0" u="none" strike="noStrike">
               <a:solidFill>
-                <a:schemeClr val="dk1"/>
+                <a:srgbClr val="000000"/>
               </a:solidFill>
               <a:effectLst/>
               <a:uFillTx/>
-              <a:latin typeface="Aptos"/>
+              <a:latin typeface="Arial"/>
             </a:endParaRPr>
           </a:p>
         </p:txBody>
       </p:sp>
     </p:spTree>
   </p:cSld>
-  <mc:AlternateContent xmlns:mc="http://schemas.openxmlformats.org/markup-compatibility/2006" xmlns:p14="http://schemas.microsoft.com/office/powerpoint/2010/main">
-    <mc:Choice Requires="p14">
-      <p:transition spd="slow" p14:dur="2000"/>
-    </mc:Choice>
-    <mc:Fallback>
-      <p:transition spd="slow"/>
-    </mc:Fallback>
-  </mc:AlternateContent>
-</p:sld>
-</file>
-
-<file path=ppt/slides/slide58.xml><?xml version="1.0" encoding="utf-8"?>
-<p:sld xmlns:a="http://schemas.openxmlformats.org/drawingml/2006/main" xmlns:p="http://schemas.openxmlformats.org/presentationml/2006/main" xmlns:r="http://schemas.openxmlformats.org/officeDocument/2006/relationships">
-  <p:cSld>
-    <p:bg>
-      <p:bgPr>
-        <a:solidFill>
-          <a:schemeClr val="lt1"/>
-        </a:solidFill>
-      </p:bgPr>
-    </p:bg>
-    <p:spTree>
-      <p:nvGrpSpPr>
-        <p:cNvPr id="1" name=""/>
-        <p:cNvGrpSpPr/>
-        <p:nvPr/>
-      </p:nvGrpSpPr>
-      <p:grpSpPr>
-        <a:xfrm>
-          <a:off x="0" y="0"/>
-          <a:ext cx="0" cy="0"/>
-          <a:chOff x="0" y="0"/>
-          <a:chExt cx="0" cy="0"/>
-        </a:xfrm>
-      </p:grpSpPr>
-      <p:sp>
-        <p:nvSpPr>
-          <p:cNvPr id="153" name="Rectangle 9">
-            <a:extLst>
-              <a:ext uri="{C183D7F6-B498-43B3-948B-1728B52AA6E4}">
-                <adec:decorative xmlns:adec="http://schemas.microsoft.com/office/drawing/2017/decorative" val="1"/>
-              </a:ext>
-            </a:extLst>
-          </p:cNvPr>
-          <p:cNvSpPr/>
-          <p:nvPr/>
-        </p:nvSpPr>
-        <p:spPr>
-          <a:xfrm>
-            <a:off x="1440" y="0"/>
-            <a:ext cx="12188520" cy="6857640"/>
-          </a:xfrm>
-          <a:prstGeom prst="rect">
-            <a:avLst/>
-          </a:prstGeom>
-          <a:noFill/>
-          <a:ln>
-            <a:noFill/>
-          </a:ln>
-        </p:spPr>
-        <p:style>
-          <a:lnRef idx="2">
-            <a:schemeClr val="accent1">
-              <a:shade val="50000"/>
-            </a:schemeClr>
-          </a:lnRef>
-          <a:fillRef idx="1">
-            <a:schemeClr val="accent1"/>
-          </a:fillRef>
-          <a:effectRef idx="0">
-            <a:schemeClr val="accent1"/>
-          </a:effectRef>
-          <a:fontRef idx="minor"/>
-        </p:style>
-        <p:txBody>
-          <a:bodyPr lIns="90000" tIns="45000" rIns="90000" bIns="45000" anchor="ctr">
-            <a:noAutofit/>
-          </a:bodyPr>
-          <a:p>
-            <a:endParaRPr lang="en-US" sz="1800" b="0" u="none" strike="noStrike">
-              <a:solidFill>
-                <a:schemeClr val="lt1"/>
-              </a:solidFill>
-              <a:effectLst/>
-              <a:uFillTx/>
-              <a:latin typeface="Aptos"/>
-            </a:endParaRPr>
-          </a:p>
-        </p:txBody>
-      </p:sp>
-      <p:pic>
-        <p:nvPicPr>
-          <p:cNvPr id="154" name="Espaço Reservado para Conteúdo 4"/>
-          <p:cNvPicPr/>
-          <p:nvPr/>
-        </p:nvPicPr>
-        <p:blipFill>
-          <a:blip r:embed="rId2"/>
-          <a:srcRect l="0" t="7" r="0" b="7"/>
-          <a:stretch/>
-        </p:blipFill>
-        <p:spPr>
-          <a:xfrm>
-            <a:off x="0" y="1440"/>
-            <a:ext cx="12202200" cy="6860160"/>
-          </a:xfrm>
-          <a:prstGeom prst="rect">
-            <a:avLst/>
-          </a:prstGeom>
-          <a:noFill/>
-          <a:ln w="0">
-            <a:noFill/>
-          </a:ln>
-        </p:spPr>
-      </p:pic>
-    </p:spTree>
-  </p:cSld>
-  <mc:AlternateContent xmlns:mc="http://schemas.openxmlformats.org/markup-compatibility/2006" xmlns:p14="http://schemas.microsoft.com/office/powerpoint/2010/main">
-    <mc:Choice Requires="p14">
-      <p:transition spd="slow" p14:dur="2000"/>
-    </mc:Choice>
-    <mc:Fallback>
-      <p:transition spd="slow"/>
-    </mc:Fallback>
-  </mc:AlternateContent>
-</p:sld>
-</file>
-
-<file path=ppt/slides/slide59.xml><?xml version="1.0" encoding="utf-8"?>
-<p:sld xmlns:a="http://schemas.openxmlformats.org/drawingml/2006/main" xmlns:p="http://schemas.openxmlformats.org/presentationml/2006/main" xmlns:r="http://schemas.openxmlformats.org/officeDocument/2006/relationships">
-  <p:cSld>
-    <p:spTree>
-      <p:nvGrpSpPr>
-        <p:cNvPr id="1" name=""/>
-        <p:cNvGrpSpPr/>
-        <p:nvPr/>
-      </p:nvGrpSpPr>
-      <p:grpSpPr>
-        <a:xfrm>
-          <a:off x="0" y="0"/>
-          <a:ext cx="0" cy="0"/>
-          <a:chOff x="0" y="0"/>
-          <a:chExt cx="0" cy="0"/>
-        </a:xfrm>
-      </p:grpSpPr>
-      <p:sp>
-        <p:nvSpPr>
-          <p:cNvPr id="163" name="PlaceHolder 1"/>
-          <p:cNvSpPr>
-            <a:spLocks noGrp="1"/>
-          </p:cNvSpPr>
-          <p:nvPr>
-            <p:ph/>
-          </p:nvPr>
-        </p:nvSpPr>
-        <p:spPr>
-          <a:xfrm>
-            <a:off x="838080" y="1825560"/>
-            <a:ext cx="10515240" cy="4350960"/>
-          </a:xfrm>
-          <a:prstGeom prst="rect">
-            <a:avLst/>
-          </a:prstGeom>
-          <a:noFill/>
-          <a:ln w="0">
-            <a:noFill/>
-          </a:ln>
-        </p:spPr>
-        <p:txBody>
-          <a:bodyPr lIns="91440" tIns="45720" rIns="91440" bIns="45720" anchor="t">
-            <a:normAutofit/>
-          </a:bodyPr>
-          <a:p>
-            <a:pPr indent="0" algn="ctr" defTabSz="914400">
-              <a:lnSpc>
-                <a:spcPct val="100000"/>
-              </a:lnSpc>
-              <a:buNone/>
-              <a:tabLst>
-                <a:tab pos="0" algn="l"/>
-              </a:tabLst>
-            </a:pPr>
-            <a:r>
-              <a:rPr lang="pt-BR" sz="7200" b="1" u="none" strike="noStrike">
-                <a:solidFill>
-                  <a:srgbClr val="FF0000"/>
-                </a:solidFill>
-                <a:effectLst/>
-                <a:uFillTx/>
-                <a:latin typeface="Aptos"/>
-              </a:rPr>
-              <a:t>R:</a:t>
-            </a:r>
-            <a:r>
-              <a:rPr lang="pt-BR" sz="7200" b="1" u="none" strike="noStrike">
-                <a:solidFill>
-                  <a:schemeClr val="dk1"/>
-                </a:solidFill>
-                <a:effectLst/>
-                <a:uFillTx/>
-                <a:latin typeface="Aptos"/>
-              </a:rPr>
-              <a:t> </a:t>
-            </a:r>
-            <a:r>
-              <a:rPr lang="pt-BR" sz="7200" b="1" u="none" strike="noStrike">
-                <a:solidFill>
-                  <a:schemeClr val="dk1"/>
-                </a:solidFill>
-                <a:effectLst/>
-                <a:uFillTx/>
-                <a:latin typeface="Aptos"/>
-                <a:ea typeface="Aptos"/>
-              </a:rPr>
-              <a:t>Confirmai na unidade a vossa Igreja!</a:t>
-            </a:r>
-            <a:endParaRPr lang="de-DE" sz="7200" b="0" u="none" strike="noStrike">
-              <a:solidFill>
-                <a:schemeClr val="dk1"/>
-              </a:solidFill>
-              <a:effectLst/>
-              <a:uFillTx/>
-              <a:latin typeface="Aptos"/>
-            </a:endParaRPr>
-          </a:p>
-        </p:txBody>
-      </p:sp>
-    </p:spTree>
-  </p:cSld>
-  <mc:AlternateContent xmlns:mc="http://schemas.openxmlformats.org/markup-compatibility/2006" xmlns:p14="http://schemas.microsoft.com/office/powerpoint/2010/main">
+  <mc:AlternateContent>
     <mc:Choice Requires="p14">
       <p:transition spd="slow" p14:dur="2000"/>
     </mc:Choice>
@@ -20819,1098 +17819,6 @@
 </p:sld>
 </file>
 
-<file path=ppt/slides/slide60.xml><?xml version="1.0" encoding="utf-8"?>
-<p:sld xmlns:a="http://schemas.openxmlformats.org/drawingml/2006/main" xmlns:p="http://schemas.openxmlformats.org/presentationml/2006/main" xmlns:r="http://schemas.openxmlformats.org/officeDocument/2006/relationships">
-  <p:cSld>
-    <p:bg>
-      <p:bgPr>
-        <a:solidFill>
-          <a:schemeClr val="lt1"/>
-        </a:solidFill>
-      </p:bgPr>
-    </p:bg>
-    <p:spTree>
-      <p:nvGrpSpPr>
-        <p:cNvPr id="1" name=""/>
-        <p:cNvGrpSpPr/>
-        <p:nvPr/>
-      </p:nvGrpSpPr>
-      <p:grpSpPr>
-        <a:xfrm>
-          <a:off x="0" y="0"/>
-          <a:ext cx="0" cy="0"/>
-          <a:chOff x="0" y="0"/>
-          <a:chExt cx="0" cy="0"/>
-        </a:xfrm>
-      </p:grpSpPr>
-      <p:sp>
-        <p:nvSpPr>
-          <p:cNvPr id="153" name="Rectangle 9">
-            <a:extLst>
-              <a:ext uri="{C183D7F6-B498-43B3-948B-1728B52AA6E4}">
-                <adec:decorative xmlns:adec="http://schemas.microsoft.com/office/drawing/2017/decorative" val="1"/>
-              </a:ext>
-            </a:extLst>
-          </p:cNvPr>
-          <p:cNvSpPr/>
-          <p:nvPr/>
-        </p:nvSpPr>
-        <p:spPr>
-          <a:xfrm>
-            <a:off x="1440" y="0"/>
-            <a:ext cx="12188520" cy="6857640"/>
-          </a:xfrm>
-          <a:prstGeom prst="rect">
-            <a:avLst/>
-          </a:prstGeom>
-          <a:noFill/>
-          <a:ln>
-            <a:noFill/>
-          </a:ln>
-        </p:spPr>
-        <p:style>
-          <a:lnRef idx="2">
-            <a:schemeClr val="accent1">
-              <a:shade val="50000"/>
-            </a:schemeClr>
-          </a:lnRef>
-          <a:fillRef idx="1">
-            <a:schemeClr val="accent1"/>
-          </a:fillRef>
-          <a:effectRef idx="0">
-            <a:schemeClr val="accent1"/>
-          </a:effectRef>
-          <a:fontRef idx="minor"/>
-        </p:style>
-        <p:txBody>
-          <a:bodyPr lIns="90000" tIns="45000" rIns="90000" bIns="45000" anchor="ctr">
-            <a:noAutofit/>
-          </a:bodyPr>
-          <a:p>
-            <a:endParaRPr lang="en-US" sz="1800" b="0" u="none" strike="noStrike">
-              <a:solidFill>
-                <a:schemeClr val="lt1"/>
-              </a:solidFill>
-              <a:effectLst/>
-              <a:uFillTx/>
-              <a:latin typeface="Aptos"/>
-            </a:endParaRPr>
-          </a:p>
-        </p:txBody>
-      </p:sp>
-      <p:pic>
-        <p:nvPicPr>
-          <p:cNvPr id="154" name="Espaço Reservado para Conteúdo 4"/>
-          <p:cNvPicPr/>
-          <p:nvPr/>
-        </p:nvPicPr>
-        <p:blipFill>
-          <a:blip r:embed="rId2"/>
-          <a:srcRect l="0" t="7" r="0" b="7"/>
-          <a:stretch/>
-        </p:blipFill>
-        <p:spPr>
-          <a:xfrm>
-            <a:off x="0" y="1440"/>
-            <a:ext cx="12202200" cy="6860160"/>
-          </a:xfrm>
-          <a:prstGeom prst="rect">
-            <a:avLst/>
-          </a:prstGeom>
-          <a:noFill/>
-          <a:ln w="0">
-            <a:noFill/>
-          </a:ln>
-        </p:spPr>
-      </p:pic>
-    </p:spTree>
-  </p:cSld>
-  <mc:AlternateContent xmlns:mc="http://schemas.openxmlformats.org/markup-compatibility/2006" xmlns:p14="http://schemas.microsoft.com/office/powerpoint/2010/main">
-    <mc:Choice Requires="p14">
-      <p:transition spd="slow" p14:dur="2000"/>
-    </mc:Choice>
-    <mc:Fallback>
-      <p:transition spd="slow"/>
-    </mc:Fallback>
-  </mc:AlternateContent>
-</p:sld>
-</file>
-
-<file path=ppt/slides/slide61.xml><?xml version="1.0" encoding="utf-8"?>
-<p:sld xmlns:a="http://schemas.openxmlformats.org/drawingml/2006/main" xmlns:p="http://schemas.openxmlformats.org/presentationml/2006/main" xmlns:r="http://schemas.openxmlformats.org/officeDocument/2006/relationships">
-  <p:cSld>
-    <p:spTree>
-      <p:nvGrpSpPr>
-        <p:cNvPr id="1" name=""/>
-        <p:cNvGrpSpPr/>
-        <p:nvPr/>
-      </p:nvGrpSpPr>
-      <p:grpSpPr>
-        <a:xfrm>
-          <a:off x="0" y="0"/>
-          <a:ext cx="0" cy="0"/>
-          <a:chOff x="0" y="0"/>
-          <a:chExt cx="0" cy="0"/>
-        </a:xfrm>
-      </p:grpSpPr>
-      <p:sp>
-        <p:nvSpPr>
-          <p:cNvPr id="163" name="PlaceHolder 1"/>
-          <p:cNvSpPr>
-            <a:spLocks noGrp="1"/>
-          </p:cNvSpPr>
-          <p:nvPr>
-            <p:ph/>
-          </p:nvPr>
-        </p:nvSpPr>
-        <p:spPr>
-          <a:xfrm>
-            <a:off x="838080" y="1825560"/>
-            <a:ext cx="10515240" cy="4350960"/>
-          </a:xfrm>
-          <a:prstGeom prst="rect">
-            <a:avLst/>
-          </a:prstGeom>
-          <a:noFill/>
-          <a:ln w="0">
-            <a:noFill/>
-          </a:ln>
-        </p:spPr>
-        <p:txBody>
-          <a:bodyPr lIns="91440" tIns="45720" rIns="91440" bIns="45720" anchor="t">
-            <a:normAutofit/>
-          </a:bodyPr>
-          <a:p>
-            <a:pPr indent="0" algn="ctr" defTabSz="914400">
-              <a:lnSpc>
-                <a:spcPct val="100000"/>
-              </a:lnSpc>
-              <a:buNone/>
-              <a:tabLst>
-                <a:tab pos="0" algn="l"/>
-              </a:tabLst>
-            </a:pPr>
-            <a:r>
-              <a:rPr lang="pt-BR" sz="7200" b="1" u="none" strike="noStrike">
-                <a:solidFill>
-                  <a:srgbClr val="FF0000"/>
-                </a:solidFill>
-                <a:effectLst/>
-                <a:uFillTx/>
-                <a:latin typeface="Aptos"/>
-              </a:rPr>
-              <a:t>R:</a:t>
-            </a:r>
-            <a:r>
-              <a:rPr lang="pt-BR" sz="7200" b="1" u="none" strike="noStrike">
-                <a:solidFill>
-                  <a:schemeClr val="dk1"/>
-                </a:solidFill>
-                <a:effectLst/>
-                <a:uFillTx/>
-                <a:latin typeface="Aptos"/>
-              </a:rPr>
-              <a:t> </a:t>
-            </a:r>
-            <a:r>
-              <a:rPr lang="pt-BR" sz="7200" b="1" u="none" strike="noStrike">
-                <a:solidFill>
-                  <a:schemeClr val="dk1"/>
-                </a:solidFill>
-                <a:effectLst/>
-                <a:uFillTx/>
-                <a:latin typeface="Aptos"/>
-                <a:ea typeface="Aptos"/>
-              </a:rPr>
-              <a:t>Ajudai-nos a criar um mundo novo!</a:t>
-            </a:r>
-            <a:endParaRPr lang="de-DE" sz="7200" b="0" u="none" strike="noStrike">
-              <a:solidFill>
-                <a:schemeClr val="dk1"/>
-              </a:solidFill>
-              <a:effectLst/>
-              <a:uFillTx/>
-              <a:latin typeface="Aptos"/>
-            </a:endParaRPr>
-          </a:p>
-        </p:txBody>
-      </p:sp>
-    </p:spTree>
-  </p:cSld>
-  <mc:AlternateContent xmlns:mc="http://schemas.openxmlformats.org/markup-compatibility/2006" xmlns:p14="http://schemas.microsoft.com/office/powerpoint/2010/main">
-    <mc:Choice Requires="p14">
-      <p:transition spd="slow" p14:dur="2000"/>
-    </mc:Choice>
-    <mc:Fallback>
-      <p:transition spd="slow"/>
-    </mc:Fallback>
-  </mc:AlternateContent>
-</p:sld>
-</file>
-
-<file path=ppt/slides/slide62.xml><?xml version="1.0" encoding="utf-8"?>
-<p:sld xmlns:a="http://schemas.openxmlformats.org/drawingml/2006/main" xmlns:p="http://schemas.openxmlformats.org/presentationml/2006/main" xmlns:r="http://schemas.openxmlformats.org/officeDocument/2006/relationships">
-  <p:cSld>
-    <p:bg>
-      <p:bgPr>
-        <a:solidFill>
-          <a:schemeClr val="lt1"/>
-        </a:solidFill>
-      </p:bgPr>
-    </p:bg>
-    <p:spTree>
-      <p:nvGrpSpPr>
-        <p:cNvPr id="1" name=""/>
-        <p:cNvGrpSpPr/>
-        <p:nvPr/>
-      </p:nvGrpSpPr>
-      <p:grpSpPr>
-        <a:xfrm>
-          <a:off x="0" y="0"/>
-          <a:ext cx="0" cy="0"/>
-          <a:chOff x="0" y="0"/>
-          <a:chExt cx="0" cy="0"/>
-        </a:xfrm>
-      </p:grpSpPr>
-      <p:sp>
-        <p:nvSpPr>
-          <p:cNvPr id="153" name="Rectangle 9">
-            <a:extLst>
-              <a:ext uri="{C183D7F6-B498-43B3-948B-1728B52AA6E4}">
-                <adec:decorative xmlns:adec="http://schemas.microsoft.com/office/drawing/2017/decorative" val="1"/>
-              </a:ext>
-            </a:extLst>
-          </p:cNvPr>
-          <p:cNvSpPr/>
-          <p:nvPr/>
-        </p:nvSpPr>
-        <p:spPr>
-          <a:xfrm>
-            <a:off x="1440" y="0"/>
-            <a:ext cx="12188520" cy="6857640"/>
-          </a:xfrm>
-          <a:prstGeom prst="rect">
-            <a:avLst/>
-          </a:prstGeom>
-          <a:noFill/>
-          <a:ln>
-            <a:noFill/>
-          </a:ln>
-        </p:spPr>
-        <p:style>
-          <a:lnRef idx="2">
-            <a:schemeClr val="accent1">
-              <a:shade val="50000"/>
-            </a:schemeClr>
-          </a:lnRef>
-          <a:fillRef idx="1">
-            <a:schemeClr val="accent1"/>
-          </a:fillRef>
-          <a:effectRef idx="0">
-            <a:schemeClr val="accent1"/>
-          </a:effectRef>
-          <a:fontRef idx="minor"/>
-        </p:style>
-        <p:txBody>
-          <a:bodyPr lIns="90000" tIns="45000" rIns="90000" bIns="45000" anchor="ctr">
-            <a:noAutofit/>
-          </a:bodyPr>
-          <a:p>
-            <a:endParaRPr lang="en-US" sz="1800" b="0" u="none" strike="noStrike">
-              <a:solidFill>
-                <a:schemeClr val="lt1"/>
-              </a:solidFill>
-              <a:effectLst/>
-              <a:uFillTx/>
-              <a:latin typeface="Aptos"/>
-            </a:endParaRPr>
-          </a:p>
-        </p:txBody>
-      </p:sp>
-      <p:pic>
-        <p:nvPicPr>
-          <p:cNvPr id="154" name="Espaço Reservado para Conteúdo 4"/>
-          <p:cNvPicPr/>
-          <p:nvPr/>
-        </p:nvPicPr>
-        <p:blipFill>
-          <a:blip r:embed="rId2"/>
-          <a:srcRect l="0" t="7" r="0" b="7"/>
-          <a:stretch/>
-        </p:blipFill>
-        <p:spPr>
-          <a:xfrm>
-            <a:off x="0" y="1440"/>
-            <a:ext cx="12202200" cy="6860160"/>
-          </a:xfrm>
-          <a:prstGeom prst="rect">
-            <a:avLst/>
-          </a:prstGeom>
-          <a:noFill/>
-          <a:ln w="0">
-            <a:noFill/>
-          </a:ln>
-        </p:spPr>
-      </p:pic>
-    </p:spTree>
-  </p:cSld>
-  <mc:AlternateContent xmlns:mc="http://schemas.openxmlformats.org/markup-compatibility/2006" xmlns:p14="http://schemas.microsoft.com/office/powerpoint/2010/main">
-    <mc:Choice Requires="p14">
-      <p:transition spd="slow" p14:dur="2000"/>
-    </mc:Choice>
-    <mc:Fallback>
-      <p:transition spd="slow"/>
-    </mc:Fallback>
-  </mc:AlternateContent>
-</p:sld>
-</file>
-
-<file path=ppt/slides/slide63.xml><?xml version="1.0" encoding="utf-8"?>
-<p:sld xmlns:a="http://schemas.openxmlformats.org/drawingml/2006/main" xmlns:p="http://schemas.openxmlformats.org/presentationml/2006/main" xmlns:r="http://schemas.openxmlformats.org/officeDocument/2006/relationships">
-  <p:cSld>
-    <p:spTree>
-      <p:nvGrpSpPr>
-        <p:cNvPr id="1" name=""/>
-        <p:cNvGrpSpPr/>
-        <p:nvPr/>
-      </p:nvGrpSpPr>
-      <p:grpSpPr>
-        <a:xfrm>
-          <a:off x="0" y="0"/>
-          <a:ext cx="0" cy="0"/>
-          <a:chOff x="0" y="0"/>
-          <a:chExt cx="0" cy="0"/>
-        </a:xfrm>
-      </p:grpSpPr>
-      <p:sp>
-        <p:nvSpPr>
-          <p:cNvPr id="163" name="PlaceHolder 1"/>
-          <p:cNvSpPr>
-            <a:spLocks noGrp="1"/>
-          </p:cNvSpPr>
-          <p:nvPr>
-            <p:ph/>
-          </p:nvPr>
-        </p:nvSpPr>
-        <p:spPr>
-          <a:xfrm>
-            <a:off x="838080" y="1825560"/>
-            <a:ext cx="10515240" cy="4350960"/>
-          </a:xfrm>
-          <a:prstGeom prst="rect">
-            <a:avLst/>
-          </a:prstGeom>
-          <a:noFill/>
-          <a:ln w="0">
-            <a:noFill/>
-          </a:ln>
-        </p:spPr>
-        <p:txBody>
-          <a:bodyPr lIns="91440" tIns="45720" rIns="91440" bIns="45720" anchor="t">
-            <a:normAutofit/>
-          </a:bodyPr>
-          <a:p>
-            <a:pPr indent="0" algn="ctr" defTabSz="914400">
-              <a:lnSpc>
-                <a:spcPct val="100000"/>
-              </a:lnSpc>
-              <a:buNone/>
-              <a:tabLst>
-                <a:tab pos="0" algn="l"/>
-              </a:tabLst>
-            </a:pPr>
-            <a:r>
-              <a:rPr lang="pt-BR" sz="7200" b="1" u="none" strike="noStrike">
-                <a:solidFill>
-                  <a:srgbClr val="FF0000"/>
-                </a:solidFill>
-                <a:effectLst/>
-                <a:uFillTx/>
-                <a:latin typeface="Aptos"/>
-              </a:rPr>
-              <a:t>R:</a:t>
-            </a:r>
-            <a:r>
-              <a:rPr lang="pt-BR" sz="7200" b="1" u="none" strike="noStrike">
-                <a:solidFill>
-                  <a:schemeClr val="dk1"/>
-                </a:solidFill>
-                <a:effectLst/>
-                <a:uFillTx/>
-                <a:latin typeface="Aptos"/>
-              </a:rPr>
-              <a:t> </a:t>
-            </a:r>
-            <a:r>
-              <a:rPr lang="pt-BR" sz="7200" b="1" u="none" strike="noStrike">
-                <a:solidFill>
-                  <a:schemeClr val="dk1"/>
-                </a:solidFill>
-                <a:effectLst/>
-                <a:uFillTx/>
-                <a:latin typeface="Aptos"/>
-                <a:ea typeface="Aptos"/>
-              </a:rPr>
-              <a:t>Concedei-lhes, ó Senhor, a luz eterna!</a:t>
-            </a:r>
-            <a:endParaRPr lang="de-DE" sz="7200" b="0" u="none" strike="noStrike">
-              <a:solidFill>
-                <a:schemeClr val="dk1"/>
-              </a:solidFill>
-              <a:effectLst/>
-              <a:uFillTx/>
-              <a:latin typeface="Aptos"/>
-            </a:endParaRPr>
-          </a:p>
-        </p:txBody>
-      </p:sp>
-    </p:spTree>
-  </p:cSld>
-  <mc:AlternateContent xmlns:mc="http://schemas.openxmlformats.org/markup-compatibility/2006" xmlns:p14="http://schemas.microsoft.com/office/powerpoint/2010/main">
-    <mc:Choice Requires="p14">
-      <p:transition spd="slow" p14:dur="2000"/>
-    </mc:Choice>
-    <mc:Fallback>
-      <p:transition spd="slow"/>
-    </mc:Fallback>
-  </mc:AlternateContent>
-</p:sld>
-</file>
-
-<file path=ppt/slides/slide64.xml><?xml version="1.0" encoding="utf-8"?>
-<p:sld xmlns:a="http://schemas.openxmlformats.org/drawingml/2006/main" xmlns:p="http://schemas.openxmlformats.org/presentationml/2006/main" xmlns:r="http://schemas.openxmlformats.org/officeDocument/2006/relationships">
-  <p:cSld>
-    <p:bg>
-      <p:bgPr>
-        <a:solidFill>
-          <a:schemeClr val="lt1"/>
-        </a:solidFill>
-      </p:bgPr>
-    </p:bg>
-    <p:spTree>
-      <p:nvGrpSpPr>
-        <p:cNvPr id="1" name=""/>
-        <p:cNvGrpSpPr/>
-        <p:nvPr/>
-      </p:nvGrpSpPr>
-      <p:grpSpPr>
-        <a:xfrm>
-          <a:off x="0" y="0"/>
-          <a:ext cx="0" cy="0"/>
-          <a:chOff x="0" y="0"/>
-          <a:chExt cx="0" cy="0"/>
-        </a:xfrm>
-      </p:grpSpPr>
-      <p:sp>
-        <p:nvSpPr>
-          <p:cNvPr id="153" name="Rectangle 9">
-            <a:extLst>
-              <a:ext uri="{C183D7F6-B498-43B3-948B-1728B52AA6E4}">
-                <adec:decorative xmlns:adec="http://schemas.microsoft.com/office/drawing/2017/decorative" val="1"/>
-              </a:ext>
-            </a:extLst>
-          </p:cNvPr>
-          <p:cNvSpPr/>
-          <p:nvPr/>
-        </p:nvSpPr>
-        <p:spPr>
-          <a:xfrm>
-            <a:off x="1440" y="0"/>
-            <a:ext cx="12188520" cy="6857640"/>
-          </a:xfrm>
-          <a:prstGeom prst="rect">
-            <a:avLst/>
-          </a:prstGeom>
-          <a:noFill/>
-          <a:ln>
-            <a:noFill/>
-          </a:ln>
-        </p:spPr>
-        <p:style>
-          <a:lnRef idx="2">
-            <a:schemeClr val="accent1">
-              <a:shade val="50000"/>
-            </a:schemeClr>
-          </a:lnRef>
-          <a:fillRef idx="1">
-            <a:schemeClr val="accent1"/>
-          </a:fillRef>
-          <a:effectRef idx="0">
-            <a:schemeClr val="accent1"/>
-          </a:effectRef>
-          <a:fontRef idx="minor"/>
-        </p:style>
-        <p:txBody>
-          <a:bodyPr lIns="90000" tIns="45000" rIns="90000" bIns="45000" anchor="ctr">
-            <a:noAutofit/>
-          </a:bodyPr>
-          <a:p>
-            <a:endParaRPr lang="en-US" sz="1800" b="0" u="none" strike="noStrike">
-              <a:solidFill>
-                <a:schemeClr val="lt1"/>
-              </a:solidFill>
-              <a:effectLst/>
-              <a:uFillTx/>
-              <a:latin typeface="Aptos"/>
-            </a:endParaRPr>
-          </a:p>
-        </p:txBody>
-      </p:sp>
-      <p:pic>
-        <p:nvPicPr>
-          <p:cNvPr id="154" name="Espaço Reservado para Conteúdo 4"/>
-          <p:cNvPicPr/>
-          <p:nvPr/>
-        </p:nvPicPr>
-        <p:blipFill>
-          <a:blip r:embed="rId2"/>
-          <a:srcRect l="0" t="7" r="0" b="7"/>
-          <a:stretch/>
-        </p:blipFill>
-        <p:spPr>
-          <a:xfrm>
-            <a:off x="0" y="1440"/>
-            <a:ext cx="12202200" cy="6860160"/>
-          </a:xfrm>
-          <a:prstGeom prst="rect">
-            <a:avLst/>
-          </a:prstGeom>
-          <a:noFill/>
-          <a:ln w="0">
-            <a:noFill/>
-          </a:ln>
-        </p:spPr>
-      </p:pic>
-    </p:spTree>
-  </p:cSld>
-  <mc:AlternateContent xmlns:mc="http://schemas.openxmlformats.org/markup-compatibility/2006" xmlns:p14="http://schemas.microsoft.com/office/powerpoint/2010/main">
-    <mc:Choice Requires="p14">
-      <p:transition spd="slow" p14:dur="2000"/>
-    </mc:Choice>
-    <mc:Fallback>
-      <p:transition spd="slow"/>
-    </mc:Fallback>
-  </mc:AlternateContent>
-</p:sld>
-</file>
-
-<file path=ppt/slides/slide65.xml><?xml version="1.0" encoding="utf-8"?>
-<p:sld xmlns:a="http://schemas.openxmlformats.org/drawingml/2006/main" xmlns:p="http://schemas.openxmlformats.org/presentationml/2006/main" xmlns:r="http://schemas.openxmlformats.org/officeDocument/2006/relationships">
-  <p:cSld>
-    <p:spTree>
-      <p:nvGrpSpPr>
-        <p:cNvPr id="1" name=""/>
-        <p:cNvGrpSpPr/>
-        <p:nvPr/>
-      </p:nvGrpSpPr>
-      <p:grpSpPr>
-        <a:xfrm>
-          <a:off x="0" y="0"/>
-          <a:ext cx="0" cy="0"/>
-          <a:chOff x="0" y="0"/>
-          <a:chExt cx="0" cy="0"/>
-        </a:xfrm>
-      </p:grpSpPr>
-      <p:sp>
-        <p:nvSpPr>
-          <p:cNvPr id="169" name="PlaceHolder 1"/>
-          <p:cNvSpPr>
-            <a:spLocks noGrp="1"/>
-          </p:cNvSpPr>
-          <p:nvPr>
-            <p:ph/>
-          </p:nvPr>
-        </p:nvSpPr>
-        <p:spPr>
-          <a:xfrm>
-            <a:off x="838080" y="1351800"/>
-            <a:ext cx="10515240" cy="4825080"/>
-          </a:xfrm>
-          <a:prstGeom prst="rect">
-            <a:avLst/>
-          </a:prstGeom>
-          <a:noFill/>
-          <a:ln w="0">
-            <a:noFill/>
-          </a:ln>
-        </p:spPr>
-        <p:txBody>
-          <a:bodyPr lIns="91440" tIns="45720" rIns="91440" bIns="45720" anchor="t">
-            <a:normAutofit/>
-          </a:bodyPr>
-          <a:p>
-            <a:pPr indent="0" algn="ctr" defTabSz="914400">
-              <a:lnSpc>
-                <a:spcPct val="100000"/>
-              </a:lnSpc>
-              <a:buNone/>
-              <a:tabLst>
-                <a:tab pos="0" algn="l"/>
-              </a:tabLst>
-            </a:pPr>
-            <a:endParaRPr lang="de-DE" sz="7200" b="0" u="none" strike="noStrike">
-              <a:solidFill>
-                <a:schemeClr val="dk1"/>
-              </a:solidFill>
-              <a:effectLst/>
-              <a:uFillTx/>
-              <a:latin typeface="Aptos"/>
-            </a:endParaRPr>
-          </a:p>
-          <a:p>
-            <a:pPr indent="0" algn="ctr" defTabSz="914400">
-              <a:lnSpc>
-                <a:spcPct val="100000"/>
-              </a:lnSpc>
-              <a:buNone/>
-              <a:tabLst>
-                <a:tab pos="0" algn="l"/>
-              </a:tabLst>
-            </a:pPr>
-            <a:r>
-              <a:rPr lang="pt-BR" sz="7200" b="1" u="none" strike="noStrike">
-                <a:solidFill>
-                  <a:srgbClr val="FF0000"/>
-                </a:solidFill>
-                <a:effectLst/>
-                <a:uFillTx/>
-                <a:latin typeface="Aptos"/>
-              </a:rPr>
-              <a:t>R:</a:t>
-            </a:r>
-            <a:r>
-              <a:rPr lang="pt-BR" sz="7200" b="1" u="none" strike="noStrike">
-                <a:solidFill>
-                  <a:schemeClr val="dk1"/>
-                </a:solidFill>
-                <a:effectLst/>
-                <a:uFillTx/>
-                <a:latin typeface="Aptos"/>
-              </a:rPr>
-              <a:t> Amém!</a:t>
-            </a:r>
-            <a:endParaRPr lang="de-DE" sz="7200" b="0" u="none" strike="noStrike">
-              <a:solidFill>
-                <a:schemeClr val="dk1"/>
-              </a:solidFill>
-              <a:effectLst/>
-              <a:uFillTx/>
-              <a:latin typeface="Aptos"/>
-            </a:endParaRPr>
-          </a:p>
-        </p:txBody>
-      </p:sp>
-    </p:spTree>
-  </p:cSld>
-  <mc:AlternateContent xmlns:mc="http://schemas.openxmlformats.org/markup-compatibility/2006" xmlns:p14="http://schemas.microsoft.com/office/powerpoint/2010/main">
-    <mc:Choice Requires="p14">
-      <p:transition spd="slow" p14:dur="2000"/>
-    </mc:Choice>
-    <mc:Fallback>
-      <p:transition spd="slow"/>
-    </mc:Fallback>
-  </mc:AlternateContent>
-</p:sld>
-</file>
-
-<file path=ppt/slides/slide66.xml><?xml version="1.0" encoding="utf-8"?>
-<p:sld xmlns:a="http://schemas.openxmlformats.org/drawingml/2006/main" xmlns:p="http://schemas.openxmlformats.org/presentationml/2006/main" xmlns:r="http://schemas.openxmlformats.org/officeDocument/2006/relationships" xmlns:p14="http://schemas.microsoft.com/office/powerpoint/2010/main" xmlns:p15="http://schemas.microsoft.com/office/powerpoint/2012/main" xmlns:mc="http://schemas.openxmlformats.org/markup-compatibility/2006">
-  <p:cSld>
-    <p:spTree>
-      <p:nvGrpSpPr>
-        <p:cNvPr id="1" name=""/>
-        <p:cNvGrpSpPr/>
-        <p:nvPr/>
-      </p:nvGrpSpPr>
-      <p:grpSpPr>
-        <a:xfrm>
-          <a:off x="0" y="0"/>
-          <a:ext cx="0" cy="0"/>
-          <a:chOff x="0" y="0"/>
-          <a:chExt cx="0" cy="0"/>
-        </a:xfrm>
-      </p:grpSpPr>
-      <p:pic>
-        <p:nvPicPr>
-          <p:cNvPr id="170" name="Espaço Reservado para Conteúdo 4"/>
-          <p:cNvPicPr/>
-          <p:nvPr/>
-        </p:nvPicPr>
-        <p:blipFill>
-          <a:blip r:embed="rId1"/>
-          <a:srcRect l="0" t="7" r="0" b="7"/>
-          <a:stretch/>
-        </p:blipFill>
-        <p:spPr>
-          <a:xfrm>
-            <a:off x="0" y="1440"/>
-            <a:ext cx="12202200" cy="6860160"/>
-          </a:xfrm>
-          <a:prstGeom prst="rect">
-            <a:avLst/>
-          </a:prstGeom>
-          <a:noFill/>
-          <a:ln w="0">
-            <a:noFill/>
-          </a:ln>
-        </p:spPr>
-      </p:pic>
-    </p:spTree>
-  </p:cSld>
-  <mc:AlternateContent>
-    <mc:Choice Requires="p14">
-      <p:transition spd="slow" p14:dur="2000"/>
-    </mc:Choice>
-    <mc:Fallback>
-      <p:transition spd="slow"/>
-    </mc:Fallback>
-  </mc:AlternateContent>
-</p:sld>
-</file>
-
-<file path=ppt/slides/slide67.xml><?xml version="1.0" encoding="utf-8"?>
-<p:sld xmlns:a="http://schemas.openxmlformats.org/drawingml/2006/main" xmlns:p="http://schemas.openxmlformats.org/presentationml/2006/main" xmlns:r="http://schemas.openxmlformats.org/officeDocument/2006/relationships" xmlns:p14="http://schemas.microsoft.com/office/powerpoint/2010/main" xmlns:p15="http://schemas.microsoft.com/office/powerpoint/2012/main" xmlns:mc="http://schemas.openxmlformats.org/markup-compatibility/2006">
-  <p:cSld>
-    <p:spTree>
-      <p:nvGrpSpPr>
-        <p:cNvPr id="1" name=""/>
-        <p:cNvGrpSpPr/>
-        <p:nvPr/>
-      </p:nvGrpSpPr>
-      <p:grpSpPr>
-        <a:xfrm>
-          <a:off x="0" y="0"/>
-          <a:ext cx="0" cy="0"/>
-          <a:chOff x="0" y="0"/>
-          <a:chExt cx="0" cy="0"/>
-        </a:xfrm>
-      </p:grpSpPr>
-      <p:sp>
-        <p:nvSpPr>
-          <p:cNvPr id="171" name="PlaceHolder 1"/>
-          <p:cNvSpPr>
-            <a:spLocks noGrp="1"/>
-          </p:cNvSpPr>
-          <p:nvPr>
-            <p:ph/>
-          </p:nvPr>
-        </p:nvSpPr>
-        <p:spPr>
-          <a:xfrm>
-            <a:off x="838080" y="1825560"/>
-            <a:ext cx="10515240" cy="4350960"/>
-          </a:xfrm>
-          <a:prstGeom prst="rect">
-            <a:avLst/>
-          </a:prstGeom>
-          <a:noFill/>
-          <a:ln w="0">
-            <a:noFill/>
-          </a:ln>
-        </p:spPr>
-        <p:txBody>
-          <a:bodyPr lIns="91440" tIns="45720" rIns="91440" bIns="45720" anchor="t">
-            <a:normAutofit/>
-          </a:bodyPr>
-          <a:p>
-            <a:pPr indent="0" algn="ctr" defTabSz="914400">
-              <a:lnSpc>
-                <a:spcPct val="100000"/>
-              </a:lnSpc>
-              <a:buNone/>
-              <a:tabLst>
-                <a:tab pos="0" algn="l"/>
-              </a:tabLst>
-            </a:pPr>
-            <a:r>
-              <a:rPr lang="pt-BR" sz="7200" b="1" u="none" strike="noStrike">
-                <a:solidFill>
-                  <a:srgbClr val="FF0000"/>
-                </a:solidFill>
-                <a:effectLst/>
-                <a:uFillTx/>
-                <a:latin typeface="Aptos"/>
-              </a:rPr>
-              <a:t>R:</a:t>
-            </a:r>
-            <a:r>
-              <a:rPr lang="pt-BR" sz="7200" b="1" u="none" strike="noStrike">
-                <a:solidFill>
-                  <a:schemeClr val="dk1"/>
-                </a:solidFill>
-                <a:effectLst/>
-                <a:uFillTx/>
-                <a:latin typeface="Aptos"/>
-              </a:rPr>
-              <a:t> </a:t>
-            </a:r>
-            <a:r>
-              <a:rPr lang="pt-BR" sz="7200" b="1" u="none" strike="noStrike">
-                <a:solidFill>
-                  <a:schemeClr val="dk1"/>
-                </a:solidFill>
-                <a:effectLst/>
-                <a:uFillTx/>
-                <a:latin typeface="Aptos"/>
-                <a:ea typeface="Aptos"/>
-              </a:rPr>
-              <a:t>Vosso é o Reino, o poder e a glória para sempre! </a:t>
-            </a:r>
-            <a:endParaRPr lang="de-DE" sz="7200" b="0" u="none" strike="noStrike">
-              <a:solidFill>
-                <a:schemeClr val="dk1"/>
-              </a:solidFill>
-              <a:effectLst/>
-              <a:uFillTx/>
-              <a:latin typeface="Aptos"/>
-            </a:endParaRPr>
-          </a:p>
-        </p:txBody>
-      </p:sp>
-    </p:spTree>
-  </p:cSld>
-  <mc:AlternateContent>
-    <mc:Choice Requires="p14">
-      <p:transition spd="slow" p14:dur="2000"/>
-    </mc:Choice>
-    <mc:Fallback>
-      <p:transition spd="slow"/>
-    </mc:Fallback>
-  </mc:AlternateContent>
-</p:sld>
-</file>
-
-<file path=ppt/slides/slide68.xml><?xml version="1.0" encoding="utf-8"?>
-<p:sld xmlns:a="http://schemas.openxmlformats.org/drawingml/2006/main" xmlns:p="http://schemas.openxmlformats.org/presentationml/2006/main" xmlns:r="http://schemas.openxmlformats.org/officeDocument/2006/relationships" xmlns:p14="http://schemas.microsoft.com/office/powerpoint/2010/main" xmlns:p15="http://schemas.microsoft.com/office/powerpoint/2012/main" xmlns:mc="http://schemas.openxmlformats.org/markup-compatibility/2006">
-  <p:cSld>
-    <p:spTree>
-      <p:nvGrpSpPr>
-        <p:cNvPr id="1" name=""/>
-        <p:cNvGrpSpPr/>
-        <p:nvPr/>
-      </p:nvGrpSpPr>
-      <p:grpSpPr>
-        <a:xfrm>
-          <a:off x="0" y="0"/>
-          <a:ext cx="0" cy="0"/>
-          <a:chOff x="0" y="0"/>
-          <a:chExt cx="0" cy="0"/>
-        </a:xfrm>
-      </p:grpSpPr>
-      <p:sp>
-        <p:nvSpPr>
-          <p:cNvPr id="172" name="PlaceHolder 1"/>
-          <p:cNvSpPr>
-            <a:spLocks noGrp="1"/>
-          </p:cNvSpPr>
-          <p:nvPr>
-            <p:ph/>
-          </p:nvPr>
-        </p:nvSpPr>
-        <p:spPr>
-          <a:xfrm>
-            <a:off x="838080" y="1351800"/>
-            <a:ext cx="10515240" cy="4825080"/>
-          </a:xfrm>
-          <a:prstGeom prst="rect">
-            <a:avLst/>
-          </a:prstGeom>
-          <a:noFill/>
-          <a:ln w="0">
-            <a:noFill/>
-          </a:ln>
-        </p:spPr>
-        <p:txBody>
-          <a:bodyPr lIns="91440" tIns="45720" rIns="91440" bIns="45720" anchor="t">
-            <a:normAutofit/>
-          </a:bodyPr>
-          <a:p>
-            <a:pPr indent="0" algn="ctr" defTabSz="914400">
-              <a:lnSpc>
-                <a:spcPct val="100000"/>
-              </a:lnSpc>
-              <a:buNone/>
-              <a:tabLst>
-                <a:tab pos="0" algn="l"/>
-              </a:tabLst>
-            </a:pPr>
-            <a:endParaRPr lang="de-DE" sz="7200" b="0" u="none" strike="noStrike">
-              <a:solidFill>
-                <a:schemeClr val="dk1"/>
-              </a:solidFill>
-              <a:effectLst/>
-              <a:uFillTx/>
-              <a:latin typeface="Aptos"/>
-            </a:endParaRPr>
-          </a:p>
-          <a:p>
-            <a:pPr indent="0" algn="ctr" defTabSz="914400">
-              <a:lnSpc>
-                <a:spcPct val="100000"/>
-              </a:lnSpc>
-              <a:buNone/>
-              <a:tabLst>
-                <a:tab pos="0" algn="l"/>
-              </a:tabLst>
-            </a:pPr>
-            <a:r>
-              <a:rPr lang="pt-BR" sz="7200" b="1" u="none" strike="noStrike">
-                <a:solidFill>
-                  <a:srgbClr val="FF0000"/>
-                </a:solidFill>
-                <a:effectLst/>
-                <a:uFillTx/>
-                <a:latin typeface="Aptos"/>
-              </a:rPr>
-              <a:t>R:</a:t>
-            </a:r>
-            <a:r>
-              <a:rPr lang="pt-BR" sz="7200" b="1" u="none" strike="noStrike">
-                <a:solidFill>
-                  <a:schemeClr val="dk1"/>
-                </a:solidFill>
-                <a:effectLst/>
-                <a:uFillTx/>
-                <a:latin typeface="Aptos"/>
-              </a:rPr>
-              <a:t> Amém!</a:t>
-            </a:r>
-            <a:endParaRPr lang="de-DE" sz="7200" b="0" u="none" strike="noStrike">
-              <a:solidFill>
-                <a:schemeClr val="dk1"/>
-              </a:solidFill>
-              <a:effectLst/>
-              <a:uFillTx/>
-              <a:latin typeface="Aptos"/>
-            </a:endParaRPr>
-          </a:p>
-        </p:txBody>
-      </p:sp>
-    </p:spTree>
-  </p:cSld>
-  <mc:AlternateContent>
-    <mc:Choice Requires="p14">
-      <p:transition spd="slow" p14:dur="2000"/>
-    </mc:Choice>
-    <mc:Fallback>
-      <p:transition spd="slow"/>
-    </mc:Fallback>
-  </mc:AlternateContent>
-</p:sld>
-</file>
-
-<file path=ppt/slides/slide69.xml><?xml version="1.0" encoding="utf-8"?>
-<p:sld xmlns:a="http://schemas.openxmlformats.org/drawingml/2006/main" xmlns:p="http://schemas.openxmlformats.org/presentationml/2006/main" xmlns:r="http://schemas.openxmlformats.org/officeDocument/2006/relationships" xmlns:p14="http://schemas.microsoft.com/office/powerpoint/2010/main" xmlns:p15="http://schemas.microsoft.com/office/powerpoint/2012/main" xmlns:mc="http://schemas.openxmlformats.org/markup-compatibility/2006">
-  <p:cSld>
-    <p:spTree>
-      <p:nvGrpSpPr>
-        <p:cNvPr id="1" name=""/>
-        <p:cNvGrpSpPr/>
-        <p:nvPr/>
-      </p:nvGrpSpPr>
-      <p:grpSpPr>
-        <a:xfrm>
-          <a:off x="0" y="0"/>
-          <a:ext cx="0" cy="0"/>
-          <a:chOff x="0" y="0"/>
-          <a:chExt cx="0" cy="0"/>
-        </a:xfrm>
-      </p:grpSpPr>
-      <p:sp>
-        <p:nvSpPr>
-          <p:cNvPr id="173" name="PlaceHolder 1"/>
-          <p:cNvSpPr>
-            <a:spLocks noGrp="1"/>
-          </p:cNvSpPr>
-          <p:nvPr>
-            <p:ph/>
-          </p:nvPr>
-        </p:nvSpPr>
-        <p:spPr>
-          <a:xfrm>
-            <a:off x="838080" y="1825560"/>
-            <a:ext cx="10515240" cy="4350960"/>
-          </a:xfrm>
-          <a:prstGeom prst="rect">
-            <a:avLst/>
-          </a:prstGeom>
-          <a:noFill/>
-          <a:ln w="0">
-            <a:noFill/>
-          </a:ln>
-        </p:spPr>
-        <p:txBody>
-          <a:bodyPr lIns="91440" tIns="45720" rIns="91440" bIns="45720" anchor="t">
-            <a:normAutofit/>
-          </a:bodyPr>
-          <a:p>
-            <a:pPr indent="0" algn="ctr" defTabSz="914400">
-              <a:lnSpc>
-                <a:spcPct val="100000"/>
-              </a:lnSpc>
-              <a:buNone/>
-              <a:tabLst>
-                <a:tab pos="0" algn="l"/>
-              </a:tabLst>
-            </a:pPr>
-            <a:r>
-              <a:rPr lang="pt-BR" sz="7200" b="1" u="none" strike="noStrike">
-                <a:solidFill>
-                  <a:srgbClr val="FF0000"/>
-                </a:solidFill>
-                <a:effectLst/>
-                <a:uFillTx/>
-                <a:latin typeface="Aptos"/>
-              </a:rPr>
-              <a:t>R:</a:t>
-            </a:r>
-            <a:r>
-              <a:rPr lang="pt-BR" sz="7200" b="1" u="none" strike="noStrike">
-                <a:solidFill>
-                  <a:schemeClr val="dk1"/>
-                </a:solidFill>
-                <a:effectLst/>
-                <a:uFillTx/>
-                <a:latin typeface="Aptos"/>
-              </a:rPr>
-              <a:t> </a:t>
-            </a:r>
-            <a:r>
-              <a:rPr lang="pt-BR" sz="7200" b="1" u="none" strike="noStrike">
-                <a:solidFill>
-                  <a:schemeClr val="dk1"/>
-                </a:solidFill>
-                <a:effectLst/>
-                <a:uFillTx/>
-                <a:latin typeface="Aptos"/>
-                <a:ea typeface="Aptos"/>
-              </a:rPr>
-              <a:t>O amor de Cristo nos uniu!</a:t>
-            </a:r>
-            <a:endParaRPr lang="de-DE" sz="7200" b="0" u="none" strike="noStrike">
-              <a:solidFill>
-                <a:schemeClr val="dk1"/>
-              </a:solidFill>
-              <a:effectLst/>
-              <a:uFillTx/>
-              <a:latin typeface="Aptos"/>
-            </a:endParaRPr>
-          </a:p>
-        </p:txBody>
-      </p:sp>
-    </p:spTree>
-  </p:cSld>
-  <mc:AlternateContent>
-    <mc:Choice Requires="p14">
-      <p:transition spd="slow" p14:dur="2000"/>
-    </mc:Choice>
-    <mc:Fallback>
-      <p:transition spd="slow"/>
-    </mc:Fallback>
-  </mc:AlternateContent>
-</p:sld>
-</file>
-
 <file path=ppt/slides/slide7.xml><?xml version="1.0" encoding="utf-8"?>
 <p:sld xmlns:a="http://schemas.openxmlformats.org/drawingml/2006/main" xmlns:p="http://schemas.openxmlformats.org/presentationml/2006/main" xmlns:r="http://schemas.openxmlformats.org/officeDocument/2006/relationships" xmlns:p14="http://schemas.microsoft.com/office/powerpoint/2010/main" xmlns:p15="http://schemas.microsoft.com/office/powerpoint/2012/main" xmlns:mc="http://schemas.openxmlformats.org/markup-compatibility/2006">
   <p:cSld>
@@ -22054,1267 +17962,6 @@
     </p:spTree>
   </p:cSld>
   <mc:AlternateContent>
-    <mc:Choice Requires="p14">
-      <p:transition spd="slow" p14:dur="2000"/>
-    </mc:Choice>
-    <mc:Fallback>
-      <p:transition spd="slow"/>
-    </mc:Fallback>
-  </mc:AlternateContent>
-</p:sld>
-</file>
-
-<file path=ppt/slides/slide70.xml><?xml version="1.0" encoding="utf-8"?>
-<p:sld xmlns:a="http://schemas.openxmlformats.org/drawingml/2006/main" xmlns:p="http://schemas.openxmlformats.org/presentationml/2006/main" xmlns:r="http://schemas.openxmlformats.org/officeDocument/2006/relationships" xmlns:p14="http://schemas.microsoft.com/office/powerpoint/2010/main" xmlns:p15="http://schemas.microsoft.com/office/powerpoint/2012/main" xmlns:mc="http://schemas.openxmlformats.org/markup-compatibility/2006">
-  <p:cSld>
-    <p:spTree>
-      <p:nvGrpSpPr>
-        <p:cNvPr id="1" name=""/>
-        <p:cNvGrpSpPr/>
-        <p:nvPr/>
-      </p:nvGrpSpPr>
-      <p:grpSpPr>
-        <a:xfrm>
-          <a:off x="0" y="0"/>
-          <a:ext cx="0" cy="0"/>
-          <a:chOff x="0" y="0"/>
-          <a:chExt cx="0" cy="0"/>
-        </a:xfrm>
-      </p:grpSpPr>
-      <p:pic>
-        <p:nvPicPr>
-          <p:cNvPr id="174" name="Espaço Reservado para Conteúdo 4"/>
-          <p:cNvPicPr/>
-          <p:nvPr/>
-        </p:nvPicPr>
-        <p:blipFill>
-          <a:blip r:embed="rId1"/>
-          <a:srcRect l="0" t="7" r="0" b="7"/>
-          <a:stretch/>
-        </p:blipFill>
-        <p:spPr>
-          <a:xfrm>
-            <a:off x="0" y="1440"/>
-            <a:ext cx="12202200" cy="6860160"/>
-          </a:xfrm>
-          <a:prstGeom prst="rect">
-            <a:avLst/>
-          </a:prstGeom>
-          <a:noFill/>
-          <a:ln w="0">
-            <a:noFill/>
-          </a:ln>
-        </p:spPr>
-      </p:pic>
-    </p:spTree>
-  </p:cSld>
-  <mc:AlternateContent>
-    <mc:Choice Requires="p14">
-      <p:transition spd="slow" p14:dur="2000"/>
-    </mc:Choice>
-    <mc:Fallback>
-      <p:transition spd="slow"/>
-    </mc:Fallback>
-  </mc:AlternateContent>
-</p:sld>
-</file>
-
-<file path=ppt/slides/slide71.xml><?xml version="1.0" encoding="utf-8"?>
-<p:sld xmlns:a="http://schemas.openxmlformats.org/drawingml/2006/main" xmlns:p="http://schemas.openxmlformats.org/presentationml/2006/main" xmlns:r="http://schemas.openxmlformats.org/officeDocument/2006/relationships" xmlns:p14="http://schemas.microsoft.com/office/powerpoint/2010/main" xmlns:p15="http://schemas.microsoft.com/office/powerpoint/2012/main" xmlns:mc="http://schemas.openxmlformats.org/markup-compatibility/2006">
-  <p:cSld>
-    <p:spTree>
-      <p:nvGrpSpPr>
-        <p:cNvPr id="1" name=""/>
-        <p:cNvGrpSpPr/>
-        <p:nvPr/>
-      </p:nvGrpSpPr>
-      <p:grpSpPr>
-        <a:xfrm>
-          <a:off x="0" y="0"/>
-          <a:ext cx="0" cy="0"/>
-          <a:chOff x="0" y="0"/>
-          <a:chExt cx="0" cy="0"/>
-        </a:xfrm>
-      </p:grpSpPr>
-      <p:sp>
-        <p:nvSpPr>
-          <p:cNvPr id="175" name="PlaceHolder 1"/>
-          <p:cNvSpPr>
-            <a:spLocks noGrp="1"/>
-          </p:cNvSpPr>
-          <p:nvPr>
-            <p:ph/>
-          </p:nvPr>
-        </p:nvSpPr>
-        <p:spPr>
-          <a:xfrm>
-            <a:off x="1108440" y="1211400"/>
-            <a:ext cx="9964800" cy="4944240"/>
-          </a:xfrm>
-          <a:prstGeom prst="rect">
-            <a:avLst/>
-          </a:prstGeom>
-          <a:noFill/>
-          <a:ln w="0">
-            <a:noFill/>
-          </a:ln>
-        </p:spPr>
-        <p:txBody>
-          <a:bodyPr lIns="91440" tIns="45720" rIns="91440" bIns="45720" anchor="t">
-            <a:noAutofit/>
-          </a:bodyPr>
-          <a:p>
-            <a:pPr marL="228600" indent="-228600" algn="ctr" defTabSz="914400">
-              <a:lnSpc>
-                <a:spcPct val="90000"/>
-              </a:lnSpc>
-              <a:spcBef>
-                <a:spcPts val="1001"/>
-              </a:spcBef>
-              <a:buNone/>
-              <a:tabLst>
-                <a:tab pos="0" algn="l"/>
-              </a:tabLst>
-            </a:pPr>
-            <a:r>
-              <a:rPr lang="pt-BR" sz="4800" b="1" u="none" strike="noStrike">
-                <a:solidFill>
-                  <a:schemeClr val="dk1"/>
-                </a:solidFill>
-                <a:effectLst/>
-                <a:highlight>
-                  <a:srgbClr val="FFFFFF"/>
-                </a:highlight>
-                <a:uFillTx/>
-                <a:latin typeface="Aptos"/>
-              </a:rPr>
-              <a:t>Cordeiro de Deus, que tirais o pecado do mundo</a:t>
-            </a:r>
-            <a:br>
-              <a:rPr sz="4800"/>
-            </a:br>
-            <a:r>
-              <a:rPr lang="pt-BR" sz="4800" b="1" u="none" strike="noStrike">
-                <a:solidFill>
-                  <a:schemeClr val="dk1"/>
-                </a:solidFill>
-                <a:effectLst/>
-                <a:highlight>
-                  <a:srgbClr val="FFFFFF"/>
-                </a:highlight>
-                <a:uFillTx/>
-                <a:latin typeface="Aptos"/>
-              </a:rPr>
-              <a:t>tende piedade de nós. (2x)</a:t>
-            </a:r>
-            <a:br>
-              <a:rPr sz="4800"/>
-            </a:br>
-            <a:br>
-              <a:rPr sz="4800"/>
-            </a:br>
-            <a:r>
-              <a:rPr lang="pt-BR" sz="4800" b="1" u="none" strike="noStrike">
-                <a:solidFill>
-                  <a:schemeClr val="dk1"/>
-                </a:solidFill>
-                <a:effectLst/>
-                <a:highlight>
-                  <a:srgbClr val="FFFFFF"/>
-                </a:highlight>
-                <a:uFillTx/>
-                <a:latin typeface="Aptos"/>
-              </a:rPr>
-              <a:t>Cordeiro de Deus, que tirais o pecado do mundo dai-nos a Paz.</a:t>
-            </a:r>
-            <a:endParaRPr lang="de-DE" sz="4800" b="0" u="none" strike="noStrike">
-              <a:solidFill>
-                <a:schemeClr val="dk1"/>
-              </a:solidFill>
-              <a:effectLst/>
-              <a:uFillTx/>
-              <a:latin typeface="Aptos"/>
-            </a:endParaRPr>
-          </a:p>
-        </p:txBody>
-      </p:sp>
-      <p:sp>
-        <p:nvSpPr>
-          <p:cNvPr id="176" name="CaixaDeTexto 4"/>
-          <p:cNvSpPr/>
-          <p:nvPr/>
-        </p:nvSpPr>
-        <p:spPr>
-          <a:xfrm>
-            <a:off x="240120" y="213480"/>
-            <a:ext cx="3038040" cy="522720"/>
-          </a:xfrm>
-          <a:prstGeom prst="rect">
-            <a:avLst/>
-          </a:prstGeom>
-          <a:noFill/>
-          <a:ln w="0">
-            <a:noFill/>
-          </a:ln>
-        </p:spPr>
-        <p:style>
-          <a:lnRef idx="0"/>
-          <a:fillRef idx="0"/>
-          <a:effectRef idx="0"/>
-          <a:fontRef idx="minor"/>
-        </p:style>
-        <p:txBody>
-          <a:bodyPr numCol="1" spcCol="0" horzOverflow="overflow" anchor="t">
-            <a:spAutoFit/>
-          </a:bodyPr>
-          <a:p>
-            <a:pPr defTabSz="914400">
-              <a:lnSpc>
-                <a:spcPct val="100000"/>
-              </a:lnSpc>
-            </a:pPr>
-            <a:r>
-              <a:rPr lang="pt-BR" sz="2800" b="1" u="none" strike="noStrike">
-                <a:solidFill>
-                  <a:srgbClr val="FF0000"/>
-                </a:solidFill>
-                <a:effectLst/>
-                <a:uFillTx/>
-                <a:latin typeface="Aptos"/>
-              </a:rPr>
-              <a:t>Cordeiro</a:t>
-            </a:r>
-            <a:endParaRPr lang="pt-BR" sz="2800" b="0" u="none" strike="noStrike">
-              <a:solidFill>
-                <a:srgbClr val="000000"/>
-              </a:solidFill>
-              <a:effectLst/>
-              <a:uFillTx/>
-              <a:latin typeface="Arial"/>
-            </a:endParaRPr>
-          </a:p>
-        </p:txBody>
-      </p:sp>
-    </p:spTree>
-  </p:cSld>
-  <mc:AlternateContent>
-    <mc:Choice Requires="p14">
-      <p:transition spd="slow" p14:dur="2000"/>
-    </mc:Choice>
-    <mc:Fallback>
-      <p:transition spd="slow"/>
-    </mc:Fallback>
-  </mc:AlternateContent>
-</p:sld>
-</file>
-
-<file path=ppt/slides/slide72.xml><?xml version="1.0" encoding="utf-8"?>
-<p:sld xmlns:a="http://schemas.openxmlformats.org/drawingml/2006/main" xmlns:p="http://schemas.openxmlformats.org/presentationml/2006/main" xmlns:r="http://schemas.openxmlformats.org/officeDocument/2006/relationships" xmlns:p14="http://schemas.microsoft.com/office/powerpoint/2010/main" xmlns:p15="http://schemas.microsoft.com/office/powerpoint/2012/main" xmlns:mc="http://schemas.openxmlformats.org/markup-compatibility/2006">
-  <p:cSld>
-    <p:spTree>
-      <p:nvGrpSpPr>
-        <p:cNvPr id="1" name=""/>
-        <p:cNvGrpSpPr/>
-        <p:nvPr/>
-      </p:nvGrpSpPr>
-      <p:grpSpPr>
-        <a:xfrm>
-          <a:off x="0" y="0"/>
-          <a:ext cx="0" cy="0"/>
-          <a:chOff x="0" y="0"/>
-          <a:chExt cx="0" cy="0"/>
-        </a:xfrm>
-      </p:grpSpPr>
-      <p:sp>
-        <p:nvSpPr>
-          <p:cNvPr id="177" name="PlaceHolder 1"/>
-          <p:cNvSpPr>
-            <a:spLocks noGrp="1"/>
-          </p:cNvSpPr>
-          <p:nvPr>
-            <p:ph/>
-          </p:nvPr>
-        </p:nvSpPr>
-        <p:spPr>
-          <a:xfrm>
-            <a:off x="838080" y="403920"/>
-            <a:ext cx="10515240" cy="6125760"/>
-          </a:xfrm>
-          <a:prstGeom prst="rect">
-            <a:avLst/>
-          </a:prstGeom>
-          <a:noFill/>
-          <a:ln w="0">
-            <a:noFill/>
-          </a:ln>
-        </p:spPr>
-        <p:txBody>
-          <a:bodyPr lIns="91440" tIns="45720" rIns="91440" bIns="45720" anchor="t">
-            <a:normAutofit/>
-          </a:bodyPr>
-          <a:p>
-            <a:pPr indent="0" algn="ctr" defTabSz="914400">
-              <a:lnSpc>
-                <a:spcPct val="100000"/>
-              </a:lnSpc>
-              <a:buNone/>
-              <a:tabLst>
-                <a:tab pos="0" algn="l"/>
-              </a:tabLst>
-            </a:pPr>
-            <a:r>
-              <a:rPr lang="pt-BR" sz="7200" b="1" u="none" strike="noStrike">
-                <a:solidFill>
-                  <a:schemeClr val="dk1"/>
-                </a:solidFill>
-                <a:effectLst/>
-                <a:uFillTx/>
-                <a:latin typeface="Aptos"/>
-                <a:ea typeface="Aptos"/>
-              </a:rPr>
-              <a:t>Senhor, eu não sou digno(a) de que entreis em minha morada, mas dizei uma palavra e serei salvo(a)!</a:t>
-            </a:r>
-            <a:endParaRPr lang="de-DE" sz="7200" b="0" u="none" strike="noStrike">
-              <a:solidFill>
-                <a:schemeClr val="dk1"/>
-              </a:solidFill>
-              <a:effectLst/>
-              <a:uFillTx/>
-              <a:latin typeface="Aptos"/>
-            </a:endParaRPr>
-          </a:p>
-        </p:txBody>
-      </p:sp>
-    </p:spTree>
-  </p:cSld>
-  <mc:AlternateContent>
-    <mc:Choice Requires="p14">
-      <p:transition spd="slow" p14:dur="2000"/>
-    </mc:Choice>
-    <mc:Fallback>
-      <p:transition spd="slow"/>
-    </mc:Fallback>
-  </mc:AlternateContent>
-</p:sld>
-</file>
-
-<file path=ppt/slides/slide73.xml><?xml version="1.0" encoding="utf-8"?>
-<p:sld xmlns:a="http://schemas.openxmlformats.org/drawingml/2006/main" xmlns:p="http://schemas.openxmlformats.org/presentationml/2006/main" xmlns:r="http://schemas.openxmlformats.org/officeDocument/2006/relationships" xmlns:p14="http://schemas.microsoft.com/office/powerpoint/2010/main" xmlns:p15="http://schemas.microsoft.com/office/powerpoint/2012/main" xmlns:mc="http://schemas.openxmlformats.org/markup-compatibility/2006">
-  <p:cSld>
-    <p:bg>
-      <p:bgPr>
-        <a:solidFill>
-          <a:schemeClr val="lt1"/>
-        </a:solidFill>
-      </p:bgPr>
-    </p:bg>
-    <p:spTree>
-      <p:nvGrpSpPr>
-        <p:cNvPr id="1" name=""/>
-        <p:cNvGrpSpPr/>
-        <p:nvPr/>
-      </p:nvGrpSpPr>
-      <p:grpSpPr>
-        <a:xfrm>
-          <a:off x="0" y="0"/>
-          <a:ext cx="0" cy="0"/>
-          <a:chOff x="0" y="0"/>
-          <a:chExt cx="0" cy="0"/>
-        </a:xfrm>
-      </p:grpSpPr>
-      <p:sp>
-        <p:nvSpPr>
-          <p:cNvPr id="178" name="Rectangle 9">
-            <a:extLst>
-              <a:ext uri="{C183D7F6-B498-43B3-948B-1728B52AA6E4}">
-                <adec:decorative xmlns:adec="http://schemas.microsoft.com/office/drawing/2017/decorative" val="1"/>
-              </a:ext>
-            </a:extLst>
-          </p:cNvPr>
-          <p:cNvSpPr/>
-          <p:nvPr/>
-        </p:nvSpPr>
-        <p:spPr>
-          <a:xfrm>
-            <a:off x="1440" y="0"/>
-            <a:ext cx="12188520" cy="6857640"/>
-          </a:xfrm>
-          <a:prstGeom prst="rect">
-            <a:avLst/>
-          </a:prstGeom>
-          <a:noFill/>
-          <a:ln>
-            <a:noFill/>
-          </a:ln>
-        </p:spPr>
-        <p:style>
-          <a:lnRef idx="2">
-            <a:schemeClr val="accent1">
-              <a:shade val="50000"/>
-            </a:schemeClr>
-          </a:lnRef>
-          <a:fillRef idx="1">
-            <a:schemeClr val="accent1"/>
-          </a:fillRef>
-          <a:effectRef idx="0">
-            <a:schemeClr val="accent1"/>
-          </a:effectRef>
-          <a:fontRef idx="minor"/>
-        </p:style>
-        <p:txBody>
-          <a:bodyPr lIns="90000" tIns="45000" rIns="90000" bIns="45000" anchor="ctr">
-            <a:noAutofit/>
-          </a:bodyPr>
-          <a:p>
-            <a:endParaRPr lang="en-US" sz="1800" b="0" u="none" strike="noStrike">
-              <a:solidFill>
-                <a:schemeClr val="lt1"/>
-              </a:solidFill>
-              <a:effectLst/>
-              <a:uFillTx/>
-              <a:latin typeface="Aptos"/>
-            </a:endParaRPr>
-          </a:p>
-        </p:txBody>
-      </p:sp>
-      <p:pic>
-        <p:nvPicPr>
-          <p:cNvPr id="179" name="Espaço Reservado para Conteúdo 4"/>
-          <p:cNvPicPr/>
-          <p:nvPr/>
-        </p:nvPicPr>
-        <p:blipFill>
-          <a:blip r:embed="rId1"/>
-          <a:srcRect l="0" t="7" r="0" b="7"/>
-          <a:stretch/>
-        </p:blipFill>
-        <p:spPr>
-          <a:xfrm>
-            <a:off x="0" y="1440"/>
-            <a:ext cx="12202200" cy="6860160"/>
-          </a:xfrm>
-          <a:prstGeom prst="rect">
-            <a:avLst/>
-          </a:prstGeom>
-          <a:noFill/>
-          <a:ln w="0">
-            <a:noFill/>
-          </a:ln>
-        </p:spPr>
-      </p:pic>
-    </p:spTree>
-  </p:cSld>
-  <mc:AlternateContent>
-    <mc:Choice Requires="p14">
-      <p:transition spd="slow" p14:dur="2000"/>
-    </mc:Choice>
-    <mc:Fallback>
-      <p:transition spd="slow"/>
-    </mc:Fallback>
-  </mc:AlternateContent>
-</p:sld>
-</file>
-
-<file path=ppt/slides/slide74.xml><?xml version="1.0" encoding="utf-8"?>
-<p:sld xmlns:a="http://schemas.openxmlformats.org/drawingml/2006/main" xmlns:p="http://schemas.openxmlformats.org/presentationml/2006/main" xmlns:r="http://schemas.openxmlformats.org/officeDocument/2006/relationships">
-  <p:cSld>
-    <p:bg>
-      <p:bgPr>
-        <a:solidFill>
-          <a:schemeClr val="lt1"/>
-        </a:solidFill>
-      </p:bgPr>
-    </p:bg>
-    <p:spTree>
-      <p:nvGrpSpPr>
-        <p:cNvPr id="1" name=""/>
-        <p:cNvGrpSpPr/>
-        <p:nvPr/>
-      </p:nvGrpSpPr>
-      <p:grpSpPr>
-        <a:xfrm>
-          <a:off x="0" y="0"/>
-          <a:ext cx="0" cy="0"/>
-          <a:chOff x="0" y="0"/>
-          <a:chExt cx="0" cy="0"/>
-        </a:xfrm>
-      </p:grpSpPr>
-      <p:sp>
-        <p:nvSpPr>
-          <p:cNvPr id="70" name="Rectangle 23">
-            <a:extLst>
-              <a:ext uri="{C183D7F6-B498-43B3-948B-1728B52AA6E4}">
-                <adec:decorative xmlns:adec="http://schemas.microsoft.com/office/drawing/2017/decorative" val="1"/>
-              </a:ext>
-            </a:extLst>
-          </p:cNvPr>
-          <p:cNvSpPr/>
-          <p:nvPr/>
-        </p:nvSpPr>
-        <p:spPr>
-          <a:xfrm>
-            <a:off x="1440" y="0"/>
-            <a:ext cx="12188520" cy="6857640"/>
-          </a:xfrm>
-          <a:prstGeom prst="rect">
-            <a:avLst/>
-          </a:prstGeom>
-          <a:noFill/>
-          <a:ln>
-            <a:noFill/>
-          </a:ln>
-        </p:spPr>
-        <p:style>
-          <a:lnRef idx="2">
-            <a:schemeClr val="accent1">
-              <a:shade val="50000"/>
-            </a:schemeClr>
-          </a:lnRef>
-          <a:fillRef idx="1">
-            <a:schemeClr val="accent1"/>
-          </a:fillRef>
-          <a:effectRef idx="0">
-            <a:schemeClr val="accent1"/>
-          </a:effectRef>
-          <a:fontRef idx="minor"/>
-        </p:style>
-        <p:txBody>
-          <a:bodyPr lIns="90000" tIns="45000" rIns="90000" bIns="45000" anchor="ctr">
-            <a:noAutofit/>
-          </a:bodyPr>
-          <a:p>
-            <a:endParaRPr lang="en-US" sz="1800" b="0" u="none" strike="noStrike">
-              <a:solidFill>
-                <a:schemeClr val="lt1"/>
-              </a:solidFill>
-              <a:effectLst/>
-              <a:uFillTx/>
-              <a:latin typeface="Aptos"/>
-            </a:endParaRPr>
-          </a:p>
-        </p:txBody>
-      </p:sp>
-      <p:pic>
-        <p:nvPicPr>
-          <p:cNvPr id="71" name="Imagem 3"/>
-          <p:cNvPicPr/>
-          <p:nvPr/>
-        </p:nvPicPr>
-        <p:blipFill>
-          <a:blip r:embed="rId2"/>
-          <a:srcRect l="0" t="10428" r="0" b="10428"/>
-          <a:stretch/>
-        </p:blipFill>
-        <p:spPr>
-          <a:xfrm>
-            <a:off x="0" y="1440"/>
-            <a:ext cx="12191760" cy="6856200"/>
-          </a:xfrm>
-          <a:prstGeom prst="rect">
-            <a:avLst/>
-          </a:prstGeom>
-          <a:noFill/>
-          <a:ln w="0">
-            <a:noFill/>
-          </a:ln>
-        </p:spPr>
-      </p:pic>
-    </p:spTree>
-  </p:cSld>
-  <mc:AlternateContent xmlns:mc="http://schemas.openxmlformats.org/markup-compatibility/2006" xmlns:p14="http://schemas.microsoft.com/office/powerpoint/2010/main">
-    <mc:Choice Requires="p14">
-      <p:transition spd="slow" p14:dur="2000"/>
-    </mc:Choice>
-    <mc:Fallback>
-      <p:transition spd="slow"/>
-    </mc:Fallback>
-  </mc:AlternateContent>
-</p:sld>
-</file>
-
-<file path=ppt/slides/slide75.xml><?xml version="1.0" encoding="utf-8"?>
-<p:sld xmlns:a="http://schemas.openxmlformats.org/drawingml/2006/main" xmlns:p="http://schemas.openxmlformats.org/presentationml/2006/main" xmlns:r="http://schemas.openxmlformats.org/officeDocument/2006/relationships">
-  <p:cSld>
-    <p:spTree>
-      <p:nvGrpSpPr>
-        <p:cNvPr id="1" name=""/>
-        <p:cNvGrpSpPr/>
-        <p:nvPr/>
-      </p:nvGrpSpPr>
-      <p:grpSpPr>
-        <a:xfrm>
-          <a:off x="0" y="0"/>
-          <a:ext cx="0" cy="0"/>
-          <a:chOff x="0" y="0"/>
-          <a:chExt cx="0" cy="0"/>
-        </a:xfrm>
-      </p:grpSpPr>
-      <p:sp>
-        <p:nvSpPr>
-          <p:cNvPr id="133" name="PlaceHolder 1"/>
-          <p:cNvSpPr>
-            <a:spLocks noGrp="1"/>
-          </p:cNvSpPr>
-          <p:nvPr>
-            <p:ph/>
-          </p:nvPr>
-        </p:nvSpPr>
-        <p:spPr>
-          <a:xfrm>
-            <a:off x="114480" y="1047600"/>
-            <a:ext cx="11944080" cy="5627520"/>
-          </a:xfrm>
-          <a:prstGeom prst="rect">
-            <a:avLst/>
-          </a:prstGeom>
-          <a:noFill/>
-          <a:ln w="0">
-            <a:noFill/>
-          </a:ln>
-        </p:spPr>
-        <p:txBody>
-          <a:bodyPr lIns="91440" tIns="45720" rIns="91440" bIns="45720" anchor="t">
-            <a:noAutofit/>
-          </a:bodyPr>
-          <a:p>
-            <a:pPr marL="228600" indent="-228600" algn="l" defTabSz="914400">
-              <a:lnSpc>
-                <a:spcPct val="90000"/>
-              </a:lnSpc>
-              <a:spcBef>
-                <a:spcPts val="1191"/>
-              </a:spcBef>
-              <a:spcAft>
-                <a:spcPts val="992"/>
-              </a:spcAft>
-              <a:buNone/>
-              <a:tabLst>
-                <a:tab pos="0" algn="l"/>
-              </a:tabLst>
-            </a:pPr>
-            <a:r>
-              <a:rPr lang="pt-BR" sz="4200" b="0" u="none" strike="noStrike">
-                <a:solidFill>
-                  <a:schemeClr val="dk1"/>
-                </a:solidFill>
-                <a:effectLst/>
-                <a:uFillTx/>
-                <a:latin typeface="Aptos"/>
-                <a:ea typeface="Aptos"/>
-              </a:rPr>
-              <a:t>{{canto.texto}}</a:t>
-            </a:r>
-            <a:endParaRPr lang="de-DE" sz="4200" b="0" u="none" strike="noStrike">
-              <a:solidFill>
-                <a:schemeClr val="dk1"/>
-              </a:solidFill>
-              <a:effectLst/>
-              <a:uFillTx/>
-              <a:latin typeface="Aptos"/>
-            </a:endParaRPr>
-          </a:p>
-        </p:txBody>
-      </p:sp>
-      <p:sp>
-        <p:nvSpPr>
-          <p:cNvPr id="134" name="CaixaDeTexto 4"/>
-          <p:cNvSpPr/>
-          <p:nvPr/>
-        </p:nvSpPr>
-        <p:spPr>
-          <a:xfrm>
-            <a:off x="240120" y="213480"/>
-            <a:ext cx="3038040" cy="522720"/>
-          </a:xfrm>
-          <a:prstGeom prst="rect">
-            <a:avLst/>
-          </a:prstGeom>
-          <a:noFill/>
-          <a:ln w="0">
-            <a:noFill/>
-          </a:ln>
-        </p:spPr>
-        <p:style>
-          <a:lnRef idx="0"/>
-          <a:fillRef idx="0"/>
-          <a:effectRef idx="0"/>
-          <a:fontRef idx="minor"/>
-        </p:style>
-        <p:txBody>
-          <a:bodyPr numCol="1" spcCol="0" horzOverflow="overflow" anchor="t">
-            <a:spAutoFit/>
-          </a:bodyPr>
-          <a:p>
-            <a:pPr defTabSz="914400">
-              <a:lnSpc>
-                <a:spcPct val="100000"/>
-              </a:lnSpc>
-            </a:pPr>
-            <a:r>
-              <a:rPr lang="pt-BR" sz="2800" b="1" u="none" strike="noStrike">
-                <a:solidFill>
-                  <a:srgbClr val="FF0000"/>
-                </a:solidFill>
-                <a:effectLst/>
-                <a:uFillTx/>
-                <a:latin typeface="Aptos"/>
-              </a:rPr>
-              <a:t>{{canto.rotulo}}</a:t>
-            </a:r>
-            <a:endParaRPr lang="pt-BR" sz="2800" b="0" u="none" strike="noStrike">
-              <a:solidFill>
-                <a:srgbClr val="000000"/>
-              </a:solidFill>
-              <a:effectLst/>
-              <a:uFillTx/>
-              <a:latin typeface="Arial"/>
-            </a:endParaRPr>
-          </a:p>
-        </p:txBody>
-      </p:sp>
-    </p:spTree>
-  </p:cSld>
-  <mc:AlternateContent xmlns:mc="http://schemas.openxmlformats.org/markup-compatibility/2006" xmlns:p14="http://schemas.microsoft.com/office/powerpoint/2010/main">
-    <mc:Choice Requires="p14">
-      <p:transition spd="slow" p14:dur="2000"/>
-    </mc:Choice>
-    <mc:Fallback>
-      <p:transition spd="slow"/>
-    </mc:Fallback>
-  </mc:AlternateContent>
-</p:sld>
-</file>
-
-<file path=ppt/slides/slide76.xml><?xml version="1.0" encoding="utf-8"?>
-<p:sld xmlns:a="http://schemas.openxmlformats.org/drawingml/2006/main" xmlns:p="http://schemas.openxmlformats.org/presentationml/2006/main" xmlns:r="http://schemas.openxmlformats.org/officeDocument/2006/relationships">
-  <p:cSld>
-    <p:bg>
-      <p:bgPr>
-        <a:solidFill>
-          <a:schemeClr val="lt1"/>
-        </a:solidFill>
-      </p:bgPr>
-    </p:bg>
-    <p:spTree>
-      <p:nvGrpSpPr>
-        <p:cNvPr id="1" name=""/>
-        <p:cNvGrpSpPr/>
-        <p:nvPr/>
-      </p:nvGrpSpPr>
-      <p:grpSpPr>
-        <a:xfrm>
-          <a:off x="0" y="0"/>
-          <a:ext cx="0" cy="0"/>
-          <a:chOff x="0" y="0"/>
-          <a:chExt cx="0" cy="0"/>
-        </a:xfrm>
-      </p:grpSpPr>
-      <p:sp>
-        <p:nvSpPr>
-          <p:cNvPr id="70" name="Rectangle 23">
-            <a:extLst>
-              <a:ext uri="{C183D7F6-B498-43B3-948B-1728B52AA6E4}">
-                <adec:decorative xmlns:adec="http://schemas.microsoft.com/office/drawing/2017/decorative" val="1"/>
-              </a:ext>
-            </a:extLst>
-          </p:cNvPr>
-          <p:cNvSpPr/>
-          <p:nvPr/>
-        </p:nvSpPr>
-        <p:spPr>
-          <a:xfrm>
-            <a:off x="1440" y="0"/>
-            <a:ext cx="12188520" cy="6857640"/>
-          </a:xfrm>
-          <a:prstGeom prst="rect">
-            <a:avLst/>
-          </a:prstGeom>
-          <a:noFill/>
-          <a:ln>
-            <a:noFill/>
-          </a:ln>
-        </p:spPr>
-        <p:style>
-          <a:lnRef idx="2">
-            <a:schemeClr val="accent1">
-              <a:shade val="50000"/>
-            </a:schemeClr>
-          </a:lnRef>
-          <a:fillRef idx="1">
-            <a:schemeClr val="accent1"/>
-          </a:fillRef>
-          <a:effectRef idx="0">
-            <a:schemeClr val="accent1"/>
-          </a:effectRef>
-          <a:fontRef idx="minor"/>
-        </p:style>
-        <p:txBody>
-          <a:bodyPr lIns="90000" tIns="45000" rIns="90000" bIns="45000" anchor="ctr">
-            <a:noAutofit/>
-          </a:bodyPr>
-          <a:p>
-            <a:endParaRPr lang="en-US" sz="1800" b="0" u="none" strike="noStrike">
-              <a:solidFill>
-                <a:schemeClr val="lt1"/>
-              </a:solidFill>
-              <a:effectLst/>
-              <a:uFillTx/>
-              <a:latin typeface="Aptos"/>
-            </a:endParaRPr>
-          </a:p>
-        </p:txBody>
-      </p:sp>
-      <p:pic>
-        <p:nvPicPr>
-          <p:cNvPr id="71" name="Imagem 3"/>
-          <p:cNvPicPr/>
-          <p:nvPr/>
-        </p:nvPicPr>
-        <p:blipFill>
-          <a:blip r:embed="rId2"/>
-          <a:srcRect l="0" t="10428" r="0" b="10428"/>
-          <a:stretch/>
-        </p:blipFill>
-        <p:spPr>
-          <a:xfrm>
-            <a:off x="0" y="1440"/>
-            <a:ext cx="12191760" cy="6856200"/>
-          </a:xfrm>
-          <a:prstGeom prst="rect">
-            <a:avLst/>
-          </a:prstGeom>
-          <a:noFill/>
-          <a:ln w="0">
-            <a:noFill/>
-          </a:ln>
-        </p:spPr>
-      </p:pic>
-    </p:spTree>
-  </p:cSld>
-  <mc:AlternateContent xmlns:mc="http://schemas.openxmlformats.org/markup-compatibility/2006" xmlns:p14="http://schemas.microsoft.com/office/powerpoint/2010/main">
-    <mc:Choice Requires="p14">
-      <p:transition spd="slow" p14:dur="2000"/>
-    </mc:Choice>
-    <mc:Fallback>
-      <p:transition spd="slow"/>
-    </mc:Fallback>
-  </mc:AlternateContent>
-</p:sld>
-</file>
-
-<file path=ppt/slides/slide77.xml><?xml version="1.0" encoding="utf-8"?>
-<p:sld xmlns:a="http://schemas.openxmlformats.org/drawingml/2006/main" xmlns:p="http://schemas.openxmlformats.org/presentationml/2006/main" xmlns:r="http://schemas.openxmlformats.org/officeDocument/2006/relationships">
-  <p:cSld>
-    <p:spTree>
-      <p:nvGrpSpPr>
-        <p:cNvPr id="1" name=""/>
-        <p:cNvGrpSpPr/>
-        <p:nvPr/>
-      </p:nvGrpSpPr>
-      <p:grpSpPr>
-        <a:xfrm>
-          <a:off x="0" y="0"/>
-          <a:ext cx="0" cy="0"/>
-          <a:chOff x="0" y="0"/>
-          <a:chExt cx="0" cy="0"/>
-        </a:xfrm>
-      </p:grpSpPr>
-      <p:sp>
-        <p:nvSpPr>
-          <p:cNvPr id="133" name="PlaceHolder 1"/>
-          <p:cNvSpPr>
-            <a:spLocks noGrp="1"/>
-          </p:cNvSpPr>
-          <p:nvPr>
-            <p:ph/>
-          </p:nvPr>
-        </p:nvSpPr>
-        <p:spPr>
-          <a:xfrm>
-            <a:off x="114480" y="1047600"/>
-            <a:ext cx="11944080" cy="5627520"/>
-          </a:xfrm>
-          <a:prstGeom prst="rect">
-            <a:avLst/>
-          </a:prstGeom>
-          <a:noFill/>
-          <a:ln w="0">
-            <a:noFill/>
-          </a:ln>
-        </p:spPr>
-        <p:txBody>
-          <a:bodyPr lIns="91440" tIns="45720" rIns="91440" bIns="45720" anchor="t">
-            <a:noAutofit/>
-          </a:bodyPr>
-          <a:p>
-            <a:pPr marL="228600" indent="-228600" algn="l" defTabSz="914400">
-              <a:lnSpc>
-                <a:spcPct val="90000"/>
-              </a:lnSpc>
-              <a:spcBef>
-                <a:spcPts val="1191"/>
-              </a:spcBef>
-              <a:spcAft>
-                <a:spcPts val="992"/>
-              </a:spcAft>
-              <a:buNone/>
-              <a:tabLst>
-                <a:tab pos="0" algn="l"/>
-              </a:tabLst>
-            </a:pPr>
-            <a:r>
-              <a:rPr lang="pt-BR" sz="4200" b="0" u="none" strike="noStrike">
-                <a:solidFill>
-                  <a:schemeClr val="dk1"/>
-                </a:solidFill>
-                <a:effectLst/>
-                <a:uFillTx/>
-                <a:latin typeface="Aptos"/>
-                <a:ea typeface="Aptos"/>
-              </a:rPr>
-              <a:t>{{canto.texto}}</a:t>
-            </a:r>
-            <a:endParaRPr lang="de-DE" sz="4200" b="0" u="none" strike="noStrike">
-              <a:solidFill>
-                <a:schemeClr val="dk1"/>
-              </a:solidFill>
-              <a:effectLst/>
-              <a:uFillTx/>
-              <a:latin typeface="Aptos"/>
-            </a:endParaRPr>
-          </a:p>
-        </p:txBody>
-      </p:sp>
-      <p:sp>
-        <p:nvSpPr>
-          <p:cNvPr id="134" name="CaixaDeTexto 4"/>
-          <p:cNvSpPr/>
-          <p:nvPr/>
-        </p:nvSpPr>
-        <p:spPr>
-          <a:xfrm>
-            <a:off x="240120" y="213480"/>
-            <a:ext cx="3038040" cy="522720"/>
-          </a:xfrm>
-          <a:prstGeom prst="rect">
-            <a:avLst/>
-          </a:prstGeom>
-          <a:noFill/>
-          <a:ln w="0">
-            <a:noFill/>
-          </a:ln>
-        </p:spPr>
-        <p:style>
-          <a:lnRef idx="0"/>
-          <a:fillRef idx="0"/>
-          <a:effectRef idx="0"/>
-          <a:fontRef idx="minor"/>
-        </p:style>
-        <p:txBody>
-          <a:bodyPr numCol="1" spcCol="0" horzOverflow="overflow" anchor="t">
-            <a:spAutoFit/>
-          </a:bodyPr>
-          <a:p>
-            <a:pPr defTabSz="914400">
-              <a:lnSpc>
-                <a:spcPct val="100000"/>
-              </a:lnSpc>
-            </a:pPr>
-            <a:r>
-              <a:rPr lang="pt-BR" sz="2800" b="1" u="none" strike="noStrike">
-                <a:solidFill>
-                  <a:srgbClr val="FF0000"/>
-                </a:solidFill>
-                <a:effectLst/>
-                <a:uFillTx/>
-                <a:latin typeface="Aptos"/>
-              </a:rPr>
-              <a:t>{{canto.rotulo}}</a:t>
-            </a:r>
-            <a:endParaRPr lang="pt-BR" sz="2800" b="0" u="none" strike="noStrike">
-              <a:solidFill>
-                <a:srgbClr val="000000"/>
-              </a:solidFill>
-              <a:effectLst/>
-              <a:uFillTx/>
-              <a:latin typeface="Arial"/>
-            </a:endParaRPr>
-          </a:p>
-        </p:txBody>
-      </p:sp>
-    </p:spTree>
-  </p:cSld>
-  <mc:AlternateContent xmlns:mc="http://schemas.openxmlformats.org/markup-compatibility/2006" xmlns:p14="http://schemas.microsoft.com/office/powerpoint/2010/main">
-    <mc:Choice Requires="p14">
-      <p:transition spd="slow" p14:dur="2000"/>
-    </mc:Choice>
-    <mc:Fallback>
-      <p:transition spd="slow"/>
-    </mc:Fallback>
-  </mc:AlternateContent>
-</p:sld>
-</file>
-
-<file path=ppt/slides/slide78.xml><?xml version="1.0" encoding="utf-8"?>
-<p:sld xmlns:a="http://schemas.openxmlformats.org/drawingml/2006/main" xmlns:p="http://schemas.openxmlformats.org/presentationml/2006/main" xmlns:r="http://schemas.openxmlformats.org/officeDocument/2006/relationships">
-  <p:cSld>
-    <p:bg>
-      <p:bgPr>
-        <a:solidFill>
-          <a:schemeClr val="lt1"/>
-        </a:solidFill>
-      </p:bgPr>
-    </p:bg>
-    <p:spTree>
-      <p:nvGrpSpPr>
-        <p:cNvPr id="1" name=""/>
-        <p:cNvGrpSpPr/>
-        <p:nvPr/>
-      </p:nvGrpSpPr>
-      <p:grpSpPr>
-        <a:xfrm>
-          <a:off x="0" y="0"/>
-          <a:ext cx="0" cy="0"/>
-          <a:chOff x="0" y="0"/>
-          <a:chExt cx="0" cy="0"/>
-        </a:xfrm>
-      </p:grpSpPr>
-      <p:sp>
-        <p:nvSpPr>
-          <p:cNvPr id="70" name="Rectangle 23">
-            <a:extLst>
-              <a:ext uri="{C183D7F6-B498-43B3-948B-1728B52AA6E4}">
-                <adec:decorative xmlns:adec="http://schemas.microsoft.com/office/drawing/2017/decorative" val="1"/>
-              </a:ext>
-            </a:extLst>
-          </p:cNvPr>
-          <p:cNvSpPr/>
-          <p:nvPr/>
-        </p:nvSpPr>
-        <p:spPr>
-          <a:xfrm>
-            <a:off x="1440" y="0"/>
-            <a:ext cx="12188520" cy="6857640"/>
-          </a:xfrm>
-          <a:prstGeom prst="rect">
-            <a:avLst/>
-          </a:prstGeom>
-          <a:noFill/>
-          <a:ln>
-            <a:noFill/>
-          </a:ln>
-        </p:spPr>
-        <p:style>
-          <a:lnRef idx="2">
-            <a:schemeClr val="accent1">
-              <a:shade val="50000"/>
-            </a:schemeClr>
-          </a:lnRef>
-          <a:fillRef idx="1">
-            <a:schemeClr val="accent1"/>
-          </a:fillRef>
-          <a:effectRef idx="0">
-            <a:schemeClr val="accent1"/>
-          </a:effectRef>
-          <a:fontRef idx="minor"/>
-        </p:style>
-        <p:txBody>
-          <a:bodyPr lIns="90000" tIns="45000" rIns="90000" bIns="45000" anchor="ctr">
-            <a:noAutofit/>
-          </a:bodyPr>
-          <a:p>
-            <a:endParaRPr lang="en-US" sz="1800" b="0" u="none" strike="noStrike">
-              <a:solidFill>
-                <a:schemeClr val="lt1"/>
-              </a:solidFill>
-              <a:effectLst/>
-              <a:uFillTx/>
-              <a:latin typeface="Aptos"/>
-            </a:endParaRPr>
-          </a:p>
-        </p:txBody>
-      </p:sp>
-      <p:pic>
-        <p:nvPicPr>
-          <p:cNvPr id="71" name="Imagem 3"/>
-          <p:cNvPicPr/>
-          <p:nvPr/>
-        </p:nvPicPr>
-        <p:blipFill>
-          <a:blip r:embed="rId2"/>
-          <a:srcRect l="0" t="10428" r="0" b="10428"/>
-          <a:stretch/>
-        </p:blipFill>
-        <p:spPr>
-          <a:xfrm>
-            <a:off x="0" y="1440"/>
-            <a:ext cx="12191760" cy="6856200"/>
-          </a:xfrm>
-          <a:prstGeom prst="rect">
-            <a:avLst/>
-          </a:prstGeom>
-          <a:noFill/>
-          <a:ln w="0">
-            <a:noFill/>
-          </a:ln>
-        </p:spPr>
-      </p:pic>
-    </p:spTree>
-  </p:cSld>
-  <mc:AlternateContent xmlns:mc="http://schemas.openxmlformats.org/markup-compatibility/2006" xmlns:p14="http://schemas.microsoft.com/office/powerpoint/2010/main">
-    <mc:Choice Requires="p14">
-      <p:transition spd="slow" p14:dur="2000"/>
-    </mc:Choice>
-    <mc:Fallback>
-      <p:transition spd="slow"/>
-    </mc:Fallback>
-  </mc:AlternateContent>
-</p:sld>
-</file>
-
-<file path=ppt/slides/slide79.xml><?xml version="1.0" encoding="utf-8"?>
-<p:sld xmlns:a="http://schemas.openxmlformats.org/drawingml/2006/main" xmlns:p="http://schemas.openxmlformats.org/presentationml/2006/main" xmlns:r="http://schemas.openxmlformats.org/officeDocument/2006/relationships">
-  <p:cSld>
-    <p:spTree>
-      <p:nvGrpSpPr>
-        <p:cNvPr id="1" name=""/>
-        <p:cNvGrpSpPr/>
-        <p:nvPr/>
-      </p:nvGrpSpPr>
-      <p:grpSpPr>
-        <a:xfrm>
-          <a:off x="0" y="0"/>
-          <a:ext cx="0" cy="0"/>
-          <a:chOff x="0" y="0"/>
-          <a:chExt cx="0" cy="0"/>
-        </a:xfrm>
-      </p:grpSpPr>
-      <p:sp>
-        <p:nvSpPr>
-          <p:cNvPr id="133" name="PlaceHolder 1"/>
-          <p:cNvSpPr>
-            <a:spLocks noGrp="1"/>
-          </p:cNvSpPr>
-          <p:nvPr>
-            <p:ph/>
-          </p:nvPr>
-        </p:nvSpPr>
-        <p:spPr>
-          <a:xfrm>
-            <a:off x="114480" y="1047600"/>
-            <a:ext cx="11944080" cy="5627520"/>
-          </a:xfrm>
-          <a:prstGeom prst="rect">
-            <a:avLst/>
-          </a:prstGeom>
-          <a:noFill/>
-          <a:ln w="0">
-            <a:noFill/>
-          </a:ln>
-        </p:spPr>
-        <p:txBody>
-          <a:bodyPr lIns="91440" tIns="45720" rIns="91440" bIns="45720" anchor="t">
-            <a:noAutofit/>
-          </a:bodyPr>
-          <a:p>
-            <a:pPr marL="228600" indent="-228600" algn="l" defTabSz="914400">
-              <a:lnSpc>
-                <a:spcPct val="90000"/>
-              </a:lnSpc>
-              <a:spcBef>
-                <a:spcPts val="1191"/>
-              </a:spcBef>
-              <a:spcAft>
-                <a:spcPts val="992"/>
-              </a:spcAft>
-              <a:buNone/>
-              <a:tabLst>
-                <a:tab pos="0" algn="l"/>
-              </a:tabLst>
-            </a:pPr>
-            <a:r>
-              <a:rPr lang="pt-BR" sz="4200" b="0" u="none" strike="noStrike">
-                <a:solidFill>
-                  <a:schemeClr val="dk1"/>
-                </a:solidFill>
-                <a:effectLst/>
-                <a:uFillTx/>
-                <a:latin typeface="Aptos"/>
-                <a:ea typeface="Aptos"/>
-              </a:rPr>
-              <a:t>{{canto.texto}}</a:t>
-            </a:r>
-            <a:endParaRPr lang="de-DE" sz="4200" b="0" u="none" strike="noStrike">
-              <a:solidFill>
-                <a:schemeClr val="dk1"/>
-              </a:solidFill>
-              <a:effectLst/>
-              <a:uFillTx/>
-              <a:latin typeface="Aptos"/>
-            </a:endParaRPr>
-          </a:p>
-        </p:txBody>
-      </p:sp>
-      <p:sp>
-        <p:nvSpPr>
-          <p:cNvPr id="134" name="CaixaDeTexto 4"/>
-          <p:cNvSpPr/>
-          <p:nvPr/>
-        </p:nvSpPr>
-        <p:spPr>
-          <a:xfrm>
-            <a:off x="240120" y="213480"/>
-            <a:ext cx="3038040" cy="522720"/>
-          </a:xfrm>
-          <a:prstGeom prst="rect">
-            <a:avLst/>
-          </a:prstGeom>
-          <a:noFill/>
-          <a:ln w="0">
-            <a:noFill/>
-          </a:ln>
-        </p:spPr>
-        <p:style>
-          <a:lnRef idx="0"/>
-          <a:fillRef idx="0"/>
-          <a:effectRef idx="0"/>
-          <a:fontRef idx="minor"/>
-        </p:style>
-        <p:txBody>
-          <a:bodyPr numCol="1" spcCol="0" horzOverflow="overflow" anchor="t">
-            <a:spAutoFit/>
-          </a:bodyPr>
-          <a:p>
-            <a:pPr defTabSz="914400">
-              <a:lnSpc>
-                <a:spcPct val="100000"/>
-              </a:lnSpc>
-            </a:pPr>
-            <a:r>
-              <a:rPr lang="pt-BR" sz="2800" b="1" u="none" strike="noStrike">
-                <a:solidFill>
-                  <a:srgbClr val="FF0000"/>
-                </a:solidFill>
-                <a:effectLst/>
-                <a:uFillTx/>
-                <a:latin typeface="Aptos"/>
-              </a:rPr>
-              <a:t>{{canto.rotulo}}</a:t>
-            </a:r>
-            <a:endParaRPr lang="pt-BR" sz="2800" b="0" u="none" strike="noStrike">
-              <a:solidFill>
-                <a:srgbClr val="000000"/>
-              </a:solidFill>
-              <a:effectLst/>
-              <a:uFillTx/>
-              <a:latin typeface="Arial"/>
-            </a:endParaRPr>
-          </a:p>
-        </p:txBody>
-      </p:sp>
-    </p:spTree>
-  </p:cSld>
-  <mc:AlternateContent xmlns:mc="http://schemas.openxmlformats.org/markup-compatibility/2006" xmlns:p14="http://schemas.microsoft.com/office/powerpoint/2010/main">
     <mc:Choice Requires="p14">
       <p:transition spd="slow" p14:dur="2000"/>
     </mc:Choice>
@@ -23407,123 +18054,6 @@
       <p:pic>
         <p:nvPicPr>
           <p:cNvPr id="91" name="Imagem 3"/>
-          <p:cNvPicPr/>
-          <p:nvPr/>
-        </p:nvPicPr>
-        <p:blipFill>
-          <a:blip r:embed="rId1"/>
-          <a:srcRect l="0" t="10428" r="0" b="10428"/>
-          <a:stretch/>
-        </p:blipFill>
-        <p:spPr>
-          <a:xfrm>
-            <a:off x="0" y="1440"/>
-            <a:ext cx="12191760" cy="6856200"/>
-          </a:xfrm>
-          <a:prstGeom prst="rect">
-            <a:avLst/>
-          </a:prstGeom>
-          <a:noFill/>
-          <a:ln w="0">
-            <a:noFill/>
-          </a:ln>
-        </p:spPr>
-      </p:pic>
-    </p:spTree>
-  </p:cSld>
-  <mc:AlternateContent>
-    <mc:Choice Requires="p14">
-      <p:transition spd="slow" p14:dur="2000"/>
-    </mc:Choice>
-    <mc:Fallback>
-      <p:transition spd="slow"/>
-    </mc:Fallback>
-  </mc:AlternateContent>
-</p:sld>
-</file>
-
-<file path=ppt/slides/slide80.xml><?xml version="1.0" encoding="utf-8"?>
-<p:sld xmlns:a="http://schemas.openxmlformats.org/drawingml/2006/main" xmlns:p="http://schemas.openxmlformats.org/presentationml/2006/main" xmlns:r="http://schemas.openxmlformats.org/officeDocument/2006/relationships" xmlns:p14="http://schemas.microsoft.com/office/powerpoint/2010/main" xmlns:p15="http://schemas.microsoft.com/office/powerpoint/2012/main" xmlns:mc="http://schemas.openxmlformats.org/markup-compatibility/2006">
-  <p:cSld>
-    <p:bg>
-      <p:bgPr>
-        <a:solidFill>
-          <a:schemeClr val="lt1"/>
-        </a:solidFill>
-      </p:bgPr>
-    </p:bg>
-    <p:spTree>
-      <p:nvGrpSpPr>
-        <p:cNvPr id="1" name=""/>
-        <p:cNvGrpSpPr/>
-        <p:nvPr/>
-      </p:nvGrpSpPr>
-      <p:grpSpPr>
-        <a:xfrm>
-          <a:off x="0" y="0"/>
-          <a:ext cx="0" cy="0"/>
-          <a:chOff x="0" y="0"/>
-          <a:chExt cx="0" cy="0"/>
-        </a:xfrm>
-      </p:grpSpPr>
-      <p:sp>
-        <p:nvSpPr>
-          <p:cNvPr id="180" name="Rectangle 23">
-            <a:extLst>
-              <a:ext uri="{C183D7F6-B498-43B3-948B-1728B52AA6E4}">
-                <adec:decorative xmlns:adec="http://schemas.microsoft.com/office/drawing/2017/decorative" val="1"/>
-              </a:ext>
-            </a:extLst>
-          </p:cNvPr>
-          <p:cNvSpPr/>
-          <p:nvPr/>
-        </p:nvSpPr>
-        <p:spPr>
-          <a:xfrm>
-            <a:off x="1440" y="0"/>
-            <a:ext cx="12188520" cy="6857640"/>
-          </a:xfrm>
-          <a:prstGeom prst="rect">
-            <a:avLst/>
-          </a:prstGeom>
-          <a:noFill/>
-          <a:ln>
-            <a:noFill/>
-          </a:ln>
-        </p:spPr>
-        <p:style>
-          <a:lnRef idx="2">
-            <a:schemeClr val="accent1">
-              <a:shade val="50000"/>
-            </a:schemeClr>
-          </a:lnRef>
-          <a:fillRef idx="1">
-            <a:schemeClr val="accent1"/>
-          </a:fillRef>
-          <a:effectRef idx="0">
-            <a:schemeClr val="accent1"/>
-          </a:effectRef>
-          <a:fontRef idx="minor"/>
-        </p:style>
-        <p:txBody>
-          <a:bodyPr lIns="90000" tIns="45000" rIns="90000" bIns="45000" anchor="ctr">
-            <a:noAutofit/>
-          </a:bodyPr>
-          <a:p>
-            <a:endParaRPr lang="en-US" sz="1800" b="0" u="none" strike="noStrike">
-              <a:solidFill>
-                <a:schemeClr val="lt1"/>
-              </a:solidFill>
-              <a:effectLst/>
-              <a:uFillTx/>
-              <a:latin typeface="Aptos"/>
-            </a:endParaRPr>
-          </a:p>
-        </p:txBody>
-      </p:sp>
-      <p:pic>
-        <p:nvPicPr>
-          <p:cNvPr id="181" name="Imagem 3"/>
           <p:cNvPicPr/>
           <p:nvPr/>
         </p:nvPicPr>
